--- a/docs/UChicago-0410.pptx
+++ b/docs/UChicago-0410.pptx
@@ -10866,8 +10866,8 @@
         </p:nvSpPr>
         <p:spPr>
           <a:xfrm>
-            <a:off x="502920" y="274320"/>
-            <a:ext cx="11185855" cy="731520"/>
+            <a:off x="502920" y="365760"/>
+            <a:ext cx="6583680" cy="640080"/>
           </a:xfrm>
           <a:prstGeom prst="rect">
             <a:avLst/>
@@ -10888,14 +10888,158 @@
                 </a:solidFill>
                 <a:latin typeface="Arial"/>
               </a:rPr>
-              <a:t>RQ1:  Gender × Outcome on trust update</a:t>
+              <a:t>RQ1 — Gender × outcome on trust update</a:t>
+            </a:r>
+          </a:p>
+        </p:txBody>
+      </p:sp>
+      <p:sp>
+        <p:nvSpPr>
+          <p:cNvPr id="3" name="Rounded Rectangle 2"/>
+          <p:cNvSpPr/>
+          <p:nvPr/>
+        </p:nvSpPr>
+        <p:spPr>
+          <a:xfrm>
+            <a:off x="8579815" y="274320"/>
+            <a:ext cx="3200400" cy="1325880"/>
+          </a:xfrm>
+          <a:prstGeom prst="roundRect">
+            <a:avLst>
+              <a:gd name="adj" fmla="val 18000"/>
+            </a:avLst>
+          </a:prstGeom>
+          <a:solidFill>
+            <a:srgbClr val="FAFBFC"/>
+          </a:solidFill>
+          <a:ln w="9525">
+            <a:solidFill>
+              <a:srgbClr val="CBD5E1"/>
+            </a:solidFill>
+          </a:ln>
+        </p:spPr>
+        <p:style>
+          <a:lnRef idx="1">
+            <a:schemeClr val="accent1"/>
+          </a:lnRef>
+          <a:fillRef idx="3">
+            <a:schemeClr val="accent1"/>
+          </a:fillRef>
+          <a:effectRef idx="2">
+            <a:schemeClr val="accent1"/>
+          </a:effectRef>
+          <a:fontRef idx="minor">
+            <a:schemeClr val="lt1"/>
+          </a:fontRef>
+        </p:style>
+        <p:txBody>
+          <a:bodyPr rtlCol="0" anchor="ctr" lIns="182880" rIns="182880" tIns="91440" bIns="91440" wrap="square"/>
+          <a:lstStyle/>
+          <a:p>
+            <a:pPr algn="l">
+              <a:spcAft>
+                <a:spcPts val="200"/>
+              </a:spcAft>
+            </a:pPr>
+            <a:r>
+              <a:rPr sz="1500" b="1">
+                <a:solidFill>
+                  <a:srgbClr val="011F5B"/>
+                </a:solidFill>
+                <a:latin typeface="Arial"/>
+              </a:rPr>
+              <a:t>Δ Male  </a:t>
+            </a:r>
+            <a:r>
+              <a:rPr sz="1700" b="1">
+                <a:solidFill>
+                  <a:srgbClr val="011F5B"/>
+                </a:solidFill>
+                <a:latin typeface="Arial"/>
+              </a:rPr>
+              <a:t>+15.0</a:t>
+            </a:r>
+          </a:p>
+          <a:p>
+            <a:pPr algn="l">
+              <a:spcAft>
+                <a:spcPts val="200"/>
+              </a:spcAft>
+            </a:pPr>
+            <a:r>
+              <a:rPr sz="1500" b="1">
+                <a:solidFill>
+                  <a:srgbClr val="990000"/>
+                </a:solidFill>
+                <a:latin typeface="Arial"/>
+              </a:rPr>
+              <a:t>Δ Female  </a:t>
+            </a:r>
+            <a:r>
+              <a:rPr sz="1700" b="1">
+                <a:solidFill>
+                  <a:srgbClr val="990000"/>
+                </a:solidFill>
+                <a:latin typeface="Arial"/>
+              </a:rPr>
+              <a:t>+4.3</a:t>
+            </a:r>
+          </a:p>
+          <a:p>
+            <a:pPr algn="l">
+              <a:spcAft>
+                <a:spcPts val="200"/>
+              </a:spcAft>
+            </a:pPr>
+            <a:r>
+              <a:rPr sz="1300" b="0">
+                <a:solidFill>
+                  <a:srgbClr val="111827"/>
+                </a:solidFill>
+                <a:latin typeface="Arial"/>
+              </a:rPr>
+              <a:t>b  </a:t>
+            </a:r>
+            <a:r>
+              <a:rPr sz="1400" b="1">
+                <a:solidFill>
+                  <a:srgbClr val="111827"/>
+                </a:solidFill>
+                <a:latin typeface="Arial"/>
+              </a:rPr>
+              <a:t>-11.60</a:t>
+            </a:r>
+          </a:p>
+          <a:p>
+            <a:pPr algn="l">
+              <a:spcAft>
+                <a:spcPts val="200"/>
+              </a:spcAft>
+            </a:pPr>
+            <a:r>
+              <a:rPr sz="1300" b="0">
+                <a:solidFill>
+                  <a:srgbClr val="111827"/>
+                </a:solidFill>
+                <a:latin typeface="Arial"/>
+              </a:rPr>
+              <a:t>p  </a:t>
+            </a:r>
+            <a:r>
+              <a:rPr sz="1400" b="1">
+                <a:solidFill>
+                  <a:srgbClr val="111827"/>
+                </a:solidFill>
+                <a:latin typeface="Arial"/>
+              </a:rPr>
+              <a:t>= .062</a:t>
             </a:r>
           </a:p>
         </p:txBody>
       </p:sp>
       <p:pic>
         <p:nvPicPr>
-          <p:cNvPr id="3" name="Picture 2" descr="rq1_gender_x_outcome.png"/>
+          <p:cNvPr id="4" name="Picture 3" descr="rq1_gender_x_outcome.png"/>
           <p:cNvPicPr>
             <a:picLocks noChangeAspect="1"/>
           </p:cNvPicPr>
@@ -10909,8 +11053,8 @@
         </p:blipFill>
         <p:spPr>
           <a:xfrm>
-            <a:off x="1415262" y="1097280"/>
-            <a:ext cx="9361170" cy="5349240"/>
+            <a:off x="95097" y="1645920"/>
+            <a:ext cx="12001500" cy="4800600"/>
           </a:xfrm>
           <a:prstGeom prst="rect">
             <a:avLst/>
@@ -10919,7 +11063,7 @@
       </p:pic>
       <p:sp>
         <p:nvSpPr>
-          <p:cNvPr id="4" name="TextBox 3"/>
+          <p:cNvPr id="5" name="TextBox 4"/>
           <p:cNvSpPr txBox="1"/>
           <p:nvPr/>
         </p:nvSpPr>
@@ -10978,8 +11122,8 @@
         </p:nvSpPr>
         <p:spPr>
           <a:xfrm>
-            <a:off x="502920" y="274320"/>
-            <a:ext cx="11185855" cy="731520"/>
+            <a:off x="502920" y="365760"/>
+            <a:ext cx="6583680" cy="640080"/>
           </a:xfrm>
           <a:prstGeom prst="rect">
             <a:avLst/>
@@ -11000,21 +11144,66 @@
                 </a:solidFill>
                 <a:latin typeface="Arial"/>
               </a:rPr>
-              <a:t>RQ2:  Strong endorsers</a:t>
-            </a:r>
-          </a:p>
-        </p:txBody>
-      </p:sp>
-      <p:sp>
-        <p:nvSpPr>
-          <p:cNvPr id="3" name="TextBox 2"/>
+              <a:t>RQ2 — Strong endorsers</a:t>
+            </a:r>
+          </a:p>
+        </p:txBody>
+      </p:sp>
+      <p:sp>
+        <p:nvSpPr>
+          <p:cNvPr id="3" name="Rounded Rectangle 2"/>
+          <p:cNvSpPr/>
+          <p:nvPr/>
+        </p:nvSpPr>
+        <p:spPr>
+          <a:xfrm>
+            <a:off x="7223760" y="274320"/>
+            <a:ext cx="2194560" cy="1325880"/>
+          </a:xfrm>
+          <a:prstGeom prst="roundRect">
+            <a:avLst>
+              <a:gd name="adj" fmla="val 18000"/>
+            </a:avLst>
+          </a:prstGeom>
+          <a:solidFill>
+            <a:srgbClr val="FAFBFC"/>
+          </a:solidFill>
+          <a:ln w="9525">
+            <a:solidFill>
+              <a:srgbClr val="CBD5E1"/>
+            </a:solidFill>
+          </a:ln>
+        </p:spPr>
+        <p:style>
+          <a:lnRef idx="1">
+            <a:schemeClr val="accent1"/>
+          </a:lnRef>
+          <a:fillRef idx="3">
+            <a:schemeClr val="accent1"/>
+          </a:fillRef>
+          <a:effectRef idx="2">
+            <a:schemeClr val="accent1"/>
+          </a:effectRef>
+          <a:fontRef idx="minor">
+            <a:schemeClr val="lt1"/>
+          </a:fontRef>
+        </p:style>
+        <p:txBody>
+          <a:bodyPr rtlCol="0" anchor="ctr"/>
+          <a:lstStyle/>
+          <a:p/>
+        </p:txBody>
+      </p:sp>
+      <p:sp>
+        <p:nvSpPr>
+          <p:cNvPr id="4" name="TextBox 3"/>
           <p:cNvSpPr txBox="1"/>
           <p:nvPr/>
         </p:nvSpPr>
         <p:spPr>
           <a:xfrm>
-            <a:off x="502920" y="841248"/>
-            <a:ext cx="11247120" cy="384048"/>
+            <a:off x="7388352" y="365760"/>
+            <a:ext cx="1865376" cy="274320"/>
           </a:xfrm>
           <a:prstGeom prst="rect">
             <a:avLst/>
@@ -11029,20 +11218,324 @@
           <a:p>
             <a:pPr algn="l"/>
             <a:r>
-              <a:rPr sz="1400" b="0" i="1">
+              <a:rPr sz="1000" b="1" i="0">
                 <a:solidFill>
                   <a:srgbClr val="6B7280"/>
                 </a:solidFill>
                 <a:latin typeface="Arial"/>
               </a:rPr>
-              <a:t>When sponsors are very confident, the gender × outcome gap is biggest.</a:t>
+              <a:t>ENDORSER CONFIDENCE</a:t>
+            </a:r>
+          </a:p>
+        </p:txBody>
+      </p:sp>
+      <p:sp>
+        <p:nvSpPr>
+          <p:cNvPr id="5" name="Rounded Rectangle 4"/>
+          <p:cNvSpPr/>
+          <p:nvPr/>
+        </p:nvSpPr>
+        <p:spPr>
+          <a:xfrm>
+            <a:off x="7388352" y="777240"/>
+            <a:ext cx="1865376" cy="182880"/>
+          </a:xfrm>
+          <a:prstGeom prst="roundRect">
+            <a:avLst>
+              <a:gd name="adj" fmla="val 50000"/>
+            </a:avLst>
+          </a:prstGeom>
+          <a:solidFill>
+            <a:srgbClr val="E5E7EB"/>
+          </a:solidFill>
+          <a:ln>
+            <a:noFill/>
+          </a:ln>
+        </p:spPr>
+        <p:style>
+          <a:lnRef idx="1">
+            <a:schemeClr val="accent1"/>
+          </a:lnRef>
+          <a:fillRef idx="3">
+            <a:schemeClr val="accent1"/>
+          </a:fillRef>
+          <a:effectRef idx="2">
+            <a:schemeClr val="accent1"/>
+          </a:effectRef>
+          <a:fontRef idx="minor">
+            <a:schemeClr val="lt1"/>
+          </a:fontRef>
+        </p:style>
+        <p:txBody>
+          <a:bodyPr rtlCol="0" anchor="ctr"/>
+          <a:lstStyle/>
+          <a:p>
+            <a:pPr algn="ctr"/>
+          </a:p>
+        </p:txBody>
+      </p:sp>
+      <p:sp>
+        <p:nvSpPr>
+          <p:cNvPr id="6" name="Rounded Rectangle 5"/>
+          <p:cNvSpPr/>
+          <p:nvPr/>
+        </p:nvSpPr>
+        <p:spPr>
+          <a:xfrm>
+            <a:off x="7388352" y="777240"/>
+            <a:ext cx="1585569" cy="182880"/>
+          </a:xfrm>
+          <a:prstGeom prst="roundRect">
+            <a:avLst>
+              <a:gd name="adj" fmla="val 50000"/>
+            </a:avLst>
+          </a:prstGeom>
+          <a:solidFill>
+            <a:srgbClr val="2563EB"/>
+          </a:solidFill>
+          <a:ln>
+            <a:noFill/>
+          </a:ln>
+        </p:spPr>
+        <p:style>
+          <a:lnRef idx="1">
+            <a:schemeClr val="accent1"/>
+          </a:lnRef>
+          <a:fillRef idx="3">
+            <a:schemeClr val="accent1"/>
+          </a:fillRef>
+          <a:effectRef idx="2">
+            <a:schemeClr val="accent1"/>
+          </a:effectRef>
+          <a:fontRef idx="minor">
+            <a:schemeClr val="lt1"/>
+          </a:fontRef>
+        </p:style>
+        <p:txBody>
+          <a:bodyPr rtlCol="0" anchor="ctr"/>
+          <a:lstStyle/>
+          <a:p>
+            <a:pPr algn="ctr"/>
+          </a:p>
+        </p:txBody>
+      </p:sp>
+      <p:sp>
+        <p:nvSpPr>
+          <p:cNvPr id="7" name="TextBox 6"/>
+          <p:cNvSpPr txBox="1"/>
+          <p:nvPr/>
+        </p:nvSpPr>
+        <p:spPr>
+          <a:xfrm>
+            <a:off x="7388352" y="1060704"/>
+            <a:ext cx="1865376" cy="329184"/>
+          </a:xfrm>
+          <a:prstGeom prst="rect">
+            <a:avLst/>
+          </a:prstGeom>
+          <a:noFill/>
+        </p:spPr>
+        <p:txBody>
+          <a:bodyPr wrap="square" anchor="t" lIns="0" rIns="0" tIns="0" bIns="0">
+            <a:spAutoFit/>
+          </a:bodyPr>
+          <a:lstStyle/>
+          <a:p>
+            <a:pPr algn="l"/>
+            <a:r>
+              <a:rPr sz="1800" b="1" i="0">
+                <a:solidFill>
+                  <a:srgbClr val="011F5B"/>
+                </a:solidFill>
+                <a:latin typeface="Arial"/>
+              </a:rPr>
+              <a:t>Strong</a:t>
+            </a:r>
+          </a:p>
+        </p:txBody>
+      </p:sp>
+      <p:sp>
+        <p:nvSpPr>
+          <p:cNvPr id="8" name="TextBox 7"/>
+          <p:cNvSpPr txBox="1"/>
+          <p:nvPr/>
+        </p:nvSpPr>
+        <p:spPr>
+          <a:xfrm>
+            <a:off x="7388352" y="1353312"/>
+            <a:ext cx="1865376" cy="228600"/>
+          </a:xfrm>
+          <a:prstGeom prst="rect">
+            <a:avLst/>
+          </a:prstGeom>
+          <a:noFill/>
+        </p:spPr>
+        <p:txBody>
+          <a:bodyPr wrap="square" anchor="t" lIns="0" rIns="0" tIns="0" bIns="0">
+            <a:spAutoFit/>
+          </a:bodyPr>
+          <a:lstStyle/>
+          <a:p>
+            <a:pPr algn="l"/>
+            <a:r>
+              <a:rPr sz="1100" b="0" i="1">
+                <a:solidFill>
+                  <a:srgbClr val="6B7280"/>
+                </a:solidFill>
+                <a:latin typeface="Arial"/>
+              </a:rPr>
+              <a:t>very confident</a:t>
+            </a:r>
+          </a:p>
+        </p:txBody>
+      </p:sp>
+      <p:sp>
+        <p:nvSpPr>
+          <p:cNvPr id="9" name="Rounded Rectangle 8"/>
+          <p:cNvSpPr/>
+          <p:nvPr/>
+        </p:nvSpPr>
+        <p:spPr>
+          <a:xfrm>
+            <a:off x="8579815" y="274320"/>
+            <a:ext cx="3200400" cy="1325880"/>
+          </a:xfrm>
+          <a:prstGeom prst="roundRect">
+            <a:avLst>
+              <a:gd name="adj" fmla="val 18000"/>
+            </a:avLst>
+          </a:prstGeom>
+          <a:solidFill>
+            <a:srgbClr val="FAFBFC"/>
+          </a:solidFill>
+          <a:ln w="9525">
+            <a:solidFill>
+              <a:srgbClr val="CBD5E1"/>
+            </a:solidFill>
+          </a:ln>
+        </p:spPr>
+        <p:style>
+          <a:lnRef idx="1">
+            <a:schemeClr val="accent1"/>
+          </a:lnRef>
+          <a:fillRef idx="3">
+            <a:schemeClr val="accent1"/>
+          </a:fillRef>
+          <a:effectRef idx="2">
+            <a:schemeClr val="accent1"/>
+          </a:effectRef>
+          <a:fontRef idx="minor">
+            <a:schemeClr val="lt1"/>
+          </a:fontRef>
+        </p:style>
+        <p:txBody>
+          <a:bodyPr rtlCol="0" anchor="ctr" lIns="182880" rIns="182880" tIns="91440" bIns="91440" wrap="square"/>
+          <a:lstStyle/>
+          <a:p>
+            <a:pPr algn="l">
+              <a:spcAft>
+                <a:spcPts val="200"/>
+              </a:spcAft>
+            </a:pPr>
+            <a:r>
+              <a:rPr sz="1500" b="1">
+                <a:solidFill>
+                  <a:srgbClr val="011F5B"/>
+                </a:solidFill>
+                <a:latin typeface="Arial"/>
+              </a:rPr>
+              <a:t>Δ Male  </a:t>
+            </a:r>
+            <a:r>
+              <a:rPr sz="1700" b="1">
+                <a:solidFill>
+                  <a:srgbClr val="011F5B"/>
+                </a:solidFill>
+                <a:latin typeface="Arial"/>
+              </a:rPr>
+              <a:t>+16.8</a:t>
+            </a:r>
+          </a:p>
+          <a:p>
+            <a:pPr algn="l">
+              <a:spcAft>
+                <a:spcPts val="200"/>
+              </a:spcAft>
+            </a:pPr>
+            <a:r>
+              <a:rPr sz="1500" b="1">
+                <a:solidFill>
+                  <a:srgbClr val="990000"/>
+                </a:solidFill>
+                <a:latin typeface="Arial"/>
+              </a:rPr>
+              <a:t>Δ Female  </a:t>
+            </a:r>
+            <a:r>
+              <a:rPr sz="1700" b="1">
+                <a:solidFill>
+                  <a:srgbClr val="990000"/>
+                </a:solidFill>
+                <a:latin typeface="Arial"/>
+              </a:rPr>
+              <a:t>+6.0</a:t>
+            </a:r>
+          </a:p>
+          <a:p>
+            <a:pPr algn="l">
+              <a:spcAft>
+                <a:spcPts val="200"/>
+              </a:spcAft>
+            </a:pPr>
+            <a:r>
+              <a:rPr sz="1300" b="0">
+                <a:solidFill>
+                  <a:srgbClr val="111827"/>
+                </a:solidFill>
+                <a:latin typeface="Arial"/>
+              </a:rPr>
+              <a:t>b  </a:t>
+            </a:r>
+            <a:r>
+              <a:rPr sz="1400" b="1">
+                <a:solidFill>
+                  <a:srgbClr val="111827"/>
+                </a:solidFill>
+                <a:latin typeface="Arial"/>
+              </a:rPr>
+              <a:t>-13.01</a:t>
+            </a:r>
+          </a:p>
+          <a:p>
+            <a:pPr algn="l">
+              <a:spcAft>
+                <a:spcPts val="200"/>
+              </a:spcAft>
+            </a:pPr>
+            <a:r>
+              <a:rPr sz="1300" b="0">
+                <a:solidFill>
+                  <a:srgbClr val="111827"/>
+                </a:solidFill>
+                <a:latin typeface="Arial"/>
+              </a:rPr>
+              <a:t>p  </a:t>
+            </a:r>
+            <a:r>
+              <a:rPr sz="1400" b="1">
+                <a:solidFill>
+                  <a:srgbClr val="111827"/>
+                </a:solidFill>
+                <a:latin typeface="Arial"/>
+              </a:rPr>
+              <a:t>= .113</a:t>
             </a:r>
           </a:p>
         </p:txBody>
       </p:sp>
       <p:pic>
         <p:nvPicPr>
-          <p:cNvPr id="4" name="Picture 3" descr="rq2_strong_only.png"/>
+          <p:cNvPr id="10" name="Picture 9" descr="rq2_strong_only.png"/>
           <p:cNvPicPr>
             <a:picLocks noChangeAspect="1"/>
           </p:cNvPicPr>
@@ -11056,8 +11549,8 @@
         </p:blipFill>
         <p:spPr>
           <a:xfrm>
-            <a:off x="1415262" y="1325880"/>
-            <a:ext cx="9361170" cy="5349240"/>
+            <a:off x="95097" y="1645920"/>
+            <a:ext cx="12001500" cy="4800600"/>
           </a:xfrm>
           <a:prstGeom prst="rect">
             <a:avLst/>
@@ -11066,7 +11559,7 @@
       </p:pic>
       <p:sp>
         <p:nvSpPr>
-          <p:cNvPr id="5" name="TextBox 4"/>
+          <p:cNvPr id="11" name="TextBox 10"/>
           <p:cNvSpPr txBox="1"/>
           <p:nvPr/>
         </p:nvSpPr>
@@ -11125,8 +11618,8 @@
         </p:nvSpPr>
         <p:spPr>
           <a:xfrm>
-            <a:off x="502920" y="274320"/>
-            <a:ext cx="11185855" cy="731520"/>
+            <a:off x="502920" y="365760"/>
+            <a:ext cx="6583680" cy="640080"/>
           </a:xfrm>
           <a:prstGeom prst="rect">
             <a:avLst/>
@@ -11147,21 +11640,66 @@
                 </a:solidFill>
                 <a:latin typeface="Arial"/>
               </a:rPr>
-              <a:t>RQ2:  Weak endorsers</a:t>
-            </a:r>
-          </a:p>
-        </p:txBody>
-      </p:sp>
-      <p:sp>
-        <p:nvSpPr>
-          <p:cNvPr id="3" name="TextBox 2"/>
+              <a:t>RQ2 — Weak endorsers</a:t>
+            </a:r>
+          </a:p>
+        </p:txBody>
+      </p:sp>
+      <p:sp>
+        <p:nvSpPr>
+          <p:cNvPr id="3" name="Rounded Rectangle 2"/>
+          <p:cNvSpPr/>
+          <p:nvPr/>
+        </p:nvSpPr>
+        <p:spPr>
+          <a:xfrm>
+            <a:off x="7223760" y="274320"/>
+            <a:ext cx="2194560" cy="1325880"/>
+          </a:xfrm>
+          <a:prstGeom prst="roundRect">
+            <a:avLst>
+              <a:gd name="adj" fmla="val 18000"/>
+            </a:avLst>
+          </a:prstGeom>
+          <a:solidFill>
+            <a:srgbClr val="FAFBFC"/>
+          </a:solidFill>
+          <a:ln w="9525">
+            <a:solidFill>
+              <a:srgbClr val="CBD5E1"/>
+            </a:solidFill>
+          </a:ln>
+        </p:spPr>
+        <p:style>
+          <a:lnRef idx="1">
+            <a:schemeClr val="accent1"/>
+          </a:lnRef>
+          <a:fillRef idx="3">
+            <a:schemeClr val="accent1"/>
+          </a:fillRef>
+          <a:effectRef idx="2">
+            <a:schemeClr val="accent1"/>
+          </a:effectRef>
+          <a:fontRef idx="minor">
+            <a:schemeClr val="lt1"/>
+          </a:fontRef>
+        </p:style>
+        <p:txBody>
+          <a:bodyPr rtlCol="0" anchor="ctr"/>
+          <a:lstStyle/>
+          <a:p/>
+        </p:txBody>
+      </p:sp>
+      <p:sp>
+        <p:nvSpPr>
+          <p:cNvPr id="4" name="TextBox 3"/>
           <p:cNvSpPr txBox="1"/>
           <p:nvPr/>
         </p:nvSpPr>
         <p:spPr>
           <a:xfrm>
-            <a:off x="502920" y="841248"/>
-            <a:ext cx="11247120" cy="384048"/>
+            <a:off x="7388352" y="365760"/>
+            <a:ext cx="1865376" cy="274320"/>
           </a:xfrm>
           <a:prstGeom prst="rect">
             <a:avLst/>
@@ -11176,20 +11714,324 @@
           <a:p>
             <a:pPr algn="l"/>
             <a:r>
-              <a:rPr sz="1400" b="0" i="1">
+              <a:rPr sz="1000" b="1" i="0">
                 <a:solidFill>
                   <a:srgbClr val="6B7280"/>
                 </a:solidFill>
                 <a:latin typeface="Arial"/>
               </a:rPr>
-              <a:t>When sponsors hedge, the same pattern persists at smaller magnitudes.</a:t>
+              <a:t>ENDORSER CONFIDENCE</a:t>
+            </a:r>
+          </a:p>
+        </p:txBody>
+      </p:sp>
+      <p:sp>
+        <p:nvSpPr>
+          <p:cNvPr id="5" name="Rounded Rectangle 4"/>
+          <p:cNvSpPr/>
+          <p:nvPr/>
+        </p:nvSpPr>
+        <p:spPr>
+          <a:xfrm>
+            <a:off x="7388352" y="777240"/>
+            <a:ext cx="1865376" cy="182880"/>
+          </a:xfrm>
+          <a:prstGeom prst="roundRect">
+            <a:avLst>
+              <a:gd name="adj" fmla="val 50000"/>
+            </a:avLst>
+          </a:prstGeom>
+          <a:solidFill>
+            <a:srgbClr val="E5E7EB"/>
+          </a:solidFill>
+          <a:ln>
+            <a:noFill/>
+          </a:ln>
+        </p:spPr>
+        <p:style>
+          <a:lnRef idx="1">
+            <a:schemeClr val="accent1"/>
+          </a:lnRef>
+          <a:fillRef idx="3">
+            <a:schemeClr val="accent1"/>
+          </a:fillRef>
+          <a:effectRef idx="2">
+            <a:schemeClr val="accent1"/>
+          </a:effectRef>
+          <a:fontRef idx="minor">
+            <a:schemeClr val="lt1"/>
+          </a:fontRef>
+        </p:style>
+        <p:txBody>
+          <a:bodyPr rtlCol="0" anchor="ctr"/>
+          <a:lstStyle/>
+          <a:p>
+            <a:pPr algn="ctr"/>
+          </a:p>
+        </p:txBody>
+      </p:sp>
+      <p:sp>
+        <p:nvSpPr>
+          <p:cNvPr id="6" name="Rounded Rectangle 5"/>
+          <p:cNvSpPr/>
+          <p:nvPr/>
+        </p:nvSpPr>
+        <p:spPr>
+          <a:xfrm>
+            <a:off x="7388352" y="777240"/>
+            <a:ext cx="410382" cy="182880"/>
+          </a:xfrm>
+          <a:prstGeom prst="roundRect">
+            <a:avLst>
+              <a:gd name="adj" fmla="val 50000"/>
+            </a:avLst>
+          </a:prstGeom>
+          <a:solidFill>
+            <a:srgbClr val="2563EB"/>
+          </a:solidFill>
+          <a:ln>
+            <a:noFill/>
+          </a:ln>
+        </p:spPr>
+        <p:style>
+          <a:lnRef idx="1">
+            <a:schemeClr val="accent1"/>
+          </a:lnRef>
+          <a:fillRef idx="3">
+            <a:schemeClr val="accent1"/>
+          </a:fillRef>
+          <a:effectRef idx="2">
+            <a:schemeClr val="accent1"/>
+          </a:effectRef>
+          <a:fontRef idx="minor">
+            <a:schemeClr val="lt1"/>
+          </a:fontRef>
+        </p:style>
+        <p:txBody>
+          <a:bodyPr rtlCol="0" anchor="ctr"/>
+          <a:lstStyle/>
+          <a:p>
+            <a:pPr algn="ctr"/>
+          </a:p>
+        </p:txBody>
+      </p:sp>
+      <p:sp>
+        <p:nvSpPr>
+          <p:cNvPr id="7" name="TextBox 6"/>
+          <p:cNvSpPr txBox="1"/>
+          <p:nvPr/>
+        </p:nvSpPr>
+        <p:spPr>
+          <a:xfrm>
+            <a:off x="7388352" y="1060704"/>
+            <a:ext cx="1865376" cy="329184"/>
+          </a:xfrm>
+          <a:prstGeom prst="rect">
+            <a:avLst/>
+          </a:prstGeom>
+          <a:noFill/>
+        </p:spPr>
+        <p:txBody>
+          <a:bodyPr wrap="square" anchor="t" lIns="0" rIns="0" tIns="0" bIns="0">
+            <a:spAutoFit/>
+          </a:bodyPr>
+          <a:lstStyle/>
+          <a:p>
+            <a:pPr algn="l"/>
+            <a:r>
+              <a:rPr sz="1800" b="1" i="0">
+                <a:solidFill>
+                  <a:srgbClr val="011F5B"/>
+                </a:solidFill>
+                <a:latin typeface="Arial"/>
+              </a:rPr>
+              <a:t>Weak</a:t>
+            </a:r>
+          </a:p>
+        </p:txBody>
+      </p:sp>
+      <p:sp>
+        <p:nvSpPr>
+          <p:cNvPr id="8" name="TextBox 7"/>
+          <p:cNvSpPr txBox="1"/>
+          <p:nvPr/>
+        </p:nvSpPr>
+        <p:spPr>
+          <a:xfrm>
+            <a:off x="7388352" y="1353312"/>
+            <a:ext cx="1865376" cy="228600"/>
+          </a:xfrm>
+          <a:prstGeom prst="rect">
+            <a:avLst/>
+          </a:prstGeom>
+          <a:noFill/>
+        </p:spPr>
+        <p:txBody>
+          <a:bodyPr wrap="square" anchor="t" lIns="0" rIns="0" tIns="0" bIns="0">
+            <a:spAutoFit/>
+          </a:bodyPr>
+          <a:lstStyle/>
+          <a:p>
+            <a:pPr algn="l"/>
+            <a:r>
+              <a:rPr sz="1100" b="0" i="1">
+                <a:solidFill>
+                  <a:srgbClr val="6B7280"/>
+                </a:solidFill>
+                <a:latin typeface="Arial"/>
+              </a:rPr>
+              <a:t>hedged / unsure</a:t>
+            </a:r>
+          </a:p>
+        </p:txBody>
+      </p:sp>
+      <p:sp>
+        <p:nvSpPr>
+          <p:cNvPr id="9" name="Rounded Rectangle 8"/>
+          <p:cNvSpPr/>
+          <p:nvPr/>
+        </p:nvSpPr>
+        <p:spPr>
+          <a:xfrm>
+            <a:off x="8579815" y="274320"/>
+            <a:ext cx="3200400" cy="1325880"/>
+          </a:xfrm>
+          <a:prstGeom prst="roundRect">
+            <a:avLst>
+              <a:gd name="adj" fmla="val 18000"/>
+            </a:avLst>
+          </a:prstGeom>
+          <a:solidFill>
+            <a:srgbClr val="FAFBFC"/>
+          </a:solidFill>
+          <a:ln w="9525">
+            <a:solidFill>
+              <a:srgbClr val="CBD5E1"/>
+            </a:solidFill>
+          </a:ln>
+        </p:spPr>
+        <p:style>
+          <a:lnRef idx="1">
+            <a:schemeClr val="accent1"/>
+          </a:lnRef>
+          <a:fillRef idx="3">
+            <a:schemeClr val="accent1"/>
+          </a:fillRef>
+          <a:effectRef idx="2">
+            <a:schemeClr val="accent1"/>
+          </a:effectRef>
+          <a:fontRef idx="minor">
+            <a:schemeClr val="lt1"/>
+          </a:fontRef>
+        </p:style>
+        <p:txBody>
+          <a:bodyPr rtlCol="0" anchor="ctr" lIns="182880" rIns="182880" tIns="91440" bIns="91440" wrap="square"/>
+          <a:lstStyle/>
+          <a:p>
+            <a:pPr algn="l">
+              <a:spcAft>
+                <a:spcPts val="200"/>
+              </a:spcAft>
+            </a:pPr>
+            <a:r>
+              <a:rPr sz="1500" b="1">
+                <a:solidFill>
+                  <a:srgbClr val="011F5B"/>
+                </a:solidFill>
+                <a:latin typeface="Arial"/>
+              </a:rPr>
+              <a:t>Δ Male  </a:t>
+            </a:r>
+            <a:r>
+              <a:rPr sz="1700" b="1">
+                <a:solidFill>
+                  <a:srgbClr val="011F5B"/>
+                </a:solidFill>
+                <a:latin typeface="Arial"/>
+              </a:rPr>
+              <a:t>+12.6</a:t>
+            </a:r>
+          </a:p>
+          <a:p>
+            <a:pPr algn="l">
+              <a:spcAft>
+                <a:spcPts val="200"/>
+              </a:spcAft>
+            </a:pPr>
+            <a:r>
+              <a:rPr sz="1500" b="1">
+                <a:solidFill>
+                  <a:srgbClr val="990000"/>
+                </a:solidFill>
+                <a:latin typeface="Arial"/>
+              </a:rPr>
+              <a:t>Δ Female  </a:t>
+            </a:r>
+            <a:r>
+              <a:rPr sz="1700" b="1">
+                <a:solidFill>
+                  <a:srgbClr val="990000"/>
+                </a:solidFill>
+                <a:latin typeface="Arial"/>
+              </a:rPr>
+              <a:t>+3.4</a:t>
+            </a:r>
+          </a:p>
+          <a:p>
+            <a:pPr algn="l">
+              <a:spcAft>
+                <a:spcPts val="200"/>
+              </a:spcAft>
+            </a:pPr>
+            <a:r>
+              <a:rPr sz="1300" b="0">
+                <a:solidFill>
+                  <a:srgbClr val="111827"/>
+                </a:solidFill>
+                <a:latin typeface="Arial"/>
+              </a:rPr>
+              <a:t>b  </a:t>
+            </a:r>
+            <a:r>
+              <a:rPr sz="1400" b="1">
+                <a:solidFill>
+                  <a:srgbClr val="111827"/>
+                </a:solidFill>
+                <a:latin typeface="Arial"/>
+              </a:rPr>
+              <a:t>-9.50</a:t>
+            </a:r>
+          </a:p>
+          <a:p>
+            <a:pPr algn="l">
+              <a:spcAft>
+                <a:spcPts val="200"/>
+              </a:spcAft>
+            </a:pPr>
+            <a:r>
+              <a:rPr sz="1300" b="0">
+                <a:solidFill>
+                  <a:srgbClr val="111827"/>
+                </a:solidFill>
+                <a:latin typeface="Arial"/>
+              </a:rPr>
+              <a:t>p  </a:t>
+            </a:r>
+            <a:r>
+              <a:rPr sz="1400" b="1">
+                <a:solidFill>
+                  <a:srgbClr val="111827"/>
+                </a:solidFill>
+                <a:latin typeface="Arial"/>
+              </a:rPr>
+              <a:t>= .322</a:t>
             </a:r>
           </a:p>
         </p:txBody>
       </p:sp>
       <p:pic>
         <p:nvPicPr>
-          <p:cNvPr id="4" name="Picture 3" descr="rq2_weak_only.png"/>
+          <p:cNvPr id="10" name="Picture 9" descr="rq2_weak_only.png"/>
           <p:cNvPicPr>
             <a:picLocks noChangeAspect="1"/>
           </p:cNvPicPr>
@@ -11203,8 +12045,8 @@
         </p:blipFill>
         <p:spPr>
           <a:xfrm>
-            <a:off x="1415262" y="1325880"/>
-            <a:ext cx="9361170" cy="5349240"/>
+            <a:off x="95097" y="1645920"/>
+            <a:ext cx="12001500" cy="4800600"/>
           </a:xfrm>
           <a:prstGeom prst="rect">
             <a:avLst/>
@@ -11213,7 +12055,7 @@
       </p:pic>
       <p:sp>
         <p:nvSpPr>
-          <p:cNvPr id="5" name="TextBox 4"/>
+          <p:cNvPr id="11" name="TextBox 10"/>
           <p:cNvSpPr txBox="1"/>
           <p:nvPr/>
         </p:nvSpPr>
@@ -11272,8 +12114,8 @@
         </p:nvSpPr>
         <p:spPr>
           <a:xfrm>
-            <a:off x="502920" y="274320"/>
-            <a:ext cx="11185855" cy="731520"/>
+            <a:off x="502920" y="365760"/>
+            <a:ext cx="6583680" cy="640080"/>
           </a:xfrm>
           <a:prstGeom prst="rect">
             <a:avLst/>
@@ -11294,42 +12136,126 @@
                 </a:solidFill>
                 <a:latin typeface="Arial"/>
               </a:rPr>
-              <a:t>RQ3:  Does the bias exist before any outcome?</a:t>
-            </a:r>
-          </a:p>
-        </p:txBody>
-      </p:sp>
-      <p:sp>
-        <p:nvSpPr>
-          <p:cNvPr id="3" name="TextBox 2"/>
-          <p:cNvSpPr txBox="1"/>
+              <a:t>RQ3 — Pre-outcome trust by gender</a:t>
+            </a:r>
+          </a:p>
+        </p:txBody>
+      </p:sp>
+      <p:sp>
+        <p:nvSpPr>
+          <p:cNvPr id="3" name="Rounded Rectangle 2"/>
+          <p:cNvSpPr/>
           <p:nvPr/>
         </p:nvSpPr>
         <p:spPr>
           <a:xfrm>
-            <a:off x="502920" y="841248"/>
-            <a:ext cx="11247120" cy="384048"/>
-          </a:xfrm>
-          <a:prstGeom prst="rect">
-            <a:avLst/>
-          </a:prstGeom>
-          <a:noFill/>
-        </p:spPr>
-        <p:txBody>
-          <a:bodyPr wrap="square" anchor="t" lIns="0" rIns="0" tIns="0" bIns="0">
-            <a:spAutoFit/>
-          </a:bodyPr>
+            <a:off x="8579815" y="274320"/>
+            <a:ext cx="3200400" cy="1325880"/>
+          </a:xfrm>
+          <a:prstGeom prst="roundRect">
+            <a:avLst>
+              <a:gd name="adj" fmla="val 18000"/>
+            </a:avLst>
+          </a:prstGeom>
+          <a:solidFill>
+            <a:srgbClr val="FAFBFC"/>
+          </a:solidFill>
+          <a:ln w="9525">
+            <a:solidFill>
+              <a:srgbClr val="CBD5E1"/>
+            </a:solidFill>
+          </a:ln>
+        </p:spPr>
+        <p:style>
+          <a:lnRef idx="1">
+            <a:schemeClr val="accent1"/>
+          </a:lnRef>
+          <a:fillRef idx="3">
+            <a:schemeClr val="accent1"/>
+          </a:fillRef>
+          <a:effectRef idx="2">
+            <a:schemeClr val="accent1"/>
+          </a:effectRef>
+          <a:fontRef idx="minor">
+            <a:schemeClr val="lt1"/>
+          </a:fontRef>
+        </p:style>
+        <p:txBody>
+          <a:bodyPr rtlCol="0" anchor="ctr" lIns="182880" rIns="182880" tIns="91440" bIns="91440" wrap="square"/>
           <a:lstStyle/>
           <a:p>
-            <a:pPr algn="l"/>
-            <a:r>
-              <a:rPr sz="1400" b="0" i="1">
+            <a:pPr algn="l">
+              <a:spcAft>
+                <a:spcPts val="200"/>
+              </a:spcAft>
+            </a:pPr>
+            <a:r>
+              <a:rPr sz="1500" b="1">
+                <a:solidFill>
+                  <a:srgbClr val="011F5B"/>
+                </a:solidFill>
+                <a:latin typeface="Arial"/>
+              </a:rPr>
+              <a:t>b gender  </a:t>
+            </a:r>
+            <a:r>
+              <a:rPr sz="1700" b="1">
+                <a:solidFill>
+                  <a:srgbClr val="011F5B"/>
+                </a:solidFill>
+                <a:latin typeface="Arial"/>
+              </a:rPr>
+              <a:t>-1.06</a:t>
+            </a:r>
+          </a:p>
+          <a:p>
+            <a:pPr algn="l">
+              <a:spcAft>
+                <a:spcPts val="200"/>
+              </a:spcAft>
+            </a:pPr>
+            <a:r>
+              <a:rPr sz="1500" b="1">
+                <a:solidFill>
+                  <a:srgbClr val="111827"/>
+                </a:solidFill>
+                <a:latin typeface="Arial"/>
+              </a:rPr>
+              <a:t>p  </a:t>
+            </a:r>
+            <a:r>
+              <a:rPr sz="1700" b="1">
+                <a:solidFill>
+                  <a:srgbClr val="111827"/>
+                </a:solidFill>
+                <a:latin typeface="Arial"/>
+              </a:rPr>
+              <a:t>= .812</a:t>
+            </a:r>
+          </a:p>
+          <a:p>
+            <a:pPr algn="l">
+              <a:spcAft>
+                <a:spcPts val="200"/>
+              </a:spcAft>
+            </a:pPr>
+            <a:r>
+              <a:rPr sz="1300" b="0">
                 <a:solidFill>
                   <a:srgbClr val="6B7280"/>
                 </a:solidFill>
                 <a:latin typeface="Arial"/>
               </a:rPr>
-              <a:t>Before the outcome arrives, audiences trust male and female sponsors equally.</a:t>
+              <a:t>   </a:t>
+            </a:r>
+            <a:r>
+              <a:rPr sz="1400" b="1">
+                <a:solidFill>
+                  <a:srgbClr val="6B7280"/>
+                </a:solidFill>
+                <a:latin typeface="Arial"/>
+              </a:rPr>
+              <a:t>no gender effect</a:t>
             </a:r>
           </a:p>
         </p:txBody>
@@ -11350,8 +12276,8 @@
         </p:blipFill>
         <p:spPr>
           <a:xfrm>
-            <a:off x="1415262" y="1325880"/>
-            <a:ext cx="9361170" cy="5349240"/>
+            <a:off x="975207" y="1645920"/>
+            <a:ext cx="10241280" cy="4800600"/>
           </a:xfrm>
           <a:prstGeom prst="rect">
             <a:avLst/>

--- a/docs/UChicago-0410.pptx
+++ b/docs/UChicago-0410.pptx
@@ -5,32 +5,32 @@
     <p:sldMasterId id="2147483648" r:id="rId1"/>
   </p:sldMasterIdLst>
   <p:notesMasterIdLst>
-    <p:notesMasterId r:id="rId41"/>
+    <p:notesMasterId r:id="rId22"/>
   </p:notesMasterIdLst>
   <p:handoutMasterIdLst>
-    <p:handoutMasterId r:id="rId42"/>
+    <p:handoutMasterId r:id="rId23"/>
   </p:handoutMasterIdLst>
   <p:sldIdLst>
-    <p:sldId id="256" r:id="rId8"/>
-    <p:sldId id="257" r:id="rId9"/>
-    <p:sldId id="258" r:id="rId10"/>
-    <p:sldId id="259" r:id="rId11"/>
-    <p:sldId id="260" r:id="rId12"/>
-    <p:sldId id="261" r:id="rId13"/>
-    <p:sldId id="262" r:id="rId14"/>
-    <p:sldId id="263" r:id="rId15"/>
-    <p:sldId id="264" r:id="rId16"/>
-    <p:sldId id="265" r:id="rId17"/>
-    <p:sldId id="266" r:id="rId18"/>
-    <p:sldId id="267" r:id="rId19"/>
-    <p:sldId id="268" r:id="rId20"/>
-    <p:sldId id="269" r:id="rId21"/>
-    <p:sldId id="270" r:id="rId22"/>
-    <p:sldId id="271" r:id="rId23"/>
-    <p:sldId id="272" r:id="rId24"/>
-    <p:sldId id="273" r:id="rId25"/>
-    <p:sldId id="274" r:id="rId26"/>
-    <p:sldId id="275" r:id="rId27"/>
+    <p:sldId id="256" r:id="rId2"/>
+    <p:sldId id="277" r:id="rId3"/>
+    <p:sldId id="258" r:id="rId4"/>
+    <p:sldId id="259" r:id="rId5"/>
+    <p:sldId id="260" r:id="rId6"/>
+    <p:sldId id="261" r:id="rId7"/>
+    <p:sldId id="262" r:id="rId8"/>
+    <p:sldId id="263" r:id="rId9"/>
+    <p:sldId id="264" r:id="rId10"/>
+    <p:sldId id="278" r:id="rId11"/>
+    <p:sldId id="265" r:id="rId12"/>
+    <p:sldId id="266" r:id="rId13"/>
+    <p:sldId id="267" r:id="rId14"/>
+    <p:sldId id="268" r:id="rId15"/>
+    <p:sldId id="269" r:id="rId16"/>
+    <p:sldId id="270" r:id="rId17"/>
+    <p:sldId id="271" r:id="rId18"/>
+    <p:sldId id="272" r:id="rId19"/>
+    <p:sldId id="273" r:id="rId20"/>
+    <p:sldId id="275" r:id="rId21"/>
   </p:sldIdLst>
   <p:sldSz cx="12192000" cy="6858000"/>
   <p:notesSz cx="6858000" cy="9144000"/>
@@ -135,44 +135,25 @@
         <p14:section name="Default Section" id="{0CF33541-5E58-43C3-A2D8-8288F878A3DB}">
           <p14:sldIdLst>
             <p14:sldId id="256"/>
-            <p14:sldId id="319"/>
-            <p14:sldId id="320"/>
-            <p14:sldId id="322"/>
-            <p14:sldId id="323"/>
-            <p14:sldId id="324"/>
-            <p14:sldId id="325"/>
-            <p14:sldId id="328"/>
-            <p14:sldId id="326"/>
-            <p14:sldId id="347"/>
-            <p14:sldId id="329"/>
-            <p14:sldId id="332"/>
-            <p14:sldId id="333"/>
-            <p14:sldId id="335"/>
-            <p14:sldId id="336"/>
-            <p14:sldId id="337"/>
-            <p14:sldId id="339"/>
-            <p14:sldId id="340"/>
-            <p14:sldId id="341"/>
-            <p14:sldId id="342"/>
-            <p14:sldId id="343"/>
-            <p14:sldId id="346"/>
-            <p14:sldId id="344"/>
-            <p14:sldId id="345"/>
-            <p14:sldId id="327"/>
-            <p14:sldId id="348"/>
-            <p14:sldId id="349"/>
-            <p14:sldId id="350"/>
-            <p14:sldId id="352"/>
-            <p14:sldId id="353"/>
-            <p14:sldId id="354"/>
-            <p14:sldId id="356"/>
-            <p14:sldId id="357"/>
-            <p14:sldId id="358"/>
-            <p14:sldId id="359"/>
-            <p14:sldId id="360"/>
-            <p14:sldId id="361"/>
-            <p14:sldId id="362"/>
+            <p14:sldId id="277"/>
+            <p14:sldId id="258"/>
+            <p14:sldId id="259"/>
+            <p14:sldId id="260"/>
+            <p14:sldId id="261"/>
+            <p14:sldId id="262"/>
             <p14:sldId id="263"/>
+            <p14:sldId id="264"/>
+            <p14:sldId id="278"/>
+            <p14:sldId id="265"/>
+            <p14:sldId id="266"/>
+            <p14:sldId id="267"/>
+            <p14:sldId id="268"/>
+            <p14:sldId id="269"/>
+            <p14:sldId id="270"/>
+            <p14:sldId id="271"/>
+            <p14:sldId id="272"/>
+            <p14:sldId id="273"/>
+            <p14:sldId id="275"/>
           </p14:sldIdLst>
         </p14:section>
       </p14:sectionLst>
@@ -269,7 +250,7 @@
           <a:p>
             <a:fld id="{5FFAB296-C70E-40F1-B507-D2D143AD6EBF}" type="datetimeFigureOut">
               <a:rPr lang="en-US" smtClean="0"/>
-              <a:t>11/12/2025</a:t>
+              <a:t>4/6/2026</a:t>
             </a:fld>
             <a:endParaRPr lang="en-US"/>
           </a:p>
@@ -434,7 +415,7 @@
           <a:p>
             <a:fld id="{60D2892C-D9C7-4A81-A07C-60131499A005}" type="datetimeFigureOut">
               <a:rPr lang="en-US" smtClean="0"/>
-              <a:t>11/12/2025</a:t>
+              <a:t>4/6/2026</a:t>
             </a:fld>
             <a:endParaRPr lang="en-US"/>
           </a:p>
@@ -3345,13 +3326,13 @@
           <p:nvPr userDrawn="1"/>
         </p:nvPicPr>
         <p:blipFill>
-          <a:blip r:embed="rId2" cstate="screen">
+          <a:blip cstate="screen">
             <a:extLst>
               <a:ext uri="{28A0092B-C50C-407E-A947-70E740481C1C}">
                 <a14:useLocalDpi xmlns:a14="http://schemas.microsoft.com/office/drawing/2010/main"/>
               </a:ext>
               <a:ext uri="{96DAC541-7B7A-43D3-8B79-37D633B846F1}">
-                <asvg:svgBlip xmlns:asvg="http://schemas.microsoft.com/office/drawing/2016/SVG/main" r:embed="rId3"/>
+                <asvg:svgBlip xmlns:asvg="http://schemas.microsoft.com/office/drawing/2016/SVG/main" r:embed="rId2"/>
               </a:ext>
             </a:extLst>
           </a:blip>
@@ -4735,14 +4716,14 @@
           <p:nvPr userDrawn="1"/>
         </p:nvPicPr>
         <p:blipFill>
-          <a:blip r:embed="rId2">
+          <a:blip>
             <a:alphaModFix/>
             <a:extLst>
               <a:ext uri="{28A0092B-C50C-407E-A947-70E740481C1C}">
                 <a14:useLocalDpi xmlns:a14="http://schemas.microsoft.com/office/drawing/2010/main"/>
               </a:ext>
               <a:ext uri="{96DAC541-7B7A-43D3-8B79-37D633B846F1}">
-                <asvg:svgBlip xmlns:asvg="http://schemas.microsoft.com/office/drawing/2016/SVG/main" r:embed="rId3"/>
+                <asvg:svgBlip xmlns:asvg="http://schemas.microsoft.com/office/drawing/2016/SVG/main" r:embed="rId2"/>
               </a:ext>
             </a:extLst>
           </a:blip>
@@ -4988,14 +4969,14 @@
           <p:nvPr userDrawn="1"/>
         </p:nvPicPr>
         <p:blipFill>
-          <a:blip r:embed="rId2">
+          <a:blip>
             <a:alphaModFix/>
             <a:extLst>
               <a:ext uri="{28A0092B-C50C-407E-A947-70E740481C1C}">
                 <a14:useLocalDpi xmlns:a14="http://schemas.microsoft.com/office/drawing/2010/main"/>
               </a:ext>
               <a:ext uri="{96DAC541-7B7A-43D3-8B79-37D633B846F1}">
-                <asvg:svgBlip xmlns:asvg="http://schemas.microsoft.com/office/drawing/2016/SVG/main" r:embed="rId3"/>
+                <asvg:svgBlip xmlns:asvg="http://schemas.microsoft.com/office/drawing/2016/SVG/main" r:embed="rId2"/>
               </a:ext>
             </a:extLst>
           </a:blip>
@@ -6380,7 +6361,7 @@
           <p:nvPr userDrawn="1"/>
         </p:nvPicPr>
         <p:blipFill>
-          <a:blip r:embed="rId2">
+          <a:blip>
             <a:lum bright="-25000"/>
             <a:alphaModFix amt="20000"/>
             <a:extLst>
@@ -6388,7 +6369,7 @@
                 <a14:useLocalDpi xmlns:a14="http://schemas.microsoft.com/office/drawing/2010/main"/>
               </a:ext>
               <a:ext uri="{96DAC541-7B7A-43D3-8B79-37D633B846F1}">
-                <asvg:svgBlip xmlns:asvg="http://schemas.microsoft.com/office/drawing/2016/SVG/main" r:embed="rId3"/>
+                <asvg:svgBlip xmlns:asvg="http://schemas.microsoft.com/office/drawing/2016/SVG/main" r:embed="rId2"/>
               </a:ext>
             </a:extLst>
           </a:blip>
@@ -7707,14 +7688,14 @@
           <p:nvPr userDrawn="1"/>
         </p:nvPicPr>
         <p:blipFill>
-          <a:blip r:embed="rId2">
+          <a:blip>
             <a:alphaModFix/>
             <a:extLst>
               <a:ext uri="{28A0092B-C50C-407E-A947-70E740481C1C}">
                 <a14:useLocalDpi xmlns:a14="http://schemas.microsoft.com/office/drawing/2010/main"/>
               </a:ext>
               <a:ext uri="{96DAC541-7B7A-43D3-8B79-37D633B846F1}">
-                <asvg:svgBlip xmlns:asvg="http://schemas.microsoft.com/office/drawing/2016/SVG/main" r:embed="rId3"/>
+                <asvg:svgBlip xmlns:asvg="http://schemas.microsoft.com/office/drawing/2016/SVG/main" r:embed="rId2"/>
               </a:ext>
             </a:extLst>
           </a:blip>
@@ -9574,13 +9555,13 @@
           <p:nvPr userDrawn="1"/>
         </p:nvPicPr>
         <p:blipFill>
-          <a:blip r:embed="rId18" cstate="screen">
+          <a:blip cstate="screen">
             <a:extLst>
               <a:ext uri="{28A0092B-C50C-407E-A947-70E740481C1C}">
                 <a14:useLocalDpi xmlns:a14="http://schemas.microsoft.com/office/drawing/2010/main"/>
               </a:ext>
               <a:ext uri="{96DAC541-7B7A-43D3-8B79-37D633B846F1}">
-                <asvg:svgBlip xmlns:asvg="http://schemas.microsoft.com/office/drawing/2016/SVG/main" r:embed="rId19"/>
+                <asvg:svgBlip xmlns:asvg="http://schemas.microsoft.com/office/drawing/2016/SVG/main" r:embed="rId18"/>
               </a:ext>
             </a:extLst>
           </a:blip>
@@ -10138,7 +10119,7 @@
 </file>
 
 <file path=ppt/slides/slide1.xml><?xml version="1.0" encoding="utf-8"?>
-<p:sld xmlns:a="http://schemas.openxmlformats.org/drawingml/2006/main" xmlns:p="http://schemas.openxmlformats.org/presentationml/2006/main" xmlns:r="http://schemas.openxmlformats.org/officeDocument/2006/relationships">
+<p:sld xmlns:a="http://schemas.openxmlformats.org/drawingml/2006/main" xmlns:r="http://schemas.openxmlformats.org/officeDocument/2006/relationships" xmlns:p="http://schemas.openxmlformats.org/presentationml/2006/main">
   <p:cSld>
     <p:bg>
       <p:bgPr>
@@ -10154,7 +10135,14 @@
         <p:cNvGrpSpPr/>
         <p:nvPr/>
       </p:nvGrpSpPr>
-      <p:grpSpPr/>
+      <p:grpSpPr>
+        <a:xfrm>
+          <a:off x="0" y="0"/>
+          <a:ext cx="0" cy="0"/>
+          <a:chOff x="0" y="0"/>
+          <a:chExt cx="0" cy="0"/>
+        </a:xfrm>
+      </p:grpSpPr>
       <p:sp>
         <p:nvSpPr>
           <p:cNvPr id="2" name="Parallelogram 1"/>
@@ -10197,6 +10185,7 @@
           <a:lstStyle/>
           <a:p>
             <a:pPr algn="ctr"/>
+            <a:endParaRPr/>
           </a:p>
         </p:txBody>
       </p:sp>
@@ -10232,8 +10221,8 @@
         </p:nvSpPr>
         <p:spPr>
           <a:xfrm>
-            <a:off x="777240" y="2606040"/>
-            <a:ext cx="10515600" cy="1737360"/>
+            <a:off x="777240" y="2598003"/>
+            <a:ext cx="10515600" cy="1661993"/>
           </a:xfrm>
           <a:prstGeom prst="rect">
             <a:avLst/>
@@ -10241,56 +10230,27 @@
           <a:noFill/>
         </p:spPr>
         <p:txBody>
-          <a:bodyPr wrap="square" anchor="t" lIns="0" rIns="0" tIns="0" bIns="0">
+          <a:bodyPr wrap="square" lIns="0" tIns="0" rIns="0" bIns="0" anchor="t">
             <a:spAutoFit/>
           </a:bodyPr>
           <a:lstStyle/>
           <a:p>
             <a:pPr algn="l"/>
             <a:r>
-              <a:rPr sz="5400" b="1" i="0">
+              <a:rPr lang="en-US" sz="5400" b="1" i="0" dirty="0">
                 <a:solidFill>
                   <a:srgbClr val="FFFFFF"/>
                 </a:solidFill>
                 <a:latin typeface="Arial"/>
               </a:rPr>
-              <a:t>Who Builds Social Capital</a:t>
-            </a:r>
-          </a:p>
-        </p:txBody>
-      </p:sp>
-      <p:sp>
-        <p:nvSpPr>
-          <p:cNvPr id="5" name="TextBox 4"/>
-          <p:cNvSpPr txBox="1"/>
-          <p:nvPr/>
-        </p:nvSpPr>
-        <p:spPr>
-          <a:xfrm>
-            <a:off x="777240" y="3429000"/>
-            <a:ext cx="10515600" cy="914400"/>
-          </a:xfrm>
-          <a:prstGeom prst="rect">
-            <a:avLst/>
-          </a:prstGeom>
-          <a:noFill/>
-        </p:spPr>
-        <p:txBody>
-          <a:bodyPr wrap="square" anchor="t" lIns="0" rIns="0" tIns="0" bIns="0">
-            <a:spAutoFit/>
-          </a:bodyPr>
-          <a:lstStyle/>
-          <a:p>
-            <a:pPr algn="l"/>
-            <a:r>
-              <a:rPr sz="5400" b="1" i="0">
-                <a:solidFill>
-                  <a:srgbClr val="FFFFFF"/>
-                </a:solidFill>
-                <a:latin typeface="Arial"/>
-              </a:rPr>
-              <a:t>Through Sponsorship?</a:t>
-            </a:r>
+              <a:t>Who Gains More From Sponsorship?</a:t>
+            </a:r>
+            <a:endParaRPr sz="5400" b="1" i="0" dirty="0">
+              <a:solidFill>
+                <a:srgbClr val="FFFFFF"/>
+              </a:solidFill>
+              <a:latin typeface="Arial"/>
+            </a:endParaRPr>
           </a:p>
         </p:txBody>
       </p:sp>
@@ -10311,7 +10271,7 @@
           <a:noFill/>
         </p:spPr>
         <p:txBody>
-          <a:bodyPr wrap="square" anchor="t" lIns="0" rIns="0" tIns="0" bIns="0">
+          <a:bodyPr wrap="square" lIns="0" tIns="0" rIns="0" bIns="0" anchor="t">
             <a:spAutoFit/>
           </a:bodyPr>
           <a:lstStyle/>
@@ -10325,41 +10285,6 @@
                 <a:latin typeface="Arial"/>
               </a:rPr>
               <a:t>Jose Cervantez  ·  Erika Kirgios  ·  Rosalind Chow</a:t>
-            </a:r>
-          </a:p>
-        </p:txBody>
-      </p:sp>
-      <p:sp>
-        <p:nvSpPr>
-          <p:cNvPr id="7" name="TextBox 6"/>
-          <p:cNvSpPr txBox="1"/>
-          <p:nvPr/>
-        </p:nvSpPr>
-        <p:spPr>
-          <a:xfrm>
-            <a:off x="777240" y="5532120"/>
-            <a:ext cx="10515600" cy="457200"/>
-          </a:xfrm>
-          <a:prstGeom prst="rect">
-            <a:avLst/>
-          </a:prstGeom>
-          <a:noFill/>
-        </p:spPr>
-        <p:txBody>
-          <a:bodyPr wrap="square" anchor="t" lIns="0" rIns="0" tIns="0" bIns="0">
-            <a:spAutoFit/>
-          </a:bodyPr>
-          <a:lstStyle/>
-          <a:p>
-            <a:pPr algn="l"/>
-            <a:r>
-              <a:rPr sz="2000" b="0" i="1">
-                <a:solidFill>
-                  <a:srgbClr val="CCD2E0"/>
-                </a:solidFill>
-                <a:latin typeface="Arial"/>
-              </a:rPr>
-              <a:t>University of Chicago</a:t>
             </a:r>
           </a:p>
         </p:txBody>
@@ -10381,14 +10306,14 @@
           <a:noFill/>
         </p:spPr>
         <p:txBody>
-          <a:bodyPr wrap="square" anchor="t" lIns="0" rIns="0" tIns="0" bIns="0">
+          <a:bodyPr wrap="square" lIns="0" tIns="0" rIns="0" bIns="0" anchor="t">
             <a:spAutoFit/>
           </a:bodyPr>
           <a:lstStyle/>
           <a:p>
             <a:pPr algn="l"/>
             <a:r>
-              <a:rPr sz="1800" b="0" i="1">
+              <a:rPr sz="1800" b="0" i="1" dirty="0">
                 <a:solidFill>
                   <a:srgbClr val="CCD2E0"/>
                 </a:solidFill>
@@ -10408,7 +10333,7 @@
 </file>
 
 <file path=ppt/slides/slide10.xml><?xml version="1.0" encoding="utf-8"?>
-<p:sld xmlns:a="http://schemas.openxmlformats.org/drawingml/2006/main" xmlns:p="http://schemas.openxmlformats.org/presentationml/2006/main" xmlns:r="http://schemas.openxmlformats.org/officeDocument/2006/relationships">
+<p:sld xmlns:a="http://schemas.openxmlformats.org/drawingml/2006/main" xmlns:r="http://schemas.openxmlformats.org/officeDocument/2006/relationships" xmlns:p="http://schemas.openxmlformats.org/presentationml/2006/main">
   <p:cSld>
     <p:spTree>
       <p:nvGrpSpPr>
@@ -10416,7 +10341,131 @@
         <p:cNvGrpSpPr/>
         <p:nvPr/>
       </p:nvGrpSpPr>
-      <p:grpSpPr/>
+      <p:grpSpPr>
+        <a:xfrm>
+          <a:off x="0" y="0"/>
+          <a:ext cx="0" cy="0"/>
+          <a:chOff x="0" y="0"/>
+          <a:chExt cx="0" cy="0"/>
+        </a:xfrm>
+      </p:grpSpPr>
+      <p:sp>
+        <p:nvSpPr>
+          <p:cNvPr id="2" name="Content Placeholder 1">
+            <a:extLst>
+              <a:ext uri="{FF2B5EF4-FFF2-40B4-BE49-F238E27FC236}">
+                <a16:creationId xmlns:a16="http://schemas.microsoft.com/office/drawing/2014/main" id="{84B7D611-69F5-047F-59A9-8FC84A0C8E0A}"/>
+              </a:ext>
+            </a:extLst>
+          </p:cNvPr>
+          <p:cNvSpPr>
+            <a:spLocks noGrp="1"/>
+          </p:cNvSpPr>
+          <p:nvPr>
+            <p:ph idx="1"/>
+          </p:nvPr>
+        </p:nvSpPr>
+        <p:spPr/>
+        <p:txBody>
+          <a:bodyPr/>
+          <a:lstStyle/>
+          <a:p>
+            <a:r>
+              <a:rPr lang="en-US" dirty="0"/>
+              <a:t>Incentive slides</a:t>
+            </a:r>
+          </a:p>
+        </p:txBody>
+      </p:sp>
+      <p:sp>
+        <p:nvSpPr>
+          <p:cNvPr id="3" name="Footer Placeholder 2">
+            <a:extLst>
+              <a:ext uri="{FF2B5EF4-FFF2-40B4-BE49-F238E27FC236}">
+                <a16:creationId xmlns:a16="http://schemas.microsoft.com/office/drawing/2014/main" id="{FA3787A9-5ECF-A0ED-92CD-14F6768201BA}"/>
+              </a:ext>
+            </a:extLst>
+          </p:cNvPr>
+          <p:cNvSpPr>
+            <a:spLocks noGrp="1"/>
+          </p:cNvSpPr>
+          <p:nvPr>
+            <p:ph type="ftr" sz="quarter" idx="10"/>
+          </p:nvPr>
+        </p:nvSpPr>
+        <p:spPr/>
+        <p:txBody>
+          <a:bodyPr/>
+          <a:lstStyle/>
+          <a:p>
+            <a:r>
+              <a:rPr lang="en-US"/>
+              <a:t>Name of Initiative</a:t>
+            </a:r>
+            <a:endParaRPr lang="en-US" dirty="0"/>
+          </a:p>
+        </p:txBody>
+      </p:sp>
+      <p:sp>
+        <p:nvSpPr>
+          <p:cNvPr id="4" name="Slide Number Placeholder 3">
+            <a:extLst>
+              <a:ext uri="{FF2B5EF4-FFF2-40B4-BE49-F238E27FC236}">
+                <a16:creationId xmlns:a16="http://schemas.microsoft.com/office/drawing/2014/main" id="{4E3D3016-2531-3594-F5D4-DE681615029E}"/>
+              </a:ext>
+            </a:extLst>
+          </p:cNvPr>
+          <p:cNvSpPr>
+            <a:spLocks noGrp="1"/>
+          </p:cNvSpPr>
+          <p:nvPr>
+            <p:ph type="sldNum" sz="quarter" idx="11"/>
+          </p:nvPr>
+        </p:nvSpPr>
+        <p:spPr/>
+        <p:txBody>
+          <a:bodyPr/>
+          <a:lstStyle/>
+          <a:p>
+            <a:fld id="{DD253308-F9C5-4FCB-8415-6DEE77C16A35}" type="slidenum">
+              <a:rPr lang="en-US" smtClean="0"/>
+              <a:pPr/>
+              <a:t>10</a:t>
+            </a:fld>
+            <a:endParaRPr lang="en-US" dirty="0"/>
+          </a:p>
+        </p:txBody>
+      </p:sp>
+    </p:spTree>
+    <p:extLst>
+      <p:ext uri="{BB962C8B-B14F-4D97-AF65-F5344CB8AC3E}">
+        <p14:creationId xmlns:p14="http://schemas.microsoft.com/office/powerpoint/2010/main" val="3103675747"/>
+      </p:ext>
+    </p:extLst>
+  </p:cSld>
+  <p:clrMapOvr>
+    <a:masterClrMapping/>
+  </p:clrMapOvr>
+</p:sld>
+</file>
+
+<file path=ppt/slides/slide11.xml><?xml version="1.0" encoding="utf-8"?>
+<p:sld xmlns:a="http://schemas.openxmlformats.org/drawingml/2006/main" xmlns:r="http://schemas.openxmlformats.org/officeDocument/2006/relationships" xmlns:p="http://schemas.openxmlformats.org/presentationml/2006/main">
+  <p:cSld>
+    <p:spTree>
+      <p:nvGrpSpPr>
+        <p:cNvPr id="1" name=""/>
+        <p:cNvGrpSpPr/>
+        <p:nvPr/>
+      </p:nvGrpSpPr>
+      <p:grpSpPr>
+        <a:xfrm>
+          <a:off x="0" y="0"/>
+          <a:ext cx="0" cy="0"/>
+          <a:chOff x="0" y="0"/>
+          <a:chExt cx="0" cy="0"/>
+        </a:xfrm>
+      </p:grpSpPr>
       <p:sp>
         <p:nvSpPr>
           <p:cNvPr id="2" name="TextBox 1"/>
@@ -10434,7 +10483,7 @@
           <a:noFill/>
         </p:spPr>
         <p:txBody>
-          <a:bodyPr wrap="square" anchor="t" lIns="0" rIns="0" tIns="0" bIns="0">
+          <a:bodyPr wrap="square" lIns="0" tIns="0" rIns="0" bIns="0" anchor="t">
             <a:spAutoFit/>
           </a:bodyPr>
           <a:lstStyle/>
@@ -10469,7 +10518,7 @@
           <a:noFill/>
         </p:spPr>
         <p:txBody>
-          <a:bodyPr wrap="square" anchor="t" lIns="0" rIns="0" tIns="0" bIns="0">
+          <a:bodyPr wrap="square" lIns="0" tIns="0" rIns="0" bIns="0" anchor="t">
             <a:spAutoFit/>
           </a:bodyPr>
           <a:lstStyle/>
@@ -10513,36 +10562,31 @@
       </p:pic>
       <p:sp>
         <p:nvSpPr>
-          <p:cNvPr id="5" name="TextBox 4"/>
-          <p:cNvSpPr txBox="1"/>
-          <p:nvPr/>
+          <p:cNvPr id="208" name="Slide Number Placeholder 3">
+            <a:extLst>
+              <a:ext uri="{FF2B5EF4-FFF2-40B4-BE49-F238E27FC236}">
+                <a16:creationId xmlns:a16="http://schemas.microsoft.com/office/drawing/2014/main" id="{8D05B4F1-FC0E-4B35-B1ED-C478513F8495}"/>
+              </a:ext>
+            </a:extLst>
+          </p:cNvPr>
+          <p:cNvSpPr>
+            <a:spLocks noGrp="1"/>
+          </p:cNvSpPr>
+          <p:nvPr>
+            <p:ph type="sldNum" sz="quarter" idx="11"/>
+          </p:nvPr>
         </p:nvSpPr>
-        <p:spPr>
-          <a:xfrm>
-            <a:off x="10774375" y="6473952"/>
-            <a:ext cx="777240" cy="292608"/>
-          </a:xfrm>
-          <a:prstGeom prst="rect">
-            <a:avLst/>
-          </a:prstGeom>
-          <a:noFill/>
-        </p:spPr>
+        <p:spPr/>
         <p:txBody>
-          <a:bodyPr wrap="none" lIns="0" rIns="0" tIns="0" bIns="0" anchor="ctr">
-            <a:spAutoFit/>
-          </a:bodyPr>
+          <a:bodyPr/>
           <a:lstStyle/>
           <a:p>
-            <a:pPr algn="r"/>
-            <a:r>
-              <a:rPr sz="1100" b="1">
-                <a:solidFill>
-                  <a:srgbClr val="FFFFFF"/>
-                </a:solidFill>
-                <a:latin typeface="Arial"/>
-              </a:rPr>
-              <a:t>10 / 20</a:t>
-            </a:r>
+            <a:fld id="{DD253308-F9C5-4FCB-8415-6DEE77C16A35}" type="slidenum">
+              <a:rPr lang="en-US" smtClean="0"/>
+              <a:pPr/>
+              <a:t>10</a:t>
+            </a:fld>
+            <a:endParaRPr lang="en-US" dirty="0"/>
           </a:p>
         </p:txBody>
       </p:sp>
@@ -10554,8 +10598,8 @@
 </p:sld>
 </file>
 
-<file path=ppt/slides/slide11.xml><?xml version="1.0" encoding="utf-8"?>
-<p:sld xmlns:a="http://schemas.openxmlformats.org/drawingml/2006/main" xmlns:p="http://schemas.openxmlformats.org/presentationml/2006/main" xmlns:r="http://schemas.openxmlformats.org/officeDocument/2006/relationships">
+<file path=ppt/slides/slide12.xml><?xml version="1.0" encoding="utf-8"?>
+<p:sld xmlns:a="http://schemas.openxmlformats.org/drawingml/2006/main" xmlns:r="http://schemas.openxmlformats.org/officeDocument/2006/relationships" xmlns:p="http://schemas.openxmlformats.org/presentationml/2006/main">
   <p:cSld>
     <p:spTree>
       <p:nvGrpSpPr>
@@ -10563,7 +10607,14 @@
         <p:cNvGrpSpPr/>
         <p:nvPr/>
       </p:nvGrpSpPr>
-      <p:grpSpPr/>
+      <p:grpSpPr>
+        <a:xfrm>
+          <a:off x="0" y="0"/>
+          <a:ext cx="0" cy="0"/>
+          <a:chOff x="0" y="0"/>
+          <a:chExt cx="0" cy="0"/>
+        </a:xfrm>
+      </p:grpSpPr>
       <p:sp>
         <p:nvSpPr>
           <p:cNvPr id="2" name="TextBox 1"/>
@@ -10581,7 +10632,7 @@
           <a:noFill/>
         </p:spPr>
         <p:txBody>
-          <a:bodyPr wrap="square" anchor="t" lIns="0" rIns="0" tIns="0" bIns="0">
+          <a:bodyPr wrap="square" lIns="0" tIns="0" rIns="0" bIns="0" anchor="t">
             <a:spAutoFit/>
           </a:bodyPr>
           <a:lstStyle/>
@@ -10616,7 +10667,7 @@
           <a:noFill/>
         </p:spPr>
         <p:txBody>
-          <a:bodyPr wrap="square" anchor="t" lIns="0" rIns="0" tIns="0" bIns="0">
+          <a:bodyPr wrap="square" lIns="0" tIns="0" rIns="0" bIns="0" anchor="t">
             <a:spAutoFit/>
           </a:bodyPr>
           <a:lstStyle/>
@@ -10660,36 +10711,31 @@
       </p:pic>
       <p:sp>
         <p:nvSpPr>
-          <p:cNvPr id="5" name="TextBox 4"/>
-          <p:cNvSpPr txBox="1"/>
-          <p:nvPr/>
+          <p:cNvPr id="209" name="Slide Number Placeholder 3">
+            <a:extLst>
+              <a:ext uri="{FF2B5EF4-FFF2-40B4-BE49-F238E27FC236}">
+                <a16:creationId xmlns:a16="http://schemas.microsoft.com/office/drawing/2014/main" id="{297B77C9-43B3-46C1-996A-821C66E057C9}"/>
+              </a:ext>
+            </a:extLst>
+          </p:cNvPr>
+          <p:cNvSpPr>
+            <a:spLocks noGrp="1"/>
+          </p:cNvSpPr>
+          <p:nvPr>
+            <p:ph type="sldNum" sz="quarter" idx="11"/>
+          </p:nvPr>
         </p:nvSpPr>
-        <p:spPr>
-          <a:xfrm>
-            <a:off x="10774375" y="6473952"/>
-            <a:ext cx="777240" cy="292608"/>
-          </a:xfrm>
-          <a:prstGeom prst="rect">
-            <a:avLst/>
-          </a:prstGeom>
-          <a:noFill/>
-        </p:spPr>
+        <p:spPr/>
         <p:txBody>
-          <a:bodyPr wrap="none" lIns="0" rIns="0" tIns="0" bIns="0" anchor="ctr">
-            <a:spAutoFit/>
-          </a:bodyPr>
+          <a:bodyPr/>
           <a:lstStyle/>
           <a:p>
-            <a:pPr algn="r"/>
-            <a:r>
-              <a:rPr sz="1100" b="1">
-                <a:solidFill>
-                  <a:srgbClr val="FFFFFF"/>
-                </a:solidFill>
-                <a:latin typeface="Arial"/>
-              </a:rPr>
-              <a:t>11 / 20</a:t>
-            </a:r>
+            <a:fld id="{DD253308-F9C5-4FCB-8415-6DEE77C16A35}" type="slidenum">
+              <a:rPr lang="en-US" smtClean="0"/>
+              <a:pPr/>
+              <a:t>10</a:t>
+            </a:fld>
+            <a:endParaRPr lang="en-US" dirty="0"/>
           </a:p>
         </p:txBody>
       </p:sp>
@@ -10701,8 +10747,8 @@
 </p:sld>
 </file>
 
-<file path=ppt/slides/slide12.xml><?xml version="1.0" encoding="utf-8"?>
-<p:sld xmlns:a="http://schemas.openxmlformats.org/drawingml/2006/main" xmlns:p="http://schemas.openxmlformats.org/presentationml/2006/main" xmlns:r="http://schemas.openxmlformats.org/officeDocument/2006/relationships">
+<file path=ppt/slides/slide13.xml><?xml version="1.0" encoding="utf-8"?>
+<p:sld xmlns:a="http://schemas.openxmlformats.org/drawingml/2006/main" xmlns:r="http://schemas.openxmlformats.org/officeDocument/2006/relationships" xmlns:p="http://schemas.openxmlformats.org/presentationml/2006/main">
   <p:cSld>
     <p:spTree>
       <p:nvGrpSpPr>
@@ -10710,7 +10756,14 @@
         <p:cNvGrpSpPr/>
         <p:nvPr/>
       </p:nvGrpSpPr>
-      <p:grpSpPr/>
+      <p:grpSpPr>
+        <a:xfrm>
+          <a:off x="0" y="0"/>
+          <a:ext cx="0" cy="0"/>
+          <a:chOff x="0" y="0"/>
+          <a:chExt cx="0" cy="0"/>
+        </a:xfrm>
+      </p:grpSpPr>
       <p:sp>
         <p:nvSpPr>
           <p:cNvPr id="2" name="TextBox 1"/>
@@ -10728,7 +10781,7 @@
           <a:noFill/>
         </p:spPr>
         <p:txBody>
-          <a:bodyPr wrap="square" anchor="t" lIns="0" rIns="0" tIns="0" bIns="0">
+          <a:bodyPr wrap="square" lIns="0" tIns="0" rIns="0" bIns="0" anchor="t">
             <a:spAutoFit/>
           </a:bodyPr>
           <a:lstStyle/>
@@ -10763,7 +10816,7 @@
           <a:noFill/>
         </p:spPr>
         <p:txBody>
-          <a:bodyPr wrap="square" anchor="t" lIns="0" rIns="0" tIns="0" bIns="0">
+          <a:bodyPr wrap="square" lIns="0" tIns="0" rIns="0" bIns="0" anchor="t">
             <a:spAutoFit/>
           </a:bodyPr>
           <a:lstStyle/>
@@ -10807,36 +10860,31 @@
       </p:pic>
       <p:sp>
         <p:nvSpPr>
-          <p:cNvPr id="5" name="TextBox 4"/>
-          <p:cNvSpPr txBox="1"/>
-          <p:nvPr/>
+          <p:cNvPr id="210" name="Slide Number Placeholder 3">
+            <a:extLst>
+              <a:ext uri="{FF2B5EF4-FFF2-40B4-BE49-F238E27FC236}">
+                <a16:creationId xmlns:a16="http://schemas.microsoft.com/office/drawing/2014/main" id="{C53DC1F7-5FD6-425C-9CF0-1889CF282E13}"/>
+              </a:ext>
+            </a:extLst>
+          </p:cNvPr>
+          <p:cNvSpPr>
+            <a:spLocks noGrp="1"/>
+          </p:cNvSpPr>
+          <p:nvPr>
+            <p:ph type="sldNum" sz="quarter" idx="11"/>
+          </p:nvPr>
         </p:nvSpPr>
-        <p:spPr>
-          <a:xfrm>
-            <a:off x="10774375" y="6473952"/>
-            <a:ext cx="777240" cy="292608"/>
-          </a:xfrm>
-          <a:prstGeom prst="rect">
-            <a:avLst/>
-          </a:prstGeom>
-          <a:noFill/>
-        </p:spPr>
+        <p:spPr/>
         <p:txBody>
-          <a:bodyPr wrap="none" lIns="0" rIns="0" tIns="0" bIns="0" anchor="ctr">
-            <a:spAutoFit/>
-          </a:bodyPr>
+          <a:bodyPr/>
           <a:lstStyle/>
           <a:p>
-            <a:pPr algn="r"/>
-            <a:r>
-              <a:rPr sz="1100" b="1">
-                <a:solidFill>
-                  <a:srgbClr val="FFFFFF"/>
-                </a:solidFill>
-                <a:latin typeface="Arial"/>
-              </a:rPr>
-              <a:t>12 / 20</a:t>
-            </a:r>
+            <a:fld id="{DD253308-F9C5-4FCB-8415-6DEE77C16A35}" type="slidenum">
+              <a:rPr lang="en-US" smtClean="0"/>
+              <a:pPr/>
+              <a:t>10</a:t>
+            </a:fld>
+            <a:endParaRPr lang="en-US" dirty="0"/>
           </a:p>
         </p:txBody>
       </p:sp>
@@ -10848,8 +10896,8 @@
 </p:sld>
 </file>
 
-<file path=ppt/slides/slide13.xml><?xml version="1.0" encoding="utf-8"?>
-<p:sld xmlns:a="http://schemas.openxmlformats.org/drawingml/2006/main" xmlns:p="http://schemas.openxmlformats.org/presentationml/2006/main" xmlns:r="http://schemas.openxmlformats.org/officeDocument/2006/relationships">
+<file path=ppt/slides/slide14.xml><?xml version="1.0" encoding="utf-8"?>
+<p:sld xmlns:a="http://schemas.openxmlformats.org/drawingml/2006/main" xmlns:r="http://schemas.openxmlformats.org/officeDocument/2006/relationships" xmlns:p="http://schemas.openxmlformats.org/presentationml/2006/main">
   <p:cSld>
     <p:spTree>
       <p:nvGrpSpPr>
@@ -10857,7 +10905,14 @@
         <p:cNvGrpSpPr/>
         <p:nvPr/>
       </p:nvGrpSpPr>
-      <p:grpSpPr/>
+      <p:grpSpPr>
+        <a:xfrm>
+          <a:off x="0" y="0"/>
+          <a:ext cx="0" cy="0"/>
+          <a:chOff x="0" y="0"/>
+          <a:chExt cx="0" cy="0"/>
+        </a:xfrm>
+      </p:grpSpPr>
       <p:sp>
         <p:nvSpPr>
           <p:cNvPr id="2" name="TextBox 1"/>
@@ -10875,7 +10930,7 @@
           <a:noFill/>
         </p:spPr>
         <p:txBody>
-          <a:bodyPr wrap="square" anchor="t" lIns="0" rIns="0" tIns="0" bIns="0">
+          <a:bodyPr wrap="square" lIns="0" tIns="0" rIns="0" bIns="0" anchor="t">
             <a:spAutoFit/>
           </a:bodyPr>
           <a:lstStyle/>
@@ -10933,7 +10988,7 @@
           </a:fontRef>
         </p:style>
         <p:txBody>
-          <a:bodyPr rtlCol="0" anchor="ctr" lIns="182880" rIns="182880" tIns="91440" bIns="91440" wrap="square"/>
+          <a:bodyPr wrap="square" lIns="182880" tIns="91440" rIns="182880" bIns="91440" rtlCol="0" anchor="ctr"/>
           <a:lstStyle/>
           <a:p>
             <a:pPr algn="l">
@@ -11037,65 +11092,60 @@
           </a:p>
         </p:txBody>
       </p:sp>
+      <p:sp>
+        <p:nvSpPr>
+          <p:cNvPr id="211" name="Slide Number Placeholder 3">
+            <a:extLst>
+              <a:ext uri="{FF2B5EF4-FFF2-40B4-BE49-F238E27FC236}">
+                <a16:creationId xmlns:a16="http://schemas.microsoft.com/office/drawing/2014/main" id="{29F8E95F-F92A-4D2C-BA95-C7E10742A51C}"/>
+              </a:ext>
+            </a:extLst>
+          </p:cNvPr>
+          <p:cNvSpPr>
+            <a:spLocks noGrp="1"/>
+          </p:cNvSpPr>
+          <p:nvPr>
+            <p:ph type="sldNum" sz="quarter" idx="11"/>
+          </p:nvPr>
+        </p:nvSpPr>
+        <p:spPr/>
+        <p:txBody>
+          <a:bodyPr/>
+          <a:lstStyle/>
+          <a:p>
+            <a:fld id="{DD253308-F9C5-4FCB-8415-6DEE77C16A35}" type="slidenum">
+              <a:rPr lang="en-US" smtClean="0"/>
+              <a:pPr/>
+              <a:t>10</a:t>
+            </a:fld>
+            <a:endParaRPr lang="en-US" dirty="0"/>
+          </a:p>
+        </p:txBody>
+      </p:sp>
       <p:pic>
         <p:nvPicPr>
-          <p:cNvPr id="4" name="Picture 3" descr="rq1_gender_x_outcome.png"/>
+          <p:cNvPr id="212" name="Picture 211" descr="rq1_gender_x_outcome.png"/>
           <p:cNvPicPr>
             <a:picLocks noChangeAspect="1"/>
           </p:cNvPicPr>
           <p:nvPr/>
         </p:nvPicPr>
         <p:blipFill>
-          <a:blip r:embed="rId2"/>
+          <a:blip r:embed="rId3"/>
           <a:stretch>
             <a:fillRect/>
           </a:stretch>
         </p:blipFill>
         <p:spPr>
           <a:xfrm>
-            <a:off x="95097" y="1645920"/>
-            <a:ext cx="12001500" cy="4800600"/>
+            <a:off x="91440" y="1645920"/>
+            <a:ext cx="12006072" cy="4800600"/>
           </a:xfrm>
           <a:prstGeom prst="rect">
             <a:avLst/>
           </a:prstGeom>
         </p:spPr>
       </p:pic>
-      <p:sp>
-        <p:nvSpPr>
-          <p:cNvPr id="5" name="TextBox 4"/>
-          <p:cNvSpPr txBox="1"/>
-          <p:nvPr/>
-        </p:nvSpPr>
-        <p:spPr>
-          <a:xfrm>
-            <a:off x="10774375" y="6473952"/>
-            <a:ext cx="777240" cy="292608"/>
-          </a:xfrm>
-          <a:prstGeom prst="rect">
-            <a:avLst/>
-          </a:prstGeom>
-          <a:noFill/>
-        </p:spPr>
-        <p:txBody>
-          <a:bodyPr wrap="none" lIns="0" rIns="0" tIns="0" bIns="0" anchor="ctr">
-            <a:spAutoFit/>
-          </a:bodyPr>
-          <a:lstStyle/>
-          <a:p>
-            <a:pPr algn="r"/>
-            <a:r>
-              <a:rPr sz="1100" b="1">
-                <a:solidFill>
-                  <a:srgbClr val="FFFFFF"/>
-                </a:solidFill>
-                <a:latin typeface="Arial"/>
-              </a:rPr>
-              <a:t>13 / 20</a:t>
-            </a:r>
-          </a:p>
-        </p:txBody>
-      </p:sp>
     </p:spTree>
   </p:cSld>
   <p:clrMapOvr>
@@ -11104,8 +11154,8 @@
 </p:sld>
 </file>
 
-<file path=ppt/slides/slide14.xml><?xml version="1.0" encoding="utf-8"?>
-<p:sld xmlns:a="http://schemas.openxmlformats.org/drawingml/2006/main" xmlns:p="http://schemas.openxmlformats.org/presentationml/2006/main" xmlns:r="http://schemas.openxmlformats.org/officeDocument/2006/relationships">
+<file path=ppt/slides/slide15.xml><?xml version="1.0" encoding="utf-8"?>
+<p:sld xmlns:a="http://schemas.openxmlformats.org/drawingml/2006/main" xmlns:r="http://schemas.openxmlformats.org/officeDocument/2006/relationships" xmlns:p="http://schemas.openxmlformats.org/presentationml/2006/main">
   <p:cSld>
     <p:spTree>
       <p:nvGrpSpPr>
@@ -11113,7 +11163,14 @@
         <p:cNvGrpSpPr/>
         <p:nvPr/>
       </p:nvGrpSpPr>
-      <p:grpSpPr/>
+      <p:grpSpPr>
+        <a:xfrm>
+          <a:off x="0" y="0"/>
+          <a:ext cx="0" cy="0"/>
+          <a:chOff x="0" y="0"/>
+          <a:chExt cx="0" cy="0"/>
+        </a:xfrm>
+      </p:grpSpPr>
       <p:sp>
         <p:nvSpPr>
           <p:cNvPr id="2" name="TextBox 1"/>
@@ -11123,7 +11180,7 @@
         <p:spPr>
           <a:xfrm>
             <a:off x="502920" y="365760"/>
-            <a:ext cx="6583680" cy="640080"/>
+            <a:ext cx="4389120" cy="640080"/>
           </a:xfrm>
           <a:prstGeom prst="rect">
             <a:avLst/>
@@ -11131,7 +11188,7 @@
           <a:noFill/>
         </p:spPr>
         <p:txBody>
-          <a:bodyPr wrap="square" anchor="t" lIns="0" rIns="0" tIns="0" bIns="0">
+          <a:bodyPr wrap="square" lIns="0" tIns="0" rIns="0" bIns="0" anchor="t">
             <a:spAutoFit/>
           </a:bodyPr>
           <a:lstStyle/>
@@ -11157,7 +11214,7 @@
         </p:nvSpPr>
         <p:spPr>
           <a:xfrm>
-            <a:off x="7223760" y="274320"/>
+            <a:off x="4997196" y="274320"/>
             <a:ext cx="2194560" cy="1325880"/>
           </a:xfrm>
           <a:prstGeom prst="roundRect">
@@ -11191,7 +11248,9 @@
         <p:txBody>
           <a:bodyPr rtlCol="0" anchor="ctr"/>
           <a:lstStyle/>
-          <a:p/>
+          <a:p>
+            <a:endParaRPr/>
+          </a:p>
         </p:txBody>
       </p:sp>
       <p:sp>
@@ -11202,7 +11261,7 @@
         </p:nvSpPr>
         <p:spPr>
           <a:xfrm>
-            <a:off x="7388352" y="365760"/>
+            <a:off x="5161788" y="365760"/>
             <a:ext cx="1865376" cy="274320"/>
           </a:xfrm>
           <a:prstGeom prst="rect">
@@ -11211,7 +11270,7 @@
           <a:noFill/>
         </p:spPr>
         <p:txBody>
-          <a:bodyPr wrap="square" anchor="t" lIns="0" rIns="0" tIns="0" bIns="0">
+          <a:bodyPr wrap="square" lIns="0" tIns="0" rIns="0" bIns="0" anchor="t">
             <a:spAutoFit/>
           </a:bodyPr>
           <a:lstStyle/>
@@ -11237,7 +11296,7 @@
         </p:nvSpPr>
         <p:spPr>
           <a:xfrm>
-            <a:off x="7388352" y="777240"/>
+            <a:off x="5161788" y="777240"/>
             <a:ext cx="1865376" cy="182880"/>
           </a:xfrm>
           <a:prstGeom prst="roundRect">
@@ -11271,6 +11330,7 @@
           <a:lstStyle/>
           <a:p>
             <a:pPr algn="ctr"/>
+            <a:endParaRPr/>
           </a:p>
         </p:txBody>
       </p:sp>
@@ -11282,7 +11342,7 @@
         </p:nvSpPr>
         <p:spPr>
           <a:xfrm>
-            <a:off x="7388352" y="777240"/>
+            <a:off x="5161788" y="777240"/>
             <a:ext cx="1585569" cy="182880"/>
           </a:xfrm>
           <a:prstGeom prst="roundRect">
@@ -11316,6 +11376,7 @@
           <a:lstStyle/>
           <a:p>
             <a:pPr algn="ctr"/>
+            <a:endParaRPr/>
           </a:p>
         </p:txBody>
       </p:sp>
@@ -11327,7 +11388,7 @@
         </p:nvSpPr>
         <p:spPr>
           <a:xfrm>
-            <a:off x="7388352" y="1060704"/>
+            <a:off x="5161788" y="1060704"/>
             <a:ext cx="1865376" cy="329184"/>
           </a:xfrm>
           <a:prstGeom prst="rect">
@@ -11336,7 +11397,7 @@
           <a:noFill/>
         </p:spPr>
         <p:txBody>
-          <a:bodyPr wrap="square" anchor="t" lIns="0" rIns="0" tIns="0" bIns="0">
+          <a:bodyPr wrap="square" lIns="0" tIns="0" rIns="0" bIns="0" anchor="t">
             <a:spAutoFit/>
           </a:bodyPr>
           <a:lstStyle/>
@@ -11362,7 +11423,7 @@
         </p:nvSpPr>
         <p:spPr>
           <a:xfrm>
-            <a:off x="7388352" y="1353312"/>
+            <a:off x="5161788" y="1353312"/>
             <a:ext cx="1865376" cy="228600"/>
           </a:xfrm>
           <a:prstGeom prst="rect">
@@ -11371,14 +11432,14 @@
           <a:noFill/>
         </p:spPr>
         <p:txBody>
-          <a:bodyPr wrap="square" anchor="t" lIns="0" rIns="0" tIns="0" bIns="0">
+          <a:bodyPr wrap="square" lIns="0" tIns="0" rIns="0" bIns="0" anchor="t">
             <a:spAutoFit/>
           </a:bodyPr>
           <a:lstStyle/>
           <a:p>
             <a:pPr algn="l"/>
             <a:r>
-              <a:rPr sz="1100" b="0" i="1">
+              <a:rPr sz="1100" b="0" i="1" dirty="0">
                 <a:solidFill>
                   <a:srgbClr val="6B7280"/>
                 </a:solidFill>
@@ -11429,7 +11490,7 @@
           </a:fontRef>
         </p:style>
         <p:txBody>
-          <a:bodyPr rtlCol="0" anchor="ctr" lIns="182880" rIns="182880" tIns="91440" bIns="91440" wrap="square"/>
+          <a:bodyPr wrap="square" lIns="182880" tIns="91440" rIns="182880" bIns="91440" rtlCol="0" anchor="ctr"/>
           <a:lstStyle/>
           <a:p>
             <a:pPr algn="l">
@@ -11533,65 +11594,60 @@
           </a:p>
         </p:txBody>
       </p:sp>
+      <p:sp>
+        <p:nvSpPr>
+          <p:cNvPr id="212" name="Slide Number Placeholder 3">
+            <a:extLst>
+              <a:ext uri="{FF2B5EF4-FFF2-40B4-BE49-F238E27FC236}">
+                <a16:creationId xmlns:a16="http://schemas.microsoft.com/office/drawing/2014/main" id="{85F90AF4-29B7-4FED-BD53-B1D1B7325F91}"/>
+              </a:ext>
+            </a:extLst>
+          </p:cNvPr>
+          <p:cNvSpPr>
+            <a:spLocks noGrp="1"/>
+          </p:cNvSpPr>
+          <p:nvPr>
+            <p:ph type="sldNum" sz="quarter" idx="11"/>
+          </p:nvPr>
+        </p:nvSpPr>
+        <p:spPr/>
+        <p:txBody>
+          <a:bodyPr/>
+          <a:lstStyle/>
+          <a:p>
+            <a:fld id="{DD253308-F9C5-4FCB-8415-6DEE77C16A35}" type="slidenum">
+              <a:rPr lang="en-US" smtClean="0"/>
+              <a:pPr/>
+              <a:t>10</a:t>
+            </a:fld>
+            <a:endParaRPr lang="en-US" dirty="0"/>
+          </a:p>
+        </p:txBody>
+      </p:sp>
       <p:pic>
         <p:nvPicPr>
-          <p:cNvPr id="10" name="Picture 9" descr="rq2_strong_only.png"/>
+          <p:cNvPr id="213" name="Picture 212" descr="rq2_strong_only.png"/>
           <p:cNvPicPr>
             <a:picLocks noChangeAspect="1"/>
           </p:cNvPicPr>
           <p:nvPr/>
         </p:nvPicPr>
         <p:blipFill>
-          <a:blip r:embed="rId2"/>
+          <a:blip r:embed="rId3"/>
           <a:stretch>
             <a:fillRect/>
           </a:stretch>
         </p:blipFill>
         <p:spPr>
           <a:xfrm>
-            <a:off x="95097" y="1645920"/>
-            <a:ext cx="12001500" cy="4800600"/>
+            <a:off x="91440" y="1645920"/>
+            <a:ext cx="12006072" cy="4800600"/>
           </a:xfrm>
           <a:prstGeom prst="rect">
             <a:avLst/>
           </a:prstGeom>
         </p:spPr>
       </p:pic>
-      <p:sp>
-        <p:nvSpPr>
-          <p:cNvPr id="11" name="TextBox 10"/>
-          <p:cNvSpPr txBox="1"/>
-          <p:nvPr/>
-        </p:nvSpPr>
-        <p:spPr>
-          <a:xfrm>
-            <a:off x="10774375" y="6473952"/>
-            <a:ext cx="777240" cy="292608"/>
-          </a:xfrm>
-          <a:prstGeom prst="rect">
-            <a:avLst/>
-          </a:prstGeom>
-          <a:noFill/>
-        </p:spPr>
-        <p:txBody>
-          <a:bodyPr wrap="none" lIns="0" rIns="0" tIns="0" bIns="0" anchor="ctr">
-            <a:spAutoFit/>
-          </a:bodyPr>
-          <a:lstStyle/>
-          <a:p>
-            <a:pPr algn="r"/>
-            <a:r>
-              <a:rPr sz="1100" b="1">
-                <a:solidFill>
-                  <a:srgbClr val="FFFFFF"/>
-                </a:solidFill>
-                <a:latin typeface="Arial"/>
-              </a:rPr>
-              <a:t>14 / 20</a:t>
-            </a:r>
-          </a:p>
-        </p:txBody>
-      </p:sp>
     </p:spTree>
   </p:cSld>
   <p:clrMapOvr>
@@ -11600,8 +11656,8 @@
 </p:sld>
 </file>
 
-<file path=ppt/slides/slide15.xml><?xml version="1.0" encoding="utf-8"?>
-<p:sld xmlns:a="http://schemas.openxmlformats.org/drawingml/2006/main" xmlns:p="http://schemas.openxmlformats.org/presentationml/2006/main" xmlns:r="http://schemas.openxmlformats.org/officeDocument/2006/relationships">
+<file path=ppt/slides/slide16.xml><?xml version="1.0" encoding="utf-8"?>
+<p:sld xmlns:a="http://schemas.openxmlformats.org/drawingml/2006/main" xmlns:r="http://schemas.openxmlformats.org/officeDocument/2006/relationships" xmlns:p="http://schemas.openxmlformats.org/presentationml/2006/main">
   <p:cSld>
     <p:spTree>
       <p:nvGrpSpPr>
@@ -11609,7 +11665,14 @@
         <p:cNvGrpSpPr/>
         <p:nvPr/>
       </p:nvGrpSpPr>
-      <p:grpSpPr/>
+      <p:grpSpPr>
+        <a:xfrm>
+          <a:off x="0" y="0"/>
+          <a:ext cx="0" cy="0"/>
+          <a:chOff x="0" y="0"/>
+          <a:chExt cx="0" cy="0"/>
+        </a:xfrm>
+      </p:grpSpPr>
       <p:sp>
         <p:nvSpPr>
           <p:cNvPr id="2" name="TextBox 1"/>
@@ -11619,7 +11682,7 @@
         <p:spPr>
           <a:xfrm>
             <a:off x="502920" y="365760"/>
-            <a:ext cx="6583680" cy="640080"/>
+            <a:ext cx="4389120" cy="640080"/>
           </a:xfrm>
           <a:prstGeom prst="rect">
             <a:avLst/>
@@ -11627,7 +11690,7 @@
           <a:noFill/>
         </p:spPr>
         <p:txBody>
-          <a:bodyPr wrap="square" anchor="t" lIns="0" rIns="0" tIns="0" bIns="0">
+          <a:bodyPr wrap="square" lIns="0" tIns="0" rIns="0" bIns="0" anchor="t">
             <a:spAutoFit/>
           </a:bodyPr>
           <a:lstStyle/>
@@ -11653,7 +11716,7 @@
         </p:nvSpPr>
         <p:spPr>
           <a:xfrm>
-            <a:off x="7223760" y="274320"/>
+            <a:off x="4997196" y="274320"/>
             <a:ext cx="2194560" cy="1325880"/>
           </a:xfrm>
           <a:prstGeom prst="roundRect">
@@ -11687,7 +11750,9 @@
         <p:txBody>
           <a:bodyPr rtlCol="0" anchor="ctr"/>
           <a:lstStyle/>
-          <a:p/>
+          <a:p>
+            <a:endParaRPr/>
+          </a:p>
         </p:txBody>
       </p:sp>
       <p:sp>
@@ -11698,7 +11763,7 @@
         </p:nvSpPr>
         <p:spPr>
           <a:xfrm>
-            <a:off x="7388352" y="365760"/>
+            <a:off x="5161788" y="365760"/>
             <a:ext cx="1865376" cy="274320"/>
           </a:xfrm>
           <a:prstGeom prst="rect">
@@ -11707,7 +11772,7 @@
           <a:noFill/>
         </p:spPr>
         <p:txBody>
-          <a:bodyPr wrap="square" anchor="t" lIns="0" rIns="0" tIns="0" bIns="0">
+          <a:bodyPr wrap="square" lIns="0" tIns="0" rIns="0" bIns="0" anchor="t">
             <a:spAutoFit/>
           </a:bodyPr>
           <a:lstStyle/>
@@ -11733,7 +11798,7 @@
         </p:nvSpPr>
         <p:spPr>
           <a:xfrm>
-            <a:off x="7388352" y="777240"/>
+            <a:off x="5161788" y="777240"/>
             <a:ext cx="1865376" cy="182880"/>
           </a:xfrm>
           <a:prstGeom prst="roundRect">
@@ -11767,6 +11832,7 @@
           <a:lstStyle/>
           <a:p>
             <a:pPr algn="ctr"/>
+            <a:endParaRPr/>
           </a:p>
         </p:txBody>
       </p:sp>
@@ -11778,7 +11844,7 @@
         </p:nvSpPr>
         <p:spPr>
           <a:xfrm>
-            <a:off x="7388352" y="777240"/>
+            <a:off x="5161788" y="777240"/>
             <a:ext cx="410382" cy="182880"/>
           </a:xfrm>
           <a:prstGeom prst="roundRect">
@@ -11812,6 +11878,7 @@
           <a:lstStyle/>
           <a:p>
             <a:pPr algn="ctr"/>
+            <a:endParaRPr/>
           </a:p>
         </p:txBody>
       </p:sp>
@@ -11823,7 +11890,7 @@
         </p:nvSpPr>
         <p:spPr>
           <a:xfrm>
-            <a:off x="7388352" y="1060704"/>
+            <a:off x="5161788" y="1060704"/>
             <a:ext cx="1865376" cy="329184"/>
           </a:xfrm>
           <a:prstGeom prst="rect">
@@ -11832,7 +11899,7 @@
           <a:noFill/>
         </p:spPr>
         <p:txBody>
-          <a:bodyPr wrap="square" anchor="t" lIns="0" rIns="0" tIns="0" bIns="0">
+          <a:bodyPr wrap="square" lIns="0" tIns="0" rIns="0" bIns="0" anchor="t">
             <a:spAutoFit/>
           </a:bodyPr>
           <a:lstStyle/>
@@ -11858,7 +11925,7 @@
         </p:nvSpPr>
         <p:spPr>
           <a:xfrm>
-            <a:off x="7388352" y="1353312"/>
+            <a:off x="5161788" y="1353312"/>
             <a:ext cx="1865376" cy="228600"/>
           </a:xfrm>
           <a:prstGeom prst="rect">
@@ -11867,7 +11934,7 @@
           <a:noFill/>
         </p:spPr>
         <p:txBody>
-          <a:bodyPr wrap="square" anchor="t" lIns="0" rIns="0" tIns="0" bIns="0">
+          <a:bodyPr wrap="square" lIns="0" tIns="0" rIns="0" bIns="0" anchor="t">
             <a:spAutoFit/>
           </a:bodyPr>
           <a:lstStyle/>
@@ -11925,7 +11992,7 @@
           </a:fontRef>
         </p:style>
         <p:txBody>
-          <a:bodyPr rtlCol="0" anchor="ctr" lIns="182880" rIns="182880" tIns="91440" bIns="91440" wrap="square"/>
+          <a:bodyPr wrap="square" lIns="182880" tIns="91440" rIns="182880" bIns="91440" rtlCol="0" anchor="ctr"/>
           <a:lstStyle/>
           <a:p>
             <a:pPr algn="l">
@@ -12029,65 +12096,60 @@
           </a:p>
         </p:txBody>
       </p:sp>
+      <p:sp>
+        <p:nvSpPr>
+          <p:cNvPr id="213" name="Slide Number Placeholder 3">
+            <a:extLst>
+              <a:ext uri="{FF2B5EF4-FFF2-40B4-BE49-F238E27FC236}">
+                <a16:creationId xmlns:a16="http://schemas.microsoft.com/office/drawing/2014/main" id="{E8F6FB20-2327-4A2A-A726-3AFFD661037F}"/>
+              </a:ext>
+            </a:extLst>
+          </p:cNvPr>
+          <p:cNvSpPr>
+            <a:spLocks noGrp="1"/>
+          </p:cNvSpPr>
+          <p:nvPr>
+            <p:ph type="sldNum" sz="quarter" idx="11"/>
+          </p:nvPr>
+        </p:nvSpPr>
+        <p:spPr/>
+        <p:txBody>
+          <a:bodyPr/>
+          <a:lstStyle/>
+          <a:p>
+            <a:fld id="{DD253308-F9C5-4FCB-8415-6DEE77C16A35}" type="slidenum">
+              <a:rPr lang="en-US" smtClean="0"/>
+              <a:pPr/>
+              <a:t>10</a:t>
+            </a:fld>
+            <a:endParaRPr lang="en-US" dirty="0"/>
+          </a:p>
+        </p:txBody>
+      </p:sp>
       <p:pic>
         <p:nvPicPr>
-          <p:cNvPr id="10" name="Picture 9" descr="rq2_weak_only.png"/>
+          <p:cNvPr id="214" name="Picture 213" descr="rq2_weak_only.png"/>
           <p:cNvPicPr>
             <a:picLocks noChangeAspect="1"/>
           </p:cNvPicPr>
           <p:nvPr/>
         </p:nvPicPr>
         <p:blipFill>
-          <a:blip r:embed="rId2"/>
+          <a:blip r:embed="rId3"/>
           <a:stretch>
             <a:fillRect/>
           </a:stretch>
         </p:blipFill>
         <p:spPr>
           <a:xfrm>
-            <a:off x="95097" y="1645920"/>
-            <a:ext cx="12001500" cy="4800600"/>
+            <a:off x="91440" y="1645920"/>
+            <a:ext cx="12006072" cy="4800600"/>
           </a:xfrm>
           <a:prstGeom prst="rect">
             <a:avLst/>
           </a:prstGeom>
         </p:spPr>
       </p:pic>
-      <p:sp>
-        <p:nvSpPr>
-          <p:cNvPr id="11" name="TextBox 10"/>
-          <p:cNvSpPr txBox="1"/>
-          <p:nvPr/>
-        </p:nvSpPr>
-        <p:spPr>
-          <a:xfrm>
-            <a:off x="10774375" y="6473952"/>
-            <a:ext cx="777240" cy="292608"/>
-          </a:xfrm>
-          <a:prstGeom prst="rect">
-            <a:avLst/>
-          </a:prstGeom>
-          <a:noFill/>
-        </p:spPr>
-        <p:txBody>
-          <a:bodyPr wrap="none" lIns="0" rIns="0" tIns="0" bIns="0" anchor="ctr">
-            <a:spAutoFit/>
-          </a:bodyPr>
-          <a:lstStyle/>
-          <a:p>
-            <a:pPr algn="r"/>
-            <a:r>
-              <a:rPr sz="1100" b="1">
-                <a:solidFill>
-                  <a:srgbClr val="FFFFFF"/>
-                </a:solidFill>
-                <a:latin typeface="Arial"/>
-              </a:rPr>
-              <a:t>15 / 20</a:t>
-            </a:r>
-          </a:p>
-        </p:txBody>
-      </p:sp>
     </p:spTree>
   </p:cSld>
   <p:clrMapOvr>
@@ -12096,8 +12158,8 @@
 </p:sld>
 </file>
 
-<file path=ppt/slides/slide16.xml><?xml version="1.0" encoding="utf-8"?>
-<p:sld xmlns:a="http://schemas.openxmlformats.org/drawingml/2006/main" xmlns:p="http://schemas.openxmlformats.org/presentationml/2006/main" xmlns:r="http://schemas.openxmlformats.org/officeDocument/2006/relationships">
+<file path=ppt/slides/slide17.xml><?xml version="1.0" encoding="utf-8"?>
+<p:sld xmlns:a="http://schemas.openxmlformats.org/drawingml/2006/main" xmlns:r="http://schemas.openxmlformats.org/officeDocument/2006/relationships" xmlns:p="http://schemas.openxmlformats.org/presentationml/2006/main">
   <p:cSld>
     <p:spTree>
       <p:nvGrpSpPr>
@@ -12105,7 +12167,14 @@
         <p:cNvGrpSpPr/>
         <p:nvPr/>
       </p:nvGrpSpPr>
-      <p:grpSpPr/>
+      <p:grpSpPr>
+        <a:xfrm>
+          <a:off x="0" y="0"/>
+          <a:ext cx="0" cy="0"/>
+          <a:chOff x="0" y="0"/>
+          <a:chExt cx="0" cy="0"/>
+        </a:xfrm>
+      </p:grpSpPr>
       <p:sp>
         <p:nvSpPr>
           <p:cNvPr id="2" name="TextBox 1"/>
@@ -12123,7 +12192,7 @@
           <a:noFill/>
         </p:spPr>
         <p:txBody>
-          <a:bodyPr wrap="square" anchor="t" lIns="0" rIns="0" tIns="0" bIns="0">
+          <a:bodyPr wrap="square" lIns="0" tIns="0" rIns="0" bIns="0" anchor="t">
             <a:spAutoFit/>
           </a:bodyPr>
           <a:lstStyle/>
@@ -12181,7 +12250,7 @@
           </a:fontRef>
         </p:style>
         <p:txBody>
-          <a:bodyPr rtlCol="0" anchor="ctr" lIns="182880" rIns="182880" tIns="91440" bIns="91440" wrap="square"/>
+          <a:bodyPr wrap="square" lIns="182880" tIns="91440" rIns="182880" bIns="91440" rtlCol="0" anchor="ctr"/>
           <a:lstStyle/>
           <a:p>
             <a:pPr algn="l">
@@ -12260,65 +12329,60 @@
           </a:p>
         </p:txBody>
       </p:sp>
+      <p:sp>
+        <p:nvSpPr>
+          <p:cNvPr id="214" name="Slide Number Placeholder 3">
+            <a:extLst>
+              <a:ext uri="{FF2B5EF4-FFF2-40B4-BE49-F238E27FC236}">
+                <a16:creationId xmlns:a16="http://schemas.microsoft.com/office/drawing/2014/main" id="{FC142386-DEDB-4088-90EC-5A0128446303}"/>
+              </a:ext>
+            </a:extLst>
+          </p:cNvPr>
+          <p:cNvSpPr>
+            <a:spLocks noGrp="1"/>
+          </p:cNvSpPr>
+          <p:nvPr>
+            <p:ph type="sldNum" sz="quarter" idx="11"/>
+          </p:nvPr>
+        </p:nvSpPr>
+        <p:spPr/>
+        <p:txBody>
+          <a:bodyPr/>
+          <a:lstStyle/>
+          <a:p>
+            <a:fld id="{DD253308-F9C5-4FCB-8415-6DEE77C16A35}" type="slidenum">
+              <a:rPr lang="en-US" smtClean="0"/>
+              <a:pPr/>
+              <a:t>10</a:t>
+            </a:fld>
+            <a:endParaRPr lang="en-US" dirty="0"/>
+          </a:p>
+        </p:txBody>
+      </p:sp>
       <p:pic>
         <p:nvPicPr>
-          <p:cNvPr id="4" name="Picture 3" descr="rq3_initial_trust.png"/>
+          <p:cNvPr id="215" name="Picture 214" descr="rq3_initial_trust.png"/>
           <p:cNvPicPr>
             <a:picLocks noChangeAspect="1"/>
           </p:cNvPicPr>
           <p:nvPr/>
         </p:nvPicPr>
         <p:blipFill>
-          <a:blip r:embed="rId2"/>
+          <a:blip r:embed="rId3"/>
           <a:stretch>
             <a:fillRect/>
           </a:stretch>
         </p:blipFill>
         <p:spPr>
           <a:xfrm>
-            <a:off x="975207" y="1645920"/>
-            <a:ext cx="10241280" cy="4800600"/>
+            <a:off x="91440" y="1645920"/>
+            <a:ext cx="12006072" cy="4800600"/>
           </a:xfrm>
           <a:prstGeom prst="rect">
             <a:avLst/>
           </a:prstGeom>
         </p:spPr>
       </p:pic>
-      <p:sp>
-        <p:nvSpPr>
-          <p:cNvPr id="5" name="TextBox 4"/>
-          <p:cNvSpPr txBox="1"/>
-          <p:nvPr/>
-        </p:nvSpPr>
-        <p:spPr>
-          <a:xfrm>
-            <a:off x="10774375" y="6473952"/>
-            <a:ext cx="777240" cy="292608"/>
-          </a:xfrm>
-          <a:prstGeom prst="rect">
-            <a:avLst/>
-          </a:prstGeom>
-          <a:noFill/>
-        </p:spPr>
-        <p:txBody>
-          <a:bodyPr wrap="none" lIns="0" rIns="0" tIns="0" bIns="0" anchor="ctr">
-            <a:spAutoFit/>
-          </a:bodyPr>
-          <a:lstStyle/>
-          <a:p>
-            <a:pPr algn="r"/>
-            <a:r>
-              <a:rPr sz="1100" b="1">
-                <a:solidFill>
-                  <a:srgbClr val="FFFFFF"/>
-                </a:solidFill>
-                <a:latin typeface="Arial"/>
-              </a:rPr>
-              <a:t>16 / 20</a:t>
-            </a:r>
-          </a:p>
-        </p:txBody>
-      </p:sp>
     </p:spTree>
   </p:cSld>
   <p:clrMapOvr>
@@ -12327,8 +12391,8 @@
 </p:sld>
 </file>
 
-<file path=ppt/slides/slide17.xml><?xml version="1.0" encoding="utf-8"?>
-<p:sld xmlns:a="http://schemas.openxmlformats.org/drawingml/2006/main" xmlns:p="http://schemas.openxmlformats.org/presentationml/2006/main" xmlns:r="http://schemas.openxmlformats.org/officeDocument/2006/relationships">
+<file path=ppt/slides/slide18.xml><?xml version="1.0" encoding="utf-8"?>
+<p:sld xmlns:a="http://schemas.openxmlformats.org/drawingml/2006/main" xmlns:r="http://schemas.openxmlformats.org/officeDocument/2006/relationships" xmlns:p="http://schemas.openxmlformats.org/presentationml/2006/main">
   <p:cSld>
     <p:spTree>
       <p:nvGrpSpPr>
@@ -12336,7 +12400,14 @@
         <p:cNvGrpSpPr/>
         <p:nvPr/>
       </p:nvGrpSpPr>
-      <p:grpSpPr/>
+      <p:grpSpPr>
+        <a:xfrm>
+          <a:off x="0" y="0"/>
+          <a:ext cx="0" cy="0"/>
+          <a:chOff x="0" y="0"/>
+          <a:chExt cx="0" cy="0"/>
+        </a:xfrm>
+      </p:grpSpPr>
       <p:sp>
         <p:nvSpPr>
           <p:cNvPr id="2" name="TextBox 1"/>
@@ -12346,7 +12417,7 @@
         <p:spPr>
           <a:xfrm>
             <a:off x="502920" y="320040"/>
-            <a:ext cx="11185855" cy="731520"/>
+            <a:ext cx="11185855" cy="492443"/>
           </a:xfrm>
           <a:prstGeom prst="rect">
             <a:avLst/>
@@ -12354,56 +12425,27 @@
           <a:noFill/>
         </p:spPr>
         <p:txBody>
-          <a:bodyPr wrap="square" anchor="t" lIns="0" rIns="0" tIns="0" bIns="0">
+          <a:bodyPr wrap="square" lIns="0" tIns="0" rIns="0" bIns="0" anchor="t">
             <a:spAutoFit/>
           </a:bodyPr>
           <a:lstStyle/>
           <a:p>
             <a:pPr algn="l"/>
             <a:r>
-              <a:rPr sz="3200" b="1" i="0">
+              <a:rPr lang="en-US" sz="3200" b="1" i="0" dirty="0">
                 <a:solidFill>
                   <a:srgbClr val="011F5B"/>
                 </a:solidFill>
                 <a:latin typeface="Arial"/>
               </a:rPr>
-              <a:t>Synthesis</a:t>
-            </a:r>
-          </a:p>
-        </p:txBody>
-      </p:sp>
-      <p:sp>
-        <p:nvSpPr>
-          <p:cNvPr id="3" name="TextBox 2"/>
-          <p:cNvSpPr txBox="1"/>
-          <p:nvPr/>
-        </p:nvSpPr>
-        <p:spPr>
-          <a:xfrm>
-            <a:off x="502920" y="1280160"/>
-            <a:ext cx="7315200" cy="1280160"/>
-          </a:xfrm>
-          <a:prstGeom prst="rect">
-            <a:avLst/>
-          </a:prstGeom>
-          <a:noFill/>
-        </p:spPr>
-        <p:txBody>
-          <a:bodyPr wrap="square" anchor="t" lIns="0" rIns="0" tIns="0" bIns="0">
-            <a:spAutoFit/>
-          </a:bodyPr>
-          <a:lstStyle/>
-          <a:p>
-            <a:pPr algn="l"/>
-            <a:r>
-              <a:rPr sz="2400" b="1" i="0">
-                <a:solidFill>
-                  <a:srgbClr val="011F5B"/>
-                </a:solidFill>
-                <a:latin typeface="Arial"/>
-              </a:rPr>
-              <a:t>The bias is real — but it shows up post-outcome, not pre-outcome.</a:t>
-            </a:r>
+              <a:t>Summary</a:t>
+            </a:r>
+            <a:endParaRPr sz="3200" b="1" i="0" dirty="0">
+              <a:solidFill>
+                <a:srgbClr val="011F5B"/>
+              </a:solidFill>
+              <a:latin typeface="Arial"/>
+            </a:endParaRPr>
           </a:p>
         </p:txBody>
       </p:sp>
@@ -12415,8 +12457,8 @@
         </p:nvSpPr>
         <p:spPr>
           <a:xfrm>
-            <a:off x="502920" y="2606040"/>
-            <a:ext cx="7315200" cy="3474720"/>
+            <a:off x="502920" y="1594203"/>
+            <a:ext cx="5074920" cy="2554545"/>
           </a:xfrm>
           <a:prstGeom prst="rect">
             <a:avLst/>
@@ -12435,13 +12477,31 @@
               </a:spcAft>
             </a:pPr>
             <a:r>
-              <a:rPr sz="1800" b="0">
+              <a:rPr sz="2400" b="0" dirty="0">
                 <a:solidFill>
                   <a:srgbClr val="111827"/>
                 </a:solidFill>
                 <a:latin typeface="Arial"/>
               </a:rPr>
-              <a:t>•  Men's endorsements move trust by Δ = +15.0</a:t>
+              <a:t>•  Men</a:t>
+            </a:r>
+            <a:r>
+              <a:rPr lang="en-US" sz="2400" b="0" dirty="0">
+                <a:solidFill>
+                  <a:srgbClr val="111827"/>
+                </a:solidFill>
+                <a:latin typeface="Arial"/>
+              </a:rPr>
+              <a:t>'</a:t>
+            </a:r>
+            <a:r>
+              <a:rPr sz="2400" b="0" dirty="0">
+                <a:solidFill>
+                  <a:srgbClr val="111827"/>
+                </a:solidFill>
+                <a:latin typeface="Arial"/>
+              </a:rPr>
+              <a:t>s endorsements move trust by Δ = +15.0</a:t>
             </a:r>
           </a:p>
           <a:p>
@@ -12451,7 +12511,7 @@
               </a:spcAft>
             </a:pPr>
             <a:r>
-              <a:rPr sz="1800" b="0">
+              <a:rPr sz="2400" b="0" dirty="0">
                 <a:solidFill>
                   <a:srgbClr val="111827"/>
                 </a:solidFill>
@@ -12467,7 +12527,7 @@
               </a:spcAft>
             </a:pPr>
             <a:r>
-              <a:rPr sz="1800" b="1">
+              <a:rPr sz="2400" b="1" dirty="0">
                 <a:solidFill>
                   <a:srgbClr val="111827"/>
                 </a:solidFill>
@@ -12483,7 +12543,7 @@
               </a:spcAft>
             </a:pPr>
             <a:r>
-              <a:rPr sz="1800" b="0">
+              <a:rPr sz="2400" b="0" dirty="0">
                 <a:solidFill>
                   <a:srgbClr val="111827"/>
                 </a:solidFill>
@@ -12498,112 +12558,69 @@
                 <a:spcPts val="1200"/>
               </a:spcAft>
             </a:pPr>
-            <a:r>
-              <a:rPr sz="1800" b="0">
-                <a:solidFill>
-                  <a:srgbClr val="111827"/>
-                </a:solidFill>
-                <a:latin typeface="Arial"/>
-              </a:rPr>
-              <a:t>•  Cohen's d for Gender × Outcome  ≈  0.34</a:t>
-            </a:r>
+            <a:endParaRPr sz="2400" b="0" dirty="0">
+              <a:solidFill>
+                <a:srgbClr val="111827"/>
+              </a:solidFill>
+              <a:latin typeface="Arial"/>
+            </a:endParaRPr>
+          </a:p>
+        </p:txBody>
+      </p:sp>
+      <p:sp>
+        <p:nvSpPr>
+          <p:cNvPr id="215" name="Slide Number Placeholder 3">
+            <a:extLst>
+              <a:ext uri="{FF2B5EF4-FFF2-40B4-BE49-F238E27FC236}">
+                <a16:creationId xmlns:a16="http://schemas.microsoft.com/office/drawing/2014/main" id="{E1D2B922-5A84-4186-A4F2-8EDED3FC5799}"/>
+              </a:ext>
+            </a:extLst>
+          </p:cNvPr>
+          <p:cNvSpPr>
+            <a:spLocks noGrp="1"/>
+          </p:cNvSpPr>
+          <p:nvPr>
+            <p:ph type="sldNum" sz="quarter" idx="11"/>
+          </p:nvPr>
+        </p:nvSpPr>
+        <p:spPr/>
+        <p:txBody>
+          <a:bodyPr/>
+          <a:lstStyle/>
+          <a:p>
+            <a:fld id="{DD253308-F9C5-4FCB-8415-6DEE77C16A35}" type="slidenum">
+              <a:rPr lang="en-US" smtClean="0"/>
+              <a:pPr/>
+              <a:t>10</a:t>
+            </a:fld>
+            <a:endParaRPr lang="en-US" dirty="0"/>
           </a:p>
         </p:txBody>
       </p:sp>
       <p:pic>
         <p:nvPicPr>
-          <p:cNvPr id="5" name="Picture 4" descr="synthesis_outcome_sensitivity.png"/>
+          <p:cNvPr id="216" name="Picture 215" descr="synthesis_outcome_sensitivity.png"/>
           <p:cNvPicPr>
             <a:picLocks noChangeAspect="1"/>
           </p:cNvPicPr>
           <p:nvPr/>
         </p:nvPicPr>
         <p:blipFill>
-          <a:blip r:embed="rId2"/>
+          <a:blip r:embed="rId3"/>
           <a:stretch>
             <a:fillRect/>
           </a:stretch>
         </p:blipFill>
         <p:spPr>
           <a:xfrm>
-            <a:off x="8092440" y="1417320"/>
-            <a:ext cx="4023360" cy="4023360"/>
+            <a:off x="5669280" y="1325880"/>
+            <a:ext cx="6400800" cy="5029200"/>
           </a:xfrm>
           <a:prstGeom prst="rect">
             <a:avLst/>
           </a:prstGeom>
         </p:spPr>
       </p:pic>
-      <p:sp>
-        <p:nvSpPr>
-          <p:cNvPr id="6" name="TextBox 5"/>
-          <p:cNvSpPr txBox="1"/>
-          <p:nvPr/>
-        </p:nvSpPr>
-        <p:spPr>
-          <a:xfrm>
-            <a:off x="502920" y="5989320"/>
-            <a:ext cx="11247120" cy="640080"/>
-          </a:xfrm>
-          <a:prstGeom prst="rect">
-            <a:avLst/>
-          </a:prstGeom>
-          <a:noFill/>
-        </p:spPr>
-        <p:txBody>
-          <a:bodyPr wrap="square" anchor="t" lIns="0" rIns="0" tIns="0" bIns="0">
-            <a:spAutoFit/>
-          </a:bodyPr>
-          <a:lstStyle/>
-          <a:p>
-            <a:pPr algn="ctr"/>
-            <a:r>
-              <a:rPr sz="1500" b="1" i="1">
-                <a:solidFill>
-                  <a:srgbClr val="990000"/>
-                </a:solidFill>
-                <a:latin typeface="Arial"/>
-              </a:rPr>
-              <a:t>Reframe: this is not 'women are punished more harshly.' It is 'men's endorsements get updated against more — in BOTH directions.'</a:t>
-            </a:r>
-          </a:p>
-        </p:txBody>
-      </p:sp>
-      <p:sp>
-        <p:nvSpPr>
-          <p:cNvPr id="7" name="TextBox 6"/>
-          <p:cNvSpPr txBox="1"/>
-          <p:nvPr/>
-        </p:nvSpPr>
-        <p:spPr>
-          <a:xfrm>
-            <a:off x="10774375" y="6473952"/>
-            <a:ext cx="777240" cy="292608"/>
-          </a:xfrm>
-          <a:prstGeom prst="rect">
-            <a:avLst/>
-          </a:prstGeom>
-          <a:noFill/>
-        </p:spPr>
-        <p:txBody>
-          <a:bodyPr wrap="none" lIns="0" rIns="0" tIns="0" bIns="0" anchor="ctr">
-            <a:spAutoFit/>
-          </a:bodyPr>
-          <a:lstStyle/>
-          <a:p>
-            <a:pPr algn="r"/>
-            <a:r>
-              <a:rPr sz="1100" b="1">
-                <a:solidFill>
-                  <a:srgbClr val="FFFFFF"/>
-                </a:solidFill>
-                <a:latin typeface="Arial"/>
-              </a:rPr>
-              <a:t>17 / 20</a:t>
-            </a:r>
-          </a:p>
-        </p:txBody>
-      </p:sp>
     </p:spTree>
   </p:cSld>
   <p:clrMapOvr>
@@ -12612,8 +12629,8 @@
 </p:sld>
 </file>
 
-<file path=ppt/slides/slide18.xml><?xml version="1.0" encoding="utf-8"?>
-<p:sld xmlns:a="http://schemas.openxmlformats.org/drawingml/2006/main" xmlns:p="http://schemas.openxmlformats.org/presentationml/2006/main" xmlns:r="http://schemas.openxmlformats.org/officeDocument/2006/relationships">
+<file path=ppt/slides/slide19.xml><?xml version="1.0" encoding="utf-8"?>
+<p:sld xmlns:a="http://schemas.openxmlformats.org/drawingml/2006/main" xmlns:r="http://schemas.openxmlformats.org/officeDocument/2006/relationships" xmlns:p="http://schemas.openxmlformats.org/presentationml/2006/main">
   <p:cSld>
     <p:spTree>
       <p:nvGrpSpPr>
@@ -12621,7 +12638,14 @@
         <p:cNvGrpSpPr/>
         <p:nvPr/>
       </p:nvGrpSpPr>
-      <p:grpSpPr/>
+      <p:grpSpPr>
+        <a:xfrm>
+          <a:off x="0" y="0"/>
+          <a:ext cx="0" cy="0"/>
+          <a:chOff x="0" y="0"/>
+          <a:chExt cx="0" cy="0"/>
+        </a:xfrm>
+      </p:grpSpPr>
       <p:sp>
         <p:nvSpPr>
           <p:cNvPr id="2" name="TextBox 1"/>
@@ -12631,7 +12655,7 @@
         <p:spPr>
           <a:xfrm>
             <a:off x="502920" y="320040"/>
-            <a:ext cx="11185855" cy="731520"/>
+            <a:ext cx="11185855" cy="492443"/>
           </a:xfrm>
           <a:prstGeom prst="rect">
             <a:avLst/>
@@ -12639,21 +12663,27 @@
           <a:noFill/>
         </p:spPr>
         <p:txBody>
-          <a:bodyPr wrap="square" anchor="t" lIns="0" rIns="0" tIns="0" bIns="0">
+          <a:bodyPr wrap="square" lIns="0" tIns="0" rIns="0" bIns="0" anchor="t">
             <a:spAutoFit/>
           </a:bodyPr>
           <a:lstStyle/>
           <a:p>
             <a:pPr algn="l"/>
             <a:r>
-              <a:rPr sz="3200" b="1" i="0">
+              <a:rPr lang="en-US" sz="3200" b="1" i="0" dirty="0">
                 <a:solidFill>
                   <a:srgbClr val="011F5B"/>
                 </a:solidFill>
                 <a:latin typeface="Arial"/>
               </a:rPr>
-              <a:t>Theoretical implications</a:t>
-            </a:r>
+              <a:t>Running story</a:t>
+            </a:r>
+            <a:endParaRPr sz="3200" b="1" i="0" dirty="0">
+              <a:solidFill>
+                <a:srgbClr val="011F5B"/>
+              </a:solidFill>
+              <a:latin typeface="Arial"/>
+            </a:endParaRPr>
           </a:p>
         </p:txBody>
       </p:sp>
@@ -12666,7 +12696,7 @@
         <p:spPr>
           <a:xfrm>
             <a:off x="502920" y="1417320"/>
-            <a:ext cx="11247120" cy="5029200"/>
+            <a:ext cx="11247120" cy="3760004"/>
           </a:xfrm>
           <a:prstGeom prst="rect">
             <a:avLst/>
@@ -12679,358 +12709,171 @@
           </a:bodyPr>
           <a:lstStyle/>
           <a:p>
-            <a:pPr algn="l">
+            <a:pPr marL="285750" indent="-285750" algn="l">
               <a:spcAft>
                 <a:spcPts val="1400"/>
               </a:spcAft>
+              <a:buFont typeface="Arial" panose="020B0604020202020204" pitchFamily="34" charset="0"/>
+              <a:buChar char="•"/>
             </a:pPr>
             <a:r>
-              <a:rPr sz="1800" b="1">
+              <a:rPr lang="en-US" dirty="0">
                 <a:solidFill>
                   <a:srgbClr val="111827"/>
                 </a:solidFill>
                 <a:latin typeface="Arial"/>
               </a:rPr>
-              <a:t>•  Endorser informativeness is gendered.</a:t>
-            </a:r>
-          </a:p>
-          <a:p>
-            <a:pPr algn="l">
+              <a:t>Running story:</a:t>
+            </a:r>
+          </a:p>
+          <a:p>
+            <a:pPr marL="742950" lvl="1" indent="-285750">
               <a:spcAft>
                 <a:spcPts val="1400"/>
               </a:spcAft>
+              <a:buFont typeface="Arial" panose="020B0604020202020204" pitchFamily="34" charset="0"/>
+              <a:buChar char="•"/>
             </a:pPr>
             <a:r>
-              <a:rPr sz="1800" b="0">
+              <a:rPr lang="en-US" b="0" dirty="0">
                 <a:solidFill>
                   <a:srgbClr val="111827"/>
                 </a:solidFill>
                 <a:latin typeface="Arial"/>
               </a:rPr>
-              <a:t>•  Audiences treat a single outcome as more diagnostic of a man's reliability than of a woman's.</a:t>
-            </a:r>
-          </a:p>
-          <a:p>
-            <a:pPr algn="l">
+              <a:t>Let’s assume sponsorship is stereotypically “male.”</a:t>
+            </a:r>
+          </a:p>
+          <a:p>
+            <a:pPr marL="1200150" lvl="2" indent="-285750">
               <a:spcAft>
                 <a:spcPts val="1400"/>
               </a:spcAft>
+              <a:buFont typeface="Arial" panose="020B0604020202020204" pitchFamily="34" charset="0"/>
+              <a:buChar char="•"/>
             </a:pPr>
             <a:r>
-              <a:rPr sz="1800" b="1">
+              <a:rPr lang="en-US" dirty="0">
                 <a:solidFill>
                   <a:srgbClr val="111827"/>
                 </a:solidFill>
                 <a:latin typeface="Arial"/>
               </a:rPr>
-              <a:t>•  This is not a 'taste-based' bias against women.</a:t>
-            </a:r>
-          </a:p>
-          <a:p>
-            <a:pPr algn="l">
+              <a:t>Men are updated in a roughly Bayesian manner. Successes push trust up, failures push it down, by similar magnitudes (it’s quite symmetrical for men). </a:t>
+            </a:r>
+          </a:p>
+          <a:p>
+            <a:pPr marL="1200150" lvl="2" indent="-285750">
               <a:spcAft>
                 <a:spcPts val="1400"/>
               </a:spcAft>
+              <a:buFont typeface="Arial" panose="020B0604020202020204" pitchFamily="34" charset="0"/>
+              <a:buChar char="•"/>
             </a:pPr>
             <a:r>
-              <a:rPr sz="1800" b="0">
+              <a:rPr lang="en-US" dirty="0">
                 <a:solidFill>
                   <a:srgbClr val="111827"/>
                 </a:solidFill>
                 <a:latin typeface="Arial"/>
               </a:rPr>
-              <a:t>•  Initial trust is symmetric.  The asymmetry arrives only after outcome feedback.</a:t>
-            </a:r>
-          </a:p>
-          <a:p>
-            <a:pPr algn="l">
+              <a:t>Women, however, are not prototypically seen as sponsors and therefore, we observe signal neglect. O</a:t>
+            </a:r>
+            <a:r>
+              <a:rPr lang="en-US" dirty="0">
+                <a:solidFill>
+                  <a:srgbClr val="111827"/>
+                </a:solidFill>
+              </a:rPr>
+              <a:t>utcomes barely move evaluator trust in either direction. We propose this is</a:t>
+            </a:r>
+            <a:r>
+              <a:rPr lang="en-US" b="0" dirty="0">
+                <a:solidFill>
+                  <a:srgbClr val="111827"/>
+                </a:solidFill>
+                <a:latin typeface="Arial"/>
+              </a:rPr>
+              <a:t> because audiences lack a rule for translating outcomes into competence about women since they are in a non-prototypical role.</a:t>
+            </a:r>
+          </a:p>
+          <a:p>
+            <a:pPr marL="1657350" lvl="3" indent="-285750">
               <a:spcAft>
                 <a:spcPts val="1400"/>
               </a:spcAft>
+              <a:buFont typeface="Arial" panose="020B0604020202020204" pitchFamily="34" charset="0"/>
+              <a:buChar char="•"/>
             </a:pPr>
             <a:r>
-              <a:rPr sz="1800" b="1">
+              <a:rPr lang="en-US" dirty="0">
                 <a:solidFill>
                   <a:srgbClr val="111827"/>
                 </a:solidFill>
                 <a:latin typeface="Arial"/>
               </a:rPr>
-              <a:t>•  Implications for sponsorship as a career-mobility lever.</a:t>
-            </a:r>
-          </a:p>
-          <a:p>
-            <a:pPr algn="l">
+              <a:t>Perhaps we would see our effects change as there are more “rounds.”</a:t>
+            </a:r>
+            <a:endParaRPr lang="en-US" b="0" dirty="0">
+              <a:solidFill>
+                <a:srgbClr val="111827"/>
+              </a:solidFill>
+              <a:latin typeface="Arial"/>
+            </a:endParaRPr>
+          </a:p>
+          <a:p>
+            <a:pPr marL="742950" lvl="1" indent="-285750">
               <a:spcAft>
                 <a:spcPts val="1400"/>
               </a:spcAft>
+              <a:buFont typeface="Arial" panose="020B0604020202020204" pitchFamily="34" charset="0"/>
+              <a:buChar char="•"/>
             </a:pPr>
             <a:r>
-              <a:rPr sz="1800" b="0">
+              <a:rPr lang="en-US" b="0" dirty="0">
                 <a:solidFill>
                   <a:srgbClr val="111827"/>
                 </a:solidFill>
                 <a:latin typeface="Arial"/>
               </a:rPr>
-              <a:t>•  If outcome learning is dampened for women sponsors, their reputational ROI per endorsement is structurally lower — even when they pick equally well.</a:t>
-            </a:r>
+              <a:t>Fairly different expectation from a lot of the other literature on double standards.</a:t>
+            </a:r>
+            <a:endParaRPr b="0" dirty="0">
+              <a:solidFill>
+                <a:srgbClr val="111827"/>
+              </a:solidFill>
+              <a:latin typeface="Arial"/>
+            </a:endParaRPr>
           </a:p>
         </p:txBody>
       </p:sp>
       <p:sp>
         <p:nvSpPr>
-          <p:cNvPr id="4" name="TextBox 3"/>
-          <p:cNvSpPr txBox="1"/>
-          <p:nvPr/>
+          <p:cNvPr id="216" name="Slide Number Placeholder 3">
+            <a:extLst>
+              <a:ext uri="{FF2B5EF4-FFF2-40B4-BE49-F238E27FC236}">
+                <a16:creationId xmlns:a16="http://schemas.microsoft.com/office/drawing/2014/main" id="{D660F081-DFF5-4F81-9684-C53659E3F2F8}"/>
+              </a:ext>
+            </a:extLst>
+          </p:cNvPr>
+          <p:cNvSpPr>
+            <a:spLocks noGrp="1"/>
+          </p:cNvSpPr>
+          <p:nvPr>
+            <p:ph type="sldNum" sz="quarter" idx="11"/>
+          </p:nvPr>
         </p:nvSpPr>
-        <p:spPr>
-          <a:xfrm>
-            <a:off x="10774375" y="6473952"/>
-            <a:ext cx="777240" cy="292608"/>
-          </a:xfrm>
-          <a:prstGeom prst="rect">
-            <a:avLst/>
-          </a:prstGeom>
-          <a:noFill/>
-        </p:spPr>
+        <p:spPr/>
         <p:txBody>
-          <a:bodyPr wrap="none" lIns="0" rIns="0" tIns="0" bIns="0" anchor="ctr">
-            <a:spAutoFit/>
-          </a:bodyPr>
+          <a:bodyPr/>
           <a:lstStyle/>
           <a:p>
-            <a:pPr algn="r"/>
-            <a:r>
-              <a:rPr sz="1100" b="1">
-                <a:solidFill>
-                  <a:srgbClr val="FFFFFF"/>
-                </a:solidFill>
-                <a:latin typeface="Arial"/>
-              </a:rPr>
-              <a:t>18 / 20</a:t>
-            </a:r>
-          </a:p>
-        </p:txBody>
-      </p:sp>
-    </p:spTree>
-  </p:cSld>
-  <p:clrMapOvr>
-    <a:masterClrMapping/>
-  </p:clrMapOvr>
-</p:sld>
-</file>
-
-<file path=ppt/slides/slide19.xml><?xml version="1.0" encoding="utf-8"?>
-<p:sld xmlns:a="http://schemas.openxmlformats.org/drawingml/2006/main" xmlns:p="http://schemas.openxmlformats.org/presentationml/2006/main" xmlns:r="http://schemas.openxmlformats.org/officeDocument/2006/relationships">
-  <p:cSld>
-    <p:spTree>
-      <p:nvGrpSpPr>
-        <p:cNvPr id="1" name=""/>
-        <p:cNvGrpSpPr/>
-        <p:nvPr/>
-      </p:nvGrpSpPr>
-      <p:grpSpPr/>
-      <p:sp>
-        <p:nvSpPr>
-          <p:cNvPr id="2" name="TextBox 1"/>
-          <p:cNvSpPr txBox="1"/>
-          <p:nvPr/>
-        </p:nvSpPr>
-        <p:spPr>
-          <a:xfrm>
-            <a:off x="502920" y="320040"/>
-            <a:ext cx="11185855" cy="731520"/>
-          </a:xfrm>
-          <a:prstGeom prst="rect">
-            <a:avLst/>
-          </a:prstGeom>
-          <a:noFill/>
-        </p:spPr>
-        <p:txBody>
-          <a:bodyPr wrap="square" anchor="t" lIns="0" rIns="0" tIns="0" bIns="0">
-            <a:spAutoFit/>
-          </a:bodyPr>
-          <a:lstStyle/>
-          <a:p>
-            <a:pPr algn="l"/>
-            <a:r>
-              <a:rPr sz="3200" b="1" i="0">
-                <a:solidFill>
-                  <a:srgbClr val="011F5B"/>
-                </a:solidFill>
-                <a:latin typeface="Arial"/>
-              </a:rPr>
-              <a:t>Limitations and next steps</a:t>
-            </a:r>
-          </a:p>
-        </p:txBody>
-      </p:sp>
-      <p:sp>
-        <p:nvSpPr>
-          <p:cNvPr id="3" name="TextBox 2"/>
-          <p:cNvSpPr txBox="1"/>
-          <p:nvPr/>
-        </p:nvSpPr>
-        <p:spPr>
-          <a:xfrm>
-            <a:off x="502920" y="1417320"/>
-            <a:ext cx="11247120" cy="5029200"/>
-          </a:xfrm>
-          <a:prstGeom prst="rect">
-            <a:avLst/>
-          </a:prstGeom>
-          <a:noFill/>
-        </p:spPr>
-        <p:txBody>
-          <a:bodyPr wrap="square" lIns="0" rIns="0">
-            <a:spAutoFit/>
-          </a:bodyPr>
-          <a:lstStyle/>
-          <a:p>
-            <a:pPr algn="l">
-              <a:spcAft>
-                <a:spcPts val="1200"/>
-              </a:spcAft>
-            </a:pPr>
-            <a:r>
-              <a:rPr sz="1700" b="0">
-                <a:solidFill>
-                  <a:srgbClr val="111827"/>
-                </a:solidFill>
-                <a:latin typeface="Arial"/>
-              </a:rPr>
-              <a:t>•  Single-outcome design — multi-trial accumulation may differ</a:t>
-            </a:r>
-          </a:p>
-          <a:p>
-            <a:pPr algn="l">
-              <a:spcAft>
-                <a:spcPts val="1200"/>
-              </a:spcAft>
-            </a:pPr>
-            <a:r>
-              <a:rPr sz="1700" b="0">
-                <a:solidFill>
-                  <a:srgbClr val="111827"/>
-                </a:solidFill>
-                <a:latin typeface="Arial"/>
-              </a:rPr>
-              <a:t>•  Prolific sample limits generalizability to organizational contexts</a:t>
-            </a:r>
-          </a:p>
-          <a:p>
-            <a:pPr algn="l">
-              <a:spcAft>
-                <a:spcPts val="1200"/>
-              </a:spcAft>
-            </a:pPr>
-            <a:r>
-              <a:rPr sz="1700" b="0">
-                <a:solidFill>
-                  <a:srgbClr val="111827"/>
-                </a:solidFill>
-                <a:latin typeface="Arial"/>
-              </a:rPr>
-              <a:t>•  Endorsement strength was rated by sponsors, not held to a single calibration</a:t>
-            </a:r>
-          </a:p>
-          <a:p>
-            <a:pPr algn="l">
-              <a:spcAft>
-                <a:spcPts val="1200"/>
-              </a:spcAft>
-            </a:pPr>
-            <a:r>
-              <a:rPr sz="1700" b="1">
-                <a:solidFill>
-                  <a:srgbClr val="111827"/>
-                </a:solidFill>
-                <a:latin typeface="Arial"/>
-              </a:rPr>
-              <a:t>•  Next:</a:t>
-            </a:r>
-          </a:p>
-          <a:p>
-            <a:pPr algn="l">
-              <a:spcAft>
-                <a:spcPts val="1200"/>
-              </a:spcAft>
-            </a:pPr>
-            <a:r>
-              <a:rPr sz="1700" b="0">
-                <a:solidFill>
-                  <a:srgbClr val="111827"/>
-                </a:solidFill>
-                <a:latin typeface="Arial"/>
-              </a:rPr>
-              <a:t>•  Pre-registered confirmatory study with N ≈ 1,200 (powered for the 3-way interaction)</a:t>
-            </a:r>
-          </a:p>
-          <a:p>
-            <a:pPr algn="l">
-              <a:spcAft>
-                <a:spcPts val="1200"/>
-              </a:spcAft>
-            </a:pPr>
-            <a:r>
-              <a:rPr sz="1700" b="0">
-                <a:solidFill>
-                  <a:srgbClr val="111827"/>
-                </a:solidFill>
-                <a:latin typeface="Arial"/>
-              </a:rPr>
-              <a:t>•  Field replication: real LinkedIn-style endorsements from professional reviewers</a:t>
-            </a:r>
-          </a:p>
-          <a:p>
-            <a:pPr algn="l">
-              <a:spcAft>
-                <a:spcPts val="1200"/>
-              </a:spcAft>
-            </a:pPr>
-            <a:r>
-              <a:rPr sz="1700" b="0">
-                <a:solidFill>
-                  <a:srgbClr val="111827"/>
-                </a:solidFill>
-                <a:latin typeface="Arial"/>
-              </a:rPr>
-              <a:t>•  Mechanism: ask evaluators to attribute success/failure to skill vs. luck and test mediation</a:t>
-            </a:r>
-          </a:p>
-        </p:txBody>
-      </p:sp>
-      <p:sp>
-        <p:nvSpPr>
-          <p:cNvPr id="4" name="TextBox 3"/>
-          <p:cNvSpPr txBox="1"/>
-          <p:nvPr/>
-        </p:nvSpPr>
-        <p:spPr>
-          <a:xfrm>
-            <a:off x="10774375" y="6473952"/>
-            <a:ext cx="777240" cy="292608"/>
-          </a:xfrm>
-          <a:prstGeom prst="rect">
-            <a:avLst/>
-          </a:prstGeom>
-          <a:noFill/>
-        </p:spPr>
-        <p:txBody>
-          <a:bodyPr wrap="none" lIns="0" rIns="0" tIns="0" bIns="0" anchor="ctr">
-            <a:spAutoFit/>
-          </a:bodyPr>
-          <a:lstStyle/>
-          <a:p>
-            <a:pPr algn="r"/>
-            <a:r>
-              <a:rPr sz="1100" b="1">
-                <a:solidFill>
-                  <a:srgbClr val="FFFFFF"/>
-                </a:solidFill>
-                <a:latin typeface="Arial"/>
-              </a:rPr>
-              <a:t>19 / 20</a:t>
-            </a:r>
+            <a:fld id="{DD253308-F9C5-4FCB-8415-6DEE77C16A35}" type="slidenum">
+              <a:rPr lang="en-US" smtClean="0"/>
+              <a:pPr/>
+              <a:t>10</a:t>
+            </a:fld>
+            <a:endParaRPr lang="en-US" dirty="0"/>
           </a:p>
         </p:txBody>
       </p:sp>
@@ -13043,7 +12886,7 @@
 </file>
 
 <file path=ppt/slides/slide2.xml><?xml version="1.0" encoding="utf-8"?>
-<p:sld xmlns:a="http://schemas.openxmlformats.org/drawingml/2006/main" xmlns:p="http://schemas.openxmlformats.org/presentationml/2006/main" xmlns:r="http://schemas.openxmlformats.org/officeDocument/2006/relationships">
+<p:sld xmlns:a="http://schemas.openxmlformats.org/drawingml/2006/main" xmlns:r="http://schemas.openxmlformats.org/officeDocument/2006/relationships" xmlns:p="http://schemas.openxmlformats.org/presentationml/2006/main">
   <p:cSld>
     <p:bg>
       <p:bgPr>
@@ -13055,49 +12898,33 @@
     </p:bg>
     <p:spTree>
       <p:nvGrpSpPr>
-        <p:cNvPr id="1" name=""/>
+        <p:cNvPr id="1" name="">
+          <a:extLst>
+            <a:ext uri="{FF2B5EF4-FFF2-40B4-BE49-F238E27FC236}">
+              <a16:creationId xmlns:a16="http://schemas.microsoft.com/office/drawing/2014/main" id="{DC7EE579-ACE7-BF23-19A1-3C427898D93F}"/>
+            </a:ext>
+          </a:extLst>
+        </p:cNvPr>
         <p:cNvGrpSpPr/>
         <p:nvPr/>
       </p:nvGrpSpPr>
-      <p:grpSpPr/>
+      <p:grpSpPr>
+        <a:xfrm>
+          <a:off x="0" y="0"/>
+          <a:ext cx="0" cy="0"/>
+          <a:chOff x="0" y="0"/>
+          <a:chExt cx="0" cy="0"/>
+        </a:xfrm>
+      </p:grpSpPr>
       <p:sp>
         <p:nvSpPr>
-          <p:cNvPr id="2" name="TextBox 1"/>
-          <p:cNvSpPr txBox="1"/>
-          <p:nvPr/>
-        </p:nvSpPr>
-        <p:spPr>
-          <a:xfrm>
-            <a:off x="502920" y="411480"/>
-            <a:ext cx="11247120" cy="365760"/>
-          </a:xfrm>
-          <a:prstGeom prst="rect">
-            <a:avLst/>
-          </a:prstGeom>
-          <a:noFill/>
-        </p:spPr>
-        <p:txBody>
-          <a:bodyPr wrap="square" anchor="t" lIns="0" rIns="0" tIns="0" bIns="0">
-            <a:spAutoFit/>
-          </a:bodyPr>
-          <a:lstStyle/>
-          <a:p>
-            <a:pPr algn="ctr"/>
-            <a:r>
-              <a:rPr sz="1400" b="1" i="0">
-                <a:solidFill>
-                  <a:srgbClr val="6B7280"/>
-                </a:solidFill>
-                <a:latin typeface="Arial"/>
-              </a:rPr>
-              <a:t>AN EXAMPLE TO SET UP TODAY'S QUESTION</a:t>
-            </a:r>
-          </a:p>
-        </p:txBody>
-      </p:sp>
-      <p:sp>
-        <p:nvSpPr>
-          <p:cNvPr id="3" name="Rounded Rectangle 2"/>
+          <p:cNvPr id="3" name="Rounded Rectangle 2">
+            <a:extLst>
+              <a:ext uri="{FF2B5EF4-FFF2-40B4-BE49-F238E27FC236}">
+                <a16:creationId xmlns:a16="http://schemas.microsoft.com/office/drawing/2014/main" id="{AC6BC92A-AEC1-70AE-A193-9C42C583FB03}"/>
+              </a:ext>
+            </a:extLst>
+          </p:cNvPr>
           <p:cNvSpPr/>
           <p:nvPr/>
         </p:nvSpPr>
@@ -13135,12 +12962,20 @@
         <p:txBody>
           <a:bodyPr rtlCol="0" anchor="ctr"/>
           <a:lstStyle/>
-          <a:p/>
+          <a:p>
+            <a:endParaRPr/>
+          </a:p>
         </p:txBody>
       </p:sp>
       <p:sp>
         <p:nvSpPr>
-          <p:cNvPr id="4" name="Oval 3"/>
+          <p:cNvPr id="4" name="Oval 3">
+            <a:extLst>
+              <a:ext uri="{FF2B5EF4-FFF2-40B4-BE49-F238E27FC236}">
+                <a16:creationId xmlns:a16="http://schemas.microsoft.com/office/drawing/2014/main" id="{74DC7079-C758-2375-4F60-07B037124CF4}"/>
+              </a:ext>
+            </a:extLst>
+          </p:cNvPr>
           <p:cNvSpPr/>
           <p:nvPr/>
         </p:nvSpPr>
@@ -13174,12 +13009,12 @@
           </a:fontRef>
         </p:style>
         <p:txBody>
-          <a:bodyPr rtlCol="0" anchor="ctr" lIns="0" rIns="0" tIns="0" bIns="0"/>
+          <a:bodyPr lIns="0" tIns="0" rIns="0" bIns="0" rtlCol="0" anchor="ctr"/>
           <a:lstStyle/>
           <a:p>
             <a:pPr algn="ctr"/>
             <a:r>
-              <a:rPr sz="3800" b="1">
+              <a:rPr sz="3800" b="1" dirty="0">
                 <a:solidFill>
                   <a:srgbClr val="FFFFFF"/>
                 </a:solidFill>
@@ -13192,7 +13027,13 @@
       </p:sp>
       <p:sp>
         <p:nvSpPr>
-          <p:cNvPr id="5" name="TextBox 4"/>
+          <p:cNvPr id="5" name="TextBox 4">
+            <a:extLst>
+              <a:ext uri="{FF2B5EF4-FFF2-40B4-BE49-F238E27FC236}">
+                <a16:creationId xmlns:a16="http://schemas.microsoft.com/office/drawing/2014/main" id="{5B3D6397-20F7-3BA8-A32E-5575EEE1BD14}"/>
+              </a:ext>
+            </a:extLst>
+          </p:cNvPr>
           <p:cNvSpPr txBox="1"/>
           <p:nvPr/>
         </p:nvSpPr>
@@ -13207,14 +13048,14 @@
           <a:noFill/>
         </p:spPr>
         <p:txBody>
-          <a:bodyPr wrap="square" anchor="t" lIns="0" rIns="0" tIns="0" bIns="0">
+          <a:bodyPr wrap="square" lIns="0" tIns="0" rIns="0" bIns="0" anchor="t">
             <a:spAutoFit/>
           </a:bodyPr>
           <a:lstStyle/>
           <a:p>
             <a:pPr algn="ctr"/>
             <a:r>
-              <a:rPr sz="2400" b="1" i="0">
+              <a:rPr sz="2400" b="1" i="0" dirty="0">
                 <a:solidFill>
                   <a:srgbClr val="111827"/>
                 </a:solidFill>
@@ -13227,7 +13068,13 @@
       </p:sp>
       <p:sp>
         <p:nvSpPr>
-          <p:cNvPr id="6" name="TextBox 5"/>
+          <p:cNvPr id="6" name="TextBox 5">
+            <a:extLst>
+              <a:ext uri="{FF2B5EF4-FFF2-40B4-BE49-F238E27FC236}">
+                <a16:creationId xmlns:a16="http://schemas.microsoft.com/office/drawing/2014/main" id="{4D889C76-EACC-61ED-7338-1E51C7289494}"/>
+              </a:ext>
+            </a:extLst>
+          </p:cNvPr>
           <p:cNvSpPr txBox="1"/>
           <p:nvPr/>
         </p:nvSpPr>
@@ -13242,14 +13089,14 @@
           <a:noFill/>
         </p:spPr>
         <p:txBody>
-          <a:bodyPr wrap="square" anchor="t" lIns="0" rIns="0" tIns="0" bIns="0">
+          <a:bodyPr wrap="square" lIns="0" tIns="0" rIns="0" bIns="0" anchor="t">
             <a:spAutoFit/>
           </a:bodyPr>
           <a:lstStyle/>
           <a:p>
             <a:pPr algn="ctr"/>
             <a:r>
-              <a:rPr sz="1400" b="0" i="1">
+              <a:rPr sz="1400" b="0" i="1" dirty="0">
                 <a:solidFill>
                   <a:srgbClr val="6B7280"/>
                 </a:solidFill>
@@ -13262,7 +13109,13 @@
       </p:sp>
       <p:sp>
         <p:nvSpPr>
-          <p:cNvPr id="7" name="Rectangle 6"/>
+          <p:cNvPr id="7" name="Rectangle 6">
+            <a:extLst>
+              <a:ext uri="{FF2B5EF4-FFF2-40B4-BE49-F238E27FC236}">
+                <a16:creationId xmlns:a16="http://schemas.microsoft.com/office/drawing/2014/main" id="{3446DBB1-A285-AADD-830F-AEA496311BBF}"/>
+              </a:ext>
+            </a:extLst>
+          </p:cNvPr>
           <p:cNvSpPr/>
           <p:nvPr/>
         </p:nvSpPr>
@@ -13300,12 +13153,19 @@
           <a:lstStyle/>
           <a:p>
             <a:pPr algn="ctr"/>
+            <a:endParaRPr/>
           </a:p>
         </p:txBody>
       </p:sp>
       <p:sp>
         <p:nvSpPr>
-          <p:cNvPr id="8" name="TextBox 7"/>
+          <p:cNvPr id="8" name="TextBox 7">
+            <a:extLst>
+              <a:ext uri="{FF2B5EF4-FFF2-40B4-BE49-F238E27FC236}">
+                <a16:creationId xmlns:a16="http://schemas.microsoft.com/office/drawing/2014/main" id="{E764E00C-BCBD-09A9-E3ED-BD988DE0966A}"/>
+              </a:ext>
+            </a:extLst>
+          </p:cNvPr>
           <p:cNvSpPr txBox="1"/>
           <p:nvPr/>
         </p:nvSpPr>
@@ -13320,14 +13180,14 @@
           <a:noFill/>
         </p:spPr>
         <p:txBody>
-          <a:bodyPr wrap="square" anchor="t" lIns="0" rIns="0" tIns="0" bIns="0">
+          <a:bodyPr wrap="square" lIns="0" tIns="0" rIns="0" bIns="0" anchor="t">
             <a:spAutoFit/>
           </a:bodyPr>
           <a:lstStyle/>
           <a:p>
             <a:pPr algn="ctr"/>
             <a:r>
-              <a:rPr sz="1400" b="1" i="0">
+              <a:rPr sz="1400" b="1" i="0" dirty="0">
                 <a:solidFill>
                   <a:srgbClr val="6B7280"/>
                 </a:solidFill>
@@ -13340,7 +13200,13 @@
       </p:sp>
       <p:sp>
         <p:nvSpPr>
-          <p:cNvPr id="9" name="TextBox 8"/>
+          <p:cNvPr id="9" name="TextBox 8">
+            <a:extLst>
+              <a:ext uri="{FF2B5EF4-FFF2-40B4-BE49-F238E27FC236}">
+                <a16:creationId xmlns:a16="http://schemas.microsoft.com/office/drawing/2014/main" id="{DE07F396-7CAC-DD5B-BECC-B62EF0C692FD}"/>
+              </a:ext>
+            </a:extLst>
+          </p:cNvPr>
           <p:cNvSpPr txBox="1"/>
           <p:nvPr/>
         </p:nvSpPr>
@@ -13355,14 +13221,14 @@
           <a:noFill/>
         </p:spPr>
         <p:txBody>
-          <a:bodyPr wrap="square" anchor="t" lIns="0" rIns="0" tIns="0" bIns="0">
+          <a:bodyPr wrap="square" lIns="0" tIns="0" rIns="0" bIns="0" anchor="t">
             <a:spAutoFit/>
           </a:bodyPr>
           <a:lstStyle/>
           <a:p>
             <a:pPr algn="ctr"/>
             <a:r>
-              <a:rPr sz="3400" b="1" i="0">
+              <a:rPr sz="3400" b="1" i="0" dirty="0">
                 <a:solidFill>
                   <a:srgbClr val="011F5B"/>
                 </a:solidFill>
@@ -13375,13 +13241,19 @@
       </p:sp>
       <p:sp>
         <p:nvSpPr>
-          <p:cNvPr id="10" name="TextBox 9"/>
+          <p:cNvPr id="10" name="TextBox 9">
+            <a:extLst>
+              <a:ext uri="{FF2B5EF4-FFF2-40B4-BE49-F238E27FC236}">
+                <a16:creationId xmlns:a16="http://schemas.microsoft.com/office/drawing/2014/main" id="{483D2E64-D960-E69E-0A08-07D690F49C8F}"/>
+              </a:ext>
+            </a:extLst>
+          </p:cNvPr>
           <p:cNvSpPr txBox="1"/>
           <p:nvPr/>
         </p:nvSpPr>
         <p:spPr>
           <a:xfrm>
-            <a:off x="1089507" y="4160520"/>
+            <a:off x="1089813" y="3954780"/>
             <a:ext cx="2217420" cy="411480"/>
           </a:xfrm>
           <a:prstGeom prst="rect">
@@ -13390,14 +13262,14 @@
           <a:noFill/>
         </p:spPr>
         <p:txBody>
-          <a:bodyPr wrap="none" lIns="0" rIns="0" tIns="0" bIns="0">
+          <a:bodyPr wrap="none" lIns="0" tIns="0" rIns="0" bIns="0">
             <a:spAutoFit/>
           </a:bodyPr>
           <a:lstStyle/>
           <a:p>
             <a:pPr algn="ctr"/>
             <a:r>
-              <a:rPr sz="2000" b="1">
+              <a:rPr sz="2000" b="1" dirty="0">
                 <a:solidFill>
                   <a:srgbClr val="047A4B"/>
                 </a:solidFill>
@@ -13406,7 +13278,7 @@
               <a:t>✓  </a:t>
             </a:r>
             <a:r>
-              <a:rPr sz="1500">
+              <a:rPr sz="1500" dirty="0">
                 <a:solidFill>
                   <a:srgbClr val="111827"/>
                 </a:solidFill>
@@ -13422,7 +13294,7 @@
               </a:spcBef>
             </a:pPr>
             <a:r>
-              <a:rPr sz="2200" b="1">
+              <a:rPr sz="2200" b="1" dirty="0">
                 <a:solidFill>
                   <a:srgbClr val="047A4B"/>
                 </a:solidFill>
@@ -13435,13 +13307,19 @@
       </p:sp>
       <p:sp>
         <p:nvSpPr>
-          <p:cNvPr id="11" name="TextBox 10"/>
+          <p:cNvPr id="11" name="TextBox 10">
+            <a:extLst>
+              <a:ext uri="{FF2B5EF4-FFF2-40B4-BE49-F238E27FC236}">
+                <a16:creationId xmlns:a16="http://schemas.microsoft.com/office/drawing/2014/main" id="{1EA746F9-7741-B077-32CE-0C5F503A700F}"/>
+              </a:ext>
+            </a:extLst>
+          </p:cNvPr>
           <p:cNvSpPr txBox="1"/>
           <p:nvPr/>
         </p:nvSpPr>
         <p:spPr>
           <a:xfrm>
-            <a:off x="3306927" y="4160520"/>
+            <a:off x="3306621" y="3897630"/>
             <a:ext cx="2217420" cy="411480"/>
           </a:xfrm>
           <a:prstGeom prst="rect">
@@ -13450,14 +13328,14 @@
           <a:noFill/>
         </p:spPr>
         <p:txBody>
-          <a:bodyPr wrap="none" lIns="0" rIns="0" tIns="0" bIns="0">
+          <a:bodyPr wrap="none" lIns="0" tIns="0" rIns="0" bIns="0">
             <a:spAutoFit/>
           </a:bodyPr>
           <a:lstStyle/>
           <a:p>
             <a:pPr algn="ctr"/>
             <a:r>
-              <a:rPr sz="2000" b="1">
+              <a:rPr sz="2000" b="1" dirty="0">
                 <a:solidFill>
                   <a:srgbClr val="C81E1E"/>
                 </a:solidFill>
@@ -13466,7 +13344,7 @@
               <a:t>✗  </a:t>
             </a:r>
             <a:r>
-              <a:rPr sz="1500">
+              <a:rPr sz="1500" dirty="0">
                 <a:solidFill>
                   <a:srgbClr val="111827"/>
                 </a:solidFill>
@@ -13482,7 +13360,7 @@
               </a:spcBef>
             </a:pPr>
             <a:r>
-              <a:rPr sz="2200" b="1">
+              <a:rPr sz="2200" b="1" dirty="0">
                 <a:solidFill>
                   <a:srgbClr val="C81E1E"/>
                 </a:solidFill>
@@ -13495,7 +13373,13 @@
       </p:sp>
       <p:sp>
         <p:nvSpPr>
-          <p:cNvPr id="12" name="Rounded Rectangle 11"/>
+          <p:cNvPr id="12" name="Rounded Rectangle 11">
+            <a:extLst>
+              <a:ext uri="{FF2B5EF4-FFF2-40B4-BE49-F238E27FC236}">
+                <a16:creationId xmlns:a16="http://schemas.microsoft.com/office/drawing/2014/main" id="{03073A4C-4026-FCE6-237B-A73CC89D64F5}"/>
+              </a:ext>
+            </a:extLst>
+          </p:cNvPr>
           <p:cNvSpPr/>
           <p:nvPr/>
         </p:nvSpPr>
@@ -13533,12 +13417,20 @@
         <p:txBody>
           <a:bodyPr rtlCol="0" anchor="ctr"/>
           <a:lstStyle/>
-          <a:p/>
+          <a:p>
+            <a:endParaRPr/>
+          </a:p>
         </p:txBody>
       </p:sp>
       <p:sp>
         <p:nvSpPr>
-          <p:cNvPr id="13" name="Oval 12"/>
+          <p:cNvPr id="13" name="Oval 12">
+            <a:extLst>
+              <a:ext uri="{FF2B5EF4-FFF2-40B4-BE49-F238E27FC236}">
+                <a16:creationId xmlns:a16="http://schemas.microsoft.com/office/drawing/2014/main" id="{D56C073E-B275-A044-A60C-50177868D8E3}"/>
+              </a:ext>
+            </a:extLst>
+          </p:cNvPr>
           <p:cNvSpPr/>
           <p:nvPr/>
         </p:nvSpPr>
@@ -13572,7 +13464,7 @@
           </a:fontRef>
         </p:style>
         <p:txBody>
-          <a:bodyPr rtlCol="0" anchor="ctr" lIns="0" rIns="0" tIns="0" bIns="0"/>
+          <a:bodyPr lIns="0" tIns="0" rIns="0" bIns="0" rtlCol="0" anchor="ctr"/>
           <a:lstStyle/>
           <a:p>
             <a:pPr algn="ctr"/>
@@ -13590,7 +13482,13 @@
       </p:sp>
       <p:sp>
         <p:nvSpPr>
-          <p:cNvPr id="14" name="TextBox 13"/>
+          <p:cNvPr id="14" name="TextBox 13">
+            <a:extLst>
+              <a:ext uri="{FF2B5EF4-FFF2-40B4-BE49-F238E27FC236}">
+                <a16:creationId xmlns:a16="http://schemas.microsoft.com/office/drawing/2014/main" id="{AC84D6CF-8C15-74BB-ACE4-E699420F412E}"/>
+              </a:ext>
+            </a:extLst>
+          </p:cNvPr>
           <p:cNvSpPr txBox="1"/>
           <p:nvPr/>
         </p:nvSpPr>
@@ -13605,7 +13503,7 @@
           <a:noFill/>
         </p:spPr>
         <p:txBody>
-          <a:bodyPr wrap="square" anchor="t" lIns="0" rIns="0" tIns="0" bIns="0">
+          <a:bodyPr wrap="square" lIns="0" tIns="0" rIns="0" bIns="0" anchor="t">
             <a:spAutoFit/>
           </a:bodyPr>
           <a:lstStyle/>
@@ -13625,7 +13523,13 @@
       </p:sp>
       <p:sp>
         <p:nvSpPr>
-          <p:cNvPr id="15" name="TextBox 14"/>
+          <p:cNvPr id="15" name="TextBox 14">
+            <a:extLst>
+              <a:ext uri="{FF2B5EF4-FFF2-40B4-BE49-F238E27FC236}">
+                <a16:creationId xmlns:a16="http://schemas.microsoft.com/office/drawing/2014/main" id="{0BF3BD6D-3F32-F346-F95E-427763D358EA}"/>
+              </a:ext>
+            </a:extLst>
+          </p:cNvPr>
           <p:cNvSpPr txBox="1"/>
           <p:nvPr/>
         </p:nvSpPr>
@@ -13640,7 +13544,7 @@
           <a:noFill/>
         </p:spPr>
         <p:txBody>
-          <a:bodyPr wrap="square" anchor="t" lIns="0" rIns="0" tIns="0" bIns="0">
+          <a:bodyPr wrap="square" lIns="0" tIns="0" rIns="0" bIns="0" anchor="t">
             <a:spAutoFit/>
           </a:bodyPr>
           <a:lstStyle/>
@@ -13660,7 +13564,13 @@
       </p:sp>
       <p:sp>
         <p:nvSpPr>
-          <p:cNvPr id="16" name="Rectangle 15"/>
+          <p:cNvPr id="16" name="Rectangle 15">
+            <a:extLst>
+              <a:ext uri="{FF2B5EF4-FFF2-40B4-BE49-F238E27FC236}">
+                <a16:creationId xmlns:a16="http://schemas.microsoft.com/office/drawing/2014/main" id="{BB221F54-7AB5-49F6-98A4-DD1DB55A8A12}"/>
+              </a:ext>
+            </a:extLst>
+          </p:cNvPr>
           <p:cNvSpPr/>
           <p:nvPr/>
         </p:nvSpPr>
@@ -13698,12 +13608,19 @@
           <a:lstStyle/>
           <a:p>
             <a:pPr algn="ctr"/>
+            <a:endParaRPr/>
           </a:p>
         </p:txBody>
       </p:sp>
       <p:sp>
         <p:nvSpPr>
-          <p:cNvPr id="17" name="TextBox 16"/>
+          <p:cNvPr id="17" name="TextBox 16">
+            <a:extLst>
+              <a:ext uri="{FF2B5EF4-FFF2-40B4-BE49-F238E27FC236}">
+                <a16:creationId xmlns:a16="http://schemas.microsoft.com/office/drawing/2014/main" id="{DFC70B4D-CFBC-477F-9173-E950BEF283DF}"/>
+              </a:ext>
+            </a:extLst>
+          </p:cNvPr>
           <p:cNvSpPr txBox="1"/>
           <p:nvPr/>
         </p:nvSpPr>
@@ -13718,7 +13635,7 @@
           <a:noFill/>
         </p:spPr>
         <p:txBody>
-          <a:bodyPr wrap="square" anchor="t" lIns="0" rIns="0" tIns="0" bIns="0">
+          <a:bodyPr wrap="square" lIns="0" tIns="0" rIns="0" bIns="0" anchor="t">
             <a:spAutoFit/>
           </a:bodyPr>
           <a:lstStyle/>
@@ -13738,7 +13655,13 @@
       </p:sp>
       <p:sp>
         <p:nvSpPr>
-          <p:cNvPr id="18" name="TextBox 17"/>
+          <p:cNvPr id="18" name="TextBox 17">
+            <a:extLst>
+              <a:ext uri="{FF2B5EF4-FFF2-40B4-BE49-F238E27FC236}">
+                <a16:creationId xmlns:a16="http://schemas.microsoft.com/office/drawing/2014/main" id="{719E73EA-2C43-99BA-8DA5-C45F84E671A1}"/>
+              </a:ext>
+            </a:extLst>
+          </p:cNvPr>
           <p:cNvSpPr txBox="1"/>
           <p:nvPr/>
         </p:nvSpPr>
@@ -13753,7 +13676,7 @@
           <a:noFill/>
         </p:spPr>
         <p:txBody>
-          <a:bodyPr wrap="square" anchor="t" lIns="0" rIns="0" tIns="0" bIns="0">
+          <a:bodyPr wrap="square" lIns="0" tIns="0" rIns="0" bIns="0" anchor="t">
             <a:spAutoFit/>
           </a:bodyPr>
           <a:lstStyle/>
@@ -13773,13 +13696,19 @@
       </p:sp>
       <p:sp>
         <p:nvSpPr>
-          <p:cNvPr id="19" name="TextBox 18"/>
+          <p:cNvPr id="19" name="TextBox 18">
+            <a:extLst>
+              <a:ext uri="{FF2B5EF4-FFF2-40B4-BE49-F238E27FC236}">
+                <a16:creationId xmlns:a16="http://schemas.microsoft.com/office/drawing/2014/main" id="{4A18199A-141C-7877-3A26-7CD10F2FE9D2}"/>
+              </a:ext>
+            </a:extLst>
+          </p:cNvPr>
           <p:cNvSpPr txBox="1"/>
           <p:nvPr/>
         </p:nvSpPr>
         <p:spPr>
           <a:xfrm>
-            <a:off x="6667347" y="4160520"/>
+            <a:off x="6667347" y="3904488"/>
             <a:ext cx="2217420" cy="411480"/>
           </a:xfrm>
           <a:prstGeom prst="rect">
@@ -13788,14 +13717,14 @@
           <a:noFill/>
         </p:spPr>
         <p:txBody>
-          <a:bodyPr wrap="none" lIns="0" rIns="0" tIns="0" bIns="0">
+          <a:bodyPr wrap="none" lIns="0" tIns="0" rIns="0" bIns="0">
             <a:spAutoFit/>
           </a:bodyPr>
           <a:lstStyle/>
           <a:p>
             <a:pPr algn="ctr"/>
             <a:r>
-              <a:rPr sz="2000" b="1">
+              <a:rPr sz="2000" b="1" dirty="0">
                 <a:solidFill>
                   <a:srgbClr val="047A4B"/>
                 </a:solidFill>
@@ -13804,7 +13733,7 @@
               <a:t>✓  </a:t>
             </a:r>
             <a:r>
-              <a:rPr sz="1500">
+              <a:rPr sz="1500" dirty="0">
                 <a:solidFill>
                   <a:srgbClr val="111827"/>
                 </a:solidFill>
@@ -13820,7 +13749,7 @@
               </a:spcBef>
             </a:pPr>
             <a:r>
-              <a:rPr sz="2200" b="1">
+              <a:rPr sz="2200" b="1" dirty="0">
                 <a:solidFill>
                   <a:srgbClr val="047A4B"/>
                 </a:solidFill>
@@ -13833,13 +13762,19 @@
       </p:sp>
       <p:sp>
         <p:nvSpPr>
-          <p:cNvPr id="20" name="TextBox 19"/>
+          <p:cNvPr id="20" name="TextBox 19">
+            <a:extLst>
+              <a:ext uri="{FF2B5EF4-FFF2-40B4-BE49-F238E27FC236}">
+                <a16:creationId xmlns:a16="http://schemas.microsoft.com/office/drawing/2014/main" id="{A1AC98DE-3348-0019-BF68-0618D5717019}"/>
+              </a:ext>
+            </a:extLst>
+          </p:cNvPr>
           <p:cNvSpPr txBox="1"/>
           <p:nvPr/>
         </p:nvSpPr>
         <p:spPr>
           <a:xfrm>
-            <a:off x="8884767" y="4160520"/>
+            <a:off x="8884767" y="3947491"/>
             <a:ext cx="2217420" cy="411480"/>
           </a:xfrm>
           <a:prstGeom prst="rect">
@@ -13848,14 +13783,14 @@
           <a:noFill/>
         </p:spPr>
         <p:txBody>
-          <a:bodyPr wrap="none" lIns="0" rIns="0" tIns="0" bIns="0">
+          <a:bodyPr wrap="none" lIns="0" tIns="0" rIns="0" bIns="0">
             <a:spAutoFit/>
           </a:bodyPr>
           <a:lstStyle/>
           <a:p>
             <a:pPr algn="ctr"/>
             <a:r>
-              <a:rPr sz="2000" b="1">
+              <a:rPr sz="2000" b="1" dirty="0">
                 <a:solidFill>
                   <a:srgbClr val="C81E1E"/>
                 </a:solidFill>
@@ -13864,7 +13799,7 @@
               <a:t>✗  </a:t>
             </a:r>
             <a:r>
-              <a:rPr sz="1500">
+              <a:rPr sz="1500" dirty="0">
                 <a:solidFill>
                   <a:srgbClr val="111827"/>
                 </a:solidFill>
@@ -13880,7 +13815,7 @@
               </a:spcBef>
             </a:pPr>
             <a:r>
-              <a:rPr sz="2200" b="1">
+              <a:rPr sz="2200" b="1" dirty="0">
                 <a:solidFill>
                   <a:srgbClr val="C81E1E"/>
                 </a:solidFill>
@@ -13893,42 +13828,13 @@
       </p:sp>
       <p:sp>
         <p:nvSpPr>
-          <p:cNvPr id="21" name="TextBox 20"/>
-          <p:cNvSpPr txBox="1"/>
-          <p:nvPr/>
-        </p:nvSpPr>
-        <p:spPr>
-          <a:xfrm>
-            <a:off x="502920" y="4846320"/>
-            <a:ext cx="11247120" cy="365760"/>
-          </a:xfrm>
-          <a:prstGeom prst="rect">
-            <a:avLst/>
-          </a:prstGeom>
-          <a:noFill/>
-        </p:spPr>
-        <p:txBody>
-          <a:bodyPr wrap="square" anchor="t" lIns="0" rIns="0" tIns="0" bIns="0">
-            <a:spAutoFit/>
-          </a:bodyPr>
-          <a:lstStyle/>
-          <a:p>
-            <a:pPr algn="ctr"/>
-            <a:r>
-              <a:rPr sz="1800" b="0" i="1">
-                <a:solidFill>
-                  <a:srgbClr val="111827"/>
-                </a:solidFill>
-                <a:latin typeface="Arial"/>
-              </a:rPr>
-              <a:t>Today, each one brings you a new recommendation for promotion.</a:t>
-            </a:r>
-          </a:p>
-        </p:txBody>
-      </p:sp>
-      <p:sp>
-        <p:nvSpPr>
-          <p:cNvPr id="22" name="TextBox 21"/>
+          <p:cNvPr id="22" name="TextBox 21">
+            <a:extLst>
+              <a:ext uri="{FF2B5EF4-FFF2-40B4-BE49-F238E27FC236}">
+                <a16:creationId xmlns:a16="http://schemas.microsoft.com/office/drawing/2014/main" id="{9C085330-23A1-2E31-9F3B-78A39ACA7EFB}"/>
+              </a:ext>
+            </a:extLst>
+          </p:cNvPr>
           <p:cNvSpPr txBox="1"/>
           <p:nvPr/>
         </p:nvSpPr>
@@ -13943,14 +13849,14 @@
           <a:noFill/>
         </p:spPr>
         <p:txBody>
-          <a:bodyPr wrap="square" anchor="t" lIns="0" rIns="0" tIns="0" bIns="0">
+          <a:bodyPr wrap="square" lIns="0" tIns="0" rIns="0" bIns="0" anchor="t">
             <a:spAutoFit/>
           </a:bodyPr>
           <a:lstStyle/>
           <a:p>
             <a:pPr algn="ctr"/>
             <a:r>
-              <a:rPr sz="3000" b="1" i="0">
+              <a:rPr sz="3000" b="1" i="0" dirty="0">
                 <a:solidFill>
                   <a:srgbClr val="011F5B"/>
                 </a:solidFill>
@@ -13963,84 +13869,647 @@
       </p:sp>
       <p:sp>
         <p:nvSpPr>
-          <p:cNvPr id="23" name="TextBox 22"/>
-          <p:cNvSpPr txBox="1"/>
-          <p:nvPr/>
+          <p:cNvPr id="200" name="Slide Number Placeholder 3">
+            <a:extLst>
+              <a:ext uri="{FF2B5EF4-FFF2-40B4-BE49-F238E27FC236}">
+                <a16:creationId xmlns:a16="http://schemas.microsoft.com/office/drawing/2014/main" id="{670AA0C5-6E38-4C7E-9F69-E6FF8DE563B6}"/>
+              </a:ext>
+            </a:extLst>
+          </p:cNvPr>
+          <p:cNvSpPr>
+            <a:spLocks noGrp="1"/>
+          </p:cNvSpPr>
+          <p:nvPr>
+            <p:ph type="sldNum" sz="quarter" idx="11"/>
+          </p:nvPr>
         </p:nvSpPr>
-        <p:spPr>
-          <a:xfrm>
-            <a:off x="502920" y="5943600"/>
-            <a:ext cx="11247120" cy="365760"/>
-          </a:xfrm>
-          <a:prstGeom prst="rect">
-            <a:avLst/>
-          </a:prstGeom>
-          <a:noFill/>
-        </p:spPr>
+        <p:spPr/>
         <p:txBody>
-          <a:bodyPr wrap="square" anchor="t" lIns="0" rIns="0" tIns="0" bIns="0">
-            <a:spAutoFit/>
-          </a:bodyPr>
+          <a:bodyPr/>
           <a:lstStyle/>
           <a:p>
-            <a:pPr algn="ctr"/>
-            <a:r>
-              <a:rPr sz="1400" b="0" i="1">
-                <a:solidFill>
-                  <a:srgbClr val="6B7280"/>
-                </a:solidFill>
-                <a:latin typeface="Arial"/>
-              </a:rPr>
-              <a:t>Today: even with identical track records, audiences treat one of these recommendations as a meaningfully stronger signal than the other.</a:t>
-            </a:r>
-          </a:p>
-        </p:txBody>
-      </p:sp>
-      <p:sp>
-        <p:nvSpPr>
-          <p:cNvPr id="24" name="TextBox 23"/>
-          <p:cNvSpPr txBox="1"/>
-          <p:nvPr/>
-        </p:nvSpPr>
-        <p:spPr>
-          <a:xfrm>
-            <a:off x="10774375" y="6473952"/>
-            <a:ext cx="777240" cy="292608"/>
-          </a:xfrm>
-          <a:prstGeom prst="rect">
-            <a:avLst/>
-          </a:prstGeom>
-          <a:noFill/>
-        </p:spPr>
-        <p:txBody>
-          <a:bodyPr wrap="none" lIns="0" rIns="0" tIns="0" bIns="0" anchor="ctr">
-            <a:spAutoFit/>
-          </a:bodyPr>
-          <a:lstStyle/>
-          <a:p>
-            <a:pPr algn="r"/>
-            <a:r>
-              <a:rPr sz="1100" b="1">
-                <a:solidFill>
-                  <a:srgbClr val="FFFFFF"/>
-                </a:solidFill>
-                <a:latin typeface="Arial"/>
-              </a:rPr>
-              <a:t>2 / 20</a:t>
-            </a:r>
+            <a:fld id="{DD253308-F9C5-4FCB-8415-6DEE77C16A35}" type="slidenum">
+              <a:rPr lang="en-US" smtClean="0"/>
+              <a:pPr/>
+              <a:t>10</a:t>
+            </a:fld>
+            <a:endParaRPr lang="en-US" dirty="0"/>
           </a:p>
         </p:txBody>
       </p:sp>
     </p:spTree>
+    <p:extLst>
+      <p:ext uri="{BB962C8B-B14F-4D97-AF65-F5344CB8AC3E}">
+        <p14:creationId xmlns:p14="http://schemas.microsoft.com/office/powerpoint/2010/main" val="609301019"/>
+      </p:ext>
+    </p:extLst>
   </p:cSld>
   <p:clrMapOvr>
     <a:masterClrMapping/>
   </p:clrMapOvr>
+  <p:timing>
+    <p:tnLst>
+      <p:par>
+        <p:cTn id="1" dur="indefinite" restart="never" nodeType="tmRoot">
+          <p:childTnLst>
+            <p:seq concurrent="1" nextAc="seek">
+              <p:cTn id="2" dur="indefinite" nodeType="mainSeq">
+                <p:childTnLst>
+                  <p:par>
+                    <p:cTn id="3" fill="hold">
+                      <p:stCondLst>
+                        <p:cond delay="indefinite"/>
+                      </p:stCondLst>
+                      <p:childTnLst>
+                        <p:par>
+                          <p:cTn id="4" fill="hold">
+                            <p:stCondLst>
+                              <p:cond delay="0"/>
+                            </p:stCondLst>
+                            <p:childTnLst>
+                              <p:par>
+                                <p:cTn id="5" presetID="1" presetClass="entr" presetSubtype="0" fill="hold" grpId="0" nodeType="clickEffect">
+                                  <p:stCondLst>
+                                    <p:cond delay="0"/>
+                                  </p:stCondLst>
+                                  <p:childTnLst>
+                                    <p:set>
+                                      <p:cBhvr>
+                                        <p:cTn id="6" dur="1" fill="hold">
+                                          <p:stCondLst>
+                                            <p:cond delay="0"/>
+                                          </p:stCondLst>
+                                        </p:cTn>
+                                        <p:tgtEl>
+                                          <p:spTgt spid="5"/>
+                                        </p:tgtEl>
+                                        <p:attrNameLst>
+                                          <p:attrName>style.visibility</p:attrName>
+                                        </p:attrNameLst>
+                                      </p:cBhvr>
+                                      <p:to>
+                                        <p:strVal val="visible"/>
+                                      </p:to>
+                                    </p:set>
+                                  </p:childTnLst>
+                                </p:cTn>
+                              </p:par>
+                              <p:par>
+                                <p:cTn id="7" presetID="1" presetClass="entr" presetSubtype="0" fill="hold" grpId="0" nodeType="withEffect">
+                                  <p:stCondLst>
+                                    <p:cond delay="0"/>
+                                  </p:stCondLst>
+                                  <p:childTnLst>
+                                    <p:set>
+                                      <p:cBhvr>
+                                        <p:cTn id="8" dur="1" fill="hold">
+                                          <p:stCondLst>
+                                            <p:cond delay="0"/>
+                                          </p:stCondLst>
+                                        </p:cTn>
+                                        <p:tgtEl>
+                                          <p:spTgt spid="4"/>
+                                        </p:tgtEl>
+                                        <p:attrNameLst>
+                                          <p:attrName>style.visibility</p:attrName>
+                                        </p:attrNameLst>
+                                      </p:cBhvr>
+                                      <p:to>
+                                        <p:strVal val="visible"/>
+                                      </p:to>
+                                    </p:set>
+                                  </p:childTnLst>
+                                </p:cTn>
+                              </p:par>
+                              <p:par>
+                                <p:cTn id="9" presetID="1" presetClass="entr" presetSubtype="0" fill="hold" grpId="0" nodeType="withEffect">
+                                  <p:stCondLst>
+                                    <p:cond delay="0"/>
+                                  </p:stCondLst>
+                                  <p:childTnLst>
+                                    <p:set>
+                                      <p:cBhvr>
+                                        <p:cTn id="10" dur="1" fill="hold">
+                                          <p:stCondLst>
+                                            <p:cond delay="0"/>
+                                          </p:stCondLst>
+                                        </p:cTn>
+                                        <p:tgtEl>
+                                          <p:spTgt spid="6"/>
+                                        </p:tgtEl>
+                                        <p:attrNameLst>
+                                          <p:attrName>style.visibility</p:attrName>
+                                        </p:attrNameLst>
+                                      </p:cBhvr>
+                                      <p:to>
+                                        <p:strVal val="visible"/>
+                                      </p:to>
+                                    </p:set>
+                                  </p:childTnLst>
+                                </p:cTn>
+                              </p:par>
+                              <p:par>
+                                <p:cTn id="11" presetID="1" presetClass="entr" presetSubtype="0" fill="hold" grpId="0" nodeType="withEffect">
+                                  <p:stCondLst>
+                                    <p:cond delay="0"/>
+                                  </p:stCondLst>
+                                  <p:childTnLst>
+                                    <p:set>
+                                      <p:cBhvr>
+                                        <p:cTn id="12" dur="1" fill="hold">
+                                          <p:stCondLst>
+                                            <p:cond delay="0"/>
+                                          </p:stCondLst>
+                                        </p:cTn>
+                                        <p:tgtEl>
+                                          <p:spTgt spid="3"/>
+                                        </p:tgtEl>
+                                        <p:attrNameLst>
+                                          <p:attrName>style.visibility</p:attrName>
+                                        </p:attrNameLst>
+                                      </p:cBhvr>
+                                      <p:to>
+                                        <p:strVal val="visible"/>
+                                      </p:to>
+                                    </p:set>
+                                  </p:childTnLst>
+                                </p:cTn>
+                              </p:par>
+                              <p:par>
+                                <p:cTn id="13" presetID="1" presetClass="entr" presetSubtype="0" fill="hold" grpId="0" nodeType="withEffect">
+                                  <p:stCondLst>
+                                    <p:cond delay="0"/>
+                                  </p:stCondLst>
+                                  <p:childTnLst>
+                                    <p:set>
+                                      <p:cBhvr>
+                                        <p:cTn id="14" dur="1" fill="hold">
+                                          <p:stCondLst>
+                                            <p:cond delay="0"/>
+                                          </p:stCondLst>
+                                        </p:cTn>
+                                        <p:tgtEl>
+                                          <p:spTgt spid="15"/>
+                                        </p:tgtEl>
+                                        <p:attrNameLst>
+                                          <p:attrName>style.visibility</p:attrName>
+                                        </p:attrNameLst>
+                                      </p:cBhvr>
+                                      <p:to>
+                                        <p:strVal val="visible"/>
+                                      </p:to>
+                                    </p:set>
+                                  </p:childTnLst>
+                                </p:cTn>
+                              </p:par>
+                              <p:par>
+                                <p:cTn id="15" presetID="1" presetClass="entr" presetSubtype="0" fill="hold" grpId="0" nodeType="withEffect">
+                                  <p:stCondLst>
+                                    <p:cond delay="0"/>
+                                  </p:stCondLst>
+                                  <p:childTnLst>
+                                    <p:set>
+                                      <p:cBhvr>
+                                        <p:cTn id="16" dur="1" fill="hold">
+                                          <p:stCondLst>
+                                            <p:cond delay="0"/>
+                                          </p:stCondLst>
+                                        </p:cTn>
+                                        <p:tgtEl>
+                                          <p:spTgt spid="14"/>
+                                        </p:tgtEl>
+                                        <p:attrNameLst>
+                                          <p:attrName>style.visibility</p:attrName>
+                                        </p:attrNameLst>
+                                      </p:cBhvr>
+                                      <p:to>
+                                        <p:strVal val="visible"/>
+                                      </p:to>
+                                    </p:set>
+                                  </p:childTnLst>
+                                </p:cTn>
+                              </p:par>
+                              <p:par>
+                                <p:cTn id="17" presetID="1" presetClass="entr" presetSubtype="0" fill="hold" grpId="0" nodeType="withEffect">
+                                  <p:stCondLst>
+                                    <p:cond delay="0"/>
+                                  </p:stCondLst>
+                                  <p:childTnLst>
+                                    <p:set>
+                                      <p:cBhvr>
+                                        <p:cTn id="18" dur="1" fill="hold">
+                                          <p:stCondLst>
+                                            <p:cond delay="0"/>
+                                          </p:stCondLst>
+                                        </p:cTn>
+                                        <p:tgtEl>
+                                          <p:spTgt spid="13"/>
+                                        </p:tgtEl>
+                                        <p:attrNameLst>
+                                          <p:attrName>style.visibility</p:attrName>
+                                        </p:attrNameLst>
+                                      </p:cBhvr>
+                                      <p:to>
+                                        <p:strVal val="visible"/>
+                                      </p:to>
+                                    </p:set>
+                                  </p:childTnLst>
+                                </p:cTn>
+                              </p:par>
+                              <p:par>
+                                <p:cTn id="19" presetID="1" presetClass="entr" presetSubtype="0" fill="hold" grpId="0" nodeType="withEffect">
+                                  <p:stCondLst>
+                                    <p:cond delay="0"/>
+                                  </p:stCondLst>
+                                  <p:childTnLst>
+                                    <p:set>
+                                      <p:cBhvr>
+                                        <p:cTn id="20" dur="1" fill="hold">
+                                          <p:stCondLst>
+                                            <p:cond delay="0"/>
+                                          </p:stCondLst>
+                                        </p:cTn>
+                                        <p:tgtEl>
+                                          <p:spTgt spid="12"/>
+                                        </p:tgtEl>
+                                        <p:attrNameLst>
+                                          <p:attrName>style.visibility</p:attrName>
+                                        </p:attrNameLst>
+                                      </p:cBhvr>
+                                      <p:to>
+                                        <p:strVal val="visible"/>
+                                      </p:to>
+                                    </p:set>
+                                  </p:childTnLst>
+                                </p:cTn>
+                              </p:par>
+                            </p:childTnLst>
+                          </p:cTn>
+                        </p:par>
+                      </p:childTnLst>
+                    </p:cTn>
+                  </p:par>
+                  <p:par>
+                    <p:cTn id="21" fill="hold">
+                      <p:stCondLst>
+                        <p:cond delay="indefinite"/>
+                      </p:stCondLst>
+                      <p:childTnLst>
+                        <p:par>
+                          <p:cTn id="22" fill="hold">
+                            <p:stCondLst>
+                              <p:cond delay="0"/>
+                            </p:stCondLst>
+                            <p:childTnLst>
+                              <p:par>
+                                <p:cTn id="23" presetID="1" presetClass="entr" presetSubtype="0" fill="hold" grpId="0" nodeType="clickEffect">
+                                  <p:stCondLst>
+                                    <p:cond delay="0"/>
+                                  </p:stCondLst>
+                                  <p:childTnLst>
+                                    <p:set>
+                                      <p:cBhvr>
+                                        <p:cTn id="24" dur="1" fill="hold">
+                                          <p:stCondLst>
+                                            <p:cond delay="0"/>
+                                          </p:stCondLst>
+                                        </p:cTn>
+                                        <p:tgtEl>
+                                          <p:spTgt spid="9"/>
+                                        </p:tgtEl>
+                                        <p:attrNameLst>
+                                          <p:attrName>style.visibility</p:attrName>
+                                        </p:attrNameLst>
+                                      </p:cBhvr>
+                                      <p:to>
+                                        <p:strVal val="visible"/>
+                                      </p:to>
+                                    </p:set>
+                                  </p:childTnLst>
+                                </p:cTn>
+                              </p:par>
+                              <p:par>
+                                <p:cTn id="25" presetID="1" presetClass="entr" presetSubtype="0" fill="hold" grpId="0" nodeType="withEffect">
+                                  <p:stCondLst>
+                                    <p:cond delay="0"/>
+                                  </p:stCondLst>
+                                  <p:childTnLst>
+                                    <p:set>
+                                      <p:cBhvr>
+                                        <p:cTn id="26" dur="1" fill="hold">
+                                          <p:stCondLst>
+                                            <p:cond delay="0"/>
+                                          </p:stCondLst>
+                                        </p:cTn>
+                                        <p:tgtEl>
+                                          <p:spTgt spid="8"/>
+                                        </p:tgtEl>
+                                        <p:attrNameLst>
+                                          <p:attrName>style.visibility</p:attrName>
+                                        </p:attrNameLst>
+                                      </p:cBhvr>
+                                      <p:to>
+                                        <p:strVal val="visible"/>
+                                      </p:to>
+                                    </p:set>
+                                  </p:childTnLst>
+                                </p:cTn>
+                              </p:par>
+                              <p:par>
+                                <p:cTn id="27" presetID="1" presetClass="entr" presetSubtype="0" fill="hold" grpId="0" nodeType="withEffect">
+                                  <p:stCondLst>
+                                    <p:cond delay="0"/>
+                                  </p:stCondLst>
+                                  <p:childTnLst>
+                                    <p:set>
+                                      <p:cBhvr>
+                                        <p:cTn id="28" dur="1" fill="hold">
+                                          <p:stCondLst>
+                                            <p:cond delay="0"/>
+                                          </p:stCondLst>
+                                        </p:cTn>
+                                        <p:tgtEl>
+                                          <p:spTgt spid="17"/>
+                                        </p:tgtEl>
+                                        <p:attrNameLst>
+                                          <p:attrName>style.visibility</p:attrName>
+                                        </p:attrNameLst>
+                                      </p:cBhvr>
+                                      <p:to>
+                                        <p:strVal val="visible"/>
+                                      </p:to>
+                                    </p:set>
+                                  </p:childTnLst>
+                                </p:cTn>
+                              </p:par>
+                              <p:par>
+                                <p:cTn id="29" presetID="1" presetClass="entr" presetSubtype="0" fill="hold" grpId="0" nodeType="withEffect">
+                                  <p:stCondLst>
+                                    <p:cond delay="0"/>
+                                  </p:stCondLst>
+                                  <p:childTnLst>
+                                    <p:set>
+                                      <p:cBhvr>
+                                        <p:cTn id="30" dur="1" fill="hold">
+                                          <p:stCondLst>
+                                            <p:cond delay="0"/>
+                                          </p:stCondLst>
+                                        </p:cTn>
+                                        <p:tgtEl>
+                                          <p:spTgt spid="18"/>
+                                        </p:tgtEl>
+                                        <p:attrNameLst>
+                                          <p:attrName>style.visibility</p:attrName>
+                                        </p:attrNameLst>
+                                      </p:cBhvr>
+                                      <p:to>
+                                        <p:strVal val="visible"/>
+                                      </p:to>
+                                    </p:set>
+                                  </p:childTnLst>
+                                </p:cTn>
+                              </p:par>
+                            </p:childTnLst>
+                          </p:cTn>
+                        </p:par>
+                      </p:childTnLst>
+                    </p:cTn>
+                  </p:par>
+                  <p:par>
+                    <p:cTn id="31" fill="hold">
+                      <p:stCondLst>
+                        <p:cond delay="indefinite"/>
+                      </p:stCondLst>
+                      <p:childTnLst>
+                        <p:par>
+                          <p:cTn id="32" fill="hold">
+                            <p:stCondLst>
+                              <p:cond delay="0"/>
+                            </p:stCondLst>
+                            <p:childTnLst>
+                              <p:par>
+                                <p:cTn id="33" presetID="1" presetClass="entr" presetSubtype="0" fill="hold" grpId="0" nodeType="clickEffect">
+                                  <p:stCondLst>
+                                    <p:cond delay="0"/>
+                                  </p:stCondLst>
+                                  <p:childTnLst>
+                                    <p:set>
+                                      <p:cBhvr>
+                                        <p:cTn id="34" dur="1" fill="hold">
+                                          <p:stCondLst>
+                                            <p:cond delay="0"/>
+                                          </p:stCondLst>
+                                        </p:cTn>
+                                        <p:tgtEl>
+                                          <p:spTgt spid="10"/>
+                                        </p:tgtEl>
+                                        <p:attrNameLst>
+                                          <p:attrName>style.visibility</p:attrName>
+                                        </p:attrNameLst>
+                                      </p:cBhvr>
+                                      <p:to>
+                                        <p:strVal val="visible"/>
+                                      </p:to>
+                                    </p:set>
+                                  </p:childTnLst>
+                                </p:cTn>
+                              </p:par>
+                              <p:par>
+                                <p:cTn id="35" presetID="1" presetClass="entr" presetSubtype="0" fill="hold" grpId="0" nodeType="withEffect">
+                                  <p:stCondLst>
+                                    <p:cond delay="0"/>
+                                  </p:stCondLst>
+                                  <p:childTnLst>
+                                    <p:set>
+                                      <p:cBhvr>
+                                        <p:cTn id="36" dur="1" fill="hold">
+                                          <p:stCondLst>
+                                            <p:cond delay="0"/>
+                                          </p:stCondLst>
+                                        </p:cTn>
+                                        <p:tgtEl>
+                                          <p:spTgt spid="19"/>
+                                        </p:tgtEl>
+                                        <p:attrNameLst>
+                                          <p:attrName>style.visibility</p:attrName>
+                                        </p:attrNameLst>
+                                      </p:cBhvr>
+                                      <p:to>
+                                        <p:strVal val="visible"/>
+                                      </p:to>
+                                    </p:set>
+                                  </p:childTnLst>
+                                </p:cTn>
+                              </p:par>
+                            </p:childTnLst>
+                          </p:cTn>
+                        </p:par>
+                      </p:childTnLst>
+                    </p:cTn>
+                  </p:par>
+                  <p:par>
+                    <p:cTn id="37" fill="hold">
+                      <p:stCondLst>
+                        <p:cond delay="indefinite"/>
+                      </p:stCondLst>
+                      <p:childTnLst>
+                        <p:par>
+                          <p:cTn id="38" fill="hold">
+                            <p:stCondLst>
+                              <p:cond delay="0"/>
+                            </p:stCondLst>
+                            <p:childTnLst>
+                              <p:par>
+                                <p:cTn id="39" presetID="1" presetClass="entr" presetSubtype="0" fill="hold" grpId="0" nodeType="clickEffect">
+                                  <p:stCondLst>
+                                    <p:cond delay="0"/>
+                                  </p:stCondLst>
+                                  <p:childTnLst>
+                                    <p:set>
+                                      <p:cBhvr>
+                                        <p:cTn id="40" dur="1" fill="hold">
+                                          <p:stCondLst>
+                                            <p:cond delay="0"/>
+                                          </p:stCondLst>
+                                        </p:cTn>
+                                        <p:tgtEl>
+                                          <p:spTgt spid="11"/>
+                                        </p:tgtEl>
+                                        <p:attrNameLst>
+                                          <p:attrName>style.visibility</p:attrName>
+                                        </p:attrNameLst>
+                                      </p:cBhvr>
+                                      <p:to>
+                                        <p:strVal val="visible"/>
+                                      </p:to>
+                                    </p:set>
+                                  </p:childTnLst>
+                                </p:cTn>
+                              </p:par>
+                              <p:par>
+                                <p:cTn id="41" presetID="1" presetClass="entr" presetSubtype="0" fill="hold" grpId="0" nodeType="withEffect">
+                                  <p:stCondLst>
+                                    <p:cond delay="0"/>
+                                  </p:stCondLst>
+                                  <p:childTnLst>
+                                    <p:set>
+                                      <p:cBhvr>
+                                        <p:cTn id="42" dur="1" fill="hold">
+                                          <p:stCondLst>
+                                            <p:cond delay="0"/>
+                                          </p:stCondLst>
+                                        </p:cTn>
+                                        <p:tgtEl>
+                                          <p:spTgt spid="20"/>
+                                        </p:tgtEl>
+                                        <p:attrNameLst>
+                                          <p:attrName>style.visibility</p:attrName>
+                                        </p:attrNameLst>
+                                      </p:cBhvr>
+                                      <p:to>
+                                        <p:strVal val="visible"/>
+                                      </p:to>
+                                    </p:set>
+                                  </p:childTnLst>
+                                </p:cTn>
+                              </p:par>
+                            </p:childTnLst>
+                          </p:cTn>
+                        </p:par>
+                      </p:childTnLst>
+                    </p:cTn>
+                  </p:par>
+                  <p:par>
+                    <p:cTn id="43" fill="hold">
+                      <p:stCondLst>
+                        <p:cond delay="indefinite"/>
+                      </p:stCondLst>
+                      <p:childTnLst>
+                        <p:par>
+                          <p:cTn id="44" fill="hold">
+                            <p:stCondLst>
+                              <p:cond delay="0"/>
+                            </p:stCondLst>
+                            <p:childTnLst>
+                              <p:par>
+                                <p:cTn id="45" presetID="1" presetClass="entr" presetSubtype="0" fill="hold" grpId="0" nodeType="clickEffect">
+                                  <p:stCondLst>
+                                    <p:cond delay="0"/>
+                                  </p:stCondLst>
+                                  <p:childTnLst>
+                                    <p:set>
+                                      <p:cBhvr>
+                                        <p:cTn id="46" dur="1" fill="hold">
+                                          <p:stCondLst>
+                                            <p:cond delay="0"/>
+                                          </p:stCondLst>
+                                        </p:cTn>
+                                        <p:tgtEl>
+                                          <p:spTgt spid="22"/>
+                                        </p:tgtEl>
+                                        <p:attrNameLst>
+                                          <p:attrName>style.visibility</p:attrName>
+                                        </p:attrNameLst>
+                                      </p:cBhvr>
+                                      <p:to>
+                                        <p:strVal val="visible"/>
+                                      </p:to>
+                                    </p:set>
+                                  </p:childTnLst>
+                                </p:cTn>
+                              </p:par>
+                            </p:childTnLst>
+                          </p:cTn>
+                        </p:par>
+                      </p:childTnLst>
+                    </p:cTn>
+                  </p:par>
+                </p:childTnLst>
+              </p:cTn>
+              <p:prevCondLst>
+                <p:cond evt="onPrev" delay="0">
+                  <p:tgtEl>
+                    <p:sldTgt/>
+                  </p:tgtEl>
+                </p:cond>
+              </p:prevCondLst>
+              <p:nextCondLst>
+                <p:cond evt="onNext" delay="0">
+                  <p:tgtEl>
+                    <p:sldTgt/>
+                  </p:tgtEl>
+                </p:cond>
+              </p:nextCondLst>
+            </p:seq>
+          </p:childTnLst>
+        </p:cTn>
+      </p:par>
+    </p:tnLst>
+    <p:bldLst>
+      <p:bldP spid="3" grpId="0" animBg="1"/>
+      <p:bldP spid="4" grpId="0" animBg="1"/>
+      <p:bldP spid="5" grpId="0"/>
+      <p:bldP spid="6" grpId="0"/>
+      <p:bldP spid="8" grpId="0"/>
+      <p:bldP spid="9" grpId="0"/>
+      <p:bldP spid="10" grpId="0"/>
+      <p:bldP spid="11" grpId="0"/>
+      <p:bldP spid="12" grpId="0" animBg="1"/>
+      <p:bldP spid="13" grpId="0" animBg="1"/>
+      <p:bldP spid="14" grpId="0"/>
+      <p:bldP spid="15" grpId="0"/>
+      <p:bldP spid="17" grpId="0"/>
+      <p:bldP spid="18" grpId="0"/>
+      <p:bldP spid="19" grpId="0"/>
+      <p:bldP spid="20" grpId="0"/>
+      <p:bldP spid="22" grpId="0"/>
+    </p:bldLst>
+  </p:timing>
 </p:sld>
 </file>
 
 <file path=ppt/slides/slide20.xml><?xml version="1.0" encoding="utf-8"?>
-<p:sld xmlns:a="http://schemas.openxmlformats.org/drawingml/2006/main" xmlns:p="http://schemas.openxmlformats.org/presentationml/2006/main" xmlns:r="http://schemas.openxmlformats.org/officeDocument/2006/relationships">
+<p:sld xmlns:a="http://schemas.openxmlformats.org/drawingml/2006/main" xmlns:r="http://schemas.openxmlformats.org/officeDocument/2006/relationships" xmlns:p="http://schemas.openxmlformats.org/presentationml/2006/main">
   <p:cSld>
     <p:bg>
       <p:bgPr>
@@ -14056,7 +14525,14 @@
         <p:cNvGrpSpPr/>
         <p:nvPr/>
       </p:nvGrpSpPr>
-      <p:grpSpPr/>
+      <p:grpSpPr>
+        <a:xfrm>
+          <a:off x="0" y="0"/>
+          <a:ext cx="0" cy="0"/>
+          <a:chOff x="0" y="0"/>
+          <a:chExt cx="0" cy="0"/>
+        </a:xfrm>
+      </p:grpSpPr>
       <p:sp>
         <p:nvSpPr>
           <p:cNvPr id="2" name="TextBox 1"/>
@@ -14074,7 +14550,7 @@
           <a:noFill/>
         </p:spPr>
         <p:txBody>
-          <a:bodyPr wrap="square" anchor="t" lIns="0" rIns="0" tIns="0" bIns="0">
+          <a:bodyPr wrap="square" lIns="0" tIns="0" rIns="0" bIns="0" anchor="t">
             <a:spAutoFit/>
           </a:bodyPr>
           <a:lstStyle/>
@@ -14094,141 +14570,31 @@
       </p:sp>
       <p:sp>
         <p:nvSpPr>
-          <p:cNvPr id="3" name="TextBox 2"/>
-          <p:cNvSpPr txBox="1"/>
-          <p:nvPr/>
+          <p:cNvPr id="217" name="Slide Number Placeholder 3">
+            <a:extLst>
+              <a:ext uri="{FF2B5EF4-FFF2-40B4-BE49-F238E27FC236}">
+                <a16:creationId xmlns:a16="http://schemas.microsoft.com/office/drawing/2014/main" id="{576EA859-4E79-4EBE-9BC9-29E0716921D5}"/>
+              </a:ext>
+            </a:extLst>
+          </p:cNvPr>
+          <p:cNvSpPr>
+            <a:spLocks noGrp="1"/>
+          </p:cNvSpPr>
+          <p:nvPr>
+            <p:ph type="sldNum" sz="quarter" idx="11"/>
+          </p:nvPr>
         </p:nvSpPr>
-        <p:spPr>
-          <a:xfrm>
-            <a:off x="548640" y="3291840"/>
-            <a:ext cx="10972800" cy="548640"/>
-          </a:xfrm>
-          <a:prstGeom prst="rect">
-            <a:avLst/>
-          </a:prstGeom>
-          <a:noFill/>
-        </p:spPr>
+        <p:spPr/>
         <p:txBody>
-          <a:bodyPr wrap="square" anchor="t" lIns="0" rIns="0" tIns="0" bIns="0">
-            <a:spAutoFit/>
-          </a:bodyPr>
+          <a:bodyPr/>
           <a:lstStyle/>
           <a:p>
-            <a:pPr algn="ctr"/>
-            <a:r>
-              <a:rPr sz="2400" b="0" i="0">
-                <a:solidFill>
-                  <a:srgbClr val="111827"/>
-                </a:solidFill>
-                <a:latin typeface="Arial"/>
-              </a:rPr>
-              <a:t>Jose Cervantez · Erika Kirgios · Rosalind Chow</a:t>
-            </a:r>
-          </a:p>
-        </p:txBody>
-      </p:sp>
-      <p:sp>
-        <p:nvSpPr>
-          <p:cNvPr id="4" name="TextBox 3"/>
-          <p:cNvSpPr txBox="1"/>
-          <p:nvPr/>
-        </p:nvSpPr>
-        <p:spPr>
-          <a:xfrm>
-            <a:off x="548640" y="3931920"/>
-            <a:ext cx="10972800" cy="457200"/>
-          </a:xfrm>
-          <a:prstGeom prst="rect">
-            <a:avLst/>
-          </a:prstGeom>
-          <a:noFill/>
-        </p:spPr>
-        <p:txBody>
-          <a:bodyPr wrap="square" anchor="t" lIns="0" rIns="0" tIns="0" bIns="0">
-            <a:spAutoFit/>
-          </a:bodyPr>
-          <a:lstStyle/>
-          <a:p>
-            <a:pPr algn="ctr"/>
-            <a:r>
-              <a:rPr sz="1800" b="0" i="1">
-                <a:solidFill>
-                  <a:srgbClr val="6B7280"/>
-                </a:solidFill>
-                <a:latin typeface="Arial"/>
-              </a:rPr>
-              <a:t>University of Chicago  ·  April 10, 2026</a:t>
-            </a:r>
-          </a:p>
-        </p:txBody>
-      </p:sp>
-      <p:sp>
-        <p:nvSpPr>
-          <p:cNvPr id="5" name="TextBox 4"/>
-          <p:cNvSpPr txBox="1"/>
-          <p:nvPr/>
-        </p:nvSpPr>
-        <p:spPr>
-          <a:xfrm>
-            <a:off x="548640" y="4937760"/>
-            <a:ext cx="10972800" cy="457200"/>
-          </a:xfrm>
-          <a:prstGeom prst="rect">
-            <a:avLst/>
-          </a:prstGeom>
-          <a:noFill/>
-        </p:spPr>
-        <p:txBody>
-          <a:bodyPr wrap="square" anchor="t" lIns="0" rIns="0" tIns="0" bIns="0">
-            <a:spAutoFit/>
-          </a:bodyPr>
-          <a:lstStyle/>
-          <a:p>
-            <a:pPr algn="ctr"/>
-            <a:r>
-              <a:rPr sz="2800" b="1" i="1">
-                <a:solidFill>
-                  <a:srgbClr val="990000"/>
-                </a:solidFill>
-                <a:latin typeface="Arial"/>
-              </a:rPr>
-              <a:t>Questions?</a:t>
-            </a:r>
-          </a:p>
-        </p:txBody>
-      </p:sp>
-      <p:sp>
-        <p:nvSpPr>
-          <p:cNvPr id="6" name="TextBox 5"/>
-          <p:cNvSpPr txBox="1"/>
-          <p:nvPr/>
-        </p:nvSpPr>
-        <p:spPr>
-          <a:xfrm>
-            <a:off x="10774375" y="6473952"/>
-            <a:ext cx="777240" cy="292608"/>
-          </a:xfrm>
-          <a:prstGeom prst="rect">
-            <a:avLst/>
-          </a:prstGeom>
-          <a:noFill/>
-        </p:spPr>
-        <p:txBody>
-          <a:bodyPr wrap="none" lIns="0" rIns="0" tIns="0" bIns="0" anchor="ctr">
-            <a:spAutoFit/>
-          </a:bodyPr>
-          <a:lstStyle/>
-          <a:p>
-            <a:pPr algn="r"/>
-            <a:r>
-              <a:rPr sz="1100" b="1">
-                <a:solidFill>
-                  <a:srgbClr val="FFFFFF"/>
-                </a:solidFill>
-                <a:latin typeface="Arial"/>
-              </a:rPr>
-              <a:t>20 / 20</a:t>
-            </a:r>
+            <a:fld id="{DD253308-F9C5-4FCB-8415-6DEE77C16A35}" type="slidenum">
+              <a:rPr lang="en-US" smtClean="0"/>
+              <a:pPr/>
+              <a:t>10</a:t>
+            </a:fld>
+            <a:endParaRPr lang="en-US" dirty="0"/>
           </a:p>
         </p:txBody>
       </p:sp>
@@ -14241,7 +14607,7 @@
 </file>
 
 <file path=ppt/slides/slide3.xml><?xml version="1.0" encoding="utf-8"?>
-<p:sld xmlns:a="http://schemas.openxmlformats.org/drawingml/2006/main" xmlns:p="http://schemas.openxmlformats.org/presentationml/2006/main" xmlns:r="http://schemas.openxmlformats.org/officeDocument/2006/relationships">
+<p:sld xmlns:a="http://schemas.openxmlformats.org/drawingml/2006/main" xmlns:r="http://schemas.openxmlformats.org/officeDocument/2006/relationships" xmlns:p="http://schemas.openxmlformats.org/presentationml/2006/main">
   <p:cSld>
     <p:spTree>
       <p:nvGrpSpPr>
@@ -14249,7 +14615,14 @@
         <p:cNvGrpSpPr/>
         <p:nvPr/>
       </p:nvGrpSpPr>
-      <p:grpSpPr/>
+      <p:grpSpPr>
+        <a:xfrm>
+          <a:off x="0" y="0"/>
+          <a:ext cx="0" cy="0"/>
+          <a:chOff x="0" y="0"/>
+          <a:chExt cx="0" cy="0"/>
+        </a:xfrm>
+      </p:grpSpPr>
       <p:sp>
         <p:nvSpPr>
           <p:cNvPr id="2" name="TextBox 1"/>
@@ -14267,7 +14640,7 @@
           <a:noFill/>
         </p:spPr>
         <p:txBody>
-          <a:bodyPr wrap="square" anchor="t" lIns="0" rIns="0" tIns="0" bIns="0">
+          <a:bodyPr wrap="square" lIns="0" tIns="0" rIns="0" bIns="0" anchor="t">
             <a:spAutoFit/>
           </a:bodyPr>
           <a:lstStyle/>
@@ -14302,14 +14675,14 @@
           <a:noFill/>
         </p:spPr>
         <p:txBody>
-          <a:bodyPr wrap="square" anchor="t" lIns="0" rIns="0" tIns="0" bIns="0">
+          <a:bodyPr wrap="square" lIns="0" tIns="0" rIns="0" bIns="0" anchor="t">
             <a:spAutoFit/>
           </a:bodyPr>
           <a:lstStyle/>
           <a:p>
             <a:pPr algn="l"/>
             <a:r>
-              <a:rPr sz="2200" b="0" i="0">
+              <a:rPr sz="2200" b="0" i="0" dirty="0">
                 <a:solidFill>
                   <a:srgbClr val="111827"/>
                 </a:solidFill>
@@ -14328,8 +14701,8 @@
         </p:nvSpPr>
         <p:spPr>
           <a:xfrm>
-            <a:off x="868680" y="3291840"/>
-            <a:ext cx="10972800" cy="2926080"/>
+            <a:off x="777240" y="2891835"/>
+            <a:ext cx="10972800" cy="2354491"/>
           </a:xfrm>
           <a:prstGeom prst="rect">
             <a:avLst/>
@@ -14348,7 +14721,7 @@
               </a:spcAft>
             </a:pPr>
             <a:r>
-              <a:rPr sz="2200" b="0">
+              <a:rPr sz="2800" b="0" dirty="0">
                 <a:solidFill>
                   <a:srgbClr val="111827"/>
                 </a:solidFill>
@@ -14364,7 +14737,7 @@
               </a:spcAft>
             </a:pPr>
             <a:r>
-              <a:rPr sz="2200" b="0">
+              <a:rPr sz="2800" b="0" dirty="0">
                 <a:solidFill>
                   <a:srgbClr val="111827"/>
                 </a:solidFill>
@@ -14380,7 +14753,7 @@
               </a:spcAft>
             </a:pPr>
             <a:r>
-              <a:rPr sz="2200" b="0">
+              <a:rPr sz="2800" b="0" dirty="0">
                 <a:solidFill>
                   <a:srgbClr val="111827"/>
                 </a:solidFill>
@@ -14396,7 +14769,7 @@
               </a:spcAft>
             </a:pPr>
             <a:r>
-              <a:rPr sz="2200" b="0">
+              <a:rPr sz="2800" b="0" dirty="0">
                 <a:solidFill>
                   <a:srgbClr val="111827"/>
                 </a:solidFill>
@@ -14409,36 +14782,31 @@
       </p:sp>
       <p:sp>
         <p:nvSpPr>
-          <p:cNvPr id="5" name="TextBox 4"/>
-          <p:cNvSpPr txBox="1"/>
-          <p:nvPr/>
+          <p:cNvPr id="201" name="Slide Number Placeholder 3">
+            <a:extLst>
+              <a:ext uri="{FF2B5EF4-FFF2-40B4-BE49-F238E27FC236}">
+                <a16:creationId xmlns:a16="http://schemas.microsoft.com/office/drawing/2014/main" id="{2C1F1100-0B2F-4478-B42E-3A03F4C67459}"/>
+              </a:ext>
+            </a:extLst>
+          </p:cNvPr>
+          <p:cNvSpPr>
+            <a:spLocks noGrp="1"/>
+          </p:cNvSpPr>
+          <p:nvPr>
+            <p:ph type="sldNum" sz="quarter" idx="11"/>
+          </p:nvPr>
         </p:nvSpPr>
-        <p:spPr>
-          <a:xfrm>
-            <a:off x="10774375" y="6473952"/>
-            <a:ext cx="777240" cy="292608"/>
-          </a:xfrm>
-          <a:prstGeom prst="rect">
-            <a:avLst/>
-          </a:prstGeom>
-          <a:noFill/>
-        </p:spPr>
+        <p:spPr/>
         <p:txBody>
-          <a:bodyPr wrap="none" lIns="0" rIns="0" tIns="0" bIns="0" anchor="ctr">
-            <a:spAutoFit/>
-          </a:bodyPr>
+          <a:bodyPr/>
           <a:lstStyle/>
           <a:p>
-            <a:pPr algn="r"/>
-            <a:r>
-              <a:rPr sz="1100" b="1">
-                <a:solidFill>
-                  <a:srgbClr val="FFFFFF"/>
-                </a:solidFill>
-                <a:latin typeface="Arial"/>
-              </a:rPr>
-              <a:t>3 / 20</a:t>
-            </a:r>
+            <a:fld id="{DD253308-F9C5-4FCB-8415-6DEE77C16A35}" type="slidenum">
+              <a:rPr lang="en-US" smtClean="0"/>
+              <a:pPr/>
+              <a:t>10</a:t>
+            </a:fld>
+            <a:endParaRPr lang="en-US" dirty="0"/>
           </a:p>
         </p:txBody>
       </p:sp>
@@ -14451,7 +14819,7 @@
 </file>
 
 <file path=ppt/slides/slide4.xml><?xml version="1.0" encoding="utf-8"?>
-<p:sld xmlns:a="http://schemas.openxmlformats.org/drawingml/2006/main" xmlns:p="http://schemas.openxmlformats.org/presentationml/2006/main" xmlns:r="http://schemas.openxmlformats.org/officeDocument/2006/relationships">
+<p:sld xmlns:a="http://schemas.openxmlformats.org/drawingml/2006/main" xmlns:r="http://schemas.openxmlformats.org/officeDocument/2006/relationships" xmlns:p="http://schemas.openxmlformats.org/presentationml/2006/main">
   <p:cSld>
     <p:spTree>
       <p:nvGrpSpPr>
@@ -14459,7 +14827,14 @@
         <p:cNvGrpSpPr/>
         <p:nvPr/>
       </p:nvGrpSpPr>
-      <p:grpSpPr/>
+      <p:grpSpPr>
+        <a:xfrm>
+          <a:off x="0" y="0"/>
+          <a:ext cx="0" cy="0"/>
+          <a:chOff x="0" y="0"/>
+          <a:chExt cx="0" cy="0"/>
+        </a:xfrm>
+      </p:grpSpPr>
       <p:sp>
         <p:nvSpPr>
           <p:cNvPr id="2" name="TextBox 1"/>
@@ -14477,7 +14852,7 @@
           <a:noFill/>
         </p:spPr>
         <p:txBody>
-          <a:bodyPr wrap="square" anchor="t" lIns="0" rIns="0" tIns="0" bIns="0">
+          <a:bodyPr wrap="square" lIns="0" tIns="0" rIns="0" bIns="0" anchor="t">
             <a:spAutoFit/>
           </a:bodyPr>
           <a:lstStyle/>
@@ -14512,7 +14887,7 @@
           <a:noFill/>
         </p:spPr>
         <p:txBody>
-          <a:bodyPr wrap="square" anchor="t" lIns="0" rIns="0" tIns="0" bIns="0">
+          <a:bodyPr wrap="square" lIns="0" tIns="0" rIns="0" bIns="0" anchor="t">
             <a:spAutoFit/>
           </a:bodyPr>
           <a:lstStyle/>
@@ -14568,7 +14943,7 @@
           </a:fontRef>
         </p:style>
         <p:txBody>
-          <a:bodyPr rtlCol="0" anchor="ctr" lIns="182880" rIns="182880" tIns="164592" bIns="164592" wrap="square"/>
+          <a:bodyPr wrap="square" lIns="182880" tIns="164592" rIns="182880" bIns="164592" rtlCol="0" anchor="ctr"/>
           <a:lstStyle/>
           <a:p>
             <a:pPr algn="ctr">
@@ -14682,7 +15057,7 @@
           </a:fontRef>
         </p:style>
         <p:txBody>
-          <a:bodyPr rtlCol="0" anchor="ctr" lIns="182880" rIns="182880" tIns="164592" bIns="164592" wrap="square"/>
+          <a:bodyPr wrap="square" lIns="182880" tIns="164592" rIns="182880" bIns="164592" rtlCol="0" anchor="ctr"/>
           <a:lstStyle/>
           <a:p>
             <a:pPr algn="ctr">
@@ -14691,7 +15066,7 @@
               </a:spcAft>
             </a:pPr>
             <a:r>
-              <a:rPr sz="2200" b="1" i="0">
+              <a:rPr sz="2200" b="1" i="0" dirty="0">
                 <a:solidFill>
                   <a:srgbClr val="990000"/>
                 </a:solidFill>
@@ -14703,7 +15078,7 @@
           <a:p>
             <a:pPr algn="l"/>
             <a:r>
-              <a:rPr sz="600" b="0" i="0">
+              <a:rPr sz="600" b="0" i="0" dirty="0">
                 <a:solidFill>
                   <a:srgbClr val="111827"/>
                 </a:solidFill>
@@ -14719,7 +15094,7 @@
               </a:spcAft>
             </a:pPr>
             <a:r>
-              <a:rPr sz="1800" b="0" i="0">
+              <a:rPr sz="1800" b="0" i="0" dirty="0">
                 <a:solidFill>
                   <a:srgbClr val="111827"/>
                 </a:solidFill>
@@ -14735,7 +15110,7 @@
               </a:spcAft>
             </a:pPr>
             <a:r>
-              <a:rPr sz="1800" b="0" i="0">
+              <a:rPr sz="1800" b="0" i="0" dirty="0">
                 <a:solidFill>
                   <a:srgbClr val="111827"/>
                 </a:solidFill>
@@ -14747,7 +15122,7 @@
           <a:p>
             <a:pPr algn="ctr"/>
             <a:r>
-              <a:rPr sz="1800" b="0" i="0">
+              <a:rPr sz="1800" b="0" i="0" dirty="0">
                 <a:solidFill>
                   <a:srgbClr val="111827"/>
                 </a:solidFill>
@@ -14760,71 +15135,31 @@
       </p:sp>
       <p:sp>
         <p:nvSpPr>
-          <p:cNvPr id="6" name="TextBox 5"/>
-          <p:cNvSpPr txBox="1"/>
-          <p:nvPr/>
+          <p:cNvPr id="202" name="Slide Number Placeholder 3">
+            <a:extLst>
+              <a:ext uri="{FF2B5EF4-FFF2-40B4-BE49-F238E27FC236}">
+                <a16:creationId xmlns:a16="http://schemas.microsoft.com/office/drawing/2014/main" id="{C0B996CF-7452-49BF-B277-569111839CD6}"/>
+              </a:ext>
+            </a:extLst>
+          </p:cNvPr>
+          <p:cNvSpPr>
+            <a:spLocks noGrp="1"/>
+          </p:cNvSpPr>
+          <p:nvPr>
+            <p:ph type="sldNum" sz="quarter" idx="11"/>
+          </p:nvPr>
         </p:nvSpPr>
-        <p:spPr>
-          <a:xfrm>
-            <a:off x="502920" y="5897880"/>
-            <a:ext cx="11247120" cy="502920"/>
-          </a:xfrm>
-          <a:prstGeom prst="rect">
-            <a:avLst/>
-          </a:prstGeom>
-          <a:noFill/>
-        </p:spPr>
+        <p:spPr/>
         <p:txBody>
-          <a:bodyPr wrap="square" anchor="t" lIns="0" rIns="0" tIns="0" bIns="0">
-            <a:spAutoFit/>
-          </a:bodyPr>
+          <a:bodyPr/>
           <a:lstStyle/>
           <a:p>
-            <a:pPr algn="ctr"/>
-            <a:r>
-              <a:rPr sz="2000" b="1" i="1">
-                <a:solidFill>
-                  <a:srgbClr val="011F5B"/>
-                </a:solidFill>
-                <a:latin typeface="Arial"/>
-              </a:rPr>
-              <a:t>But are these risks symmetric across the gender of the sponsor?</a:t>
-            </a:r>
-          </a:p>
-        </p:txBody>
-      </p:sp>
-      <p:sp>
-        <p:nvSpPr>
-          <p:cNvPr id="7" name="TextBox 6"/>
-          <p:cNvSpPr txBox="1"/>
-          <p:nvPr/>
-        </p:nvSpPr>
-        <p:spPr>
-          <a:xfrm>
-            <a:off x="10774375" y="6473952"/>
-            <a:ext cx="777240" cy="292608"/>
-          </a:xfrm>
-          <a:prstGeom prst="rect">
-            <a:avLst/>
-          </a:prstGeom>
-          <a:noFill/>
-        </p:spPr>
-        <p:txBody>
-          <a:bodyPr wrap="none" lIns="0" rIns="0" tIns="0" bIns="0" anchor="ctr">
-            <a:spAutoFit/>
-          </a:bodyPr>
-          <a:lstStyle/>
-          <a:p>
-            <a:pPr algn="r"/>
-            <a:r>
-              <a:rPr sz="1100" b="1">
-                <a:solidFill>
-                  <a:srgbClr val="FFFFFF"/>
-                </a:solidFill>
-                <a:latin typeface="Arial"/>
-              </a:rPr>
-              <a:t>4 / 20</a:t>
-            </a:r>
+            <a:fld id="{DD253308-F9C5-4FCB-8415-6DEE77C16A35}" type="slidenum">
+              <a:rPr lang="en-US" smtClean="0"/>
+              <a:pPr/>
+              <a:t>10</a:t>
+            </a:fld>
+            <a:endParaRPr lang="en-US" dirty="0"/>
           </a:p>
         </p:txBody>
       </p:sp>
@@ -14833,11 +15168,89 @@
   <p:clrMapOvr>
     <a:masterClrMapping/>
   </p:clrMapOvr>
+  <p:timing>
+    <p:tnLst>
+      <p:par>
+        <p:cTn id="1" dur="indefinite" restart="never" nodeType="tmRoot">
+          <p:childTnLst>
+            <p:seq concurrent="1" nextAc="seek">
+              <p:cTn id="2" dur="indefinite" nodeType="mainSeq">
+                <p:childTnLst>
+                  <p:par>
+                    <p:cTn id="3" fill="hold">
+                      <p:stCondLst>
+                        <p:cond delay="indefinite"/>
+                      </p:stCondLst>
+                      <p:childTnLst>
+                        <p:par>
+                          <p:cTn id="4" fill="hold">
+                            <p:stCondLst>
+                              <p:cond delay="0"/>
+                            </p:stCondLst>
+                            <p:childTnLst>
+                              <p:par>
+                                <p:cTn id="5" presetID="1" presetClass="entr" presetSubtype="0" fill="hold" grpId="0" nodeType="clickEffect">
+                                  <p:stCondLst>
+                                    <p:cond delay="0"/>
+                                  </p:stCondLst>
+                                  <p:childTnLst>
+                                    <p:set>
+                                      <p:cBhvr>
+                                        <p:cTn id="6" dur="1" fill="hold">
+                                          <p:stCondLst>
+                                            <p:cond delay="0"/>
+                                          </p:stCondLst>
+                                        </p:cTn>
+                                        <p:tgtEl>
+                                          <p:spTgt spid="5"/>
+                                        </p:tgtEl>
+                                        <p:attrNameLst>
+                                          <p:attrName>style.visibility</p:attrName>
+                                        </p:attrNameLst>
+                                      </p:cBhvr>
+                                      <p:to>
+                                        <p:strVal val="visible"/>
+                                      </p:to>
+                                    </p:set>
+                                  </p:childTnLst>
+                                </p:cTn>
+                              </p:par>
+                            </p:childTnLst>
+                          </p:cTn>
+                        </p:par>
+                      </p:childTnLst>
+                    </p:cTn>
+                  </p:par>
+                </p:childTnLst>
+              </p:cTn>
+              <p:prevCondLst>
+                <p:cond evt="onPrev" delay="0">
+                  <p:tgtEl>
+                    <p:sldTgt/>
+                  </p:tgtEl>
+                </p:cond>
+              </p:prevCondLst>
+              <p:nextCondLst>
+                <p:cond evt="onNext" delay="0">
+                  <p:tgtEl>
+                    <p:sldTgt/>
+                  </p:tgtEl>
+                </p:cond>
+              </p:nextCondLst>
+            </p:seq>
+          </p:childTnLst>
+        </p:cTn>
+      </p:par>
+    </p:tnLst>
+    <p:bldLst>
+      <p:bldP spid="5" grpId="0" animBg="1"/>
+    </p:bldLst>
+  </p:timing>
 </p:sld>
 </file>
 
 <file path=ppt/slides/slide5.xml><?xml version="1.0" encoding="utf-8"?>
-<p:sld xmlns:a="http://schemas.openxmlformats.org/drawingml/2006/main" xmlns:p="http://schemas.openxmlformats.org/presentationml/2006/main" xmlns:r="http://schemas.openxmlformats.org/officeDocument/2006/relationships">
+<p:sld xmlns:a="http://schemas.openxmlformats.org/drawingml/2006/main" xmlns:r="http://schemas.openxmlformats.org/officeDocument/2006/relationships" xmlns:p="http://schemas.openxmlformats.org/presentationml/2006/main">
   <p:cSld>
     <p:spTree>
       <p:nvGrpSpPr>
@@ -14845,7 +15258,14 @@
         <p:cNvGrpSpPr/>
         <p:nvPr/>
       </p:nvGrpSpPr>
-      <p:grpSpPr/>
+      <p:grpSpPr>
+        <a:xfrm>
+          <a:off x="0" y="0"/>
+          <a:ext cx="0" cy="0"/>
+          <a:chOff x="0" y="0"/>
+          <a:chExt cx="0" cy="0"/>
+        </a:xfrm>
+      </p:grpSpPr>
       <p:sp>
         <p:nvSpPr>
           <p:cNvPr id="2" name="TextBox 1"/>
@@ -14863,7 +15283,7 @@
           <a:noFill/>
         </p:spPr>
         <p:txBody>
-          <a:bodyPr wrap="square" anchor="t" lIns="0" rIns="0" tIns="0" bIns="0">
+          <a:bodyPr wrap="square" lIns="0" tIns="0" rIns="0" bIns="0" anchor="t">
             <a:spAutoFit/>
           </a:bodyPr>
           <a:lstStyle/>
@@ -14919,12 +15339,11 @@
           </a:fontRef>
         </p:style>
         <p:txBody>
-          <a:bodyPr rtlCol="0" anchor="ctr" lIns="320040" rIns="182880" tIns="201168" bIns="164592"/>
+          <a:bodyPr lIns="320040" tIns="201168" rIns="182880" bIns="164592" rtlCol="0" anchor="ctr"/>
           <a:lstStyle/>
           <a:p>
-            <a:pPr algn="ctr"/>
-            <a:r>
-              <a:rPr sz="2200" b="1">
+            <a:r>
+              <a:rPr sz="2200" b="1" dirty="0">
                 <a:solidFill>
                   <a:srgbClr val="990000"/>
                 </a:solidFill>
@@ -14933,30 +15352,19 @@
               <a:t>RQ1    </a:t>
             </a:r>
             <a:r>
-              <a:rPr sz="2200" b="1">
+              <a:rPr lang="en-US" sz="2200" b="1" dirty="0">
                 <a:solidFill>
                   <a:srgbClr val="011F5B"/>
                 </a:solidFill>
-                <a:latin typeface="Arial"/>
               </a:rPr>
-              <a:t>Does endorser gender shape how outcomes update trust?</a:t>
-            </a:r>
-          </a:p>
-          <a:p>
-            <a:pPr>
-              <a:spcBef>
-                <a:spcPts val="800"/>
-              </a:spcBef>
-            </a:pPr>
-            <a:r>
-              <a:rPr sz="1500" i="1">
-                <a:solidFill>
-                  <a:srgbClr val="6B7280"/>
-                </a:solidFill>
-                <a:latin typeface="Arial"/>
-              </a:rPr>
-              <a:t>After observing one success or failure, do audiences treat male and female sponsors symmetrically?</a:t>
-            </a:r>
+              <a:t>When a sponsor’s protégé succeeds or fails, does the sponsor’s gender shape how audiences react?</a:t>
+            </a:r>
+            <a:endParaRPr sz="2200" b="1" dirty="0">
+              <a:solidFill>
+                <a:srgbClr val="011F5B"/>
+              </a:solidFill>
+              <a:latin typeface="Arial"/>
+            </a:endParaRPr>
           </a:p>
         </p:txBody>
       </p:sp>
@@ -14998,12 +15406,11 @@
           </a:fontRef>
         </p:style>
         <p:txBody>
-          <a:bodyPr rtlCol="0" anchor="ctr" lIns="320040" rIns="182880" tIns="201168" bIns="164592"/>
+          <a:bodyPr lIns="320040" tIns="201168" rIns="182880" bIns="164592" rtlCol="0" anchor="ctr"/>
           <a:lstStyle/>
           <a:p>
-            <a:pPr algn="ctr"/>
-            <a:r>
-              <a:rPr sz="2200" b="1">
+            <a:r>
+              <a:rPr sz="2200" b="1" dirty="0">
                 <a:solidFill>
                   <a:srgbClr val="990000"/>
                 </a:solidFill>
@@ -15012,30 +15419,20 @@
               <a:t>RQ2    </a:t>
             </a:r>
             <a:r>
-              <a:rPr sz="2200" b="1">
+              <a:rPr lang="en-US" sz="2200" b="1" dirty="0">
                 <a:solidFill>
                   <a:srgbClr val="011F5B"/>
                 </a:solidFill>
                 <a:latin typeface="Arial"/>
               </a:rPr>
-              <a:t>Does endorsement strength moderate the bias?</a:t>
-            </a:r>
-          </a:p>
-          <a:p>
-            <a:pPr>
-              <a:spcBef>
-                <a:spcPts val="800"/>
-              </a:spcBef>
-            </a:pPr>
-            <a:r>
-              <a:rPr sz="1500" i="1">
-                <a:solidFill>
-                  <a:srgbClr val="6B7280"/>
-                </a:solidFill>
-                <a:latin typeface="Arial"/>
-              </a:rPr>
-              <a:t>Are confident vs. hedged endorsements treated differently as a function of sponsor gender?</a:t>
-            </a:r>
+              <a:t>Does it matter how confident the sponsor was when they made                         the endorsement? </a:t>
+            </a:r>
+            <a:endParaRPr sz="2200" b="1" dirty="0">
+              <a:solidFill>
+                <a:srgbClr val="011F5B"/>
+              </a:solidFill>
+              <a:latin typeface="Arial"/>
+            </a:endParaRPr>
           </a:p>
         </p:txBody>
       </p:sp>
@@ -15077,12 +15474,11 @@
           </a:fontRef>
         </p:style>
         <p:txBody>
-          <a:bodyPr rtlCol="0" anchor="ctr" lIns="320040" rIns="182880" tIns="201168" bIns="164592"/>
+          <a:bodyPr lIns="320040" tIns="201168" rIns="182880" bIns="164592" rtlCol="0" anchor="ctr"/>
           <a:lstStyle/>
           <a:p>
-            <a:pPr algn="ctr"/>
-            <a:r>
-              <a:rPr sz="2200" b="1">
+            <a:r>
+              <a:rPr sz="2200" b="1" dirty="0">
                 <a:solidFill>
                   <a:srgbClr val="990000"/>
                 </a:solidFill>
@@ -15091,65 +15487,44 @@
               <a:t>RQ3    </a:t>
             </a:r>
             <a:r>
-              <a:rPr sz="2200" b="1">
+              <a:rPr lang="en-US" sz="2200" b="1" dirty="0">
                 <a:solidFill>
                   <a:srgbClr val="011F5B"/>
                 </a:solidFill>
                 <a:latin typeface="Arial"/>
               </a:rPr>
-              <a:t>Does the bias exist before any outcome is observed?</a:t>
-            </a:r>
-          </a:p>
-          <a:p>
-            <a:pPr>
-              <a:spcBef>
-                <a:spcPts val="800"/>
-              </a:spcBef>
-            </a:pPr>
-            <a:r>
-              <a:rPr sz="1500" i="1">
-                <a:solidFill>
-                  <a:srgbClr val="6B7280"/>
-                </a:solidFill>
-                <a:latin typeface="Arial"/>
-              </a:rPr>
-              <a:t>Or does it emerge only after evaluators see the protégé succeed or fail?</a:t>
+              <a:t>Are male and female sponsors trusted equally before any outcome is observed?</a:t>
             </a:r>
           </a:p>
         </p:txBody>
       </p:sp>
       <p:sp>
         <p:nvSpPr>
-          <p:cNvPr id="6" name="TextBox 5"/>
-          <p:cNvSpPr txBox="1"/>
-          <p:nvPr/>
+          <p:cNvPr id="203" name="Slide Number Placeholder 3">
+            <a:extLst>
+              <a:ext uri="{FF2B5EF4-FFF2-40B4-BE49-F238E27FC236}">
+                <a16:creationId xmlns:a16="http://schemas.microsoft.com/office/drawing/2014/main" id="{CB360B25-41EB-4CDC-B611-783C980A8F4B}"/>
+              </a:ext>
+            </a:extLst>
+          </p:cNvPr>
+          <p:cNvSpPr>
+            <a:spLocks noGrp="1"/>
+          </p:cNvSpPr>
+          <p:nvPr>
+            <p:ph type="sldNum" sz="quarter" idx="11"/>
+          </p:nvPr>
         </p:nvSpPr>
-        <p:spPr>
-          <a:xfrm>
-            <a:off x="10774375" y="6473952"/>
-            <a:ext cx="777240" cy="292608"/>
-          </a:xfrm>
-          <a:prstGeom prst="rect">
-            <a:avLst/>
-          </a:prstGeom>
-          <a:noFill/>
-        </p:spPr>
+        <p:spPr/>
         <p:txBody>
-          <a:bodyPr wrap="none" lIns="0" rIns="0" tIns="0" bIns="0" anchor="ctr">
-            <a:spAutoFit/>
-          </a:bodyPr>
+          <a:bodyPr/>
           <a:lstStyle/>
           <a:p>
-            <a:pPr algn="r"/>
-            <a:r>
-              <a:rPr sz="1100" b="1">
-                <a:solidFill>
-                  <a:srgbClr val="FFFFFF"/>
-                </a:solidFill>
-                <a:latin typeface="Arial"/>
-              </a:rPr>
-              <a:t>5 / 20</a:t>
-            </a:r>
+            <a:fld id="{DD253308-F9C5-4FCB-8415-6DEE77C16A35}" type="slidenum">
+              <a:rPr lang="en-US" smtClean="0"/>
+              <a:pPr/>
+              <a:t>10</a:t>
+            </a:fld>
+            <a:endParaRPr lang="en-US" dirty="0"/>
           </a:p>
         </p:txBody>
       </p:sp>
@@ -15158,11 +15533,89 @@
   <p:clrMapOvr>
     <a:masterClrMapping/>
   </p:clrMapOvr>
+  <p:timing>
+    <p:tnLst>
+      <p:par>
+        <p:cTn id="1" dur="indefinite" restart="never" nodeType="tmRoot">
+          <p:childTnLst>
+            <p:seq concurrent="1" nextAc="seek">
+              <p:cTn id="2" dur="indefinite" nodeType="mainSeq">
+                <p:childTnLst>
+                  <p:par>
+                    <p:cTn id="3" fill="hold">
+                      <p:stCondLst>
+                        <p:cond delay="indefinite"/>
+                      </p:stCondLst>
+                      <p:childTnLst>
+                        <p:par>
+                          <p:cTn id="4" fill="hold">
+                            <p:stCondLst>
+                              <p:cond delay="0"/>
+                            </p:stCondLst>
+                            <p:childTnLst>
+                              <p:par>
+                                <p:cTn id="5" presetID="1" presetClass="entr" presetSubtype="0" fill="hold" grpId="0" nodeType="clickEffect">
+                                  <p:stCondLst>
+                                    <p:cond delay="0"/>
+                                  </p:stCondLst>
+                                  <p:childTnLst>
+                                    <p:set>
+                                      <p:cBhvr>
+                                        <p:cTn id="6" dur="1" fill="hold">
+                                          <p:stCondLst>
+                                            <p:cond delay="0"/>
+                                          </p:stCondLst>
+                                        </p:cTn>
+                                        <p:tgtEl>
+                                          <p:spTgt spid="3"/>
+                                        </p:tgtEl>
+                                        <p:attrNameLst>
+                                          <p:attrName>style.visibility</p:attrName>
+                                        </p:attrNameLst>
+                                      </p:cBhvr>
+                                      <p:to>
+                                        <p:strVal val="visible"/>
+                                      </p:to>
+                                    </p:set>
+                                  </p:childTnLst>
+                                </p:cTn>
+                              </p:par>
+                            </p:childTnLst>
+                          </p:cTn>
+                        </p:par>
+                      </p:childTnLst>
+                    </p:cTn>
+                  </p:par>
+                </p:childTnLst>
+              </p:cTn>
+              <p:prevCondLst>
+                <p:cond evt="onPrev" delay="0">
+                  <p:tgtEl>
+                    <p:sldTgt/>
+                  </p:tgtEl>
+                </p:cond>
+              </p:prevCondLst>
+              <p:nextCondLst>
+                <p:cond evt="onNext" delay="0">
+                  <p:tgtEl>
+                    <p:sldTgt/>
+                  </p:tgtEl>
+                </p:cond>
+              </p:nextCondLst>
+            </p:seq>
+          </p:childTnLst>
+        </p:cTn>
+      </p:par>
+    </p:tnLst>
+    <p:bldLst>
+      <p:bldP spid="3" grpId="0" animBg="1"/>
+    </p:bldLst>
+  </p:timing>
 </p:sld>
 </file>
 
 <file path=ppt/slides/slide6.xml><?xml version="1.0" encoding="utf-8"?>
-<p:sld xmlns:a="http://schemas.openxmlformats.org/drawingml/2006/main" xmlns:p="http://schemas.openxmlformats.org/presentationml/2006/main" xmlns:r="http://schemas.openxmlformats.org/officeDocument/2006/relationships">
+<p:sld xmlns:a="http://schemas.openxmlformats.org/drawingml/2006/main" xmlns:r="http://schemas.openxmlformats.org/officeDocument/2006/relationships" xmlns:p="http://schemas.openxmlformats.org/presentationml/2006/main">
   <p:cSld>
     <p:spTree>
       <p:nvGrpSpPr>
@@ -15170,7 +15623,14 @@
         <p:cNvGrpSpPr/>
         <p:nvPr/>
       </p:nvGrpSpPr>
-      <p:grpSpPr/>
+      <p:grpSpPr>
+        <a:xfrm>
+          <a:off x="0" y="0"/>
+          <a:ext cx="0" cy="0"/>
+          <a:chOff x="0" y="0"/>
+          <a:chExt cx="0" cy="0"/>
+        </a:xfrm>
+      </p:grpSpPr>
       <p:sp>
         <p:nvSpPr>
           <p:cNvPr id="2" name="TextBox 1"/>
@@ -15180,7 +15640,7 @@
         <p:spPr>
           <a:xfrm>
             <a:off x="502920" y="320040"/>
-            <a:ext cx="11185855" cy="731520"/>
+            <a:ext cx="11185855" cy="492443"/>
           </a:xfrm>
           <a:prstGeom prst="rect">
             <a:avLst/>
@@ -15188,20 +15648,29 @@
           <a:noFill/>
         </p:spPr>
         <p:txBody>
-          <a:bodyPr wrap="square" anchor="t" lIns="0" rIns="0" tIns="0" bIns="0">
+          <a:bodyPr wrap="square" lIns="0" tIns="0" rIns="0" bIns="0" anchor="t">
             <a:spAutoFit/>
           </a:bodyPr>
           <a:lstStyle/>
           <a:p>
             <a:pPr algn="l"/>
             <a:r>
-              <a:rPr sz="3200" b="1" i="0">
+              <a:rPr lang="en-US" sz="3200" b="1" i="0" dirty="0">
                 <a:solidFill>
                   <a:srgbClr val="011F5B"/>
                 </a:solidFill>
                 <a:latin typeface="Arial"/>
               </a:rPr>
-              <a:t>Multi-stage lab experiment</a:t>
+              <a:t>Three</a:t>
+            </a:r>
+            <a:r>
+              <a:rPr sz="3200" b="1" i="0" dirty="0">
+                <a:solidFill>
+                  <a:srgbClr val="011F5B"/>
+                </a:solidFill>
+                <a:latin typeface="Arial"/>
+              </a:rPr>
+              <a:t>-stage lab experiment</a:t>
             </a:r>
           </a:p>
         </p:txBody>
@@ -15244,12 +15713,12 @@
           </a:fontRef>
         </p:style>
         <p:txBody>
-          <a:bodyPr rtlCol="0" anchor="ctr" lIns="256032" rIns="256032" tIns="274320" bIns="164592"/>
+          <a:bodyPr lIns="256032" tIns="274320" rIns="256032" bIns="164592" rtlCol="0" anchor="ctr"/>
           <a:lstStyle/>
           <a:p>
             <a:pPr algn="ctr"/>
             <a:r>
-              <a:rPr sz="2000" b="1">
+              <a:rPr sz="3200" b="1" dirty="0">
                 <a:solidFill>
                   <a:srgbClr val="990000"/>
                 </a:solidFill>
@@ -15265,7 +15734,7 @@
               </a:spcBef>
             </a:pPr>
             <a:r>
-              <a:rPr sz="2200" b="1">
+              <a:rPr sz="2200" b="1" dirty="0">
                 <a:solidFill>
                   <a:srgbClr val="011F5B"/>
                 </a:solidFill>
@@ -15281,7 +15750,7 @@
               </a:spcBef>
             </a:pPr>
             <a:r>
-              <a:rPr sz="1500">
+              <a:rPr sz="1500" dirty="0">
                 <a:solidFill>
                   <a:srgbClr val="111827"/>
                 </a:solidFill>
@@ -15297,7 +15766,7 @@
               </a:spcBef>
             </a:pPr>
             <a:r>
-              <a:rPr sz="1500">
+              <a:rPr sz="1500" dirty="0">
                 <a:solidFill>
                   <a:srgbClr val="111827"/>
                 </a:solidFill>
@@ -15313,13 +15782,31 @@
               </a:spcBef>
             </a:pPr>
             <a:r>
-              <a:rPr sz="1500">
+              <a:rPr sz="1500" dirty="0">
                 <a:solidFill>
                   <a:srgbClr val="111827"/>
                 </a:solidFill>
                 <a:latin typeface="Arial"/>
               </a:rPr>
-              <a:t>We use the verifiable scores to</a:t>
+              <a:t>We use the </a:t>
+            </a:r>
+            <a:r>
+              <a:rPr lang="en-US" sz="1500" dirty="0">
+                <a:solidFill>
+                  <a:srgbClr val="111827"/>
+                </a:solidFill>
+                <a:latin typeface="Arial"/>
+              </a:rPr>
+              <a:t>posted</a:t>
+            </a:r>
+            <a:r>
+              <a:rPr sz="1500" dirty="0">
+                <a:solidFill>
+                  <a:srgbClr val="111827"/>
+                </a:solidFill>
+                <a:latin typeface="Arial"/>
+              </a:rPr>
+              <a:t> scores to</a:t>
             </a:r>
           </a:p>
           <a:p>
@@ -15329,7 +15816,7 @@
               </a:spcBef>
             </a:pPr>
             <a:r>
-              <a:rPr sz="1500">
+              <a:rPr sz="1500" dirty="0">
                 <a:solidFill>
                   <a:srgbClr val="111827"/>
                 </a:solidFill>
@@ -15378,12 +15865,12 @@
           </a:fontRef>
         </p:style>
         <p:txBody>
-          <a:bodyPr rtlCol="0" anchor="ctr" lIns="256032" rIns="256032" tIns="274320" bIns="164592"/>
+          <a:bodyPr lIns="256032" tIns="274320" rIns="256032" bIns="164592" rtlCol="0" anchor="ctr"/>
           <a:lstStyle/>
           <a:p>
             <a:pPr algn="ctr"/>
             <a:r>
-              <a:rPr sz="2000" b="1">
+              <a:rPr sz="3200" b="1" dirty="0">
                 <a:solidFill>
                   <a:srgbClr val="990000"/>
                 </a:solidFill>
@@ -15399,7 +15886,7 @@
               </a:spcBef>
             </a:pPr>
             <a:r>
-              <a:rPr sz="2200" b="1">
+              <a:rPr sz="2200" b="1" dirty="0">
                 <a:solidFill>
                   <a:srgbClr val="011F5B"/>
                 </a:solidFill>
@@ -15415,7 +15902,7 @@
               </a:spcBef>
             </a:pPr>
             <a:r>
-              <a:rPr sz="1500">
+              <a:rPr sz="1500" dirty="0">
                 <a:solidFill>
                   <a:srgbClr val="111827"/>
                 </a:solidFill>
@@ -15431,7 +15918,7 @@
               </a:spcBef>
             </a:pPr>
             <a:r>
-              <a:rPr sz="1500">
+              <a:rPr sz="1500" dirty="0">
                 <a:solidFill>
                   <a:srgbClr val="111827"/>
                 </a:solidFill>
@@ -15447,7 +15934,7 @@
               </a:spcBef>
             </a:pPr>
             <a:r>
-              <a:rPr sz="1500">
+              <a:rPr sz="1500" dirty="0">
                 <a:solidFill>
                   <a:srgbClr val="111827"/>
                 </a:solidFill>
@@ -15455,15 +15942,17 @@
               </a:rPr>
               <a:t>perform better, and how confident</a:t>
             </a:r>
-          </a:p>
-          <a:p>
-            <a:pPr algn="l">
-              <a:spcBef>
-                <a:spcPts val="0"/>
-              </a:spcBef>
-            </a:pPr>
-            <a:r>
-              <a:rPr sz="1500">
+            <a:r>
+              <a:rPr lang="en-US" sz="1500" dirty="0">
+                <a:solidFill>
+                  <a:srgbClr val="111827"/>
+                </a:solidFill>
+                <a:latin typeface="Arial"/>
+              </a:rPr>
+              <a:t> </a:t>
+            </a:r>
+            <a:r>
+              <a:rPr sz="1500" dirty="0">
                 <a:solidFill>
                   <a:srgbClr val="111827"/>
                 </a:solidFill>
@@ -15512,12 +16001,12 @@
           </a:fontRef>
         </p:style>
         <p:txBody>
-          <a:bodyPr rtlCol="0" anchor="ctr" lIns="256032" rIns="256032" tIns="274320" bIns="164592"/>
+          <a:bodyPr lIns="256032" tIns="274320" rIns="256032" bIns="164592" rtlCol="0" anchor="ctr"/>
           <a:lstStyle/>
           <a:p>
             <a:pPr algn="ctr"/>
             <a:r>
-              <a:rPr sz="2000" b="1">
+              <a:rPr sz="3200" b="1" dirty="0">
                 <a:solidFill>
                   <a:srgbClr val="990000"/>
                 </a:solidFill>
@@ -15533,7 +16022,7 @@
               </a:spcBef>
             </a:pPr>
             <a:r>
-              <a:rPr sz="2200" b="1">
+              <a:rPr sz="2200" b="1" dirty="0">
                 <a:solidFill>
                   <a:srgbClr val="011F5B"/>
                 </a:solidFill>
@@ -15549,7 +16038,7 @@
               </a:spcBef>
             </a:pPr>
             <a:r>
-              <a:rPr sz="1500">
+              <a:rPr sz="1500" dirty="0">
                 <a:solidFill>
                   <a:srgbClr val="111827"/>
                 </a:solidFill>
@@ -15557,15 +16046,17 @@
               </a:rPr>
               <a:t>Evaluators bet on a sponsor's</a:t>
             </a:r>
-          </a:p>
-          <a:p>
-            <a:pPr algn="l">
-              <a:spcBef>
-                <a:spcPts val="0"/>
-              </a:spcBef>
-            </a:pPr>
-            <a:r>
-              <a:rPr sz="1500">
+            <a:r>
+              <a:rPr lang="en-US" sz="1500" dirty="0">
+                <a:solidFill>
+                  <a:srgbClr val="111827"/>
+                </a:solidFill>
+                <a:latin typeface="Arial"/>
+              </a:rPr>
+              <a:t> </a:t>
+            </a:r>
+            <a:r>
+              <a:rPr sz="1500" dirty="0">
                 <a:solidFill>
                   <a:srgbClr val="111827"/>
                 </a:solidFill>
@@ -15573,31 +16064,53 @@
               </a:rPr>
               <a:t>endorsement, see the outcome,</a:t>
             </a:r>
-          </a:p>
-          <a:p>
-            <a:pPr algn="l">
-              <a:spcBef>
-                <a:spcPts val="0"/>
-              </a:spcBef>
-            </a:pPr>
-            <a:r>
-              <a:rPr sz="1500">
+            <a:r>
+              <a:rPr lang="en-US" sz="1500" dirty="0">
                 <a:solidFill>
                   <a:srgbClr val="111827"/>
                 </a:solidFill>
                 <a:latin typeface="Arial"/>
               </a:rPr>
-              <a:t>then bet on a second endorsement</a:t>
-            </a:r>
-          </a:p>
-          <a:p>
-            <a:pPr algn="l">
-              <a:spcBef>
-                <a:spcPts val="0"/>
-              </a:spcBef>
-            </a:pPr>
-            <a:r>
-              <a:rPr sz="1500">
+              <a:t> </a:t>
+            </a:r>
+            <a:r>
+              <a:rPr sz="1500" dirty="0">
+                <a:solidFill>
+                  <a:srgbClr val="111827"/>
+                </a:solidFill>
+                <a:latin typeface="Arial"/>
+              </a:rPr>
+              <a:t>then bet on a second</a:t>
+            </a:r>
+            <a:r>
+              <a:rPr lang="en-US" sz="1500" dirty="0">
+                <a:solidFill>
+                  <a:srgbClr val="111827"/>
+                </a:solidFill>
+                <a:latin typeface="Arial"/>
+              </a:rPr>
+              <a:t> </a:t>
+            </a:r>
+            <a:r>
+              <a:rPr sz="1500" dirty="0">
+                <a:solidFill>
+                  <a:srgbClr val="111827"/>
+                </a:solidFill>
+                <a:latin typeface="Arial"/>
+              </a:rPr>
+              <a:t>endorsement</a:t>
+            </a:r>
+            <a:r>
+              <a:rPr lang="en-US" sz="1500" dirty="0">
+                <a:solidFill>
+                  <a:srgbClr val="111827"/>
+                </a:solidFill>
+                <a:latin typeface="Arial"/>
+              </a:rPr>
+              <a:t> </a:t>
+            </a:r>
+            <a:r>
+              <a:rPr sz="1500" dirty="0">
                 <a:solidFill>
                   <a:srgbClr val="111827"/>
                 </a:solidFill>
@@ -15610,71 +16123,31 @@
       </p:sp>
       <p:sp>
         <p:nvSpPr>
-          <p:cNvPr id="6" name="TextBox 5"/>
-          <p:cNvSpPr txBox="1"/>
-          <p:nvPr/>
+          <p:cNvPr id="204" name="Slide Number Placeholder 3">
+            <a:extLst>
+              <a:ext uri="{FF2B5EF4-FFF2-40B4-BE49-F238E27FC236}">
+                <a16:creationId xmlns:a16="http://schemas.microsoft.com/office/drawing/2014/main" id="{E0E0B616-1893-4626-88F5-27D4B80A4217}"/>
+              </a:ext>
+            </a:extLst>
+          </p:cNvPr>
+          <p:cNvSpPr>
+            <a:spLocks noGrp="1"/>
+          </p:cNvSpPr>
+          <p:nvPr>
+            <p:ph type="sldNum" sz="quarter" idx="11"/>
+          </p:nvPr>
         </p:nvSpPr>
-        <p:spPr>
-          <a:xfrm>
-            <a:off x="502920" y="6080760"/>
-            <a:ext cx="11247120" cy="457200"/>
-          </a:xfrm>
-          <a:prstGeom prst="rect">
-            <a:avLst/>
-          </a:prstGeom>
-          <a:noFill/>
-        </p:spPr>
+        <p:spPr/>
         <p:txBody>
-          <a:bodyPr wrap="square" anchor="t" lIns="0" rIns="0" tIns="0" bIns="0">
-            <a:spAutoFit/>
-          </a:bodyPr>
+          <a:bodyPr/>
           <a:lstStyle/>
           <a:p>
-            <a:pPr algn="ctr"/>
-            <a:r>
-              <a:rPr sz="1600" b="1" i="1">
-                <a:solidFill>
-                  <a:srgbClr val="011F5B"/>
-                </a:solidFill>
-                <a:latin typeface="Arial"/>
-              </a:rPr>
-              <a:t>Today's talk focuses on Stage 3.</a:t>
-            </a:r>
-          </a:p>
-        </p:txBody>
-      </p:sp>
-      <p:sp>
-        <p:nvSpPr>
-          <p:cNvPr id="7" name="TextBox 6"/>
-          <p:cNvSpPr txBox="1"/>
-          <p:nvPr/>
-        </p:nvSpPr>
-        <p:spPr>
-          <a:xfrm>
-            <a:off x="10774375" y="6473952"/>
-            <a:ext cx="777240" cy="292608"/>
-          </a:xfrm>
-          <a:prstGeom prst="rect">
-            <a:avLst/>
-          </a:prstGeom>
-          <a:noFill/>
-        </p:spPr>
-        <p:txBody>
-          <a:bodyPr wrap="none" lIns="0" rIns="0" tIns="0" bIns="0" anchor="ctr">
-            <a:spAutoFit/>
-          </a:bodyPr>
-          <a:lstStyle/>
-          <a:p>
-            <a:pPr algn="r"/>
-            <a:r>
-              <a:rPr sz="1100" b="1">
-                <a:solidFill>
-                  <a:srgbClr val="FFFFFF"/>
-                </a:solidFill>
-                <a:latin typeface="Arial"/>
-              </a:rPr>
-              <a:t>6 / 20</a:t>
-            </a:r>
+            <a:fld id="{DD253308-F9C5-4FCB-8415-6DEE77C16A35}" type="slidenum">
+              <a:rPr lang="en-US" smtClean="0"/>
+              <a:pPr/>
+              <a:t>10</a:t>
+            </a:fld>
+            <a:endParaRPr lang="en-US" dirty="0"/>
           </a:p>
         </p:txBody>
       </p:sp>
@@ -15683,11 +16156,135 @@
   <p:clrMapOvr>
     <a:masterClrMapping/>
   </p:clrMapOvr>
+  <p:timing>
+    <p:tnLst>
+      <p:par>
+        <p:cTn id="1" dur="indefinite" restart="never" nodeType="tmRoot">
+          <p:childTnLst>
+            <p:seq concurrent="1" nextAc="seek">
+              <p:cTn id="2" dur="indefinite" nodeType="mainSeq">
+                <p:childTnLst>
+                  <p:par>
+                    <p:cTn id="3" fill="hold">
+                      <p:stCondLst>
+                        <p:cond delay="indefinite"/>
+                      </p:stCondLst>
+                      <p:childTnLst>
+                        <p:par>
+                          <p:cTn id="4" fill="hold">
+                            <p:stCondLst>
+                              <p:cond delay="0"/>
+                            </p:stCondLst>
+                            <p:childTnLst>
+                              <p:par>
+                                <p:cTn id="5" presetID="1" presetClass="entr" presetSubtype="0" fill="hold" grpId="0" nodeType="clickEffect">
+                                  <p:stCondLst>
+                                    <p:cond delay="0"/>
+                                  </p:stCondLst>
+                                  <p:childTnLst>
+                                    <p:set>
+                                      <p:cBhvr>
+                                        <p:cTn id="6" dur="1" fill="hold">
+                                          <p:stCondLst>
+                                            <p:cond delay="0"/>
+                                          </p:stCondLst>
+                                        </p:cTn>
+                                        <p:tgtEl>
+                                          <p:spTgt spid="4"/>
+                                        </p:tgtEl>
+                                        <p:attrNameLst>
+                                          <p:attrName>style.visibility</p:attrName>
+                                        </p:attrNameLst>
+                                      </p:cBhvr>
+                                      <p:to>
+                                        <p:strVal val="visible"/>
+                                      </p:to>
+                                    </p:set>
+                                  </p:childTnLst>
+                                </p:cTn>
+                              </p:par>
+                            </p:childTnLst>
+                          </p:cTn>
+                        </p:par>
+                      </p:childTnLst>
+                    </p:cTn>
+                  </p:par>
+                  <p:par>
+                    <p:cTn id="7" fill="hold">
+                      <p:stCondLst>
+                        <p:cond delay="indefinite"/>
+                      </p:stCondLst>
+                      <p:childTnLst>
+                        <p:par>
+                          <p:cTn id="8" fill="hold">
+                            <p:stCondLst>
+                              <p:cond delay="0"/>
+                            </p:stCondLst>
+                            <p:childTnLst>
+                              <p:par>
+                                <p:cTn id="9" presetID="1" presetClass="entr" presetSubtype="0" fill="hold" grpId="0" nodeType="clickEffect">
+                                  <p:stCondLst>
+                                    <p:cond delay="0"/>
+                                  </p:stCondLst>
+                                  <p:childTnLst>
+                                    <p:set>
+                                      <p:cBhvr>
+                                        <p:cTn id="10" dur="1" fill="hold">
+                                          <p:stCondLst>
+                                            <p:cond delay="0"/>
+                                          </p:stCondLst>
+                                        </p:cTn>
+                                        <p:tgtEl>
+                                          <p:spTgt spid="5"/>
+                                        </p:tgtEl>
+                                        <p:attrNameLst>
+                                          <p:attrName>style.visibility</p:attrName>
+                                        </p:attrNameLst>
+                                      </p:cBhvr>
+                                      <p:to>
+                                        <p:strVal val="visible"/>
+                                      </p:to>
+                                    </p:set>
+                                  </p:childTnLst>
+                                </p:cTn>
+                              </p:par>
+                            </p:childTnLst>
+                          </p:cTn>
+                        </p:par>
+                      </p:childTnLst>
+                    </p:cTn>
+                  </p:par>
+                </p:childTnLst>
+              </p:cTn>
+              <p:prevCondLst>
+                <p:cond evt="onPrev" delay="0">
+                  <p:tgtEl>
+                    <p:sldTgt/>
+                  </p:tgtEl>
+                </p:cond>
+              </p:prevCondLst>
+              <p:nextCondLst>
+                <p:cond evt="onNext" delay="0">
+                  <p:tgtEl>
+                    <p:sldTgt/>
+                  </p:tgtEl>
+                </p:cond>
+              </p:nextCondLst>
+            </p:seq>
+          </p:childTnLst>
+        </p:cTn>
+      </p:par>
+    </p:tnLst>
+    <p:bldLst>
+      <p:bldP spid="4" grpId="0" animBg="1"/>
+      <p:bldP spid="5" grpId="0" animBg="1"/>
+    </p:bldLst>
+  </p:timing>
 </p:sld>
 </file>
 
 <file path=ppt/slides/slide7.xml><?xml version="1.0" encoding="utf-8"?>
-<p:sld xmlns:a="http://schemas.openxmlformats.org/drawingml/2006/main" xmlns:p="http://schemas.openxmlformats.org/presentationml/2006/main" xmlns:r="http://schemas.openxmlformats.org/officeDocument/2006/relationships">
+<p:sld xmlns:a="http://schemas.openxmlformats.org/drawingml/2006/main" xmlns:r="http://schemas.openxmlformats.org/officeDocument/2006/relationships" xmlns:p="http://schemas.openxmlformats.org/presentationml/2006/main">
   <p:cSld>
     <p:spTree>
       <p:nvGrpSpPr>
@@ -15695,7 +16292,14 @@
         <p:cNvGrpSpPr/>
         <p:nvPr/>
       </p:nvGrpSpPr>
-      <p:grpSpPr/>
+      <p:grpSpPr>
+        <a:xfrm>
+          <a:off x="0" y="0"/>
+          <a:ext cx="0" cy="0"/>
+          <a:chOff x="0" y="0"/>
+          <a:chExt cx="0" cy="0"/>
+        </a:xfrm>
+      </p:grpSpPr>
       <p:sp>
         <p:nvSpPr>
           <p:cNvPr id="2" name="TextBox 1"/>
@@ -15713,7 +16317,7 @@
           <a:noFill/>
         </p:spPr>
         <p:txBody>
-          <a:bodyPr wrap="square" anchor="t" lIns="0" rIns="0" tIns="0" bIns="0">
+          <a:bodyPr wrap="square" lIns="0" tIns="0" rIns="0" bIns="0" anchor="t">
             <a:spAutoFit/>
           </a:bodyPr>
           <a:lstStyle/>
@@ -15739,7 +16343,7 @@
         </p:nvSpPr>
         <p:spPr>
           <a:xfrm>
-            <a:off x="502920" y="1051560"/>
+            <a:off x="502920" y="918574"/>
             <a:ext cx="11247120" cy="548640"/>
           </a:xfrm>
           <a:prstGeom prst="rect">
@@ -15748,14 +16352,14 @@
           <a:noFill/>
         </p:spPr>
         <p:txBody>
-          <a:bodyPr wrap="square" anchor="t" lIns="0" rIns="0" tIns="0" bIns="0">
+          <a:bodyPr wrap="square" lIns="0" tIns="0" rIns="0" bIns="0" anchor="t">
             <a:spAutoFit/>
           </a:bodyPr>
           <a:lstStyle/>
           <a:p>
             <a:pPr algn="l"/>
             <a:r>
-              <a:rPr sz="1800" b="0" i="1">
+              <a:rPr sz="1800" b="0" i="1" dirty="0">
                 <a:solidFill>
                   <a:srgbClr val="6B7280"/>
                 </a:solidFill>
@@ -15782,8 +16386,8 @@
         </p:blipFill>
         <p:spPr>
           <a:xfrm>
-            <a:off x="2216179" y="1691640"/>
-            <a:ext cx="7759337" cy="4526280"/>
+            <a:off x="1990891" y="1192894"/>
+            <a:ext cx="8107266" cy="4729239"/>
           </a:xfrm>
           <a:prstGeom prst="rect">
             <a:avLst/>
@@ -15807,7 +16411,7 @@
           <a:noFill/>
         </p:spPr>
         <p:txBody>
-          <a:bodyPr wrap="square" anchor="t" lIns="0" rIns="0" tIns="0" bIns="0">
+          <a:bodyPr wrap="square" lIns="0" tIns="0" rIns="0" bIns="0" anchor="t">
             <a:spAutoFit/>
           </a:bodyPr>
           <a:lstStyle/>
@@ -15827,36 +16431,31 @@
       </p:sp>
       <p:sp>
         <p:nvSpPr>
-          <p:cNvPr id="6" name="TextBox 5"/>
-          <p:cNvSpPr txBox="1"/>
-          <p:nvPr/>
+          <p:cNvPr id="205" name="Slide Number Placeholder 3">
+            <a:extLst>
+              <a:ext uri="{FF2B5EF4-FFF2-40B4-BE49-F238E27FC236}">
+                <a16:creationId xmlns:a16="http://schemas.microsoft.com/office/drawing/2014/main" id="{E5E9CEA3-2FB5-40FF-8728-CB6B8DBBAF2C}"/>
+              </a:ext>
+            </a:extLst>
+          </p:cNvPr>
+          <p:cNvSpPr>
+            <a:spLocks noGrp="1"/>
+          </p:cNvSpPr>
+          <p:nvPr>
+            <p:ph type="sldNum" sz="quarter" idx="11"/>
+          </p:nvPr>
         </p:nvSpPr>
-        <p:spPr>
-          <a:xfrm>
-            <a:off x="10774375" y="6473952"/>
-            <a:ext cx="777240" cy="292608"/>
-          </a:xfrm>
-          <a:prstGeom prst="rect">
-            <a:avLst/>
-          </a:prstGeom>
-          <a:noFill/>
-        </p:spPr>
+        <p:spPr/>
         <p:txBody>
-          <a:bodyPr wrap="none" lIns="0" rIns="0" tIns="0" bIns="0" anchor="ctr">
-            <a:spAutoFit/>
-          </a:bodyPr>
+          <a:bodyPr/>
           <a:lstStyle/>
           <a:p>
-            <a:pPr algn="r"/>
-            <a:r>
-              <a:rPr sz="1100" b="1">
-                <a:solidFill>
-                  <a:srgbClr val="FFFFFF"/>
-                </a:solidFill>
-                <a:latin typeface="Arial"/>
-              </a:rPr>
-              <a:t>7 / 20</a:t>
-            </a:r>
+            <a:fld id="{DD253308-F9C5-4FCB-8415-6DEE77C16A35}" type="slidenum">
+              <a:rPr lang="en-US" smtClean="0"/>
+              <a:pPr/>
+              <a:t>10</a:t>
+            </a:fld>
+            <a:endParaRPr lang="en-US" dirty="0"/>
           </a:p>
         </p:txBody>
       </p:sp>
@@ -15869,7 +16468,7 @@
 </file>
 
 <file path=ppt/slides/slide8.xml><?xml version="1.0" encoding="utf-8"?>
-<p:sld xmlns:a="http://schemas.openxmlformats.org/drawingml/2006/main" xmlns:p="http://schemas.openxmlformats.org/presentationml/2006/main" xmlns:r="http://schemas.openxmlformats.org/officeDocument/2006/relationships">
+<p:sld xmlns:a="http://schemas.openxmlformats.org/drawingml/2006/main" xmlns:r="http://schemas.openxmlformats.org/officeDocument/2006/relationships" xmlns:p="http://schemas.openxmlformats.org/presentationml/2006/main">
   <p:cSld>
     <p:spTree>
       <p:nvGrpSpPr>
@@ -15877,7 +16476,14 @@
         <p:cNvGrpSpPr/>
         <p:nvPr/>
       </p:nvGrpSpPr>
-      <p:grpSpPr/>
+      <p:grpSpPr>
+        <a:xfrm>
+          <a:off x="0" y="0"/>
+          <a:ext cx="0" cy="0"/>
+          <a:chOff x="0" y="0"/>
+          <a:chExt cx="0" cy="0"/>
+        </a:xfrm>
+      </p:grpSpPr>
       <p:sp>
         <p:nvSpPr>
           <p:cNvPr id="2" name="TextBox 1"/>
@@ -15895,7 +16501,7 @@
           <a:noFill/>
         </p:spPr>
         <p:txBody>
-          <a:bodyPr wrap="square" anchor="t" lIns="0" rIns="0" tIns="0" bIns="0">
+          <a:bodyPr wrap="square" lIns="0" tIns="0" rIns="0" bIns="0" anchor="t">
             <a:spAutoFit/>
           </a:bodyPr>
           <a:lstStyle/>
@@ -15909,41 +16515,6 @@
                 <a:latin typeface="Arial"/>
               </a:rPr>
               <a:t>Stage 2:  Real sponsors made real endorsements</a:t>
-            </a:r>
-          </a:p>
-        </p:txBody>
-      </p:sp>
-      <p:sp>
-        <p:nvSpPr>
-          <p:cNvPr id="3" name="TextBox 2"/>
-          <p:cNvSpPr txBox="1"/>
-          <p:nvPr/>
-        </p:nvSpPr>
-        <p:spPr>
-          <a:xfrm>
-            <a:off x="502920" y="1051560"/>
-            <a:ext cx="11247120" cy="548640"/>
-          </a:xfrm>
-          <a:prstGeom prst="rect">
-            <a:avLst/>
-          </a:prstGeom>
-          <a:noFill/>
-        </p:spPr>
-        <p:txBody>
-          <a:bodyPr wrap="square" anchor="t" lIns="0" rIns="0" tIns="0" bIns="0">
-            <a:spAutoFit/>
-          </a:bodyPr>
-          <a:lstStyle/>
-          <a:p>
-            <a:pPr algn="l"/>
-            <a:r>
-              <a:rPr sz="1700" b="0" i="1">
-                <a:solidFill>
-                  <a:srgbClr val="6B7280"/>
-                </a:solidFill>
-                <a:latin typeface="Arial"/>
-              </a:rPr>
-              <a:t>Stage 2 was a stimulus-generation step. Sponsors saw real candidate pairs and picked who would perform better.</a:t>
             </a:r>
           </a:p>
         </p:txBody>
@@ -15957,7 +16528,7 @@
         <p:spPr>
           <a:xfrm>
             <a:off x="502920" y="1874519"/>
-            <a:ext cx="4434840" cy="4389120"/>
+            <a:ext cx="4572000" cy="2451953"/>
           </a:xfrm>
           <a:prstGeom prst="rect">
             <a:avLst/>
@@ -15976,7 +16547,7 @@
               </a:spcAft>
             </a:pPr>
             <a:r>
-              <a:rPr sz="1500" b="1">
+              <a:rPr sz="1500" b="1" dirty="0">
                 <a:solidFill>
                   <a:srgbClr val="111827"/>
                 </a:solidFill>
@@ -15992,7 +16563,7 @@
               </a:spcAft>
             </a:pPr>
             <a:r>
-              <a:rPr sz="1500" b="0">
+              <a:rPr sz="1500" b="0" dirty="0">
                 <a:solidFill>
                   <a:srgbClr val="111827"/>
                 </a:solidFill>
@@ -16008,7 +16579,7 @@
               </a:spcAft>
             </a:pPr>
             <a:r>
-              <a:rPr sz="1500" b="0">
+              <a:rPr sz="1500" b="0" dirty="0">
                 <a:solidFill>
                   <a:srgbClr val="111827"/>
                 </a:solidFill>
@@ -16024,7 +16595,7 @@
               </a:spcAft>
             </a:pPr>
             <a:r>
-              <a:rPr sz="1500" b="0">
+              <a:rPr sz="1500" b="0" dirty="0">
                 <a:solidFill>
                   <a:srgbClr val="111827"/>
                 </a:solidFill>
@@ -16040,7 +16611,7 @@
               </a:spcAft>
             </a:pPr>
             <a:r>
-              <a:rPr sz="1500" b="0">
+              <a:rPr sz="1500" b="0" dirty="0">
                 <a:solidFill>
                   <a:srgbClr val="111827"/>
                 </a:solidFill>
@@ -16061,14 +16632,15 @@
         </p:nvPicPr>
         <p:blipFill>
           <a:blip r:embed="rId2"/>
+          <a:srcRect r="14676"/>
           <a:stretch>
             <a:fillRect/>
           </a:stretch>
         </p:blipFill>
         <p:spPr>
           <a:xfrm>
-            <a:off x="5074920" y="1874519"/>
-            <a:ext cx="6858000" cy="4217670"/>
+            <a:off x="5253825" y="1600200"/>
+            <a:ext cx="6355079" cy="4580644"/>
           </a:xfrm>
           <a:prstGeom prst="rect">
             <a:avLst/>
@@ -16077,71 +16649,31 @@
       </p:pic>
       <p:sp>
         <p:nvSpPr>
-          <p:cNvPr id="6" name="TextBox 5"/>
-          <p:cNvSpPr txBox="1"/>
-          <p:nvPr/>
+          <p:cNvPr id="206" name="Slide Number Placeholder 3">
+            <a:extLst>
+              <a:ext uri="{FF2B5EF4-FFF2-40B4-BE49-F238E27FC236}">
+                <a16:creationId xmlns:a16="http://schemas.microsoft.com/office/drawing/2014/main" id="{E2A5B9A1-29AB-40F9-A389-D33CD2E213E4}"/>
+              </a:ext>
+            </a:extLst>
+          </p:cNvPr>
+          <p:cNvSpPr>
+            <a:spLocks noGrp="1"/>
+          </p:cNvSpPr>
+          <p:nvPr>
+            <p:ph type="sldNum" sz="quarter" idx="11"/>
+          </p:nvPr>
         </p:nvSpPr>
-        <p:spPr>
-          <a:xfrm>
-            <a:off x="5074920" y="6263640"/>
-            <a:ext cx="6858000" cy="365760"/>
-          </a:xfrm>
-          <a:prstGeom prst="rect">
-            <a:avLst/>
-          </a:prstGeom>
-          <a:noFill/>
-        </p:spPr>
+        <p:spPr/>
         <p:txBody>
-          <a:bodyPr wrap="square" anchor="t" lIns="0" rIns="0" tIns="0" bIns="0">
-            <a:spAutoFit/>
-          </a:bodyPr>
+          <a:bodyPr/>
           <a:lstStyle/>
           <a:p>
-            <a:pPr algn="ctr"/>
-            <a:r>
-              <a:rPr sz="1200" b="0" i="1">
-                <a:solidFill>
-                  <a:srgbClr val="6B7280"/>
-                </a:solidFill>
-                <a:latin typeface="Arial"/>
-              </a:rPr>
-              <a:t>An example of what a Stage 2 sponsor sees.</a:t>
-            </a:r>
-          </a:p>
-        </p:txBody>
-      </p:sp>
-      <p:sp>
-        <p:nvSpPr>
-          <p:cNvPr id="7" name="TextBox 6"/>
-          <p:cNvSpPr txBox="1"/>
-          <p:nvPr/>
-        </p:nvSpPr>
-        <p:spPr>
-          <a:xfrm>
-            <a:off x="10774375" y="6473952"/>
-            <a:ext cx="777240" cy="292608"/>
-          </a:xfrm>
-          <a:prstGeom prst="rect">
-            <a:avLst/>
-          </a:prstGeom>
-          <a:noFill/>
-        </p:spPr>
-        <p:txBody>
-          <a:bodyPr wrap="none" lIns="0" rIns="0" tIns="0" bIns="0" anchor="ctr">
-            <a:spAutoFit/>
-          </a:bodyPr>
-          <a:lstStyle/>
-          <a:p>
-            <a:pPr algn="r"/>
-            <a:r>
-              <a:rPr sz="1100" b="1">
-                <a:solidFill>
-                  <a:srgbClr val="FFFFFF"/>
-                </a:solidFill>
-                <a:latin typeface="Arial"/>
-              </a:rPr>
-              <a:t>8 / 20</a:t>
-            </a:r>
+            <a:fld id="{DD253308-F9C5-4FCB-8415-6DEE77C16A35}" type="slidenum">
+              <a:rPr lang="en-US" smtClean="0"/>
+              <a:pPr/>
+              <a:t>10</a:t>
+            </a:fld>
+            <a:endParaRPr lang="en-US" dirty="0"/>
           </a:p>
         </p:txBody>
       </p:sp>
@@ -16154,7 +16686,7 @@
 </file>
 
 <file path=ppt/slides/slide9.xml><?xml version="1.0" encoding="utf-8"?>
-<p:sld xmlns:a="http://schemas.openxmlformats.org/drawingml/2006/main" xmlns:p="http://schemas.openxmlformats.org/presentationml/2006/main" xmlns:r="http://schemas.openxmlformats.org/officeDocument/2006/relationships">
+<p:sld xmlns:a="http://schemas.openxmlformats.org/drawingml/2006/main" xmlns:r="http://schemas.openxmlformats.org/officeDocument/2006/relationships" xmlns:p="http://schemas.openxmlformats.org/presentationml/2006/main">
   <p:cSld>
     <p:spTree>
       <p:nvGrpSpPr>
@@ -16162,7 +16694,14 @@
         <p:cNvGrpSpPr/>
         <p:nvPr/>
       </p:nvGrpSpPr>
-      <p:grpSpPr/>
+      <p:grpSpPr>
+        <a:xfrm>
+          <a:off x="0" y="0"/>
+          <a:ext cx="0" cy="0"/>
+          <a:chOff x="0" y="0"/>
+          <a:chExt cx="0" cy="0"/>
+        </a:xfrm>
+      </p:grpSpPr>
       <p:sp>
         <p:nvSpPr>
           <p:cNvPr id="2" name="TextBox 1"/>
@@ -16172,7 +16711,7 @@
         <p:spPr>
           <a:xfrm>
             <a:off x="502920" y="320040"/>
-            <a:ext cx="11185855" cy="731520"/>
+            <a:ext cx="11185855" cy="984885"/>
           </a:xfrm>
           <a:prstGeom prst="rect">
             <a:avLst/>
@@ -16180,56 +16719,36 @@
           <a:noFill/>
         </p:spPr>
         <p:txBody>
-          <a:bodyPr wrap="square" anchor="t" lIns="0" rIns="0" tIns="0" bIns="0">
+          <a:bodyPr wrap="square" lIns="0" tIns="0" rIns="0" bIns="0" anchor="t">
             <a:spAutoFit/>
           </a:bodyPr>
           <a:lstStyle/>
           <a:p>
             <a:pPr algn="l"/>
             <a:r>
-              <a:rPr sz="3200" b="1" i="0">
+              <a:rPr sz="3200" b="1" i="0" dirty="0">
                 <a:solidFill>
                   <a:srgbClr val="011F5B"/>
                 </a:solidFill>
                 <a:latin typeface="Arial"/>
               </a:rPr>
-              <a:t>Stage 3:  What we manipulate, what evaluators do</a:t>
-            </a:r>
-          </a:p>
-        </p:txBody>
-      </p:sp>
-      <p:sp>
-        <p:nvSpPr>
-          <p:cNvPr id="3" name="TextBox 2"/>
-          <p:cNvSpPr txBox="1"/>
-          <p:nvPr/>
-        </p:nvSpPr>
-        <p:spPr>
-          <a:xfrm>
-            <a:off x="502920" y="1051560"/>
-            <a:ext cx="11247120" cy="502920"/>
-          </a:xfrm>
-          <a:prstGeom prst="rect">
-            <a:avLst/>
-          </a:prstGeom>
-          <a:noFill/>
-        </p:spPr>
-        <p:txBody>
-          <a:bodyPr wrap="square" anchor="t" lIns="0" rIns="0" tIns="0" bIns="0">
-            <a:spAutoFit/>
-          </a:bodyPr>
-          <a:lstStyle/>
-          <a:p>
-            <a:pPr algn="l"/>
-            <a:r>
-              <a:rPr sz="1500" b="0" i="1">
-                <a:solidFill>
-                  <a:srgbClr val="6B7280"/>
+              <a:t>Stage 3:  </a:t>
+            </a:r>
+            <a:r>
+              <a:rPr lang="en-US" sz="3200" b="1" i="0" dirty="0">
+                <a:solidFill>
+                  <a:srgbClr val="011F5B"/>
                 </a:solidFill>
                 <a:latin typeface="Arial"/>
               </a:rPr>
-              <a:t>Each evaluator sees ONE sponsor making ONE endorsement, then watches the outcome, then sees a second endorsement from the same sponsor.</a:t>
-            </a:r>
+              <a:t>Evaluators wager on sponsorship decisions from the previous stage</a:t>
+            </a:r>
+            <a:endParaRPr sz="3200" b="1" i="0" dirty="0">
+              <a:solidFill>
+                <a:srgbClr val="011F5B"/>
+              </a:solidFill>
+              <a:latin typeface="Arial"/>
+            </a:endParaRPr>
           </a:p>
         </p:txBody>
       </p:sp>
@@ -16242,7 +16761,7 @@
         <p:spPr>
           <a:xfrm>
             <a:off x="502920" y="1600200"/>
-            <a:ext cx="11247120" cy="320040"/>
+            <a:ext cx="11247120" cy="169277"/>
           </a:xfrm>
           <a:prstGeom prst="rect">
             <a:avLst/>
@@ -16250,20 +16769,20 @@
           <a:noFill/>
         </p:spPr>
         <p:txBody>
-          <a:bodyPr wrap="square" anchor="t" lIns="0" rIns="0" tIns="0" bIns="0">
+          <a:bodyPr wrap="square" lIns="0" tIns="0" rIns="0" bIns="0" anchor="t">
             <a:spAutoFit/>
           </a:bodyPr>
           <a:lstStyle/>
           <a:p>
             <a:pPr algn="ctr"/>
             <a:r>
-              <a:rPr sz="1100" b="1" i="0">
+              <a:rPr sz="1100" b="1" i="0" dirty="0">
                 <a:solidFill>
                   <a:srgbClr val="6B7280"/>
                 </a:solidFill>
                 <a:latin typeface="Arial"/>
               </a:rPr>
-              <a:t>WE RANDOMLY VARY THREE THINGS</a:t>
+              <a:t>WE VARY THREE THINGS</a:t>
             </a:r>
           </a:p>
         </p:txBody>
@@ -16306,7 +16825,7 @@
           </a:fontRef>
         </p:style>
         <p:txBody>
-          <a:bodyPr rtlCol="0" anchor="ctr" lIns="228600" rIns="182880" tIns="164592" bIns="164592"/>
+          <a:bodyPr lIns="228600" tIns="164592" rIns="182880" bIns="164592" rtlCol="0" anchor="ctr"/>
           <a:lstStyle/>
           <a:p>
             <a:pPr algn="l"/>
@@ -16392,12 +16911,12 @@
           </a:fontRef>
         </p:style>
         <p:txBody>
-          <a:bodyPr rtlCol="0" anchor="ctr" lIns="228600" rIns="182880" tIns="164592" bIns="164592"/>
+          <a:bodyPr lIns="228600" tIns="164592" rIns="182880" bIns="164592" rtlCol="0" anchor="ctr"/>
           <a:lstStyle/>
           <a:p>
             <a:pPr algn="l"/>
             <a:r>
-              <a:rPr sz="1800" b="1">
+              <a:rPr sz="1800" b="1" dirty="0">
                 <a:solidFill>
                   <a:srgbClr val="011F5B"/>
                 </a:solidFill>
@@ -16413,7 +16932,7 @@
               </a:spcBef>
             </a:pPr>
             <a:r>
-              <a:rPr sz="1600" b="1">
+              <a:rPr sz="1600" b="1" dirty="0">
                 <a:solidFill>
                   <a:srgbClr val="111827"/>
                 </a:solidFill>
@@ -16429,13 +16948,31 @@
               </a:spcBef>
             </a:pPr>
             <a:r>
-              <a:rPr sz="1600" b="1">
+              <a:rPr sz="1600" b="1" dirty="0">
                 <a:solidFill>
                   <a:srgbClr val="111827"/>
                 </a:solidFill>
                 <a:latin typeface="Arial"/>
               </a:rPr>
-              <a:t>•  Weak  (hedged / unsure)</a:t>
+              <a:t>•  Weak  (</a:t>
+            </a:r>
+            <a:r>
+              <a:rPr lang="en-US" sz="1600" b="1" dirty="0">
+                <a:solidFill>
+                  <a:srgbClr val="111827"/>
+                </a:solidFill>
+                <a:latin typeface="Arial"/>
+              </a:rPr>
+              <a:t>low confidence</a:t>
+            </a:r>
+            <a:r>
+              <a:rPr sz="1600" b="1" dirty="0">
+                <a:solidFill>
+                  <a:srgbClr val="111827"/>
+                </a:solidFill>
+                <a:latin typeface="Arial"/>
+              </a:rPr>
+              <a:t> / unsure)</a:t>
             </a:r>
           </a:p>
         </p:txBody>
@@ -16478,7 +17015,7 @@
           </a:fontRef>
         </p:style>
         <p:txBody>
-          <a:bodyPr rtlCol="0" anchor="ctr" lIns="228600" rIns="182880" tIns="164592" bIns="164592"/>
+          <a:bodyPr lIns="228600" tIns="164592" rIns="182880" bIns="164592" rtlCol="0" anchor="ctr"/>
           <a:lstStyle/>
           <a:p>
             <a:pPr algn="l"/>
@@ -16543,14 +17080,14 @@
           <a:noFill/>
         </p:spPr>
         <p:txBody>
-          <a:bodyPr wrap="square" anchor="t" lIns="0" rIns="0" tIns="0" bIns="0">
+          <a:bodyPr wrap="square" lIns="0" tIns="0" rIns="0" bIns="0" anchor="t">
             <a:spAutoFit/>
           </a:bodyPr>
           <a:lstStyle/>
           <a:p>
             <a:pPr algn="ctr"/>
             <a:r>
-              <a:rPr sz="1100" b="1" i="0">
+              <a:rPr sz="1100" b="1" i="0" dirty="0">
                 <a:solidFill>
                   <a:srgbClr val="6B7280"/>
                 </a:solidFill>
@@ -16599,7 +17136,7 @@
           </a:fontRef>
         </p:style>
         <p:txBody>
-          <a:bodyPr rtlCol="0" anchor="ctr" lIns="228600" rIns="182880" tIns="164592" bIns="164592"/>
+          <a:bodyPr lIns="228600" tIns="164592" rIns="182880" bIns="164592" rtlCol="0" anchor="ctr"/>
           <a:lstStyle/>
           <a:p>
             <a:pPr algn="ctr"/>
@@ -16680,6 +17217,7 @@
           <a:lstStyle/>
           <a:p>
             <a:pPr algn="ctr"/>
+            <a:endParaRPr/>
           </a:p>
         </p:txBody>
       </p:sp>
@@ -16721,7 +17259,7 @@
           </a:fontRef>
         </p:style>
         <p:txBody>
-          <a:bodyPr rtlCol="0" anchor="ctr" lIns="228600" rIns="182880" tIns="164592" bIns="164592"/>
+          <a:bodyPr lIns="228600" tIns="164592" rIns="182880" bIns="164592" rtlCol="0" anchor="ctr"/>
           <a:lstStyle/>
           <a:p>
             <a:pPr algn="ctr"/>
@@ -16802,6 +17340,7 @@
           <a:lstStyle/>
           <a:p>
             <a:pPr algn="ctr"/>
+            <a:endParaRPr/>
           </a:p>
         </p:txBody>
       </p:sp>
@@ -16843,7 +17382,7 @@
           </a:fontRef>
         </p:style>
         <p:txBody>
-          <a:bodyPr rtlCol="0" anchor="ctr" lIns="228600" rIns="182880" tIns="164592" bIns="164592"/>
+          <a:bodyPr lIns="228600" tIns="164592" rIns="182880" bIns="164592" rtlCol="0" anchor="ctr"/>
           <a:lstStyle/>
           <a:p>
             <a:pPr algn="ctr"/>
@@ -16901,14 +17440,14 @@
           <a:noFill/>
         </p:spPr>
         <p:txBody>
-          <a:bodyPr wrap="square" anchor="t" lIns="0" rIns="0" tIns="0" bIns="0">
+          <a:bodyPr wrap="square" lIns="0" tIns="0" rIns="0" bIns="0" anchor="t">
             <a:spAutoFit/>
           </a:bodyPr>
           <a:lstStyle/>
           <a:p>
             <a:pPr algn="ctr"/>
             <a:r>
-              <a:rPr sz="1500" b="1" i="1">
+              <a:rPr sz="1500" b="1" i="1" dirty="0">
                 <a:solidFill>
                   <a:srgbClr val="011F5B"/>
                 </a:solidFill>
@@ -16921,36 +17460,31 @@
       </p:sp>
       <p:sp>
         <p:nvSpPr>
-          <p:cNvPr id="15" name="TextBox 14"/>
-          <p:cNvSpPr txBox="1"/>
-          <p:nvPr/>
+          <p:cNvPr id="207" name="Slide Number Placeholder 3">
+            <a:extLst>
+              <a:ext uri="{FF2B5EF4-FFF2-40B4-BE49-F238E27FC236}">
+                <a16:creationId xmlns:a16="http://schemas.microsoft.com/office/drawing/2014/main" id="{BA6A12A3-B136-4760-90AF-5858779DF383}"/>
+              </a:ext>
+            </a:extLst>
+          </p:cNvPr>
+          <p:cNvSpPr>
+            <a:spLocks noGrp="1"/>
+          </p:cNvSpPr>
+          <p:nvPr>
+            <p:ph type="sldNum" sz="quarter" idx="11"/>
+          </p:nvPr>
         </p:nvSpPr>
-        <p:spPr>
-          <a:xfrm>
-            <a:off x="10774375" y="6473952"/>
-            <a:ext cx="777240" cy="292608"/>
-          </a:xfrm>
-          <a:prstGeom prst="rect">
-            <a:avLst/>
-          </a:prstGeom>
-          <a:noFill/>
-        </p:spPr>
+        <p:spPr/>
         <p:txBody>
-          <a:bodyPr wrap="none" lIns="0" rIns="0" tIns="0" bIns="0" anchor="ctr">
-            <a:spAutoFit/>
-          </a:bodyPr>
+          <a:bodyPr/>
           <a:lstStyle/>
           <a:p>
-            <a:pPr algn="r"/>
-            <a:r>
-              <a:rPr sz="1100" b="1">
-                <a:solidFill>
-                  <a:srgbClr val="FFFFFF"/>
-                </a:solidFill>
-                <a:latin typeface="Arial"/>
-              </a:rPr>
-              <a:t>9 / 20</a:t>
-            </a:r>
+            <a:fld id="{DD253308-F9C5-4FCB-8415-6DEE77C16A35}" type="slidenum">
+              <a:rPr lang="en-US" smtClean="0"/>
+              <a:pPr/>
+              <a:t>10</a:t>
+            </a:fld>
+            <a:endParaRPr lang="en-US" dirty="0"/>
           </a:p>
         </p:txBody>
       </p:sp>
@@ -16959,6 +17493,454 @@
   <p:clrMapOvr>
     <a:masterClrMapping/>
   </p:clrMapOvr>
+  <p:timing>
+    <p:tnLst>
+      <p:par>
+        <p:cTn id="1" dur="indefinite" restart="never" nodeType="tmRoot">
+          <p:childTnLst>
+            <p:seq concurrent="1" nextAc="seek">
+              <p:cTn id="2" dur="indefinite" nodeType="mainSeq">
+                <p:childTnLst>
+                  <p:par>
+                    <p:cTn id="3" fill="hold">
+                      <p:stCondLst>
+                        <p:cond delay="indefinite"/>
+                      </p:stCondLst>
+                      <p:childTnLst>
+                        <p:par>
+                          <p:cTn id="4" fill="hold">
+                            <p:stCondLst>
+                              <p:cond delay="0"/>
+                            </p:stCondLst>
+                            <p:childTnLst>
+                              <p:par>
+                                <p:cTn id="5" presetID="1" presetClass="entr" presetSubtype="0" fill="hold" grpId="0" nodeType="clickEffect">
+                                  <p:stCondLst>
+                                    <p:cond delay="0"/>
+                                  </p:stCondLst>
+                                  <p:childTnLst>
+                                    <p:set>
+                                      <p:cBhvr>
+                                        <p:cTn id="6" dur="1" fill="hold">
+                                          <p:stCondLst>
+                                            <p:cond delay="0"/>
+                                          </p:stCondLst>
+                                        </p:cTn>
+                                        <p:tgtEl>
+                                          <p:spTgt spid="4"/>
+                                        </p:tgtEl>
+                                        <p:attrNameLst>
+                                          <p:attrName>style.visibility</p:attrName>
+                                        </p:attrNameLst>
+                                      </p:cBhvr>
+                                      <p:to>
+                                        <p:strVal val="visible"/>
+                                      </p:to>
+                                    </p:set>
+                                  </p:childTnLst>
+                                </p:cTn>
+                              </p:par>
+                            </p:childTnLst>
+                          </p:cTn>
+                        </p:par>
+                      </p:childTnLst>
+                    </p:cTn>
+                  </p:par>
+                  <p:par>
+                    <p:cTn id="7" fill="hold">
+                      <p:stCondLst>
+                        <p:cond delay="indefinite"/>
+                      </p:stCondLst>
+                      <p:childTnLst>
+                        <p:par>
+                          <p:cTn id="8" fill="hold">
+                            <p:stCondLst>
+                              <p:cond delay="0"/>
+                            </p:stCondLst>
+                            <p:childTnLst>
+                              <p:par>
+                                <p:cTn id="9" presetID="1" presetClass="entr" presetSubtype="0" fill="hold" grpId="0" nodeType="clickEffect">
+                                  <p:stCondLst>
+                                    <p:cond delay="0"/>
+                                  </p:stCondLst>
+                                  <p:childTnLst>
+                                    <p:set>
+                                      <p:cBhvr>
+                                        <p:cTn id="10" dur="1" fill="hold">
+                                          <p:stCondLst>
+                                            <p:cond delay="0"/>
+                                          </p:stCondLst>
+                                        </p:cTn>
+                                        <p:tgtEl>
+                                          <p:spTgt spid="5"/>
+                                        </p:tgtEl>
+                                        <p:attrNameLst>
+                                          <p:attrName>style.visibility</p:attrName>
+                                        </p:attrNameLst>
+                                      </p:cBhvr>
+                                      <p:to>
+                                        <p:strVal val="visible"/>
+                                      </p:to>
+                                    </p:set>
+                                  </p:childTnLst>
+                                </p:cTn>
+                              </p:par>
+                            </p:childTnLst>
+                          </p:cTn>
+                        </p:par>
+                      </p:childTnLst>
+                    </p:cTn>
+                  </p:par>
+                  <p:par>
+                    <p:cTn id="11" fill="hold">
+                      <p:stCondLst>
+                        <p:cond delay="indefinite"/>
+                      </p:stCondLst>
+                      <p:childTnLst>
+                        <p:par>
+                          <p:cTn id="12" fill="hold">
+                            <p:stCondLst>
+                              <p:cond delay="0"/>
+                            </p:stCondLst>
+                            <p:childTnLst>
+                              <p:par>
+                                <p:cTn id="13" presetID="1" presetClass="entr" presetSubtype="0" fill="hold" grpId="0" nodeType="clickEffect">
+                                  <p:stCondLst>
+                                    <p:cond delay="0"/>
+                                  </p:stCondLst>
+                                  <p:childTnLst>
+                                    <p:set>
+                                      <p:cBhvr>
+                                        <p:cTn id="14" dur="1" fill="hold">
+                                          <p:stCondLst>
+                                            <p:cond delay="0"/>
+                                          </p:stCondLst>
+                                        </p:cTn>
+                                        <p:tgtEl>
+                                          <p:spTgt spid="6"/>
+                                        </p:tgtEl>
+                                        <p:attrNameLst>
+                                          <p:attrName>style.visibility</p:attrName>
+                                        </p:attrNameLst>
+                                      </p:cBhvr>
+                                      <p:to>
+                                        <p:strVal val="visible"/>
+                                      </p:to>
+                                    </p:set>
+                                  </p:childTnLst>
+                                </p:cTn>
+                              </p:par>
+                            </p:childTnLst>
+                          </p:cTn>
+                        </p:par>
+                      </p:childTnLst>
+                    </p:cTn>
+                  </p:par>
+                  <p:par>
+                    <p:cTn id="15" fill="hold">
+                      <p:stCondLst>
+                        <p:cond delay="indefinite"/>
+                      </p:stCondLst>
+                      <p:childTnLst>
+                        <p:par>
+                          <p:cTn id="16" fill="hold">
+                            <p:stCondLst>
+                              <p:cond delay="0"/>
+                            </p:stCondLst>
+                            <p:childTnLst>
+                              <p:par>
+                                <p:cTn id="17" presetID="1" presetClass="entr" presetSubtype="0" fill="hold" grpId="0" nodeType="clickEffect">
+                                  <p:stCondLst>
+                                    <p:cond delay="0"/>
+                                  </p:stCondLst>
+                                  <p:childTnLst>
+                                    <p:set>
+                                      <p:cBhvr>
+                                        <p:cTn id="18" dur="1" fill="hold">
+                                          <p:stCondLst>
+                                            <p:cond delay="0"/>
+                                          </p:stCondLst>
+                                        </p:cTn>
+                                        <p:tgtEl>
+                                          <p:spTgt spid="7"/>
+                                        </p:tgtEl>
+                                        <p:attrNameLst>
+                                          <p:attrName>style.visibility</p:attrName>
+                                        </p:attrNameLst>
+                                      </p:cBhvr>
+                                      <p:to>
+                                        <p:strVal val="visible"/>
+                                      </p:to>
+                                    </p:set>
+                                  </p:childTnLst>
+                                </p:cTn>
+                              </p:par>
+                            </p:childTnLst>
+                          </p:cTn>
+                        </p:par>
+                      </p:childTnLst>
+                    </p:cTn>
+                  </p:par>
+                  <p:par>
+                    <p:cTn id="19" fill="hold">
+                      <p:stCondLst>
+                        <p:cond delay="indefinite"/>
+                      </p:stCondLst>
+                      <p:childTnLst>
+                        <p:par>
+                          <p:cTn id="20" fill="hold">
+                            <p:stCondLst>
+                              <p:cond delay="0"/>
+                            </p:stCondLst>
+                            <p:childTnLst>
+                              <p:par>
+                                <p:cTn id="21" presetID="1" presetClass="entr" presetSubtype="0" fill="hold" grpId="0" nodeType="clickEffect">
+                                  <p:stCondLst>
+                                    <p:cond delay="0"/>
+                                  </p:stCondLst>
+                                  <p:childTnLst>
+                                    <p:set>
+                                      <p:cBhvr>
+                                        <p:cTn id="22" dur="1" fill="hold">
+                                          <p:stCondLst>
+                                            <p:cond delay="0"/>
+                                          </p:stCondLst>
+                                        </p:cTn>
+                                        <p:tgtEl>
+                                          <p:spTgt spid="9"/>
+                                        </p:tgtEl>
+                                        <p:attrNameLst>
+                                          <p:attrName>style.visibility</p:attrName>
+                                        </p:attrNameLst>
+                                      </p:cBhvr>
+                                      <p:to>
+                                        <p:strVal val="visible"/>
+                                      </p:to>
+                                    </p:set>
+                                  </p:childTnLst>
+                                </p:cTn>
+                              </p:par>
+                              <p:par>
+                                <p:cTn id="23" presetID="1" presetClass="entr" presetSubtype="0" fill="hold" grpId="0" nodeType="withEffect">
+                                  <p:stCondLst>
+                                    <p:cond delay="0"/>
+                                  </p:stCondLst>
+                                  <p:childTnLst>
+                                    <p:set>
+                                      <p:cBhvr>
+                                        <p:cTn id="24" dur="1" fill="hold">
+                                          <p:stCondLst>
+                                            <p:cond delay="0"/>
+                                          </p:stCondLst>
+                                        </p:cTn>
+                                        <p:tgtEl>
+                                          <p:spTgt spid="8"/>
+                                        </p:tgtEl>
+                                        <p:attrNameLst>
+                                          <p:attrName>style.visibility</p:attrName>
+                                        </p:attrNameLst>
+                                      </p:cBhvr>
+                                      <p:to>
+                                        <p:strVal val="visible"/>
+                                      </p:to>
+                                    </p:set>
+                                  </p:childTnLst>
+                                </p:cTn>
+                              </p:par>
+                              <p:par>
+                                <p:cTn id="25" presetID="1" presetClass="entr" presetSubtype="0" fill="hold" grpId="0" nodeType="withEffect">
+                                  <p:stCondLst>
+                                    <p:cond delay="0"/>
+                                  </p:stCondLst>
+                                  <p:childTnLst>
+                                    <p:set>
+                                      <p:cBhvr>
+                                        <p:cTn id="26" dur="1" fill="hold">
+                                          <p:stCondLst>
+                                            <p:cond delay="0"/>
+                                          </p:stCondLst>
+                                        </p:cTn>
+                                        <p:tgtEl>
+                                          <p:spTgt spid="11"/>
+                                        </p:tgtEl>
+                                        <p:attrNameLst>
+                                          <p:attrName>style.visibility</p:attrName>
+                                        </p:attrNameLst>
+                                      </p:cBhvr>
+                                      <p:to>
+                                        <p:strVal val="visible"/>
+                                      </p:to>
+                                    </p:set>
+                                  </p:childTnLst>
+                                </p:cTn>
+                              </p:par>
+                              <p:par>
+                                <p:cTn id="27" presetID="1" presetClass="entr" presetSubtype="0" fill="hold" grpId="0" nodeType="withEffect">
+                                  <p:stCondLst>
+                                    <p:cond delay="0"/>
+                                  </p:stCondLst>
+                                  <p:childTnLst>
+                                    <p:set>
+                                      <p:cBhvr>
+                                        <p:cTn id="28" dur="1" fill="hold">
+                                          <p:stCondLst>
+                                            <p:cond delay="0"/>
+                                          </p:stCondLst>
+                                        </p:cTn>
+                                        <p:tgtEl>
+                                          <p:spTgt spid="13"/>
+                                        </p:tgtEl>
+                                        <p:attrNameLst>
+                                          <p:attrName>style.visibility</p:attrName>
+                                        </p:attrNameLst>
+                                      </p:cBhvr>
+                                      <p:to>
+                                        <p:strVal val="visible"/>
+                                      </p:to>
+                                    </p:set>
+                                  </p:childTnLst>
+                                </p:cTn>
+                              </p:par>
+                              <p:par>
+                                <p:cTn id="29" presetID="1" presetClass="entr" presetSubtype="0" fill="hold" grpId="0" nodeType="withEffect">
+                                  <p:stCondLst>
+                                    <p:cond delay="0"/>
+                                  </p:stCondLst>
+                                  <p:childTnLst>
+                                    <p:set>
+                                      <p:cBhvr>
+                                        <p:cTn id="30" dur="1" fill="hold">
+                                          <p:stCondLst>
+                                            <p:cond delay="0"/>
+                                          </p:stCondLst>
+                                        </p:cTn>
+                                        <p:tgtEl>
+                                          <p:spTgt spid="10"/>
+                                        </p:tgtEl>
+                                        <p:attrNameLst>
+                                          <p:attrName>style.visibility</p:attrName>
+                                        </p:attrNameLst>
+                                      </p:cBhvr>
+                                      <p:to>
+                                        <p:strVal val="visible"/>
+                                      </p:to>
+                                    </p:set>
+                                  </p:childTnLst>
+                                </p:cTn>
+                              </p:par>
+                              <p:par>
+                                <p:cTn id="31" presetID="1" presetClass="entr" presetSubtype="0" fill="hold" grpId="0" nodeType="withEffect">
+                                  <p:stCondLst>
+                                    <p:cond delay="0"/>
+                                  </p:stCondLst>
+                                  <p:childTnLst>
+                                    <p:set>
+                                      <p:cBhvr>
+                                        <p:cTn id="32" dur="1" fill="hold">
+                                          <p:stCondLst>
+                                            <p:cond delay="0"/>
+                                          </p:stCondLst>
+                                        </p:cTn>
+                                        <p:tgtEl>
+                                          <p:spTgt spid="12"/>
+                                        </p:tgtEl>
+                                        <p:attrNameLst>
+                                          <p:attrName>style.visibility</p:attrName>
+                                        </p:attrNameLst>
+                                      </p:cBhvr>
+                                      <p:to>
+                                        <p:strVal val="visible"/>
+                                      </p:to>
+                                    </p:set>
+                                  </p:childTnLst>
+                                </p:cTn>
+                              </p:par>
+                            </p:childTnLst>
+                          </p:cTn>
+                        </p:par>
+                      </p:childTnLst>
+                    </p:cTn>
+                  </p:par>
+                  <p:par>
+                    <p:cTn id="33" fill="hold">
+                      <p:stCondLst>
+                        <p:cond delay="indefinite"/>
+                      </p:stCondLst>
+                      <p:childTnLst>
+                        <p:par>
+                          <p:cTn id="34" fill="hold">
+                            <p:stCondLst>
+                              <p:cond delay="0"/>
+                            </p:stCondLst>
+                            <p:childTnLst>
+                              <p:par>
+                                <p:cTn id="35" presetID="1" presetClass="entr" presetSubtype="0" fill="hold" grpId="0" nodeType="clickEffect">
+                                  <p:stCondLst>
+                                    <p:cond delay="0"/>
+                                  </p:stCondLst>
+                                  <p:childTnLst>
+                                    <p:set>
+                                      <p:cBhvr>
+                                        <p:cTn id="36" dur="1" fill="hold">
+                                          <p:stCondLst>
+                                            <p:cond delay="0"/>
+                                          </p:stCondLst>
+                                        </p:cTn>
+                                        <p:tgtEl>
+                                          <p:spTgt spid="14"/>
+                                        </p:tgtEl>
+                                        <p:attrNameLst>
+                                          <p:attrName>style.visibility</p:attrName>
+                                        </p:attrNameLst>
+                                      </p:cBhvr>
+                                      <p:to>
+                                        <p:strVal val="visible"/>
+                                      </p:to>
+                                    </p:set>
+                                  </p:childTnLst>
+                                </p:cTn>
+                              </p:par>
+                            </p:childTnLst>
+                          </p:cTn>
+                        </p:par>
+                      </p:childTnLst>
+                    </p:cTn>
+                  </p:par>
+                </p:childTnLst>
+              </p:cTn>
+              <p:prevCondLst>
+                <p:cond evt="onPrev" delay="0">
+                  <p:tgtEl>
+                    <p:sldTgt/>
+                  </p:tgtEl>
+                </p:cond>
+              </p:prevCondLst>
+              <p:nextCondLst>
+                <p:cond evt="onNext" delay="0">
+                  <p:tgtEl>
+                    <p:sldTgt/>
+                  </p:tgtEl>
+                </p:cond>
+              </p:nextCondLst>
+            </p:seq>
+          </p:childTnLst>
+        </p:cTn>
+      </p:par>
+    </p:tnLst>
+    <p:bldLst>
+      <p:bldP spid="4" grpId="0"/>
+      <p:bldP spid="5" grpId="0" animBg="1"/>
+      <p:bldP spid="6" grpId="0" animBg="1"/>
+      <p:bldP spid="7" grpId="0" animBg="1"/>
+      <p:bldP spid="8" grpId="0"/>
+      <p:bldP spid="9" grpId="0" animBg="1"/>
+      <p:bldP spid="10" grpId="0" animBg="1"/>
+      <p:bldP spid="11" grpId="0" animBg="1"/>
+      <p:bldP spid="12" grpId="0" animBg="1"/>
+      <p:bldP spid="13" grpId="0" animBg="1"/>
+      <p:bldP spid="14" grpId="0"/>
+    </p:bldLst>
+  </p:timing>
 </p:sld>
 </file>
 

--- a/docs/UChicago-0410.pptx
+++ b/docs/UChicago-0410.pptx
@@ -10584,7 +10584,7 @@
             <a:fld id="{DD253308-F9C5-4FCB-8415-6DEE77C16A35}" type="slidenum">
               <a:rPr lang="en-US" smtClean="0"/>
               <a:pPr/>
-              <a:t>10</a:t>
+              <a:t>11</a:t>
             </a:fld>
             <a:endParaRPr lang="en-US" dirty="0"/>
           </a:p>
@@ -10733,7 +10733,7 @@
             <a:fld id="{DD253308-F9C5-4FCB-8415-6DEE77C16A35}" type="slidenum">
               <a:rPr lang="en-US" smtClean="0"/>
               <a:pPr/>
-              <a:t>10</a:t>
+              <a:t>12</a:t>
             </a:fld>
             <a:endParaRPr lang="en-US" dirty="0"/>
           </a:p>
@@ -10882,7 +10882,7 @@
             <a:fld id="{DD253308-F9C5-4FCB-8415-6DEE77C16A35}" type="slidenum">
               <a:rPr lang="en-US" smtClean="0"/>
               <a:pPr/>
-              <a:t>10</a:t>
+              <a:t>13</a:t>
             </a:fld>
             <a:endParaRPr lang="en-US" dirty="0"/>
           </a:p>
@@ -11116,7 +11116,7 @@
             <a:fld id="{DD253308-F9C5-4FCB-8415-6DEE77C16A35}" type="slidenum">
               <a:rPr lang="en-US" smtClean="0"/>
               <a:pPr/>
-              <a:t>10</a:t>
+              <a:t>14</a:t>
             </a:fld>
             <a:endParaRPr lang="en-US" dirty="0"/>
           </a:p>
@@ -11131,7 +11131,7 @@
           <p:nvPr/>
         </p:nvPicPr>
         <p:blipFill>
-          <a:blip r:embed="rId3"/>
+          <a:blip r:embed="rId2"/>
           <a:stretch>
             <a:fillRect/>
           </a:stretch>
@@ -11618,7 +11618,7 @@
             <a:fld id="{DD253308-F9C5-4FCB-8415-6DEE77C16A35}" type="slidenum">
               <a:rPr lang="en-US" smtClean="0"/>
               <a:pPr/>
-              <a:t>10</a:t>
+              <a:t>15</a:t>
             </a:fld>
             <a:endParaRPr lang="en-US" dirty="0"/>
           </a:p>
@@ -11633,7 +11633,7 @@
           <p:nvPr/>
         </p:nvPicPr>
         <p:blipFill>
-          <a:blip r:embed="rId3"/>
+          <a:blip r:embed="rId2"/>
           <a:stretch>
             <a:fillRect/>
           </a:stretch>
@@ -12120,7 +12120,7 @@
             <a:fld id="{DD253308-F9C5-4FCB-8415-6DEE77C16A35}" type="slidenum">
               <a:rPr lang="en-US" smtClean="0"/>
               <a:pPr/>
-              <a:t>10</a:t>
+              <a:t>16</a:t>
             </a:fld>
             <a:endParaRPr lang="en-US" dirty="0"/>
           </a:p>
@@ -12135,7 +12135,7 @@
           <p:nvPr/>
         </p:nvPicPr>
         <p:blipFill>
-          <a:blip r:embed="rId3"/>
+          <a:blip r:embed="rId2"/>
           <a:stretch>
             <a:fillRect/>
           </a:stretch>
@@ -12353,7 +12353,7 @@
             <a:fld id="{DD253308-F9C5-4FCB-8415-6DEE77C16A35}" type="slidenum">
               <a:rPr lang="en-US" smtClean="0"/>
               <a:pPr/>
-              <a:t>10</a:t>
+              <a:t>17</a:t>
             </a:fld>
             <a:endParaRPr lang="en-US" dirty="0"/>
           </a:p>
@@ -12368,7 +12368,7 @@
           <p:nvPr/>
         </p:nvPicPr>
         <p:blipFill>
-          <a:blip r:embed="rId3"/>
+          <a:blip r:embed="rId2"/>
           <a:stretch>
             <a:fillRect/>
           </a:stretch>
@@ -12591,7 +12591,7 @@
             <a:fld id="{DD253308-F9C5-4FCB-8415-6DEE77C16A35}" type="slidenum">
               <a:rPr lang="en-US" smtClean="0"/>
               <a:pPr/>
-              <a:t>10</a:t>
+              <a:t>18</a:t>
             </a:fld>
             <a:endParaRPr lang="en-US" dirty="0"/>
           </a:p>
@@ -12606,7 +12606,7 @@
           <p:nvPr/>
         </p:nvPicPr>
         <p:blipFill>
-          <a:blip r:embed="rId3"/>
+          <a:blip r:embed="rId2"/>
           <a:stretch>
             <a:fillRect/>
           </a:stretch>
@@ -12871,7 +12871,7 @@
             <a:fld id="{DD253308-F9C5-4FCB-8415-6DEE77C16A35}" type="slidenum">
               <a:rPr lang="en-US" smtClean="0"/>
               <a:pPr/>
-              <a:t>10</a:t>
+              <a:t>19</a:t>
             </a:fld>
             <a:endParaRPr lang="en-US" dirty="0"/>
           </a:p>
@@ -13891,7 +13891,7 @@
             <a:fld id="{DD253308-F9C5-4FCB-8415-6DEE77C16A35}" type="slidenum">
               <a:rPr lang="en-US" smtClean="0"/>
               <a:pPr/>
-              <a:t>10</a:t>
+              <a:t>2</a:t>
             </a:fld>
             <a:endParaRPr lang="en-US" dirty="0"/>
           </a:p>
@@ -14592,7 +14592,7 @@
             <a:fld id="{DD253308-F9C5-4FCB-8415-6DEE77C16A35}" type="slidenum">
               <a:rPr lang="en-US" smtClean="0"/>
               <a:pPr/>
-              <a:t>10</a:t>
+              <a:t>20</a:t>
             </a:fld>
             <a:endParaRPr lang="en-US" dirty="0"/>
           </a:p>
@@ -14804,7 +14804,7 @@
             <a:fld id="{DD253308-F9C5-4FCB-8415-6DEE77C16A35}" type="slidenum">
               <a:rPr lang="en-US" smtClean="0"/>
               <a:pPr/>
-              <a:t>10</a:t>
+              <a:t>3</a:t>
             </a:fld>
             <a:endParaRPr lang="en-US" dirty="0"/>
           </a:p>
@@ -15157,7 +15157,7 @@
             <a:fld id="{DD253308-F9C5-4FCB-8415-6DEE77C16A35}" type="slidenum">
               <a:rPr lang="en-US" smtClean="0"/>
               <a:pPr/>
-              <a:t>10</a:t>
+              <a:t>4</a:t>
             </a:fld>
             <a:endParaRPr lang="en-US" dirty="0"/>
           </a:p>
@@ -15522,7 +15522,7 @@
             <a:fld id="{DD253308-F9C5-4FCB-8415-6DEE77C16A35}" type="slidenum">
               <a:rPr lang="en-US" smtClean="0"/>
               <a:pPr/>
-              <a:t>10</a:t>
+              <a:t>5</a:t>
             </a:fld>
             <a:endParaRPr lang="en-US" dirty="0"/>
           </a:p>
@@ -15586,6 +15586,96 @@
                       </p:childTnLst>
                     </p:cTn>
                   </p:par>
+                  <p:par>
+                    <p:cTn id="7" fill="hold">
+                      <p:stCondLst>
+                        <p:cond delay="indefinite"/>
+                      </p:stCondLst>
+                      <p:childTnLst>
+                        <p:par>
+                          <p:cTn id="8" fill="hold">
+                            <p:stCondLst>
+                              <p:cond delay="0"/>
+                            </p:stCondLst>
+                            <p:childTnLst>
+                              <p:par>
+                                <p:cTn id="9" presetID="1" presetClass="entr" presetSubtype="0" fill="hold" grpId="0" nodeType="clickEffect">
+                                  <p:stCondLst>
+                                    <p:cond delay="0"/>
+                                  </p:stCondLst>
+                                  <p:childTnLst>
+                                    <p:set>
+                                      <p:cBhvr>
+                                        <p:cTn id="10" dur="1" fill="hold">
+                                          <p:stCondLst>
+                                            <p:cond delay="0"/>
+                                          </p:stCondLst>
+                                        </p:cTn>
+                                        <p:tgtEl>
+                                          <p:spTgt spid="4"/>
+                                        </p:tgtEl>
+                                        <p:attrNameLst>
+                                          <p:attrName>style.visibility</p:attrName>
+                                        </p:attrNameLst>
+                                      </p:cBhvr>
+                                      <p:to>
+                                        <p:strVal val="visible"/>
+                                      </p:to>
+                                    </p:set>
+                                  </p:childTnLst>
+                                </p:cTn>
+                              </p:par>
+                            </p:childTnLst>
+                          </p:cTn>
+                        </p:par>
+                      </p:childTnLst>
+                    </p:cTn>
+                  </p:par>
+                  <p:par>
+                    <p:cTn id="11" fill="hold">
+                      <p:stCondLst>
+                        <p:cond delay="indefinite"/>
+                      </p:stCondLst>
+                      <p:childTnLst>
+                        <p:par>
+                          <p:cTn id="12" fill="hold">
+                            <p:stCondLst>
+                              <p:cond delay="0"/>
+                            </p:stCondLst>
+                            <p:childTnLst>
+                              <p:par>
+                                <p:cTn id="13" presetID="1" presetClass="entr" presetSubtype="0" fill="hold" grpId="0" nodeType="clickEffect">
+                                  <p:stCondLst>
+                                    <p:cond delay="0"/>
+                                  </p:stCondLst>
+                                  <p:childTnLst>
+                                    <p:set>
+                                      <p:cBhvr>
+                                        <p:cTn id="14" dur="1" fill="hold">
+                                          <p:stCondLst>
+                                            <p:cond delay="0"/>
+                                          </p:stCondLst>
+                                        </p:cTn>
+                                        <p:tgtEl>
+                                          <p:spTgt spid="5"/>
+                                        </p:tgtEl>
+                                        <p:attrNameLst>
+                                          <p:attrName>style.visibility</p:attrName>
+                                        </p:attrNameLst>
+                                      </p:cBhvr>
+                                      <p:to>
+                                        <p:strVal val="visible"/>
+                                      </p:to>
+                                    </p:set>
+                                  </p:childTnLst>
+                                </p:cTn>
+                              </p:par>
+                            </p:childTnLst>
+                          </p:cTn>
+                        </p:par>
+                      </p:childTnLst>
+                    </p:cTn>
+                  </p:par>
                 </p:childTnLst>
               </p:cTn>
               <p:prevCondLst>
@@ -15609,6 +15699,8 @@
     </p:tnLst>
     <p:bldLst>
       <p:bldP spid="3" grpId="0" animBg="1"/>
+      <p:bldP spid="4" grpId="0" animBg="1"/>
+      <p:bldP spid="5" grpId="0" animBg="1"/>
     </p:bldLst>
   </p:timing>
 </p:sld>
@@ -16145,7 +16237,7 @@
             <a:fld id="{DD253308-F9C5-4FCB-8415-6DEE77C16A35}" type="slidenum">
               <a:rPr lang="en-US" smtClean="0"/>
               <a:pPr/>
-              <a:t>10</a:t>
+              <a:t>6</a:t>
             </a:fld>
             <a:endParaRPr lang="en-US" dirty="0"/>
           </a:p>
@@ -16453,7 +16545,7 @@
             <a:fld id="{DD253308-F9C5-4FCB-8415-6DEE77C16A35}" type="slidenum">
               <a:rPr lang="en-US" smtClean="0"/>
               <a:pPr/>
-              <a:t>10</a:t>
+              <a:t>7</a:t>
             </a:fld>
             <a:endParaRPr lang="en-US" dirty="0"/>
           </a:p>
@@ -16671,7 +16763,7 @@
             <a:fld id="{DD253308-F9C5-4FCB-8415-6DEE77C16A35}" type="slidenum">
               <a:rPr lang="en-US" smtClean="0"/>
               <a:pPr/>
-              <a:t>10</a:t>
+              <a:t>8</a:t>
             </a:fld>
             <a:endParaRPr lang="en-US" dirty="0"/>
           </a:p>
@@ -17482,7 +17574,7 @@
             <a:fld id="{DD253308-F9C5-4FCB-8415-6DEE77C16A35}" type="slidenum">
               <a:rPr lang="en-US" smtClean="0"/>
               <a:pPr/>
-              <a:t>10</a:t>
+              <a:t>9</a:t>
             </a:fld>
             <a:endParaRPr lang="en-US" dirty="0"/>
           </a:p>

--- a/docs/UChicago-0410.pptx
+++ b/docs/UChicago-0410.pptx
@@ -11169,7 +11169,7 @@
           <a:bodyPr/>
           <a:lstStyle/>
           <a:p>
-            <a:fld id="{E9844035-78A0-48CD-A1B4-1865DD3AD23F}" type="slidenum">
+            <a:fld id="{133B578A-5069-41C7-B44B-BBCAE1B54D41}" type="slidenum">
               <a:rPr lang="en-US" smtClean="0"/>
               <a:pPr/>
               <a:t>7</a:t>
@@ -11387,7 +11387,7 @@
           <a:bodyPr/>
           <a:lstStyle/>
           <a:p>
-            <a:fld id="{D18B3C5F-5C89-448E-A627-33D1752A6225}" type="slidenum">
+            <a:fld id="{C99AF71D-9C57-480F-8983-A52A71A7AE30}" type="slidenum">
               <a:rPr lang="en-US" smtClean="0"/>
               <a:pPr/>
               <a:t>8</a:t>
@@ -11429,35 +11429,6 @@
       </p:grpSpPr>
       <p:sp>
         <p:nvSpPr>
-          <p:cNvPr id="3" name="Footer Placeholder 2">
-            <a:extLst>
-              <a:ext uri="{FF2B5EF4-FFF2-40B4-BE49-F238E27FC236}">
-                <a16:creationId xmlns:a16="http://schemas.microsoft.com/office/drawing/2014/main" id="{1245282F-A917-93D9-F325-78A6817CD6E2}"/>
-              </a:ext>
-            </a:extLst>
-          </p:cNvPr>
-          <p:cNvSpPr>
-            <a:spLocks noGrp="1"/>
-          </p:cNvSpPr>
-          <p:nvPr>
-            <p:ph type="ftr" sz="quarter" idx="10"/>
-          </p:nvPr>
-        </p:nvSpPr>
-        <p:spPr/>
-        <p:txBody>
-          <a:bodyPr/>
-          <a:lstStyle/>
-          <a:p>
-            <a:r>
-              <a:rPr lang="en-US"/>
-              <a:t>Name of Initiative</a:t>
-            </a:r>
-            <a:endParaRPr lang="en-US" dirty="0"/>
-          </a:p>
-        </p:txBody>
-      </p:sp>
-      <p:sp>
-        <p:nvSpPr>
           <p:cNvPr id="4" name="Slide Number Placeholder 3">
             <a:extLst>
               <a:ext uri="{FF2B5EF4-FFF2-40B4-BE49-F238E27FC236}">
@@ -11477,7 +11448,7 @@
           <a:bodyPr/>
           <a:lstStyle/>
           <a:p>
-            <a:fld id="{A1593E03-F4AB-488B-BBDD-B11134A09294}" type="slidenum">
+            <a:fld id="{2FE141A2-985C-45CE-BC8B-826415B8688F}" type="slidenum">
               <a:rPr lang="en-US" smtClean="0"/>
               <a:pPr/>
               <a:t>9</a:t>
@@ -11494,8 +11465,8 @@
         </p:nvSpPr>
         <p:spPr>
           <a:xfrm>
-            <a:off x="502920" y="365760"/>
-            <a:ext cx="11155680" cy="548640"/>
+            <a:off x="502920" y="274320"/>
+            <a:ext cx="11155680" cy="640080"/>
           </a:xfrm>
           <a:prstGeom prst="rect">
             <a:avLst/>
@@ -11510,9 +11481,9 @@
           <a:p>
             <a:pPr algn="l"/>
             <a:r>
-              <a:rPr sz="2800" b="1" i="0">
-                <a:solidFill>
-                  <a:srgbClr val="011F5B"/>
+              <a:rPr sz="3200" b="1" i="0">
+                <a:solidFill>
+                  <a:srgbClr val="00143D"/>
                 </a:solidFill>
                 <a:latin typeface="Calibri"/>
               </a:rPr>
@@ -11529,8 +11500,52 @@
         </p:nvSpPr>
         <p:spPr>
           <a:xfrm>
-            <a:off x="502920" y="1143000"/>
-            <a:ext cx="11155680" cy="731520"/>
+            <a:off x="502920" y="1078992"/>
+            <a:ext cx="11155680" cy="502920"/>
+          </a:xfrm>
+          <a:prstGeom prst="rect">
+            <a:avLst/>
+          </a:prstGeom>
+          <a:noFill/>
+        </p:spPr>
+        <p:txBody>
+          <a:bodyPr wrap="square" tIns="0" bIns="0">
+            <a:spAutoFit/>
+          </a:bodyPr>
+          <a:lstStyle/>
+          <a:p>
+            <a:pPr algn="l"/>
+            <a:r>
+              <a:rPr sz="2600" b="0" i="0">
+                <a:solidFill>
+                  <a:srgbClr val="1F2937"/>
+                </a:solidFill>
+                <a:latin typeface="Calibri"/>
+              </a:rPr>
+              <a:t>Each endorsement could earn the sponsor up to </a:t>
+            </a:r>
+            <a:r>
+              <a:rPr sz="2600" b="1" i="0">
+                <a:solidFill>
+                  <a:srgbClr val="00143D"/>
+                </a:solidFill>
+                <a:latin typeface="Calibri"/>
+              </a:rPr>
+              <a:t>$3.00.</a:t>
+            </a:r>
+          </a:p>
+        </p:txBody>
+      </p:sp>
+      <p:sp>
+        <p:nvSpPr>
+          <p:cNvPr id="7" name="TextBox 6"/>
+          <p:cNvSpPr txBox="1"/>
+          <p:nvPr/>
+        </p:nvSpPr>
+        <p:spPr>
+          <a:xfrm>
+            <a:off x="502920" y="1627632"/>
+            <a:ext cx="11155680" cy="384048"/>
           </a:xfrm>
           <a:prstGeom prst="rect">
             <a:avLst/>
@@ -11543,50 +11558,15 @@
           </a:bodyPr>
           <a:lstStyle/>
           <a:p>
-            <a:pPr algn="ctr"/>
-            <a:r>
-              <a:rPr sz="3600" b="1" i="0">
-                <a:solidFill>
-                  <a:srgbClr val="011F5B"/>
+            <a:pPr algn="l"/>
+            <a:r>
+              <a:rPr sz="1500" b="0" i="1">
+                <a:solidFill>
+                  <a:srgbClr val="5B657A"/>
                 </a:solidFill>
                 <a:latin typeface="Calibri"/>
               </a:rPr>
-              <a:t>sponsor earns  =  $3  ×  evaluator wager</a:t>
-            </a:r>
-          </a:p>
-        </p:txBody>
-      </p:sp>
-      <p:sp>
-        <p:nvSpPr>
-          <p:cNvPr id="7" name="TextBox 6"/>
-          <p:cNvSpPr txBox="1"/>
-          <p:nvPr/>
-        </p:nvSpPr>
-        <p:spPr>
-          <a:xfrm>
-            <a:off x="502920" y="1920240"/>
-            <a:ext cx="11155680" cy="320040"/>
-          </a:xfrm>
-          <a:prstGeom prst="rect">
-            <a:avLst/>
-          </a:prstGeom>
-          <a:noFill/>
-        </p:spPr>
-        <p:txBody>
-          <a:bodyPr wrap="square" lIns="27432" rIns="27432" tIns="18288" bIns="18288">
-            <a:spAutoFit/>
-          </a:bodyPr>
-          <a:lstStyle/>
-          <a:p>
-            <a:pPr algn="ctr"/>
-            <a:r>
-              <a:rPr sz="1400" b="0" i="1">
-                <a:solidFill>
-                  <a:srgbClr val="5B657A"/>
-                </a:solidFill>
-                <a:latin typeface="Calibri"/>
-              </a:rPr>
-              <a:t>only if the endorsed candidate scored higher on logical reasoning</a:t>
+              <a:t>The amount depends on how confidently a downstream evaluator wagers on it — and only if the endorsed candidate truly scored higher.</a:t>
             </a:r>
           </a:p>
         </p:txBody>
@@ -11599,17 +11579,19 @@
         </p:nvSpPr>
         <p:spPr>
           <a:xfrm>
-            <a:off x="6675120" y="4791456"/>
-            <a:ext cx="1554480" cy="841248"/>
+            <a:off x="502920" y="2103120"/>
+            <a:ext cx="5349240" cy="841248"/>
           </a:xfrm>
           <a:prstGeom prst="rect">
             <a:avLst/>
           </a:prstGeom>
           <a:solidFill>
-            <a:srgbClr val="EAF0FB"/>
+            <a:srgbClr val="FFFFFF"/>
           </a:solidFill>
-          <a:ln>
-            <a:noFill/>
+          <a:ln w="25400">
+            <a:solidFill>
+              <a:srgbClr val="106B45"/>
+            </a:solidFill>
           </a:ln>
         </p:spPr>
         <p:style>
@@ -11627,68 +11609,60 @@
           </a:fontRef>
         </p:style>
         <p:txBody>
-          <a:bodyPr rtlCol="0" anchor="ctr"/>
-          <a:lstStyle/>
-          <a:p/>
-        </p:txBody>
-      </p:sp>
-      <p:sp>
-        <p:nvSpPr>
-          <p:cNvPr id="9" name="TextBox 8"/>
-          <p:cNvSpPr txBox="1"/>
+          <a:bodyPr rtlCol="0" anchor="ctr" lIns="182880" rIns="182880"/>
+          <a:lstStyle/>
+          <a:p>
+            <a:pPr algn="l"/>
+            <a:r>
+              <a:rPr sz="2100" b="0" i="0">
+                <a:solidFill>
+                  <a:srgbClr val="1F2937"/>
+                </a:solidFill>
+                <a:latin typeface="Calibri"/>
+              </a:rPr>
+              <a:t>If </a:t>
+            </a:r>
+            <a:r>
+              <a:rPr sz="2100" b="1" i="0">
+                <a:solidFill>
+                  <a:srgbClr val="106B45"/>
+                </a:solidFill>
+                <a:latin typeface="Calibri"/>
+              </a:rPr>
+              <a:t>right </a:t>
+            </a:r>
+            <a:r>
+              <a:rPr sz="2100" b="0" i="0">
+                <a:solidFill>
+                  <a:srgbClr val="1F2937"/>
+                </a:solidFill>
+                <a:latin typeface="Calibri"/>
+              </a:rPr>
+              <a:t>→  $3 × evaluator's wager</a:t>
+            </a:r>
+          </a:p>
+        </p:txBody>
+      </p:sp>
+      <p:sp>
+        <p:nvSpPr>
+          <p:cNvPr id="9" name="Rectangle 8"/>
+          <p:cNvSpPr/>
           <p:nvPr/>
         </p:nvSpPr>
         <p:spPr>
           <a:xfrm>
-            <a:off x="502920" y="2377440"/>
-            <a:ext cx="11155680" cy="292608"/>
+            <a:off x="6309359" y="2103120"/>
+            <a:ext cx="5349240" cy="841248"/>
           </a:xfrm>
           <a:prstGeom prst="rect">
             <a:avLst/>
           </a:prstGeom>
-          <a:noFill/>
-        </p:spPr>
-        <p:txBody>
-          <a:bodyPr wrap="square" lIns="27432" rIns="27432" tIns="18288" bIns="18288">
-            <a:spAutoFit/>
-          </a:bodyPr>
-          <a:lstStyle/>
-          <a:p>
-            <a:pPr algn="ctr"/>
-            <a:r>
-              <a:rPr sz="1300" b="0" i="0">
-                <a:solidFill>
-                  <a:srgbClr val="1F2937"/>
-                </a:solidFill>
-                <a:latin typeface="Calibri"/>
-              </a:rPr>
-              <a:t>evaluator wagers 50%</a:t>
-            </a:r>
-          </a:p>
-        </p:txBody>
-      </p:sp>
-      <p:sp>
-        <p:nvSpPr>
-          <p:cNvPr id="10" name="Rounded Rectangle 9"/>
-          <p:cNvSpPr/>
-          <p:nvPr/>
-        </p:nvSpPr>
-        <p:spPr>
-          <a:xfrm>
-            <a:off x="3200400" y="2834640"/>
-            <a:ext cx="5788152" cy="201168"/>
-          </a:xfrm>
-          <a:prstGeom prst="roundRect">
-            <a:avLst>
-              <a:gd name="adj" fmla="val 50000"/>
-            </a:avLst>
-          </a:prstGeom>
           <a:solidFill>
-            <a:srgbClr val="E5E7EB"/>
+            <a:srgbClr val="FFFFFF"/>
           </a:solidFill>
-          <a:ln w="9525">
+          <a:ln w="25400">
             <a:solidFill>
-              <a:srgbClr val="C7CFDD"/>
+              <a:srgbClr val="B12121"/>
             </a:solidFill>
           </a:ln>
         </p:spPr>
@@ -11707,26 +11681,131 @@
           </a:fontRef>
         </p:style>
         <p:txBody>
-          <a:bodyPr rtlCol="0" anchor="ctr"/>
-          <a:lstStyle/>
-          <a:p/>
-        </p:txBody>
-      </p:sp>
-      <p:sp>
-        <p:nvSpPr>
-          <p:cNvPr id="11" name="Rounded Rectangle 10"/>
+          <a:bodyPr rtlCol="0" anchor="ctr" lIns="182880" rIns="182880"/>
+          <a:lstStyle/>
+          <a:p>
+            <a:pPr algn="l"/>
+            <a:r>
+              <a:rPr sz="2100" b="0" i="0">
+                <a:solidFill>
+                  <a:srgbClr val="1F2937"/>
+                </a:solidFill>
+                <a:latin typeface="Calibri"/>
+              </a:rPr>
+              <a:t>If </a:t>
+            </a:r>
+            <a:r>
+              <a:rPr sz="2100" b="1" i="0">
+                <a:solidFill>
+                  <a:srgbClr val="B12121"/>
+                </a:solidFill>
+                <a:latin typeface="Calibri"/>
+              </a:rPr>
+              <a:t>wrong </a:t>
+            </a:r>
+            <a:r>
+              <a:rPr sz="2100" b="0" i="0">
+                <a:solidFill>
+                  <a:srgbClr val="1F2937"/>
+                </a:solidFill>
+                <a:latin typeface="Calibri"/>
+              </a:rPr>
+              <a:t>→  nothing</a:t>
+            </a:r>
+          </a:p>
+        </p:txBody>
+      </p:sp>
+      <p:sp>
+        <p:nvSpPr>
+          <p:cNvPr id="10" name="TextBox 9"/>
+          <p:cNvSpPr txBox="1"/>
+          <p:nvPr/>
+        </p:nvSpPr>
+        <p:spPr>
+          <a:xfrm>
+            <a:off x="502920" y="3154680"/>
+            <a:ext cx="11155680" cy="292608"/>
+          </a:xfrm>
+          <a:prstGeom prst="rect">
+            <a:avLst/>
+          </a:prstGeom>
+          <a:noFill/>
+        </p:spPr>
+        <p:txBody>
+          <a:bodyPr wrap="square" lIns="27432" rIns="27432" tIns="18288" bIns="18288">
+            <a:spAutoFit/>
+          </a:bodyPr>
+          <a:lstStyle/>
+          <a:p>
+            <a:pPr algn="ctr"/>
+            <a:r>
+              <a:rPr sz="1300" b="0" i="1">
+                <a:solidFill>
+                  <a:srgbClr val="5B657A"/>
+                </a:solidFill>
+                <a:latin typeface="Calibri"/>
+              </a:rPr>
+              <a:t>evaluator wagers 50%</a:t>
+            </a:r>
+          </a:p>
+        </p:txBody>
+      </p:sp>
+      <p:sp>
+        <p:nvSpPr>
+          <p:cNvPr id="11" name="Rectangle 10"/>
           <p:cNvSpPr/>
           <p:nvPr/>
         </p:nvSpPr>
         <p:spPr>
           <a:xfrm>
-            <a:off x="3200400" y="2834640"/>
+            <a:off x="3200400" y="3520440"/>
+            <a:ext cx="5788152" cy="201168"/>
+          </a:xfrm>
+          <a:prstGeom prst="rect">
+            <a:avLst/>
+          </a:prstGeom>
+          <a:solidFill>
+            <a:srgbClr val="EAF0FB"/>
+          </a:solidFill>
+          <a:ln w="9525">
+            <a:solidFill>
+              <a:srgbClr val="9AA7BD"/>
+            </a:solidFill>
+          </a:ln>
+        </p:spPr>
+        <p:style>
+          <a:lnRef idx="1">
+            <a:schemeClr val="accent1"/>
+          </a:lnRef>
+          <a:fillRef idx="3">
+            <a:schemeClr val="accent1"/>
+          </a:fillRef>
+          <a:effectRef idx="2">
+            <a:schemeClr val="accent1"/>
+          </a:effectRef>
+          <a:fontRef idx="minor">
+            <a:schemeClr val="lt1"/>
+          </a:fontRef>
+        </p:style>
+        <p:txBody>
+          <a:bodyPr rtlCol="0" anchor="ctr"/>
+          <a:lstStyle/>
+          <a:p/>
+        </p:txBody>
+      </p:sp>
+      <p:sp>
+        <p:nvSpPr>
+          <p:cNvPr id="12" name="Rectangle 11"/>
+          <p:cNvSpPr/>
+          <p:nvPr/>
+        </p:nvSpPr>
+        <p:spPr>
+          <a:xfrm>
+            <a:off x="3200400" y="3520440"/>
             <a:ext cx="2894076" cy="201168"/>
           </a:xfrm>
-          <a:prstGeom prst="roundRect">
-            <a:avLst>
-              <a:gd name="adj" fmla="val 50000"/>
-            </a:avLst>
+          <a:prstGeom prst="rect">
+            <a:avLst/>
           </a:prstGeom>
           <a:solidFill>
             <a:srgbClr val="011F5B"/>
@@ -11757,13 +11836,13 @@
       </p:sp>
       <p:sp>
         <p:nvSpPr>
-          <p:cNvPr id="12" name="Oval 11"/>
+          <p:cNvPr id="13" name="Oval 12"/>
           <p:cNvSpPr/>
           <p:nvPr/>
         </p:nvSpPr>
         <p:spPr>
           <a:xfrm>
-            <a:off x="5902452" y="2743200"/>
+            <a:off x="5902452" y="3429000"/>
             <a:ext cx="384048" cy="384048"/>
           </a:xfrm>
           <a:prstGeom prst="ellipse">
@@ -11772,7 +11851,7 @@
           <a:solidFill>
             <a:srgbClr val="FFFFFF"/>
           </a:solidFill>
-          <a:ln w="22225">
+          <a:ln w="31750">
             <a:solidFill>
               <a:srgbClr val="011F5B"/>
             </a:solidFill>
@@ -11800,13 +11879,13 @@
       </p:sp>
       <p:sp>
         <p:nvSpPr>
-          <p:cNvPr id="13" name="TextBox 12"/>
+          <p:cNvPr id="14" name="TextBox 13"/>
           <p:cNvSpPr txBox="1"/>
           <p:nvPr/>
         </p:nvSpPr>
         <p:spPr>
           <a:xfrm>
-            <a:off x="2514600" y="3127248"/>
+            <a:off x="2514600" y="3813048"/>
             <a:ext cx="640080" cy="274320"/>
           </a:xfrm>
           <a:prstGeom prst="rect">
@@ -11835,13 +11914,13 @@
       </p:sp>
       <p:sp>
         <p:nvSpPr>
-          <p:cNvPr id="14" name="TextBox 13"/>
+          <p:cNvPr id="15" name="TextBox 14"/>
           <p:cNvSpPr txBox="1"/>
           <p:nvPr/>
         </p:nvSpPr>
         <p:spPr>
           <a:xfrm>
-            <a:off x="9034272" y="3127248"/>
+            <a:off x="9034272" y="3813048"/>
             <a:ext cx="731520" cy="274320"/>
           </a:xfrm>
           <a:prstGeom prst="rect">
@@ -11870,14 +11949,14 @@
       </p:sp>
       <p:sp>
         <p:nvSpPr>
-          <p:cNvPr id="15" name="TextBox 14"/>
+          <p:cNvPr id="16" name="TextBox 15"/>
           <p:cNvSpPr txBox="1"/>
           <p:nvPr/>
         </p:nvSpPr>
         <p:spPr>
           <a:xfrm>
-            <a:off x="4270248" y="3520440"/>
-            <a:ext cx="3657600" cy="914400"/>
+            <a:off x="502920" y="4160520"/>
+            <a:ext cx="5349240" cy="777240"/>
           </a:xfrm>
           <a:prstGeom prst="rect">
             <a:avLst/>
@@ -11890,50 +11969,15 @@
           </a:bodyPr>
           <a:lstStyle/>
           <a:p>
-            <a:pPr algn="ctr"/>
-            <a:r>
-              <a:rPr sz="5600" b="1" i="0">
-                <a:solidFill>
-                  <a:srgbClr val="011F5B"/>
+            <a:pPr algn="r"/>
+            <a:r>
+              <a:rPr sz="3200" b="1" i="0">
+                <a:solidFill>
+                  <a:srgbClr val="106B45"/>
                 </a:solidFill>
                 <a:latin typeface="Calibri"/>
               </a:rPr>
-              <a:t>$1.50</a:t>
-            </a:r>
-          </a:p>
-        </p:txBody>
-      </p:sp>
-      <p:sp>
-        <p:nvSpPr>
-          <p:cNvPr id="16" name="TextBox 15"/>
-          <p:cNvSpPr txBox="1"/>
-          <p:nvPr/>
-        </p:nvSpPr>
-        <p:spPr>
-          <a:xfrm>
-            <a:off x="1965960" y="4846320"/>
-            <a:ext cx="1600200" cy="365760"/>
-          </a:xfrm>
-          <a:prstGeom prst="rect">
-            <a:avLst/>
-          </a:prstGeom>
-          <a:noFill/>
-        </p:spPr>
-        <p:txBody>
-          <a:bodyPr wrap="square" lIns="27432" rIns="27432" tIns="18288" bIns="18288" anchor="ctr">
-            <a:spAutoFit/>
-          </a:bodyPr>
-          <a:lstStyle/>
-          <a:p>
-            <a:pPr algn="ctr"/>
-            <a:r>
-              <a:rPr sz="1500" b="1" i="0">
-                <a:solidFill>
-                  <a:srgbClr val="5B657A"/>
-                </a:solidFill>
-                <a:latin typeface="Calibri"/>
-              </a:rPr>
-              <a:t>wager</a:t>
+              <a:t>right:  $1.50</a:t>
             </a:r>
           </a:p>
         </p:txBody>
@@ -11946,8 +11990,8 @@
         </p:nvSpPr>
         <p:spPr>
           <a:xfrm>
-            <a:off x="3566160" y="4846320"/>
-            <a:ext cx="1554480" cy="365760"/>
+            <a:off x="6355080" y="4160520"/>
+            <a:ext cx="5349240" cy="777240"/>
           </a:xfrm>
           <a:prstGeom prst="rect">
             <a:avLst/>
@@ -11955,20 +11999,20 @@
           <a:noFill/>
         </p:spPr>
         <p:txBody>
-          <a:bodyPr wrap="square" lIns="27432" rIns="27432" tIns="18288" bIns="18288" anchor="ctr">
+          <a:bodyPr wrap="square" lIns="27432" rIns="27432" tIns="18288" bIns="18288">
             <a:spAutoFit/>
           </a:bodyPr>
           <a:lstStyle/>
           <a:p>
-            <a:pPr algn="ctr"/>
-            <a:r>
-              <a:rPr sz="1500" b="1" i="0">
-                <a:solidFill>
-                  <a:srgbClr val="011F5B"/>
+            <a:pPr algn="l"/>
+            <a:r>
+              <a:rPr sz="3200" b="1" i="0">
+                <a:solidFill>
+                  <a:srgbClr val="B12121"/>
                 </a:solidFill>
                 <a:latin typeface="Calibri"/>
               </a:rPr>
-              <a:t>0%</a:t>
+              <a:t>wrong:  $0</a:t>
             </a:r>
           </a:p>
         </p:txBody>
@@ -11981,8 +12025,8 @@
         </p:nvSpPr>
         <p:spPr>
           <a:xfrm>
-            <a:off x="5120640" y="4846320"/>
-            <a:ext cx="1554480" cy="365760"/>
+            <a:off x="2194560" y="5074920"/>
+            <a:ext cx="1783080" cy="310896"/>
           </a:xfrm>
           <a:prstGeom prst="rect">
             <a:avLst/>
@@ -11990,20 +12034,20 @@
           <a:noFill/>
         </p:spPr>
         <p:txBody>
-          <a:bodyPr wrap="square" lIns="27432" rIns="27432" tIns="18288" bIns="18288" anchor="ctr">
+          <a:bodyPr wrap="square" lIns="27432" rIns="27432" tIns="18288" bIns="18288">
             <a:spAutoFit/>
           </a:bodyPr>
           <a:lstStyle/>
           <a:p>
-            <a:pPr algn="ctr"/>
+            <a:pPr algn="r"/>
             <a:r>
               <a:rPr sz="1500" b="1" i="0">
                 <a:solidFill>
-                  <a:srgbClr val="011F5B"/>
+                  <a:srgbClr val="5B657A"/>
                 </a:solidFill>
                 <a:latin typeface="Calibri"/>
               </a:rPr>
-              <a:t>25%</a:t>
+              <a:t>wager</a:t>
             </a:r>
           </a:p>
         </p:txBody>
@@ -12016,8 +12060,8 @@
         </p:nvSpPr>
         <p:spPr>
           <a:xfrm>
-            <a:off x="6675120" y="4846320"/>
-            <a:ext cx="1554480" cy="365760"/>
+            <a:off x="3977639" y="5074920"/>
+            <a:ext cx="2331720" cy="310896"/>
           </a:xfrm>
           <a:prstGeom prst="rect">
             <a:avLst/>
@@ -12025,7 +12069,7 @@
           <a:noFill/>
         </p:spPr>
         <p:txBody>
-          <a:bodyPr wrap="square" lIns="27432" rIns="27432" tIns="18288" bIns="18288" anchor="ctr">
+          <a:bodyPr wrap="square" lIns="27432" rIns="27432" tIns="18288" bIns="18288">
             <a:spAutoFit/>
           </a:bodyPr>
           <a:lstStyle/>
@@ -12034,11 +12078,11 @@
             <a:r>
               <a:rPr sz="1500" b="1" i="0">
                 <a:solidFill>
-                  <a:srgbClr val="011F5B"/>
+                  <a:srgbClr val="5B657A"/>
                 </a:solidFill>
                 <a:latin typeface="Calibri"/>
               </a:rPr>
-              <a:t>50%</a:t>
+              <a:t>0%</a:t>
             </a:r>
           </a:p>
         </p:txBody>
@@ -12051,8 +12095,8 @@
         </p:nvSpPr>
         <p:spPr>
           <a:xfrm>
-            <a:off x="8229600" y="4846320"/>
-            <a:ext cx="1554480" cy="365760"/>
+            <a:off x="6309359" y="5074920"/>
+            <a:ext cx="2331720" cy="310896"/>
           </a:xfrm>
           <a:prstGeom prst="rect">
             <a:avLst/>
@@ -12060,7 +12104,7 @@
           <a:noFill/>
         </p:spPr>
         <p:txBody>
-          <a:bodyPr wrap="square" lIns="27432" rIns="27432" tIns="18288" bIns="18288" anchor="ctr">
+          <a:bodyPr wrap="square" lIns="27432" rIns="27432" tIns="18288" bIns="18288">
             <a:spAutoFit/>
           </a:bodyPr>
           <a:lstStyle/>
@@ -12069,11 +12113,11 @@
             <a:r>
               <a:rPr sz="1500" b="1" i="0">
                 <a:solidFill>
-                  <a:srgbClr val="011F5B"/>
+                  <a:srgbClr val="5B657A"/>
                 </a:solidFill>
                 <a:latin typeface="Calibri"/>
               </a:rPr>
-              <a:t>75%</a:t>
+              <a:t>50%</a:t>
             </a:r>
           </a:p>
         </p:txBody>
@@ -12086,8 +12130,8 @@
         </p:nvSpPr>
         <p:spPr>
           <a:xfrm>
-            <a:off x="9784080" y="4846320"/>
-            <a:ext cx="1554480" cy="365760"/>
+            <a:off x="8641080" y="5074920"/>
+            <a:ext cx="2331720" cy="310896"/>
           </a:xfrm>
           <a:prstGeom prst="rect">
             <a:avLst/>
@@ -12095,7 +12139,7 @@
           <a:noFill/>
         </p:spPr>
         <p:txBody>
-          <a:bodyPr wrap="square" lIns="27432" rIns="27432" tIns="18288" bIns="18288" anchor="ctr">
+          <a:bodyPr wrap="square" lIns="27432" rIns="27432" tIns="18288" bIns="18288">
             <a:spAutoFit/>
           </a:bodyPr>
           <a:lstStyle/>
@@ -12104,7 +12148,7 @@
             <a:r>
               <a:rPr sz="1500" b="1" i="0">
                 <a:solidFill>
-                  <a:srgbClr val="011F5B"/>
+                  <a:srgbClr val="5B657A"/>
                 </a:solidFill>
                 <a:latin typeface="Calibri"/>
               </a:rPr>
@@ -12115,37 +12159,43 @@
       </p:sp>
       <p:sp>
         <p:nvSpPr>
-          <p:cNvPr id="22" name="TextBox 21"/>
-          <p:cNvSpPr txBox="1"/>
+          <p:cNvPr id="22" name="Rectangle 21"/>
+          <p:cNvSpPr/>
           <p:nvPr/>
         </p:nvSpPr>
         <p:spPr>
           <a:xfrm>
-            <a:off x="1965960" y="5257800"/>
-            <a:ext cx="1600200" cy="365760"/>
+            <a:off x="6309359" y="5367528"/>
+            <a:ext cx="2331720" cy="658368"/>
           </a:xfrm>
           <a:prstGeom prst="rect">
             <a:avLst/>
           </a:prstGeom>
-          <a:noFill/>
-        </p:spPr>
-        <p:txBody>
-          <a:bodyPr wrap="square" lIns="27432" rIns="27432" tIns="18288" bIns="18288" anchor="ctr">
-            <a:spAutoFit/>
-          </a:bodyPr>
-          <a:lstStyle/>
-          <a:p>
-            <a:pPr algn="ctr"/>
-            <a:r>
-              <a:rPr sz="1500" b="1" i="0">
-                <a:solidFill>
-                  <a:srgbClr val="5B657A"/>
-                </a:solidFill>
-                <a:latin typeface="Calibri"/>
-              </a:rPr>
-              <a:t>bonus</a:t>
-            </a:r>
-          </a:p>
+          <a:solidFill>
+            <a:srgbClr val="DBE3F1"/>
+          </a:solidFill>
+          <a:ln>
+            <a:noFill/>
+          </a:ln>
+        </p:spPr>
+        <p:style>
+          <a:lnRef idx="1">
+            <a:schemeClr val="accent1"/>
+          </a:lnRef>
+          <a:fillRef idx="3">
+            <a:schemeClr val="accent1"/>
+          </a:fillRef>
+          <a:effectRef idx="2">
+            <a:schemeClr val="accent1"/>
+          </a:effectRef>
+          <a:fontRef idx="minor">
+            <a:schemeClr val="lt1"/>
+          </a:fontRef>
+        </p:style>
+        <p:txBody>
+          <a:bodyPr rtlCol="0" anchor="ctr"/>
+          <a:lstStyle/>
+          <a:p/>
         </p:txBody>
       </p:sp>
       <p:sp>
@@ -12156,8 +12206,8 @@
         </p:nvSpPr>
         <p:spPr>
           <a:xfrm>
-            <a:off x="3566160" y="5257800"/>
-            <a:ext cx="1554480" cy="365760"/>
+            <a:off x="2194560" y="5385816"/>
+            <a:ext cx="1783080" cy="310896"/>
           </a:xfrm>
           <a:prstGeom prst="rect">
             <a:avLst/>
@@ -12165,20 +12215,20 @@
           <a:noFill/>
         </p:spPr>
         <p:txBody>
-          <a:bodyPr wrap="square" lIns="27432" rIns="27432" tIns="18288" bIns="18288" anchor="ctr">
+          <a:bodyPr wrap="square" lIns="27432" rIns="27432" tIns="18288" bIns="18288">
             <a:spAutoFit/>
           </a:bodyPr>
           <a:lstStyle/>
           <a:p>
-            <a:pPr algn="ctr"/>
-            <a:r>
-              <a:rPr sz="1500" b="0" i="0">
-                <a:solidFill>
-                  <a:srgbClr val="1F2937"/>
+            <a:pPr algn="r"/>
+            <a:r>
+              <a:rPr sz="1500" b="1" i="0">
+                <a:solidFill>
+                  <a:srgbClr val="106B45"/>
                 </a:solidFill>
                 <a:latin typeface="Calibri"/>
               </a:rPr>
-              <a:t>$0</a:t>
+              <a:t>if right</a:t>
             </a:r>
           </a:p>
         </p:txBody>
@@ -12191,8 +12241,8 @@
         </p:nvSpPr>
         <p:spPr>
           <a:xfrm>
-            <a:off x="5120640" y="5257800"/>
-            <a:ext cx="1554480" cy="365760"/>
+            <a:off x="3977639" y="5385816"/>
+            <a:ext cx="2331720" cy="310896"/>
           </a:xfrm>
           <a:prstGeom prst="rect">
             <a:avLst/>
@@ -12200,7 +12250,7 @@
           <a:noFill/>
         </p:spPr>
         <p:txBody>
-          <a:bodyPr wrap="square" lIns="27432" rIns="27432" tIns="18288" bIns="18288" anchor="ctr">
+          <a:bodyPr wrap="square" lIns="27432" rIns="27432" tIns="18288" bIns="18288">
             <a:spAutoFit/>
           </a:bodyPr>
           <a:lstStyle/>
@@ -12213,7 +12263,7 @@
                 </a:solidFill>
                 <a:latin typeface="Calibri"/>
               </a:rPr>
-              <a:t>$0.75</a:t>
+              <a:t>$0</a:t>
             </a:r>
           </a:p>
         </p:txBody>
@@ -12226,8 +12276,8 @@
         </p:nvSpPr>
         <p:spPr>
           <a:xfrm>
-            <a:off x="6675120" y="5257800"/>
-            <a:ext cx="1554480" cy="365760"/>
+            <a:off x="6309359" y="5385816"/>
+            <a:ext cx="2331720" cy="310896"/>
           </a:xfrm>
           <a:prstGeom prst="rect">
             <a:avLst/>
@@ -12235,7 +12285,7 @@
           <a:noFill/>
         </p:spPr>
         <p:txBody>
-          <a:bodyPr wrap="square" lIns="27432" rIns="27432" tIns="18288" bIns="18288" anchor="ctr">
+          <a:bodyPr wrap="square" lIns="27432" rIns="27432" tIns="18288" bIns="18288">
             <a:spAutoFit/>
           </a:bodyPr>
           <a:lstStyle/>
@@ -12261,8 +12311,8 @@
         </p:nvSpPr>
         <p:spPr>
           <a:xfrm>
-            <a:off x="8229600" y="5257800"/>
-            <a:ext cx="1554480" cy="365760"/>
+            <a:off x="8641080" y="5385816"/>
+            <a:ext cx="2331720" cy="310896"/>
           </a:xfrm>
           <a:prstGeom prst="rect">
             <a:avLst/>
@@ -12270,7 +12320,7 @@
           <a:noFill/>
         </p:spPr>
         <p:txBody>
-          <a:bodyPr wrap="square" lIns="27432" rIns="27432" tIns="18288" bIns="18288" anchor="ctr">
+          <a:bodyPr wrap="square" lIns="27432" rIns="27432" tIns="18288" bIns="18288">
             <a:spAutoFit/>
           </a:bodyPr>
           <a:lstStyle/>
@@ -12283,7 +12333,7 @@
                 </a:solidFill>
                 <a:latin typeface="Calibri"/>
               </a:rPr>
-              <a:t>$2.25</a:t>
+              <a:t>$3.00</a:t>
             </a:r>
           </a:p>
         </p:txBody>
@@ -12296,8 +12346,8 @@
         </p:nvSpPr>
         <p:spPr>
           <a:xfrm>
-            <a:off x="9784080" y="5257800"/>
-            <a:ext cx="1554480" cy="365760"/>
+            <a:off x="2194560" y="5696712"/>
+            <a:ext cx="1783080" cy="310896"/>
           </a:xfrm>
           <a:prstGeom prst="rect">
             <a:avLst/>
@@ -12305,20 +12355,20 @@
           <a:noFill/>
         </p:spPr>
         <p:txBody>
-          <a:bodyPr wrap="square" lIns="27432" rIns="27432" tIns="18288" bIns="18288" anchor="ctr">
+          <a:bodyPr wrap="square" lIns="27432" rIns="27432" tIns="18288" bIns="18288">
             <a:spAutoFit/>
           </a:bodyPr>
           <a:lstStyle/>
           <a:p>
-            <a:pPr algn="ctr"/>
-            <a:r>
-              <a:rPr sz="1500" b="0" i="0">
-                <a:solidFill>
-                  <a:srgbClr val="1F2937"/>
+            <a:pPr algn="r"/>
+            <a:r>
+              <a:rPr sz="1500" b="1" i="0">
+                <a:solidFill>
+                  <a:srgbClr val="B12121"/>
                 </a:solidFill>
                 <a:latin typeface="Calibri"/>
               </a:rPr>
-              <a:t>$3.00</a:t>
+              <a:t>if wrong</a:t>
             </a:r>
           </a:p>
         </p:txBody>
@@ -12331,8 +12381,113 @@
         </p:nvSpPr>
         <p:spPr>
           <a:xfrm>
-            <a:off x="502920" y="5989320"/>
-            <a:ext cx="11155680" cy="320040"/>
+            <a:off x="3977639" y="5696712"/>
+            <a:ext cx="2331720" cy="310896"/>
+          </a:xfrm>
+          <a:prstGeom prst="rect">
+            <a:avLst/>
+          </a:prstGeom>
+          <a:noFill/>
+        </p:spPr>
+        <p:txBody>
+          <a:bodyPr wrap="square" lIns="27432" rIns="27432" tIns="18288" bIns="18288">
+            <a:spAutoFit/>
+          </a:bodyPr>
+          <a:lstStyle/>
+          <a:p>
+            <a:pPr algn="ctr"/>
+            <a:r>
+              <a:rPr sz="1500" b="0" i="0">
+                <a:solidFill>
+                  <a:srgbClr val="1F2937"/>
+                </a:solidFill>
+                <a:latin typeface="Calibri"/>
+              </a:rPr>
+              <a:t>$0</a:t>
+            </a:r>
+          </a:p>
+        </p:txBody>
+      </p:sp>
+      <p:sp>
+        <p:nvSpPr>
+          <p:cNvPr id="29" name="TextBox 28"/>
+          <p:cNvSpPr txBox="1"/>
+          <p:nvPr/>
+        </p:nvSpPr>
+        <p:spPr>
+          <a:xfrm>
+            <a:off x="6309359" y="5696712"/>
+            <a:ext cx="2331720" cy="310896"/>
+          </a:xfrm>
+          <a:prstGeom prst="rect">
+            <a:avLst/>
+          </a:prstGeom>
+          <a:noFill/>
+        </p:spPr>
+        <p:txBody>
+          <a:bodyPr wrap="square" lIns="27432" rIns="27432" tIns="18288" bIns="18288">
+            <a:spAutoFit/>
+          </a:bodyPr>
+          <a:lstStyle/>
+          <a:p>
+            <a:pPr algn="ctr"/>
+            <a:r>
+              <a:rPr sz="1500" b="0" i="0">
+                <a:solidFill>
+                  <a:srgbClr val="1F2937"/>
+                </a:solidFill>
+                <a:latin typeface="Calibri"/>
+              </a:rPr>
+              <a:t>$0</a:t>
+            </a:r>
+          </a:p>
+        </p:txBody>
+      </p:sp>
+      <p:sp>
+        <p:nvSpPr>
+          <p:cNvPr id="30" name="TextBox 29"/>
+          <p:cNvSpPr txBox="1"/>
+          <p:nvPr/>
+        </p:nvSpPr>
+        <p:spPr>
+          <a:xfrm>
+            <a:off x="8641080" y="5696712"/>
+            <a:ext cx="2331720" cy="310896"/>
+          </a:xfrm>
+          <a:prstGeom prst="rect">
+            <a:avLst/>
+          </a:prstGeom>
+          <a:noFill/>
+        </p:spPr>
+        <p:txBody>
+          <a:bodyPr wrap="square" lIns="27432" rIns="27432" tIns="18288" bIns="18288">
+            <a:spAutoFit/>
+          </a:bodyPr>
+          <a:lstStyle/>
+          <a:p>
+            <a:pPr algn="ctr"/>
+            <a:r>
+              <a:rPr sz="1500" b="0" i="0">
+                <a:solidFill>
+                  <a:srgbClr val="1F2937"/>
+                </a:solidFill>
+                <a:latin typeface="Calibri"/>
+              </a:rPr>
+              <a:t>$0</a:t>
+            </a:r>
+          </a:p>
+        </p:txBody>
+      </p:sp>
+      <p:sp>
+        <p:nvSpPr>
+          <p:cNvPr id="31" name="TextBox 30"/>
+          <p:cNvSpPr txBox="1"/>
+          <p:nvPr/>
+        </p:nvSpPr>
+        <p:spPr>
+          <a:xfrm>
+            <a:off x="502920" y="6099048"/>
+            <a:ext cx="11155680" cy="274320"/>
           </a:xfrm>
           <a:prstGeom prst="rect">
             <a:avLst/>
@@ -12409,7 +12564,7 @@
           <a:bodyPr/>
           <a:lstStyle/>
           <a:p>
-            <a:fld id="{7E88E3C7-5C5B-4B3C-BA62-549FDAFD505C}" type="slidenum">
+            <a:fld id="{AA8FB8B8-6742-43DB-982A-BE508B9FD65E}" type="slidenum">
               <a:rPr lang="en-US" smtClean="0"/>
               <a:pPr/>
               <a:t>10</a:t>
@@ -13561,7 +13716,7 @@
           <a:bodyPr/>
           <a:lstStyle/>
           <a:p>
-            <a:fld id="{F0F04575-80B0-4419-87DC-16961C0C370C}" type="slidenum">
+            <a:fld id="{FA04BBA2-B4A7-4C88-ADF7-36A5469907FA}" type="slidenum">
               <a:rPr lang="en-US" smtClean="0"/>
               <a:pPr/>
               <a:t>11</a:t>
@@ -13578,8 +13733,8 @@
         </p:nvSpPr>
         <p:spPr>
           <a:xfrm>
-            <a:off x="502920" y="365760"/>
-            <a:ext cx="11155680" cy="548640"/>
+            <a:off x="502920" y="274320"/>
+            <a:ext cx="11155680" cy="640080"/>
           </a:xfrm>
           <a:prstGeom prst="rect">
             <a:avLst/>
@@ -13600,7 +13755,7 @@
                 </a:solidFill>
                 <a:latin typeface="Calibri"/>
               </a:rPr>
-              <a:t>Stage 3</a:t>
+              <a:t>Stage 3 setup</a:t>
             </a:r>
           </a:p>
         </p:txBody>
@@ -13613,8 +13768,8 @@
         </p:nvSpPr>
         <p:spPr>
           <a:xfrm>
-            <a:off x="731520" y="1097280"/>
-            <a:ext cx="10698480" cy="502920"/>
+            <a:off x="502920" y="960120"/>
+            <a:ext cx="11155680" cy="365760"/>
           </a:xfrm>
           <a:prstGeom prst="rect">
             <a:avLst/>
@@ -13629,13 +13784,13 @@
           <a:p>
             <a:pPr algn="l"/>
             <a:r>
-              <a:rPr sz="2000" b="0" i="0">
-                <a:solidFill>
-                  <a:srgbClr val="1F2937"/>
+              <a:rPr sz="1600" b="0" i="1">
+                <a:solidFill>
+                  <a:srgbClr val="5B657A"/>
                 </a:solidFill>
                 <a:latin typeface="Calibri"/>
               </a:rPr>
-              <a:t>Candidates completed three tasks: word-search, general-knowledge, and logical-reasoning.</a:t>
+              <a:t>n = 403 Prolific evaluators (passed 5/5 comprehension checks)</a:t>
             </a:r>
           </a:p>
         </p:txBody>
@@ -13648,8 +13803,8 @@
         </p:nvSpPr>
         <p:spPr>
           <a:xfrm>
-            <a:off x="731520" y="1783080"/>
-            <a:ext cx="10698480" cy="731520"/>
+            <a:off x="502920" y="1417320"/>
+            <a:ext cx="11155680" cy="365760"/>
           </a:xfrm>
           <a:prstGeom prst="rect">
             <a:avLst/>
@@ -13664,13 +13819,13 @@
           <a:p>
             <a:pPr algn="l"/>
             <a:r>
-              <a:rPr sz="2000" b="0" i="0">
-                <a:solidFill>
-                  <a:srgbClr val="1F2937"/>
+              <a:rPr sz="1800" b="1" i="0">
+                <a:solidFill>
+                  <a:srgbClr val="00143D"/>
                 </a:solidFill>
                 <a:latin typeface="Calibri"/>
               </a:rPr>
-              <a:t>Endorsers viewed two candidates and used a slider to predict which one would score higher on logical-reasoning.</a:t>
+              <a:t>Each evaluator is randomly assigned to ONE sponsor and sees:</a:t>
             </a:r>
           </a:p>
         </p:txBody>
@@ -13683,8 +13838,184 @@
         </p:nvSpPr>
         <p:spPr>
           <a:xfrm>
-            <a:off x="731520" y="2606040"/>
-            <a:ext cx="10698480" cy="822960"/>
+            <a:off x="868680" y="1874519"/>
+            <a:ext cx="10789920" cy="384048"/>
+          </a:xfrm>
+          <a:prstGeom prst="rect">
+            <a:avLst/>
+          </a:prstGeom>
+          <a:noFill/>
+        </p:spPr>
+        <p:txBody>
+          <a:bodyPr wrap="square" lIns="27432" tIns="18288" bIns="18288">
+            <a:spAutoFit/>
+          </a:bodyPr>
+          <a:lstStyle/>
+          <a:p>
+            <a:pPr algn="l"/>
+            <a:r>
+              <a:rPr sz="1800" b="1" i="0">
+                <a:solidFill>
+                  <a:srgbClr val="011F5B"/>
+                </a:solidFill>
+                <a:latin typeface="Calibri"/>
+              </a:rPr>
+              <a:t>•  </a:t>
+            </a:r>
+            <a:r>
+              <a:rPr sz="1800" b="0" i="0">
+                <a:solidFill>
+                  <a:srgbClr val="1F2937"/>
+                </a:solidFill>
+                <a:latin typeface="Calibri"/>
+              </a:rPr>
+              <a:t>the sponsor's name + colored avatar (signals gender)</a:t>
+            </a:r>
+          </a:p>
+        </p:txBody>
+      </p:sp>
+      <p:sp>
+        <p:nvSpPr>
+          <p:cNvPr id="9" name="TextBox 8"/>
+          <p:cNvSpPr txBox="1"/>
+          <p:nvPr/>
+        </p:nvSpPr>
+        <p:spPr>
+          <a:xfrm>
+            <a:off x="868680" y="2258568"/>
+            <a:ext cx="10789920" cy="384048"/>
+          </a:xfrm>
+          <a:prstGeom prst="rect">
+            <a:avLst/>
+          </a:prstGeom>
+          <a:noFill/>
+        </p:spPr>
+        <p:txBody>
+          <a:bodyPr wrap="square" lIns="27432" tIns="18288" bIns="18288">
+            <a:spAutoFit/>
+          </a:bodyPr>
+          <a:lstStyle/>
+          <a:p>
+            <a:pPr algn="l"/>
+            <a:r>
+              <a:rPr sz="1800" b="1" i="0">
+                <a:solidFill>
+                  <a:srgbClr val="011F5B"/>
+                </a:solidFill>
+                <a:latin typeface="Calibri"/>
+              </a:rPr>
+              <a:t>•  </a:t>
+            </a:r>
+            <a:r>
+              <a:rPr sz="1800" b="0" i="0">
+                <a:solidFill>
+                  <a:srgbClr val="1F2937"/>
+                </a:solidFill>
+                <a:latin typeface="Calibri"/>
+              </a:rPr>
+              <a:t>that sponsor's endorsement of one candidate from a pair</a:t>
+            </a:r>
+          </a:p>
+        </p:txBody>
+      </p:sp>
+      <p:sp>
+        <p:nvSpPr>
+          <p:cNvPr id="10" name="TextBox 9"/>
+          <p:cNvSpPr txBox="1"/>
+          <p:nvPr/>
+        </p:nvSpPr>
+        <p:spPr>
+          <a:xfrm>
+            <a:off x="868680" y="2642615"/>
+            <a:ext cx="10789920" cy="384048"/>
+          </a:xfrm>
+          <a:prstGeom prst="rect">
+            <a:avLst/>
+          </a:prstGeom>
+          <a:noFill/>
+        </p:spPr>
+        <p:txBody>
+          <a:bodyPr wrap="square" lIns="27432" tIns="18288" bIns="18288">
+            <a:spAutoFit/>
+          </a:bodyPr>
+          <a:lstStyle/>
+          <a:p>
+            <a:pPr algn="l"/>
+            <a:r>
+              <a:rPr sz="1800" b="1" i="0">
+                <a:solidFill>
+                  <a:srgbClr val="011F5B"/>
+                </a:solidFill>
+                <a:latin typeface="Calibri"/>
+              </a:rPr>
+              <a:t>•  </a:t>
+            </a:r>
+            <a:r>
+              <a:rPr sz="1800" b="0" i="0">
+                <a:solidFill>
+                  <a:srgbClr val="1F2937"/>
+                </a:solidFill>
+                <a:latin typeface="Calibri"/>
+              </a:rPr>
+              <a:t>how confident the sponsor was on that endorsement (Strong / Weak)</a:t>
+            </a:r>
+          </a:p>
+        </p:txBody>
+      </p:sp>
+      <p:sp>
+        <p:nvSpPr>
+          <p:cNvPr id="11" name="TextBox 10"/>
+          <p:cNvSpPr txBox="1"/>
+          <p:nvPr/>
+        </p:nvSpPr>
+        <p:spPr>
+          <a:xfrm>
+            <a:off x="868680" y="3026663"/>
+            <a:ext cx="10789920" cy="384048"/>
+          </a:xfrm>
+          <a:prstGeom prst="rect">
+            <a:avLst/>
+          </a:prstGeom>
+          <a:noFill/>
+        </p:spPr>
+        <p:txBody>
+          <a:bodyPr wrap="square" lIns="27432" tIns="18288" bIns="18288">
+            <a:spAutoFit/>
+          </a:bodyPr>
+          <a:lstStyle/>
+          <a:p>
+            <a:pPr algn="l"/>
+            <a:r>
+              <a:rPr sz="1800" b="1" i="0">
+                <a:solidFill>
+                  <a:srgbClr val="011F5B"/>
+                </a:solidFill>
+                <a:latin typeface="Calibri"/>
+              </a:rPr>
+              <a:t>•  </a:t>
+            </a:r>
+            <a:r>
+              <a:rPr sz="1800" b="0" i="0">
+                <a:solidFill>
+                  <a:srgbClr val="1F2937"/>
+                </a:solidFill>
+                <a:latin typeface="Calibri"/>
+              </a:rPr>
+              <a:t>a slider to wager part of a $0.50 bank on the endorser being right</a:t>
+            </a:r>
+          </a:p>
+        </p:txBody>
+      </p:sp>
+      <p:sp>
+        <p:nvSpPr>
+          <p:cNvPr id="12" name="TextBox 11"/>
+          <p:cNvSpPr txBox="1"/>
+          <p:nvPr/>
+        </p:nvSpPr>
+        <p:spPr>
+          <a:xfrm>
+            <a:off x="502920" y="3502151"/>
+            <a:ext cx="11155680" cy="384048"/>
           </a:xfrm>
           <a:prstGeom prst="rect">
             <a:avLst/>
@@ -13699,62 +14030,27 @@
           <a:p>
             <a:pPr algn="l"/>
             <a:r>
-              <a:rPr sz="2000" b="0" i="0">
-                <a:solidFill>
-                  <a:srgbClr val="1F2937"/>
+              <a:rPr sz="1500" b="0" i="1">
+                <a:solidFill>
+                  <a:srgbClr val="5B657A"/>
                 </a:solidFill>
                 <a:latin typeface="Calibri"/>
               </a:rPr>
-              <a:t>An endorsement is “correct” when the endorsed candidate outscores a randomly selected other candidate on logical-reasoning.</a:t>
-            </a:r>
-          </a:p>
-        </p:txBody>
-      </p:sp>
-      <p:sp>
-        <p:nvSpPr>
-          <p:cNvPr id="9" name="TextBox 8"/>
-          <p:cNvSpPr txBox="1"/>
-          <p:nvPr/>
-        </p:nvSpPr>
-        <p:spPr>
-          <a:xfrm>
-            <a:off x="731520" y="3566160"/>
-            <a:ext cx="10698480" cy="411480"/>
-          </a:xfrm>
-          <a:prstGeom prst="rect">
-            <a:avLst/>
-          </a:prstGeom>
-          <a:noFill/>
-        </p:spPr>
-        <p:txBody>
-          <a:bodyPr wrap="square" lIns="27432" rIns="27432" tIns="18288" bIns="18288">
-            <a:spAutoFit/>
-          </a:bodyPr>
-          <a:lstStyle/>
-          <a:p>
-            <a:pPr algn="l"/>
-            <a:r>
-              <a:rPr sz="2000" b="0" i="1">
-                <a:solidFill>
-                  <a:srgbClr val="5B657A"/>
-                </a:solidFill>
-                <a:latin typeface="Calibri"/>
-              </a:rPr>
-              <a:t>Each evaluator sees two endorsements from the SAME sponsor:</a:t>
-            </a:r>
-          </a:p>
-        </p:txBody>
-      </p:sp>
-      <p:sp>
-        <p:nvSpPr>
-          <p:cNvPr id="10" name="Rounded Rectangle 9"/>
+              <a:t>Each evaluator sees TWO decisions back-to-back, with the SAME sponsor on different candidate pairs:</a:t>
+            </a:r>
+          </a:p>
+        </p:txBody>
+      </p:sp>
+      <p:sp>
+        <p:nvSpPr>
+          <p:cNvPr id="13" name="Rounded Rectangle 12"/>
           <p:cNvSpPr/>
           <p:nvPr/>
         </p:nvSpPr>
         <p:spPr>
           <a:xfrm>
-            <a:off x="2578608" y="4160520"/>
-            <a:ext cx="1828800" cy="868680"/>
+            <a:off x="2619756" y="3959352"/>
+            <a:ext cx="1920240" cy="713232"/>
           </a:xfrm>
           <a:prstGeom prst="roundRect">
             <a:avLst>
@@ -13764,7 +14060,7 @@
           <a:solidFill>
             <a:srgbClr val="EAF0FB"/>
           </a:solidFill>
-          <a:ln w="15875">
+          <a:ln w="25400">
             <a:solidFill>
               <a:srgbClr val="011F5B"/>
             </a:solidFill>
@@ -13790,9 +14086,9 @@
           <a:p>
             <a:pPr algn="ctr"/>
             <a:r>
-              <a:rPr sz="1800" b="1" i="0">
-                <a:solidFill>
-                  <a:srgbClr val="011F5B"/>
+              <a:rPr sz="1700" b="1" i="0">
+                <a:solidFill>
+                  <a:srgbClr val="00143D"/>
                 </a:solidFill>
                 <a:latin typeface="Calibri"/>
               </a:rPr>
@@ -13803,14 +14099,14 @@
       </p:sp>
       <p:sp>
         <p:nvSpPr>
-          <p:cNvPr id="11" name="Rounded Rectangle 10"/>
+          <p:cNvPr id="14" name="Rounded Rectangle 13"/>
           <p:cNvSpPr/>
           <p:nvPr/>
         </p:nvSpPr>
         <p:spPr>
           <a:xfrm>
-            <a:off x="5184648" y="4160520"/>
-            <a:ext cx="1828800" cy="868680"/>
+            <a:off x="5134356" y="3959352"/>
+            <a:ext cx="1920240" cy="713232"/>
           </a:xfrm>
           <a:prstGeom prst="roundRect">
             <a:avLst>
@@ -13818,11 +14114,11 @@
             </a:avLst>
           </a:prstGeom>
           <a:solidFill>
-            <a:srgbClr val="EAF0FB"/>
+            <a:srgbClr val="DFF4E8"/>
           </a:solidFill>
-          <a:ln w="15875">
+          <a:ln w="25400">
             <a:solidFill>
-              <a:srgbClr val="011F5B"/>
+              <a:srgbClr val="106B45"/>
             </a:solidFill>
           </a:ln>
         </p:spPr>
@@ -13846,9 +14142,9 @@
           <a:p>
             <a:pPr algn="ctr"/>
             <a:r>
-              <a:rPr sz="1800" b="1" i="0">
-                <a:solidFill>
-                  <a:srgbClr val="011F5B"/>
+              <a:rPr sz="1700" b="1" i="0">
+                <a:solidFill>
+                  <a:srgbClr val="116B45"/>
                 </a:solidFill>
                 <a:latin typeface="Calibri"/>
               </a:rPr>
@@ -13859,14 +14155,14 @@
       </p:sp>
       <p:sp>
         <p:nvSpPr>
-          <p:cNvPr id="12" name="Rounded Rectangle 11"/>
+          <p:cNvPr id="15" name="Rounded Rectangle 14"/>
           <p:cNvSpPr/>
           <p:nvPr/>
         </p:nvSpPr>
         <p:spPr>
           <a:xfrm>
-            <a:off x="7790688" y="4160520"/>
-            <a:ext cx="1828800" cy="868680"/>
+            <a:off x="7648956" y="3959352"/>
+            <a:ext cx="1920240" cy="713232"/>
           </a:xfrm>
           <a:prstGeom prst="roundRect">
             <a:avLst>
@@ -13876,7 +14172,7 @@
           <a:solidFill>
             <a:srgbClr val="EAF0FB"/>
           </a:solidFill>
-          <a:ln w="15875">
+          <a:ln w="25400">
             <a:solidFill>
               <a:srgbClr val="011F5B"/>
             </a:solidFill>
@@ -13902,9 +14198,9 @@
           <a:p>
             <a:pPr algn="ctr"/>
             <a:r>
-              <a:rPr sz="1800" b="1" i="0">
-                <a:solidFill>
-                  <a:srgbClr val="011F5B"/>
+              <a:rPr sz="1700" b="1" i="0">
+                <a:solidFill>
+                  <a:srgbClr val="00143D"/>
                 </a:solidFill>
                 <a:latin typeface="Calibri"/>
               </a:rPr>
@@ -13915,14 +14211,14 @@
       </p:sp>
       <p:sp>
         <p:nvSpPr>
-          <p:cNvPr id="13" name="Right Arrow 12"/>
+          <p:cNvPr id="16" name="Right Arrow 15"/>
           <p:cNvSpPr/>
           <p:nvPr/>
         </p:nvSpPr>
         <p:spPr>
           <a:xfrm>
-            <a:off x="4453128" y="4498848"/>
-            <a:ext cx="685800" cy="182880"/>
+            <a:off x="4585716" y="4224528"/>
+            <a:ext cx="502920" cy="182880"/>
           </a:xfrm>
           <a:prstGeom prst="rightArrow">
             <a:avLst/>
@@ -13930,10 +14226,8 @@
           <a:solidFill>
             <a:srgbClr val="011F5B"/>
           </a:solidFill>
-          <a:ln w="6350">
-            <a:solidFill>
-              <a:srgbClr val="011F5B"/>
-            </a:solidFill>
+          <a:ln>
+            <a:noFill/>
           </a:ln>
         </p:spPr>
         <p:style>
@@ -13958,14 +14252,14 @@
       </p:sp>
       <p:sp>
         <p:nvSpPr>
-          <p:cNvPr id="14" name="Right Arrow 13"/>
+          <p:cNvPr id="17" name="Right Arrow 16"/>
           <p:cNvSpPr/>
           <p:nvPr/>
         </p:nvSpPr>
         <p:spPr>
           <a:xfrm>
-            <a:off x="7059168" y="4498848"/>
-            <a:ext cx="685800" cy="182880"/>
+            <a:off x="7100316" y="4224528"/>
+            <a:ext cx="502920" cy="182880"/>
           </a:xfrm>
           <a:prstGeom prst="rightArrow">
             <a:avLst/>
@@ -13973,10 +14267,8 @@
           <a:solidFill>
             <a:srgbClr val="011F5B"/>
           </a:solidFill>
-          <a:ln w="6350">
-            <a:solidFill>
-              <a:srgbClr val="011F5B"/>
-            </a:solidFill>
+          <a:ln>
+            <a:noFill/>
           </a:ln>
         </p:spPr>
         <p:style>
@@ -14001,14 +14293,14 @@
       </p:sp>
       <p:sp>
         <p:nvSpPr>
-          <p:cNvPr id="15" name="TextBox 14"/>
+          <p:cNvPr id="18" name="TextBox 17"/>
           <p:cNvSpPr txBox="1"/>
           <p:nvPr/>
         </p:nvSpPr>
         <p:spPr>
           <a:xfrm>
-            <a:off x="502920" y="5532120"/>
-            <a:ext cx="11155680" cy="548640"/>
+            <a:off x="502920" y="4946904"/>
+            <a:ext cx="11155680" cy="502920"/>
           </a:xfrm>
           <a:prstGeom prst="rect">
             <a:avLst/>
@@ -14016,7 +14308,7 @@
           <a:noFill/>
         </p:spPr>
         <p:txBody>
-          <a:bodyPr wrap="square" lIns="27432" rIns="27432" tIns="18288" bIns="18288">
+          <a:bodyPr wrap="square" tIns="0" bIns="0">
             <a:spAutoFit/>
           </a:bodyPr>
           <a:lstStyle/>
@@ -14151,282 +14443,6 @@
       </p:sp>
       <p:sp>
         <p:nvSpPr>
-          <p:cNvPr id="5" name="Rounded Rectangle 4"/>
-          <p:cNvSpPr/>
-          <p:nvPr/>
-        </p:nvSpPr>
-        <p:spPr>
-          <a:xfrm>
-            <a:off x="394563" y="1828800"/>
-            <a:ext cx="3703320" cy="1828800"/>
-          </a:xfrm>
-          <a:prstGeom prst="roundRect">
-            <a:avLst/>
-          </a:prstGeom>
-          <a:solidFill>
-            <a:srgbClr val="FFFFFF"/>
-          </a:solidFill>
-          <a:ln w="25400">
-            <a:solidFill>
-              <a:srgbClr val="011F5B"/>
-            </a:solidFill>
-          </a:ln>
-        </p:spPr>
-        <p:style>
-          <a:lnRef idx="1">
-            <a:schemeClr val="accent1"/>
-          </a:lnRef>
-          <a:fillRef idx="3">
-            <a:schemeClr val="accent1"/>
-          </a:fillRef>
-          <a:effectRef idx="2">
-            <a:schemeClr val="accent1"/>
-          </a:effectRef>
-          <a:fontRef idx="minor">
-            <a:schemeClr val="lt1"/>
-          </a:fontRef>
-        </p:style>
-        <p:txBody>
-          <a:bodyPr lIns="228600" tIns="164592" rIns="182880" bIns="164592" rtlCol="0" anchor="ctr"/>
-          <a:lstStyle/>
-          <a:p>
-            <a:pPr algn="l"/>
-            <a:r>
-              <a:rPr sz="1800" b="1">
-                <a:solidFill>
-                  <a:srgbClr val="011F5B"/>
-                </a:solidFill>
-                <a:latin typeface="Arial"/>
-              </a:rPr>
-              <a:t>1.  Sponsor gender</a:t>
-            </a:r>
-          </a:p>
-          <a:p>
-            <a:pPr algn="l">
-              <a:spcBef>
-                <a:spcPts val="1000"/>
-              </a:spcBef>
-            </a:pPr>
-            <a:r>
-              <a:rPr sz="1600" b="1">
-                <a:solidFill>
-                  <a:srgbClr val="011F5B"/>
-                </a:solidFill>
-                <a:latin typeface="Arial"/>
-              </a:rPr>
-              <a:t>•  Man</a:t>
-            </a:r>
-          </a:p>
-          <a:p>
-            <a:pPr algn="l">
-              <a:spcBef>
-                <a:spcPts val="400"/>
-              </a:spcBef>
-            </a:pPr>
-            <a:r>
-              <a:rPr sz="1600" b="1">
-                <a:solidFill>
-                  <a:srgbClr val="990000"/>
-                </a:solidFill>
-                <a:latin typeface="Arial"/>
-              </a:rPr>
-              <a:t>•  Woman</a:t>
-            </a:r>
-          </a:p>
-        </p:txBody>
-      </p:sp>
-      <p:sp>
-        <p:nvSpPr>
-          <p:cNvPr id="6" name="Rounded Rectangle 5"/>
-          <p:cNvSpPr/>
-          <p:nvPr/>
-        </p:nvSpPr>
-        <p:spPr>
-          <a:xfrm>
-            <a:off x="4244187" y="1828800"/>
-            <a:ext cx="3703320" cy="1828800"/>
-          </a:xfrm>
-          <a:prstGeom prst="roundRect">
-            <a:avLst/>
-          </a:prstGeom>
-          <a:solidFill>
-            <a:srgbClr val="FFFFFF"/>
-          </a:solidFill>
-          <a:ln w="25400">
-            <a:solidFill>
-              <a:srgbClr val="011F5B"/>
-            </a:solidFill>
-          </a:ln>
-        </p:spPr>
-        <p:style>
-          <a:lnRef idx="1">
-            <a:schemeClr val="accent1"/>
-          </a:lnRef>
-          <a:fillRef idx="3">
-            <a:schemeClr val="accent1"/>
-          </a:fillRef>
-          <a:effectRef idx="2">
-            <a:schemeClr val="accent1"/>
-          </a:effectRef>
-          <a:fontRef idx="minor">
-            <a:schemeClr val="lt1"/>
-          </a:fontRef>
-        </p:style>
-        <p:txBody>
-          <a:bodyPr lIns="228600" tIns="164592" rIns="182880" bIns="164592" rtlCol="0" anchor="ctr"/>
-          <a:lstStyle/>
-          <a:p>
-            <a:pPr algn="l"/>
-            <a:r>
-              <a:rPr sz="1800" b="1" dirty="0">
-                <a:solidFill>
-                  <a:srgbClr val="011F5B"/>
-                </a:solidFill>
-                <a:latin typeface="Arial"/>
-              </a:rPr>
-              <a:t>2.  Endorsement strength</a:t>
-            </a:r>
-          </a:p>
-          <a:p>
-            <a:pPr algn="l">
-              <a:spcBef>
-                <a:spcPts val="1000"/>
-              </a:spcBef>
-            </a:pPr>
-            <a:r>
-              <a:rPr sz="1600" b="1" dirty="0">
-                <a:solidFill>
-                  <a:srgbClr val="111827"/>
-                </a:solidFill>
-                <a:latin typeface="Arial"/>
-              </a:rPr>
-              <a:t>•  Strong  (very confident)</a:t>
-            </a:r>
-          </a:p>
-          <a:p>
-            <a:pPr algn="l">
-              <a:spcBef>
-                <a:spcPts val="400"/>
-              </a:spcBef>
-            </a:pPr>
-            <a:r>
-              <a:rPr sz="1600" b="1" dirty="0">
-                <a:solidFill>
-                  <a:srgbClr val="111827"/>
-                </a:solidFill>
-                <a:latin typeface="Arial"/>
-              </a:rPr>
-              <a:t>•  Weak  (</a:t>
-            </a:r>
-            <a:r>
-              <a:rPr lang="en-US" sz="1600" b="1" dirty="0">
-                <a:solidFill>
-                  <a:srgbClr val="111827"/>
-                </a:solidFill>
-                <a:latin typeface="Arial"/>
-              </a:rPr>
-              <a:t>low confidence</a:t>
-            </a:r>
-            <a:r>
-              <a:rPr sz="1600" b="1" dirty="0">
-                <a:solidFill>
-                  <a:srgbClr val="111827"/>
-                </a:solidFill>
-                <a:latin typeface="Arial"/>
-              </a:rPr>
-              <a:t> / unsure)</a:t>
-            </a:r>
-          </a:p>
-        </p:txBody>
-      </p:sp>
-      <p:sp>
-        <p:nvSpPr>
-          <p:cNvPr id="7" name="Rounded Rectangle 6"/>
-          <p:cNvSpPr/>
-          <p:nvPr/>
-        </p:nvSpPr>
-        <p:spPr>
-          <a:xfrm>
-            <a:off x="8093811" y="1828800"/>
-            <a:ext cx="3703320" cy="1828800"/>
-          </a:xfrm>
-          <a:prstGeom prst="roundRect">
-            <a:avLst/>
-          </a:prstGeom>
-          <a:solidFill>
-            <a:srgbClr val="FFFFFF"/>
-          </a:solidFill>
-          <a:ln w="25400">
-            <a:solidFill>
-              <a:srgbClr val="011F5B"/>
-            </a:solidFill>
-          </a:ln>
-        </p:spPr>
-        <p:style>
-          <a:lnRef idx="1">
-            <a:schemeClr val="accent1"/>
-          </a:lnRef>
-          <a:fillRef idx="3">
-            <a:schemeClr val="accent1"/>
-          </a:fillRef>
-          <a:effectRef idx="2">
-            <a:schemeClr val="accent1"/>
-          </a:effectRef>
-          <a:fontRef idx="minor">
-            <a:schemeClr val="lt1"/>
-          </a:fontRef>
-        </p:style>
-        <p:txBody>
-          <a:bodyPr lIns="228600" tIns="164592" rIns="182880" bIns="164592" rtlCol="0" anchor="ctr"/>
-          <a:lstStyle/>
-          <a:p>
-            <a:pPr algn="l"/>
-            <a:r>
-              <a:rPr sz="1800" b="1">
-                <a:solidFill>
-                  <a:srgbClr val="011F5B"/>
-                </a:solidFill>
-                <a:latin typeface="Arial"/>
-              </a:rPr>
-              <a:t>3.  Outcome</a:t>
-            </a:r>
-          </a:p>
-          <a:p>
-            <a:pPr algn="l">
-              <a:spcBef>
-                <a:spcPts val="1000"/>
-              </a:spcBef>
-            </a:pPr>
-            <a:r>
-              <a:rPr sz="1600" b="1">
-                <a:solidFill>
-                  <a:srgbClr val="047A4B"/>
-                </a:solidFill>
-                <a:latin typeface="Arial"/>
-              </a:rPr>
-              <a:t>•  Endorser was correct</a:t>
-            </a:r>
-          </a:p>
-          <a:p>
-            <a:pPr algn="l">
-              <a:spcBef>
-                <a:spcPts val="400"/>
-              </a:spcBef>
-            </a:pPr>
-            <a:r>
-              <a:rPr sz="1600" b="1">
-                <a:solidFill>
-                  <a:srgbClr val="C81E1E"/>
-                </a:solidFill>
-                <a:latin typeface="Arial"/>
-              </a:rPr>
-              <a:t>•  Endorser was wrong</a:t>
-            </a:r>
-          </a:p>
-        </p:txBody>
-      </p:sp>
-      <p:sp>
-        <p:nvSpPr>
           <p:cNvPr id="207" name="Slide Number Placeholder 3">
             <a:extLst>
               <a:ext uri="{FF2B5EF4-FFF2-40B4-BE49-F238E27FC236}">
@@ -14446,12 +14462,1007 @@
           <a:bodyPr/>
           <a:lstStyle/>
           <a:p>
-            <a:fld id="{A979F254-CC43-4DA6-A247-E51DAF53351D}" type="slidenum">
+            <a:fld id="{097F6251-1296-4B6B-8061-EF8D9DFF4E9D}" type="slidenum">
               <a:rPr lang="en-US" smtClean="0"/>
               <a:pPr/>
               <a:t>12</a:t>
             </a:fld>
             <a:endParaRPr lang="en-US" dirty="0"/>
+          </a:p>
+        </p:txBody>
+      </p:sp>
+      <p:sp>
+        <p:nvSpPr>
+          <p:cNvPr id="208" name="Rounded Rectangle 207"/>
+          <p:cNvSpPr/>
+          <p:nvPr/>
+        </p:nvSpPr>
+        <p:spPr>
+          <a:xfrm>
+            <a:off x="393192" y="1783080"/>
+            <a:ext cx="3703320" cy="4434840"/>
+          </a:xfrm>
+          <a:prstGeom prst="roundRect">
+            <a:avLst>
+              <a:gd name="adj" fmla="val 6000"/>
+            </a:avLst>
+          </a:prstGeom>
+          <a:solidFill>
+            <a:srgbClr val="FFFFFF"/>
+          </a:solidFill>
+          <a:ln w="15875">
+            <a:solidFill>
+              <a:srgbClr val="C7CFDD"/>
+            </a:solidFill>
+          </a:ln>
+        </p:spPr>
+        <p:style>
+          <a:lnRef idx="1">
+            <a:schemeClr val="accent1"/>
+          </a:lnRef>
+          <a:fillRef idx="3">
+            <a:schemeClr val="accent1"/>
+          </a:fillRef>
+          <a:effectRef idx="2">
+            <a:schemeClr val="accent1"/>
+          </a:effectRef>
+          <a:fontRef idx="minor">
+            <a:schemeClr val="lt1"/>
+          </a:fontRef>
+        </p:style>
+        <p:txBody>
+          <a:bodyPr rtlCol="0" anchor="ctr"/>
+          <a:lstStyle/>
+          <a:p/>
+        </p:txBody>
+      </p:sp>
+      <p:sp>
+        <p:nvSpPr>
+          <p:cNvPr id="209" name="Rounded Rectangle 208"/>
+          <p:cNvSpPr/>
+          <p:nvPr/>
+        </p:nvSpPr>
+        <p:spPr>
+          <a:xfrm>
+            <a:off x="4242816" y="1783080"/>
+            <a:ext cx="3703320" cy="4434840"/>
+          </a:xfrm>
+          <a:prstGeom prst="roundRect">
+            <a:avLst>
+              <a:gd name="adj" fmla="val 6000"/>
+            </a:avLst>
+          </a:prstGeom>
+          <a:solidFill>
+            <a:srgbClr val="FFFFFF"/>
+          </a:solidFill>
+          <a:ln w="15875">
+            <a:solidFill>
+              <a:srgbClr val="C7CFDD"/>
+            </a:solidFill>
+          </a:ln>
+        </p:spPr>
+        <p:style>
+          <a:lnRef idx="1">
+            <a:schemeClr val="accent1"/>
+          </a:lnRef>
+          <a:fillRef idx="3">
+            <a:schemeClr val="accent1"/>
+          </a:fillRef>
+          <a:effectRef idx="2">
+            <a:schemeClr val="accent1"/>
+          </a:effectRef>
+          <a:fontRef idx="minor">
+            <a:schemeClr val="lt1"/>
+          </a:fontRef>
+        </p:style>
+        <p:txBody>
+          <a:bodyPr rtlCol="0" anchor="ctr"/>
+          <a:lstStyle/>
+          <a:p/>
+        </p:txBody>
+      </p:sp>
+      <p:sp>
+        <p:nvSpPr>
+          <p:cNvPr id="210" name="Rounded Rectangle 209"/>
+          <p:cNvSpPr/>
+          <p:nvPr/>
+        </p:nvSpPr>
+        <p:spPr>
+          <a:xfrm>
+            <a:off x="8092440" y="1783080"/>
+            <a:ext cx="3703320" cy="4434840"/>
+          </a:xfrm>
+          <a:prstGeom prst="roundRect">
+            <a:avLst>
+              <a:gd name="adj" fmla="val 6000"/>
+            </a:avLst>
+          </a:prstGeom>
+          <a:solidFill>
+            <a:srgbClr val="FFFFFF"/>
+          </a:solidFill>
+          <a:ln w="15875">
+            <a:solidFill>
+              <a:srgbClr val="C7CFDD"/>
+            </a:solidFill>
+          </a:ln>
+        </p:spPr>
+        <p:style>
+          <a:lnRef idx="1">
+            <a:schemeClr val="accent1"/>
+          </a:lnRef>
+          <a:fillRef idx="3">
+            <a:schemeClr val="accent1"/>
+          </a:fillRef>
+          <a:effectRef idx="2">
+            <a:schemeClr val="accent1"/>
+          </a:effectRef>
+          <a:fontRef idx="minor">
+            <a:schemeClr val="lt1"/>
+          </a:fontRef>
+        </p:style>
+        <p:txBody>
+          <a:bodyPr rtlCol="0" anchor="ctr"/>
+          <a:lstStyle/>
+          <a:p/>
+        </p:txBody>
+      </p:sp>
+      <p:sp>
+        <p:nvSpPr>
+          <p:cNvPr id="211" name="TextBox 210"/>
+          <p:cNvSpPr txBox="1"/>
+          <p:nvPr/>
+        </p:nvSpPr>
+        <p:spPr>
+          <a:xfrm>
+            <a:off x="576072" y="1920240"/>
+            <a:ext cx="3337560" cy="411480"/>
+          </a:xfrm>
+          <a:prstGeom prst="rect">
+            <a:avLst/>
+          </a:prstGeom>
+          <a:noFill/>
+        </p:spPr>
+        <p:txBody>
+          <a:bodyPr wrap="square" lIns="27432" rIns="27432" tIns="18288" bIns="18288">
+            <a:spAutoFit/>
+          </a:bodyPr>
+          <a:lstStyle/>
+          <a:p>
+            <a:pPr algn="l"/>
+            <a:r>
+              <a:rPr sz="1800" b="1" i="0">
+                <a:solidFill>
+                  <a:srgbClr val="00143D"/>
+                </a:solidFill>
+                <a:latin typeface="Calibri"/>
+              </a:rPr>
+              <a:t>1.  Sponsor gender</a:t>
+            </a:r>
+          </a:p>
+        </p:txBody>
+      </p:sp>
+      <p:sp>
+        <p:nvSpPr>
+          <p:cNvPr id="212" name="TextBox 211"/>
+          <p:cNvSpPr txBox="1"/>
+          <p:nvPr/>
+        </p:nvSpPr>
+        <p:spPr>
+          <a:xfrm>
+            <a:off x="576072" y="2377440"/>
+            <a:ext cx="3337560" cy="365760"/>
+          </a:xfrm>
+          <a:prstGeom prst="rect">
+            <a:avLst/>
+          </a:prstGeom>
+          <a:noFill/>
+        </p:spPr>
+        <p:txBody>
+          <a:bodyPr wrap="square" lIns="27432" rIns="27432" tIns="18288" bIns="18288">
+            <a:spAutoFit/>
+          </a:bodyPr>
+          <a:lstStyle/>
+          <a:p>
+            <a:pPr algn="l"/>
+            <a:r>
+              <a:rPr sz="1200" b="0" i="1">
+                <a:solidFill>
+                  <a:srgbClr val="5B657A"/>
+                </a:solidFill>
+                <a:latin typeface="Calibri"/>
+              </a:rPr>
+              <a:t>(name + colored avatar)</a:t>
+            </a:r>
+          </a:p>
+        </p:txBody>
+      </p:sp>
+      <p:sp>
+        <p:nvSpPr>
+          <p:cNvPr id="213" name="Oval 212"/>
+          <p:cNvSpPr/>
+          <p:nvPr/>
+        </p:nvSpPr>
+        <p:spPr>
+          <a:xfrm>
+            <a:off x="667512" y="2971800"/>
+            <a:ext cx="640080" cy="640080"/>
+          </a:xfrm>
+          <a:prstGeom prst="ellipse">
+            <a:avLst/>
+          </a:prstGeom>
+          <a:solidFill>
+            <a:srgbClr val="FCE7F3"/>
+          </a:solidFill>
+          <a:ln w="50800">
+            <a:solidFill>
+              <a:srgbClr val="EC4899"/>
+            </a:solidFill>
+          </a:ln>
+        </p:spPr>
+        <p:style>
+          <a:lnRef idx="1">
+            <a:schemeClr val="accent1"/>
+          </a:lnRef>
+          <a:fillRef idx="3">
+            <a:schemeClr val="accent1"/>
+          </a:fillRef>
+          <a:effectRef idx="2">
+            <a:schemeClr val="accent1"/>
+          </a:effectRef>
+          <a:fontRef idx="minor">
+            <a:schemeClr val="lt1"/>
+          </a:fontRef>
+        </p:style>
+        <p:txBody>
+          <a:bodyPr rtlCol="0" anchor="ctr"/>
+          <a:lstStyle/>
+          <a:p/>
+        </p:txBody>
+      </p:sp>
+      <p:sp>
+        <p:nvSpPr>
+          <p:cNvPr id="214" name="TextBox 213"/>
+          <p:cNvSpPr txBox="1"/>
+          <p:nvPr/>
+        </p:nvSpPr>
+        <p:spPr>
+          <a:xfrm>
+            <a:off x="1472184" y="3063240"/>
+            <a:ext cx="1645920" cy="411480"/>
+          </a:xfrm>
+          <a:prstGeom prst="rect">
+            <a:avLst/>
+          </a:prstGeom>
+          <a:noFill/>
+        </p:spPr>
+        <p:txBody>
+          <a:bodyPr wrap="square" lIns="27432" rIns="27432" tIns="18288" bIns="18288">
+            <a:spAutoFit/>
+          </a:bodyPr>
+          <a:lstStyle/>
+          <a:p>
+            <a:pPr algn="l"/>
+            <a:r>
+              <a:rPr sz="1800" b="1" i="0">
+                <a:solidFill>
+                  <a:srgbClr val="EC4899"/>
+                </a:solidFill>
+                <a:latin typeface="Calibri"/>
+              </a:rPr>
+              <a:t>Woman</a:t>
+            </a:r>
+          </a:p>
+        </p:txBody>
+      </p:sp>
+      <p:sp>
+        <p:nvSpPr>
+          <p:cNvPr id="215" name="Oval 214"/>
+          <p:cNvSpPr/>
+          <p:nvPr/>
+        </p:nvSpPr>
+        <p:spPr>
+          <a:xfrm>
+            <a:off x="667512" y="4114800"/>
+            <a:ext cx="640080" cy="640080"/>
+          </a:xfrm>
+          <a:prstGeom prst="ellipse">
+            <a:avLst/>
+          </a:prstGeom>
+          <a:solidFill>
+            <a:srgbClr val="DBEAFE"/>
+          </a:solidFill>
+          <a:ln w="50800">
+            <a:solidFill>
+              <a:srgbClr val="3B82F6"/>
+            </a:solidFill>
+          </a:ln>
+        </p:spPr>
+        <p:style>
+          <a:lnRef idx="1">
+            <a:schemeClr val="accent1"/>
+          </a:lnRef>
+          <a:fillRef idx="3">
+            <a:schemeClr val="accent1"/>
+          </a:fillRef>
+          <a:effectRef idx="2">
+            <a:schemeClr val="accent1"/>
+          </a:effectRef>
+          <a:fontRef idx="minor">
+            <a:schemeClr val="lt1"/>
+          </a:fontRef>
+        </p:style>
+        <p:txBody>
+          <a:bodyPr rtlCol="0" anchor="ctr"/>
+          <a:lstStyle/>
+          <a:p/>
+        </p:txBody>
+      </p:sp>
+      <p:sp>
+        <p:nvSpPr>
+          <p:cNvPr id="216" name="TextBox 215"/>
+          <p:cNvSpPr txBox="1"/>
+          <p:nvPr/>
+        </p:nvSpPr>
+        <p:spPr>
+          <a:xfrm>
+            <a:off x="1472184" y="4206240"/>
+            <a:ext cx="1645920" cy="411480"/>
+          </a:xfrm>
+          <a:prstGeom prst="rect">
+            <a:avLst/>
+          </a:prstGeom>
+          <a:noFill/>
+        </p:spPr>
+        <p:txBody>
+          <a:bodyPr wrap="square" lIns="27432" rIns="27432" tIns="18288" bIns="18288">
+            <a:spAutoFit/>
+          </a:bodyPr>
+          <a:lstStyle/>
+          <a:p>
+            <a:pPr algn="l"/>
+            <a:r>
+              <a:rPr sz="1800" b="1" i="0">
+                <a:solidFill>
+                  <a:srgbClr val="3B82F6"/>
+                </a:solidFill>
+                <a:latin typeface="Calibri"/>
+              </a:rPr>
+              <a:t>Man</a:t>
+            </a:r>
+          </a:p>
+        </p:txBody>
+      </p:sp>
+      <p:sp>
+        <p:nvSpPr>
+          <p:cNvPr id="217" name="TextBox 216"/>
+          <p:cNvSpPr txBox="1"/>
+          <p:nvPr/>
+        </p:nvSpPr>
+        <p:spPr>
+          <a:xfrm>
+            <a:off x="4425696" y="1920240"/>
+            <a:ext cx="3337560" cy="411480"/>
+          </a:xfrm>
+          <a:prstGeom prst="rect">
+            <a:avLst/>
+          </a:prstGeom>
+          <a:noFill/>
+        </p:spPr>
+        <p:txBody>
+          <a:bodyPr wrap="square" lIns="27432" rIns="27432" tIns="18288" bIns="18288">
+            <a:spAutoFit/>
+          </a:bodyPr>
+          <a:lstStyle/>
+          <a:p>
+            <a:pPr algn="l"/>
+            <a:r>
+              <a:rPr sz="1800" b="1" i="0">
+                <a:solidFill>
+                  <a:srgbClr val="00143D"/>
+                </a:solidFill>
+                <a:latin typeface="Calibri"/>
+              </a:rPr>
+              <a:t>2.  Endorsement strength</a:t>
+            </a:r>
+          </a:p>
+        </p:txBody>
+      </p:sp>
+      <p:sp>
+        <p:nvSpPr>
+          <p:cNvPr id="218" name="TextBox 217"/>
+          <p:cNvSpPr txBox="1"/>
+          <p:nvPr/>
+        </p:nvSpPr>
+        <p:spPr>
+          <a:xfrm>
+            <a:off x="4425696" y="2377440"/>
+            <a:ext cx="3337560" cy="365760"/>
+          </a:xfrm>
+          <a:prstGeom prst="rect">
+            <a:avLst/>
+          </a:prstGeom>
+          <a:noFill/>
+        </p:spPr>
+        <p:txBody>
+          <a:bodyPr wrap="square" lIns="27432" rIns="27432" tIns="18288" bIns="18288">
+            <a:spAutoFit/>
+          </a:bodyPr>
+          <a:lstStyle/>
+          <a:p>
+            <a:pPr algn="l"/>
+            <a:r>
+              <a:rPr sz="1200" b="0" i="1">
+                <a:solidFill>
+                  <a:srgbClr val="5B657A"/>
+                </a:solidFill>
+                <a:latin typeface="Calibri"/>
+              </a:rPr>
+              <a:t>(how confident the sponsor was)</a:t>
+            </a:r>
+          </a:p>
+        </p:txBody>
+      </p:sp>
+      <p:sp>
+        <p:nvSpPr>
+          <p:cNvPr id="219" name="Rounded Rectangle 218"/>
+          <p:cNvSpPr/>
+          <p:nvPr/>
+        </p:nvSpPr>
+        <p:spPr>
+          <a:xfrm>
+            <a:off x="4951475" y="3017520"/>
+            <a:ext cx="2286000" cy="182880"/>
+          </a:xfrm>
+          <a:prstGeom prst="roundRect">
+            <a:avLst>
+              <a:gd name="adj" fmla="val 50000"/>
+            </a:avLst>
+          </a:prstGeom>
+          <a:solidFill>
+            <a:srgbClr val="E5EAF3"/>
+          </a:solidFill>
+          <a:ln w="9525">
+            <a:solidFill>
+              <a:srgbClr val="9AA7BD"/>
+            </a:solidFill>
+          </a:ln>
+        </p:spPr>
+        <p:style>
+          <a:lnRef idx="1">
+            <a:schemeClr val="accent1"/>
+          </a:lnRef>
+          <a:fillRef idx="3">
+            <a:schemeClr val="accent1"/>
+          </a:fillRef>
+          <a:effectRef idx="2">
+            <a:schemeClr val="accent1"/>
+          </a:effectRef>
+          <a:fontRef idx="minor">
+            <a:schemeClr val="lt1"/>
+          </a:fontRef>
+        </p:style>
+        <p:txBody>
+          <a:bodyPr rtlCol="0" anchor="ctr"/>
+          <a:lstStyle/>
+          <a:p/>
+        </p:txBody>
+      </p:sp>
+      <p:sp>
+        <p:nvSpPr>
+          <p:cNvPr id="220" name="Rounded Rectangle 219"/>
+          <p:cNvSpPr/>
+          <p:nvPr/>
+        </p:nvSpPr>
+        <p:spPr>
+          <a:xfrm>
+            <a:off x="4951475" y="3017520"/>
+            <a:ext cx="2057400" cy="182880"/>
+          </a:xfrm>
+          <a:prstGeom prst="roundRect">
+            <a:avLst>
+              <a:gd name="adj" fmla="val 50000"/>
+            </a:avLst>
+          </a:prstGeom>
+          <a:solidFill>
+            <a:srgbClr val="011F5B"/>
+          </a:solidFill>
+          <a:ln>
+            <a:noFill/>
+          </a:ln>
+        </p:spPr>
+        <p:style>
+          <a:lnRef idx="1">
+            <a:schemeClr val="accent1"/>
+          </a:lnRef>
+          <a:fillRef idx="3">
+            <a:schemeClr val="accent1"/>
+          </a:fillRef>
+          <a:effectRef idx="2">
+            <a:schemeClr val="accent1"/>
+          </a:effectRef>
+          <a:fontRef idx="minor">
+            <a:schemeClr val="lt1"/>
+          </a:fontRef>
+        </p:style>
+        <p:txBody>
+          <a:bodyPr rtlCol="0" anchor="ctr"/>
+          <a:lstStyle/>
+          <a:p/>
+        </p:txBody>
+      </p:sp>
+      <p:sp>
+        <p:nvSpPr>
+          <p:cNvPr id="221" name="TextBox 220"/>
+          <p:cNvSpPr txBox="1"/>
+          <p:nvPr/>
+        </p:nvSpPr>
+        <p:spPr>
+          <a:xfrm>
+            <a:off x="4425696" y="3291839"/>
+            <a:ext cx="3337560" cy="365760"/>
+          </a:xfrm>
+          <a:prstGeom prst="rect">
+            <a:avLst/>
+          </a:prstGeom>
+          <a:noFill/>
+        </p:spPr>
+        <p:txBody>
+          <a:bodyPr wrap="square" lIns="27432" rIns="27432" tIns="18288" bIns="18288">
+            <a:spAutoFit/>
+          </a:bodyPr>
+          <a:lstStyle/>
+          <a:p>
+            <a:pPr algn="ctr"/>
+            <a:r>
+              <a:rPr sz="1800" b="1" i="0">
+                <a:solidFill>
+                  <a:srgbClr val="00143D"/>
+                </a:solidFill>
+                <a:latin typeface="Calibri"/>
+              </a:rPr>
+              <a:t>Strong</a:t>
+            </a:r>
+          </a:p>
+        </p:txBody>
+      </p:sp>
+      <p:sp>
+        <p:nvSpPr>
+          <p:cNvPr id="222" name="TextBox 221"/>
+          <p:cNvSpPr txBox="1"/>
+          <p:nvPr/>
+        </p:nvSpPr>
+        <p:spPr>
+          <a:xfrm>
+            <a:off x="4425696" y="3611879"/>
+            <a:ext cx="3337560" cy="274320"/>
+          </a:xfrm>
+          <a:prstGeom prst="rect">
+            <a:avLst/>
+          </a:prstGeom>
+          <a:noFill/>
+        </p:spPr>
+        <p:txBody>
+          <a:bodyPr wrap="square" lIns="27432" rIns="27432" tIns="18288" bIns="18288">
+            <a:spAutoFit/>
+          </a:bodyPr>
+          <a:lstStyle/>
+          <a:p>
+            <a:pPr algn="ctr"/>
+            <a:r>
+              <a:rPr sz="1200" b="0" i="1">
+                <a:solidFill>
+                  <a:srgbClr val="5B657A"/>
+                </a:solidFill>
+                <a:latin typeface="Calibri"/>
+              </a:rPr>
+              <a:t>very confident</a:t>
+            </a:r>
+          </a:p>
+        </p:txBody>
+      </p:sp>
+      <p:sp>
+        <p:nvSpPr>
+          <p:cNvPr id="223" name="Rounded Rectangle 222"/>
+          <p:cNvSpPr/>
+          <p:nvPr/>
+        </p:nvSpPr>
+        <p:spPr>
+          <a:xfrm>
+            <a:off x="4951475" y="4389120"/>
+            <a:ext cx="2286000" cy="182880"/>
+          </a:xfrm>
+          <a:prstGeom prst="roundRect">
+            <a:avLst>
+              <a:gd name="adj" fmla="val 50000"/>
+            </a:avLst>
+          </a:prstGeom>
+          <a:solidFill>
+            <a:srgbClr val="E5EAF3"/>
+          </a:solidFill>
+          <a:ln w="9525">
+            <a:solidFill>
+              <a:srgbClr val="9AA7BD"/>
+            </a:solidFill>
+          </a:ln>
+        </p:spPr>
+        <p:style>
+          <a:lnRef idx="1">
+            <a:schemeClr val="accent1"/>
+          </a:lnRef>
+          <a:fillRef idx="3">
+            <a:schemeClr val="accent1"/>
+          </a:fillRef>
+          <a:effectRef idx="2">
+            <a:schemeClr val="accent1"/>
+          </a:effectRef>
+          <a:fontRef idx="minor">
+            <a:schemeClr val="lt1"/>
+          </a:fontRef>
+        </p:style>
+        <p:txBody>
+          <a:bodyPr rtlCol="0" anchor="ctr"/>
+          <a:lstStyle/>
+          <a:p/>
+        </p:txBody>
+      </p:sp>
+      <p:sp>
+        <p:nvSpPr>
+          <p:cNvPr id="224" name="Rounded Rectangle 223"/>
+          <p:cNvSpPr/>
+          <p:nvPr/>
+        </p:nvSpPr>
+        <p:spPr>
+          <a:xfrm>
+            <a:off x="4951475" y="4389120"/>
+            <a:ext cx="502920" cy="182880"/>
+          </a:xfrm>
+          <a:prstGeom prst="roundRect">
+            <a:avLst>
+              <a:gd name="adj" fmla="val 50000"/>
+            </a:avLst>
+          </a:prstGeom>
+          <a:solidFill>
+            <a:srgbClr val="B12121"/>
+          </a:solidFill>
+          <a:ln>
+            <a:noFill/>
+          </a:ln>
+        </p:spPr>
+        <p:style>
+          <a:lnRef idx="1">
+            <a:schemeClr val="accent1"/>
+          </a:lnRef>
+          <a:fillRef idx="3">
+            <a:schemeClr val="accent1"/>
+          </a:fillRef>
+          <a:effectRef idx="2">
+            <a:schemeClr val="accent1"/>
+          </a:effectRef>
+          <a:fontRef idx="minor">
+            <a:schemeClr val="lt1"/>
+          </a:fontRef>
+        </p:style>
+        <p:txBody>
+          <a:bodyPr rtlCol="0" anchor="ctr"/>
+          <a:lstStyle/>
+          <a:p/>
+        </p:txBody>
+      </p:sp>
+      <p:sp>
+        <p:nvSpPr>
+          <p:cNvPr id="225" name="TextBox 224"/>
+          <p:cNvSpPr txBox="1"/>
+          <p:nvPr/>
+        </p:nvSpPr>
+        <p:spPr>
+          <a:xfrm>
+            <a:off x="4425696" y="4663440"/>
+            <a:ext cx="3337560" cy="365760"/>
+          </a:xfrm>
+          <a:prstGeom prst="rect">
+            <a:avLst/>
+          </a:prstGeom>
+          <a:noFill/>
+        </p:spPr>
+        <p:txBody>
+          <a:bodyPr wrap="square" lIns="27432" rIns="27432" tIns="18288" bIns="18288">
+            <a:spAutoFit/>
+          </a:bodyPr>
+          <a:lstStyle/>
+          <a:p>
+            <a:pPr algn="ctr"/>
+            <a:r>
+              <a:rPr sz="1800" b="1" i="0">
+                <a:solidFill>
+                  <a:srgbClr val="B12121"/>
+                </a:solidFill>
+                <a:latin typeface="Calibri"/>
+              </a:rPr>
+              <a:t>Weak</a:t>
+            </a:r>
+          </a:p>
+        </p:txBody>
+      </p:sp>
+      <p:sp>
+        <p:nvSpPr>
+          <p:cNvPr id="226" name="TextBox 225"/>
+          <p:cNvSpPr txBox="1"/>
+          <p:nvPr/>
+        </p:nvSpPr>
+        <p:spPr>
+          <a:xfrm>
+            <a:off x="4425696" y="4983480"/>
+            <a:ext cx="3337560" cy="274320"/>
+          </a:xfrm>
+          <a:prstGeom prst="rect">
+            <a:avLst/>
+          </a:prstGeom>
+          <a:noFill/>
+        </p:spPr>
+        <p:txBody>
+          <a:bodyPr wrap="square" lIns="27432" rIns="27432" tIns="18288" bIns="18288">
+            <a:spAutoFit/>
+          </a:bodyPr>
+          <a:lstStyle/>
+          <a:p>
+            <a:pPr algn="ctr"/>
+            <a:r>
+              <a:rPr sz="1200" b="0" i="1">
+                <a:solidFill>
+                  <a:srgbClr val="5B657A"/>
+                </a:solidFill>
+                <a:latin typeface="Calibri"/>
+              </a:rPr>
+              <a:t>unsure</a:t>
+            </a:r>
+          </a:p>
+        </p:txBody>
+      </p:sp>
+      <p:sp>
+        <p:nvSpPr>
+          <p:cNvPr id="227" name="TextBox 226"/>
+          <p:cNvSpPr txBox="1"/>
+          <p:nvPr/>
+        </p:nvSpPr>
+        <p:spPr>
+          <a:xfrm>
+            <a:off x="8275319" y="1920240"/>
+            <a:ext cx="3337560" cy="411480"/>
+          </a:xfrm>
+          <a:prstGeom prst="rect">
+            <a:avLst/>
+          </a:prstGeom>
+          <a:noFill/>
+        </p:spPr>
+        <p:txBody>
+          <a:bodyPr wrap="square" lIns="27432" rIns="27432" tIns="18288" bIns="18288">
+            <a:spAutoFit/>
+          </a:bodyPr>
+          <a:lstStyle/>
+          <a:p>
+            <a:pPr algn="l"/>
+            <a:r>
+              <a:rPr sz="1800" b="1" i="0">
+                <a:solidFill>
+                  <a:srgbClr val="00143D"/>
+                </a:solidFill>
+                <a:latin typeface="Calibri"/>
+              </a:rPr>
+              <a:t>3.  Outcome</a:t>
+            </a:r>
+          </a:p>
+        </p:txBody>
+      </p:sp>
+      <p:sp>
+        <p:nvSpPr>
+          <p:cNvPr id="228" name="TextBox 227"/>
+          <p:cNvSpPr txBox="1"/>
+          <p:nvPr/>
+        </p:nvSpPr>
+        <p:spPr>
+          <a:xfrm>
+            <a:off x="8275319" y="2377440"/>
+            <a:ext cx="3337560" cy="365760"/>
+          </a:xfrm>
+          <a:prstGeom prst="rect">
+            <a:avLst/>
+          </a:prstGeom>
+          <a:noFill/>
+        </p:spPr>
+        <p:txBody>
+          <a:bodyPr wrap="square" lIns="27432" rIns="27432" tIns="18288" bIns="18288">
+            <a:spAutoFit/>
+          </a:bodyPr>
+          <a:lstStyle/>
+          <a:p>
+            <a:pPr algn="l"/>
+            <a:r>
+              <a:rPr sz="1200" b="0" i="1">
+                <a:solidFill>
+                  <a:srgbClr val="5B657A"/>
+                </a:solidFill>
+                <a:latin typeface="Calibri"/>
+              </a:rPr>
+              <a:t>(was the endorsement right?)</a:t>
+            </a:r>
+          </a:p>
+        </p:txBody>
+      </p:sp>
+      <p:sp>
+        <p:nvSpPr>
+          <p:cNvPr id="229" name="Rounded Rectangle 228"/>
+          <p:cNvSpPr/>
+          <p:nvPr/>
+        </p:nvSpPr>
+        <p:spPr>
+          <a:xfrm>
+            <a:off x="9029700" y="3063239"/>
+            <a:ext cx="1828800" cy="457200"/>
+          </a:xfrm>
+          <a:prstGeom prst="roundRect">
+            <a:avLst>
+              <a:gd name="adj" fmla="val 50000"/>
+            </a:avLst>
+          </a:prstGeom>
+          <a:solidFill>
+            <a:srgbClr val="DFF4E8"/>
+          </a:solidFill>
+          <a:ln>
+            <a:noFill/>
+          </a:ln>
+        </p:spPr>
+        <p:style>
+          <a:lnRef idx="1">
+            <a:schemeClr val="accent1"/>
+          </a:lnRef>
+          <a:fillRef idx="3">
+            <a:schemeClr val="accent1"/>
+          </a:fillRef>
+          <a:effectRef idx="2">
+            <a:schemeClr val="accent1"/>
+          </a:effectRef>
+          <a:fontRef idx="minor">
+            <a:schemeClr val="lt1"/>
+          </a:fontRef>
+        </p:style>
+        <p:txBody>
+          <a:bodyPr rtlCol="0" anchor="ctr" tIns="18288" bIns="18288"/>
+          <a:lstStyle/>
+          <a:p>
+            <a:pPr algn="ctr"/>
+            <a:r>
+              <a:rPr sz="1400" b="1" i="0">
+                <a:solidFill>
+                  <a:srgbClr val="116B45"/>
+                </a:solidFill>
+                <a:latin typeface="Calibri"/>
+              </a:rPr>
+              <a:t>CORRECT</a:t>
+            </a:r>
+          </a:p>
+        </p:txBody>
+      </p:sp>
+      <p:sp>
+        <p:nvSpPr>
+          <p:cNvPr id="230" name="TextBox 229"/>
+          <p:cNvSpPr txBox="1"/>
+          <p:nvPr/>
+        </p:nvSpPr>
+        <p:spPr>
+          <a:xfrm>
+            <a:off x="8275319" y="3611879"/>
+            <a:ext cx="3337560" cy="292608"/>
+          </a:xfrm>
+          <a:prstGeom prst="rect">
+            <a:avLst/>
+          </a:prstGeom>
+          <a:noFill/>
+        </p:spPr>
+        <p:txBody>
+          <a:bodyPr wrap="square" lIns="27432" rIns="27432" tIns="18288" bIns="18288">
+            <a:spAutoFit/>
+          </a:bodyPr>
+          <a:lstStyle/>
+          <a:p>
+            <a:pPr algn="ctr"/>
+            <a:r>
+              <a:rPr sz="1200" b="0" i="1">
+                <a:solidFill>
+                  <a:srgbClr val="5B657A"/>
+                </a:solidFill>
+                <a:latin typeface="Calibri"/>
+              </a:rPr>
+              <a:t>endorsement was right</a:t>
+            </a:r>
+          </a:p>
+        </p:txBody>
+      </p:sp>
+      <p:sp>
+        <p:nvSpPr>
+          <p:cNvPr id="231" name="Rounded Rectangle 230"/>
+          <p:cNvSpPr/>
+          <p:nvPr/>
+        </p:nvSpPr>
+        <p:spPr>
+          <a:xfrm>
+            <a:off x="9029700" y="4206240"/>
+            <a:ext cx="1828800" cy="457200"/>
+          </a:xfrm>
+          <a:prstGeom prst="roundRect">
+            <a:avLst>
+              <a:gd name="adj" fmla="val 50000"/>
+            </a:avLst>
+          </a:prstGeom>
+          <a:solidFill>
+            <a:srgbClr val="FDE2E2"/>
+          </a:solidFill>
+          <a:ln>
+            <a:noFill/>
+          </a:ln>
+        </p:spPr>
+        <p:style>
+          <a:lnRef idx="1">
+            <a:schemeClr val="accent1"/>
+          </a:lnRef>
+          <a:fillRef idx="3">
+            <a:schemeClr val="accent1"/>
+          </a:fillRef>
+          <a:effectRef idx="2">
+            <a:schemeClr val="accent1"/>
+          </a:effectRef>
+          <a:fontRef idx="minor">
+            <a:schemeClr val="lt1"/>
+          </a:fontRef>
+        </p:style>
+        <p:txBody>
+          <a:bodyPr rtlCol="0" anchor="ctr" tIns="18288" bIns="18288"/>
+          <a:lstStyle/>
+          <a:p>
+            <a:pPr algn="ctr"/>
+            <a:r>
+              <a:rPr sz="1400" b="1" i="0">
+                <a:solidFill>
+                  <a:srgbClr val="B12121"/>
+                </a:solidFill>
+                <a:latin typeface="Calibri"/>
+              </a:rPr>
+              <a:t>WRONG</a:t>
+            </a:r>
+          </a:p>
+        </p:txBody>
+      </p:sp>
+      <p:sp>
+        <p:nvSpPr>
+          <p:cNvPr id="232" name="TextBox 231"/>
+          <p:cNvSpPr txBox="1"/>
+          <p:nvPr/>
+        </p:nvSpPr>
+        <p:spPr>
+          <a:xfrm>
+            <a:off x="8275319" y="4754879"/>
+            <a:ext cx="3337560" cy="292608"/>
+          </a:xfrm>
+          <a:prstGeom prst="rect">
+            <a:avLst/>
+          </a:prstGeom>
+          <a:noFill/>
+        </p:spPr>
+        <p:txBody>
+          <a:bodyPr wrap="square" lIns="27432" rIns="27432" tIns="18288" bIns="18288">
+            <a:spAutoFit/>
+          </a:bodyPr>
+          <a:lstStyle/>
+          <a:p>
+            <a:pPr algn="ctr"/>
+            <a:r>
+              <a:rPr sz="1200" b="0" i="1">
+                <a:solidFill>
+                  <a:srgbClr val="5B657A"/>
+                </a:solidFill>
+                <a:latin typeface="Calibri"/>
+              </a:rPr>
+              <a:t>endorsement was wrong</a:t>
+            </a:r>
           </a:p>
         </p:txBody>
       </p:sp>
@@ -14571,7 +15582,7 @@
           <a:bodyPr/>
           <a:lstStyle/>
           <a:p>
-            <a:fld id="{D21BCB3A-9FD1-45AD-8941-16949E503D39}" type="slidenum">
+            <a:fld id="{1BB3FA40-0FA2-4F08-9091-55C8362B0EBB}" type="slidenum">
               <a:rPr lang="en-US" smtClean="0"/>
               <a:pPr/>
               <a:t>13</a:t>
@@ -14720,7 +15731,7 @@
           <a:bodyPr/>
           <a:lstStyle/>
           <a:p>
-            <a:fld id="{0B6EC54E-72C4-4E1D-869A-3A8AD1238830}" type="slidenum">
+            <a:fld id="{493D4049-3CAA-4EC0-A6B0-F5B1000348F1}" type="slidenum">
               <a:rPr lang="en-US" smtClean="0"/>
               <a:pPr/>
               <a:t>14</a:t>
@@ -14869,7 +15880,7 @@
           <a:bodyPr/>
           <a:lstStyle/>
           <a:p>
-            <a:fld id="{08A73E3F-3214-4D07-9808-33F9E49E9DBA}" type="slidenum">
+            <a:fld id="{8AC21F2C-C742-4EAF-9DCA-81A145DB03F2}" type="slidenum">
               <a:rPr lang="en-US" smtClean="0"/>
               <a:pPr/>
               <a:t>15</a:t>
@@ -14936,7 +15947,7 @@
         <p:spPr>
           <a:xfrm>
             <a:off x="502920" y="365760"/>
-            <a:ext cx="6583680" cy="640080"/>
+            <a:ext cx="6949440" cy="1280160"/>
           </a:xfrm>
           <a:prstGeom prst="rect">
             <a:avLst/>
@@ -14957,7 +15968,7 @@
                 </a:solidFill>
                 <a:latin typeface="Arial"/>
               </a:rPr>
-              <a:t>RQ1 — Pre-outcome trust by gender</a:t>
+              <a:t>RQ1  —  How much did evaluators wager on the first decision?</a:t>
             </a:r>
           </a:p>
         </p:txBody>
@@ -15102,7 +16113,7 @@
           <a:bodyPr/>
           <a:lstStyle/>
           <a:p>
-            <a:fld id="{D5005041-C5ED-42D8-A7D5-61EB6FD00C31}" type="slidenum">
+            <a:fld id="{BB429047-D323-46C7-80A8-D3D7839C5454}" type="slidenum">
               <a:rPr lang="en-US" smtClean="0"/>
               <a:pPr/>
               <a:t>19</a:t>
@@ -15195,7 +16206,7 @@
           <a:bodyPr/>
           <a:lstStyle/>
           <a:p>
-            <a:fld id="{E1BA4E03-EB89-4039-8592-4AE86A57FA33}" type="slidenum">
+            <a:fld id="{F1E47CCA-68FB-412A-B804-3CB318872DD3}" type="slidenum">
               <a:rPr lang="en-US" smtClean="0"/>
               <a:pPr/>
               <a:t>2</a:t>
@@ -15495,7 +16506,7 @@
         <p:spPr>
           <a:xfrm>
             <a:off x="502920" y="365760"/>
-            <a:ext cx="6583680" cy="640080"/>
+            <a:ext cx="6949440" cy="1280160"/>
           </a:xfrm>
           <a:prstGeom prst="rect">
             <a:avLst/>
@@ -15516,7 +16527,7 @@
                 </a:solidFill>
                 <a:latin typeface="Arial"/>
               </a:rPr>
-              <a:t>RQ2 — Gender × outcome on trust update</a:t>
+              <a:t>RQ2  —  How much did one outcome change evaluator wagers?</a:t>
             </a:r>
           </a:p>
         </p:txBody>
@@ -15686,7 +16697,7 @@
           <a:bodyPr/>
           <a:lstStyle/>
           <a:p>
-            <a:fld id="{7D35DBE2-971A-430C-A639-4E83E36F7E47}" type="slidenum">
+            <a:fld id="{4900C941-EDAE-4A63-B5E3-727810D9A25B}" type="slidenum">
               <a:rPr lang="en-US" smtClean="0"/>
               <a:pPr/>
               <a:t>16</a:t>
@@ -16232,7 +17243,7 @@
           <a:bodyPr/>
           <a:lstStyle/>
           <a:p>
-            <a:fld id="{12C246EB-65F4-4FB3-8362-DDD224F9C84B}" type="slidenum">
+            <a:fld id="{0797C8F1-32CA-45E2-AC0F-E9A069B484B9}" type="slidenum">
               <a:rPr lang="en-US" smtClean="0"/>
               <a:pPr/>
               <a:t>17</a:t>
@@ -16564,7 +17575,7 @@
                 </a:solidFill>
                 <a:latin typeface="Arial"/>
               </a:rPr>
-              <a:t>hedged / unsure</a:t>
+              <a:t>unsure</a:t>
             </a:r>
           </a:p>
         </p:txBody>
@@ -16734,7 +17745,7 @@
           <a:bodyPr/>
           <a:lstStyle/>
           <a:p>
-            <a:fld id="{B1295F4C-C8FD-42C5-ABDA-B79C9CB8993C}" type="slidenum">
+            <a:fld id="{9B2F5F96-ED41-4409-A830-A8C5C9F69FBD}" type="slidenum">
               <a:rPr lang="en-US" smtClean="0"/>
               <a:pPr/>
               <a:t>18</a:t>
@@ -16972,7 +17983,7 @@
           <a:bodyPr/>
           <a:lstStyle/>
           <a:p>
-            <a:fld id="{F3313B65-40EB-4359-8EBE-0102D0AC60E7}" type="slidenum">
+            <a:fld id="{7EB0FA9B-A343-44C8-86C1-3D64FE4D8E5F}" type="slidenum">
               <a:rPr lang="en-US" smtClean="0"/>
               <a:pPr/>
               <a:t>20</a:t>
@@ -17288,7 +18299,7 @@
           <a:bodyPr/>
           <a:lstStyle/>
           <a:p>
-            <a:fld id="{16D8F00B-6365-4624-A003-8AEFFC5403B8}" type="slidenum">
+            <a:fld id="{31627EE3-3217-437F-A2DC-9F0D01B00429}" type="slidenum">
               <a:rPr lang="en-US" smtClean="0"/>
               <a:pPr/>
               <a:t>21</a:t>
@@ -17386,7 +18397,7 @@
           <a:bodyPr/>
           <a:lstStyle/>
           <a:p>
-            <a:fld id="{BC0FCE76-5F18-4151-80F4-4FEB3CB37DD9}" type="slidenum">
+            <a:fld id="{93CA3884-E741-4C09-ACB1-7CB8EBC8984B}" type="slidenum">
               <a:rPr lang="en-US" smtClean="0"/>
               <a:pPr/>
               <a:t>22</a:t>
@@ -17558,7 +18569,7 @@
           <a:bodyPr/>
           <a:lstStyle/>
           <a:p>
-            <a:fld id="{CD50795D-8A32-47A0-868B-E611D278CFA6}" type="slidenum">
+            <a:fld id="{4008515D-EECB-4F76-91B6-EB75DC62E15F}" type="slidenum">
               <a:rPr lang="en-US" smtClean="0"/>
               <a:pPr/>
               <a:t>23</a:t>
@@ -17996,7 +19007,7 @@
           <a:bodyPr/>
           <a:lstStyle/>
           <a:p>
-            <a:fld id="{5BFB7D3F-6111-475F-95CA-57840A544866}" type="slidenum">
+            <a:fld id="{D7DCE3DD-F53E-4074-B825-2EB678F57870}" type="slidenum">
               <a:rPr lang="en-US" smtClean="0"/>
               <a:pPr/>
               <a:t>2</a:t>
@@ -18602,7 +19613,7 @@
           <a:bodyPr/>
           <a:lstStyle/>
           <a:p>
-            <a:fld id="{EA95AC04-E5D0-4040-BF50-30723AC2DFB5}" type="slidenum">
+            <a:fld id="{FA0B802A-5AAE-45BC-BC8A-AE39B83C91A0}" type="slidenum">
               <a:rPr lang="en-US" smtClean="0"/>
               <a:pPr/>
               <a:t>2</a:t>
@@ -19530,7 +20541,7 @@
           <a:bodyPr/>
           <a:lstStyle/>
           <a:p>
-            <a:fld id="{3AEC69BD-B13A-41AA-A625-433C2A4275BD}" type="slidenum">
+            <a:fld id="{C9C203F7-3303-4778-8B5A-83D51D44706F}" type="slidenum">
               <a:rPr lang="en-US" smtClean="0"/>
               <a:pPr/>
               <a:t>2</a:t>
@@ -19982,7 +20993,7 @@
           <a:bodyPr/>
           <a:lstStyle/>
           <a:p>
-            <a:fld id="{113013AB-AD95-45ED-9471-8215DA5C7188}" type="slidenum">
+            <a:fld id="{0F172CCD-2A3A-478D-8F98-D1CA1E48D67D}" type="slidenum">
               <a:rPr lang="en-US" smtClean="0"/>
               <a:pPr/>
               <a:t>3</a:t>
@@ -20335,7 +21346,7 @@
           <a:bodyPr/>
           <a:lstStyle/>
           <a:p>
-            <a:fld id="{F9E27489-26D6-4A90-8085-4B95DD080010}" type="slidenum">
+            <a:fld id="{9D0E735B-3425-48F6-BB31-4470FCA4DF8F}" type="slidenum">
               <a:rPr lang="en-US" smtClean="0"/>
               <a:pPr/>
               <a:t>4</a:t>
@@ -20700,7 +21711,7 @@
           <a:bodyPr/>
           <a:lstStyle/>
           <a:p>
-            <a:fld id="{EEDBA634-3625-4C36-BDE7-A329D742BCE6}" type="slidenum">
+            <a:fld id="{C8E7D469-2B7A-4ACB-A157-AF80BC1031B2}" type="slidenum">
               <a:rPr lang="en-US" smtClean="0"/>
               <a:pPr/>
               <a:t>5</a:t>
@@ -21415,7 +22426,7 @@
           <a:bodyPr/>
           <a:lstStyle/>
           <a:p>
-            <a:fld id="{6D1F4919-111F-4293-BADB-482A3347A9B6}" type="slidenum">
+            <a:fld id="{54E3F97F-5C6E-4F84-942C-87BA52CDDB18}" type="slidenum">
               <a:rPr lang="en-US" smtClean="0"/>
               <a:pPr/>
               <a:t>6</a:t>

--- a/docs/UChicago-0410.pptx
+++ b/docs/UChicago-0410.pptx
@@ -22810,7 +22810,7 @@
                 </a:solidFill>
                 <a:latin typeface="Arial"/>
               </a:rPr>
-              <a:t>Different attributions of the same outcome.</a:t>
+              <a:t>Same starting wager, different weight on the outcome.</a:t>
             </a:r>
           </a:p>
         </p:txBody>
@@ -22885,7 +22885,7 @@
                 </a:solidFill>
                 <a:latin typeface="Arial"/>
               </a:rPr>
-              <a:t>Same starting point for men and women.</a:t>
+              <a:t>People hold different priors for men vs women.</a:t>
             </a:r>
           </a:p>
           <a:p>
@@ -22901,7 +22901,7 @@
                 </a:solidFill>
                 <a:latin typeface="Arial"/>
               </a:rPr>
-              <a:t>Initial wagers are identical by gender (b = -1.06, p = .81). Evaluators take the endorsement at face value before any outcome.</a:t>
+              <a:t>Men are assumed critical; women are assumed nicer on average. But the priors don't bite at the first wager (b = -1.06, p = .81), because evaluators anchor automatically on the strength label.</a:t>
             </a:r>
           </a:p>
         </p:txBody>
@@ -22976,7 +22976,7 @@
                 </a:solidFill>
                 <a:latin typeface="Arial"/>
               </a:rPr>
-              <a:t>But outcomes get attributed differently.</a:t>
+              <a:t>Women's endorsements cluster high + narrow.</a:t>
             </a:r>
           </a:p>
           <a:p>
@@ -22992,7 +22992,7 @@
                 </a:solidFill>
                 <a:latin typeface="Arial"/>
               </a:rPr>
-              <a:t>A man's correct call reads as "his judgment"; his wrong call reads as "his bad call." Either way, reputation moves.</a:t>
+              <a:t>"She would have said it either way" makes her outcome barely informative, so evaluators discount the update (consistent with the muted effects in the stronger confidence cells).</a:t>
             </a:r>
           </a:p>
         </p:txBody>
@@ -23067,7 +23067,7 @@
                 </a:solidFill>
                 <a:latin typeface="Arial"/>
               </a:rPr>
-              <a:t>Women's outcomes get read as luck or situation.</a:t>
+              <a:t>Men's endorsements spread wide.</a:t>
             </a:r>
           </a:p>
           <a:p>
@@ -23083,7 +23083,7 @@
                 </a:solidFill>
                 <a:latin typeface="Arial"/>
               </a:rPr>
-              <a:t>"She got the easy one" or "bad luck on that one." The outcome barely updates trust in her judgment.</a:t>
+              <a:t>When men endorse with confidence it carries information that can be both praised or penalized, and the outcome moves trust accordingly.</a:t>
             </a:r>
           </a:p>
         </p:txBody>
@@ -23158,7 +23158,7 @@
                 </a:solidFill>
                 <a:latin typeface="Arial"/>
               </a:rPr>
-              <a:t>Next direction: telegraph selectivity.</a:t>
+              <a:t>Next direction: telegraph their standards.</a:t>
             </a:r>
           </a:p>
           <a:p>
@@ -23174,21 +23174,21 @@
                 </a:solidFill>
                 <a:latin typeface="Arial"/>
               </a:rPr>
-              <a:t>Does "I only recommend the top 10%" force her outcome to be re-attributed to her judgment?</a:t>
+              <a:t>Signaling "I only recommend the top 10%" breaks the assumed clustering, so the outcome can be re-read as informative.</a:t>
             </a:r>
           </a:p>
         </p:txBody>
       </p:sp>
       <p:pic>
         <p:nvPicPr>
-          <p:cNvPr id="227" name="Picture 226" descr="attribution_theory.png"/>
+          <p:cNvPr id="227" name="Picture 226" descr="image.png"/>
           <p:cNvPicPr>
             <a:picLocks noChangeAspect="1"/>
           </p:cNvPicPr>
           <p:nvPr/>
         </p:nvPicPr>
         <p:blipFill>
-          <a:blip r:embed="rId4"/>
+          <a:blip r:embed="rId3"/>
           <a:stretch>
             <a:fillRect/>
           </a:stretch>
@@ -23233,7 +23233,7 @@
                 </a:solidFill>
                 <a:latin typeface="Arial"/>
               </a:rPr>
-              <a:t>Hypothesized attribution weights</a:t>
+              <a:t>Hypothesized prior distributions</a:t>
             </a:r>
           </a:p>
         </p:txBody>

--- a/docs/UChicago-0410.pptx
+++ b/docs/UChicago-0410.pptx
@@ -22810,7 +22810,7 @@
                 </a:solidFill>
                 <a:latin typeface="Arial"/>
               </a:rPr>
-              <a:t>Same starting wager, different weight on the outcome.</a:t>
+              <a:t>The prior leaks in once there's an outcome to read.</a:t>
             </a:r>
           </a:p>
         </p:txBody>
@@ -22885,7 +22885,7 @@
                 </a:solidFill>
                 <a:latin typeface="Arial"/>
               </a:rPr>
-              <a:t>People hold different priors for men vs women.</a:t>
+              <a:t>Without a track record, people stay reserved.</a:t>
             </a:r>
           </a:p>
           <a:p>
@@ -22901,7 +22901,7 @@
                 </a:solidFill>
                 <a:latin typeface="Arial"/>
               </a:rPr>
-              <a:t>Men are assumed critical; women are assumed nicer on average. But the priors don't bite at the first wager (b = -1.06, p = .81), because evaluators anchor automatically on the strength label.</a:t>
+              <a:t>RQ1 is null (b = -1.06, p = .81). With nothing but a strength label, there's no basis to discriminate yet. Unlike most discrimination findings, the gap leaks in only at the outcome.</a:t>
             </a:r>
           </a:p>
         </p:txBody>
@@ -22992,7 +22992,7 @@
                 </a:solidFill>
                 <a:latin typeface="Arial"/>
               </a:rPr>
-              <a:t>"She would have said it either way" makes her outcome barely informative, so evaluators discount the update (consistent with the muted effects in the stronger confidence cells).</a:t>
+              <a:t>Once the outcome arrives, "she would have said it either way" makes it barely informative, so trust barely moves (consistent with the muted effects in the stronger confidence cells).</a:t>
             </a:r>
           </a:p>
         </p:txBody>

--- a/docs/UChicago-0410.pptx
+++ b/docs/UChicago-0410.pptx
@@ -22976,7 +22976,7 @@
                 </a:solidFill>
                 <a:latin typeface="Arial"/>
               </a:rPr>
-              <a:t>Women's endorsements cluster high + narrow.</a:t>
+              <a:t>Women's endorsements are assumed high + narrow.</a:t>
             </a:r>
           </a:p>
           <a:p>
@@ -23067,7 +23067,7 @@
                 </a:solidFill>
                 <a:latin typeface="Arial"/>
               </a:rPr>
-              <a:t>Men's endorsements spread wide.</a:t>
+              <a:t>Men's endorsements are assumed to spread wide.</a:t>
             </a:r>
           </a:p>
           <a:p>
@@ -23083,7 +23083,7 @@
                 </a:solidFill>
                 <a:latin typeface="Arial"/>
               </a:rPr>
-              <a:t>When men endorse with confidence it carries information that can be both praised or penalized, and the outcome moves trust accordingly.</a:t>
+              <a:t>Evaluators read men's confident calls as carrying information that can be both praised or penalized, so trust moves accordingly.</a:t>
             </a:r>
           </a:p>
         </p:txBody>

--- a/docs/UChicago-0410.pptx
+++ b/docs/UChicago-0410.pptx
@@ -22976,7 +22976,7 @@
                 </a:solidFill>
                 <a:latin typeface="Arial"/>
               </a:rPr>
-              <a:t>Women's endorsements are assumed high + narrow.</a:t>
+              <a:t>Women's endorsements: more generous on average.</a:t>
             </a:r>
           </a:p>
           <a:p>
@@ -22992,7 +22992,7 @@
                 </a:solidFill>
                 <a:latin typeface="Arial"/>
               </a:rPr>
-              <a:t>Once the outcome arrives, "she would have said it either way" makes it barely informative, so trust barely moves (consistent with the muted effects in the stronger confidence cells).</a:t>
+              <a:t>A generous endorsement is hard to read signal from, so evaluators discount their endorsements (consistent with the effects among sponsors in the stronger confidence cells).</a:t>
             </a:r>
           </a:p>
         </p:txBody>
@@ -23067,7 +23067,7 @@
                 </a:solidFill>
                 <a:latin typeface="Arial"/>
               </a:rPr>
-              <a:t>Men's endorsements are assumed to spread wide.</a:t>
+              <a:t>Men's endorsements: more critical but spread out.</a:t>
             </a:r>
           </a:p>
           <a:p>
@@ -23158,7 +23158,7 @@
                 </a:solidFill>
                 <a:latin typeface="Arial"/>
               </a:rPr>
-              <a:t>Next direction: telegraph their standards.</a:t>
+              <a:t>One alternative: telegraph their standards.</a:t>
             </a:r>
           </a:p>
           <a:p>
@@ -23174,7 +23174,7 @@
                 </a:solidFill>
                 <a:latin typeface="Arial"/>
               </a:rPr>
-              <a:t>Signaling "I only recommend the top 10%" breaks the assumed clustering, so the outcome can be re-read as informative.</a:t>
+              <a:t>Implication: women can't build credibility without more experience. But signaling "I only recommend the top 10%" could let outcomes be re-read as informative.</a:t>
             </a:r>
           </a:p>
         </p:txBody>
